--- a/tema2_bleeding/Признаки_наружного_кровотечения.pptx
+++ b/tema2_bleeding/Признаки_наружного_кровотечения.pptx
@@ -14,7 +14,6 @@
     <p:sldId id="262" r:id="rId13"/>
     <p:sldId id="263" r:id="rId14"/>
     <p:sldId id="264" r:id="rId15"/>
-    <p:sldId id="265" r:id="rId16"/>
   </p:sldIdLst>
   <p:sldSz cx="24384000" cy="13716000" type="screen4x3"/>
   <p:notesSz cx="6858000" cy="9144000"/>
@@ -3112,7 +3111,7 @@
             <a:avLst/>
           </a:prstGeom>
           <a:solidFill>
-            <a:srgbClr val="F7F7F7"/>
+            <a:srgbClr val="FFFFFF"/>
           </a:solidFill>
           <a:ln>
             <a:noFill/>
@@ -3148,14 +3147,14 @@
         </p:nvSpPr>
         <p:spPr>
           <a:xfrm>
-            <a:off x="0" y="2800000"/>
-            <a:ext cx="3500000" cy="2200000"/>
+            <a:off x="0" y="0"/>
+            <a:ext cx="24384000" cy="120000"/>
           </a:xfrm>
           <a:prstGeom prst="rect">
             <a:avLst/>
           </a:prstGeom>
           <a:solidFill>
-            <a:srgbClr val="D9D9D9"/>
+            <a:srgbClr val="DDDDDD"/>
           </a:solidFill>
           <a:ln>
             <a:noFill/>
@@ -3191,14 +3190,14 @@
         </p:nvSpPr>
         <p:spPr>
           <a:xfrm>
-            <a:off x="23000000" y="0"/>
-            <a:ext cx="1384000" cy="13716000"/>
+            <a:off x="0" y="4200000"/>
+            <a:ext cx="24384000" cy="2800000"/>
           </a:xfrm>
           <a:prstGeom prst="rect">
             <a:avLst/>
           </a:prstGeom>
           <a:solidFill>
-            <a:srgbClr val="D9D9D9"/>
+            <a:srgbClr val="FAFAFA"/>
           </a:solidFill>
           <a:ln>
             <a:noFill/>
@@ -3234,8 +3233,8 @@
         </p:nvSpPr>
         <p:spPr>
           <a:xfrm>
-            <a:off x="900000" y="3000000"/>
-            <a:ext cx="20000000" cy="1800000"/>
+            <a:off x="800000" y="4600000"/>
+            <a:ext cx="22800000" cy="1400000"/>
           </a:xfrm>
           <a:prstGeom prst="rect">
             <a:avLst/>
@@ -3243,16 +3242,20 @@
           <a:noFill/>
         </p:spPr>
         <p:txBody>
-          <a:bodyPr wrap="square" anchor="t"/>
+          <a:bodyPr wrap="square" anchor="t">
+            <a:spAutoFit/>
+          </a:bodyPr>
           <a:lstStyle/>
           <a:p>
             <a:pPr algn="l"/>
             <a:r>
-              <a:rPr sz="3200" b="1">
+              <a:rPr sz="4600" b="1">
                 <a:solidFill>
-                  <a:srgbClr val="2C2C2C"/>
+                  <a:srgbClr val="333333"/>
                 </a:solidFill>
-                <a:latin typeface="Arial"/>
+                <a:latin typeface="Open Sans"/>
+                <a:ea typeface="Open Sans"/>
+                <a:cs typeface="Open Sans"/>
               </a:rPr>
               <a:t>ПРИЗНАКИ НАРУЖНОГО КРОВОТЕЧЕНИЯ И КРОВОПОТЕРИ</a:t>
             </a:r>
@@ -3267,14 +3270,14 @@
         </p:nvSpPr>
         <p:spPr>
           <a:xfrm>
-            <a:off x="900000" y="4900000"/>
-            <a:ext cx="16000000" cy="25000"/>
+            <a:off x="800000" y="6200000"/>
+            <a:ext cx="12000000" cy="20000"/>
           </a:xfrm>
           <a:prstGeom prst="rect">
             <a:avLst/>
           </a:prstGeom>
           <a:solidFill>
-            <a:srgbClr val="2C2C2C"/>
+            <a:srgbClr val="0055AA"/>
           </a:solidFill>
           <a:ln>
             <a:noFill/>
@@ -3310,8 +3313,8 @@
         </p:nvSpPr>
         <p:spPr>
           <a:xfrm>
-            <a:off x="900000" y="5100000"/>
-            <a:ext cx="20000000" cy="500000"/>
+            <a:off x="800000" y="6500000"/>
+            <a:ext cx="22800000" cy="600000"/>
           </a:xfrm>
           <a:prstGeom prst="rect">
             <a:avLst/>
@@ -3319,18 +3322,22 @@
           <a:noFill/>
         </p:spPr>
         <p:txBody>
-          <a:bodyPr wrap="square" anchor="t"/>
+          <a:bodyPr wrap="square" anchor="t">
+            <a:spAutoFit/>
+          </a:bodyPr>
           <a:lstStyle/>
           <a:p>
             <a:pPr algn="l"/>
             <a:r>
-              <a:rPr sz="1600" b="0">
+              <a:rPr sz="2600" b="0">
                 <a:solidFill>
-                  <a:srgbClr val="555555"/>
+                  <a:srgbClr val="0055AA"/>
                 </a:solidFill>
-                <a:latin typeface="Arial"/>
+                <a:latin typeface="Open Sans"/>
+                <a:ea typeface="Open Sans"/>
+                <a:cs typeface="Open Sans"/>
               </a:rPr>
-              <a:t>Теоретический модуль · п. 2.2 Приложения № 2 к ПП РФ № 2464</a:t>
+              <a:t>Теоретический модуль · п. 2.2</a:t>
             </a:r>
           </a:p>
         </p:txBody>
@@ -3343,8 +3350,8 @@
         </p:nvSpPr>
         <p:spPr>
           <a:xfrm>
-            <a:off x="900000" y="5800000"/>
-            <a:ext cx="20000000" cy="400000"/>
+            <a:off x="800000" y="7200000"/>
+            <a:ext cx="22800000" cy="500000"/>
           </a:xfrm>
           <a:prstGeom prst="rect">
             <a:avLst/>
@@ -3352,229 +3359,20 @@
           <a:noFill/>
         </p:spPr>
         <p:txBody>
-          <a:bodyPr wrap="square" anchor="t"/>
+          <a:bodyPr wrap="square" anchor="t">
+            <a:spAutoFit/>
+          </a:bodyPr>
           <a:lstStyle/>
           <a:p>
             <a:pPr algn="l"/>
             <a:r>
-              <a:rPr sz="1200" b="0">
+              <a:rPr sz="2000" b="0">
                 <a:solidFill>
-                  <a:srgbClr val="6F6F6F"/>
+                  <a:srgbClr val="333333"/>
                 </a:solidFill>
-                <a:latin typeface="Arial"/>
-              </a:rPr>
-              <a:t>Курс первой помощи · Тема 2</a:t>
-            </a:r>
-          </a:p>
-        </p:txBody>
-      </p:sp>
-    </p:spTree>
-  </p:cSld>
-  <p:clrMapOvr>
-    <a:masterClrMapping/>
-  </p:clrMapOvr>
-</p:sld>
-</file>
-
-<file path=ppt/slides/slide10.xml><?xml version="1.0" encoding="utf-8"?>
-<p:sld xmlns:a="http://schemas.openxmlformats.org/drawingml/2006/main" xmlns:p="http://schemas.openxmlformats.org/presentationml/2006/main" xmlns:r="http://schemas.openxmlformats.org/officeDocument/2006/relationships">
-  <p:cSld>
-    <p:spTree>
-      <p:nvGrpSpPr>
-        <p:cNvPr id="1" name=""/>
-        <p:cNvGrpSpPr/>
-        <p:nvPr/>
-      </p:nvGrpSpPr>
-      <p:grpSpPr/>
-      <p:sp>
-        <p:nvSpPr>
-          <p:cNvPr id="2" name="Rectangle 1"/>
-          <p:cNvSpPr/>
-          <p:nvPr/>
-        </p:nvSpPr>
-        <p:spPr>
-          <a:xfrm>
-            <a:off x="0" y="0"/>
-            <a:ext cx="24384000" cy="13716000"/>
-          </a:xfrm>
-          <a:prstGeom prst="rect">
-            <a:avLst/>
-          </a:prstGeom>
-          <a:solidFill>
-            <a:srgbClr val="F7F7F7"/>
-          </a:solidFill>
-          <a:ln>
-            <a:noFill/>
-          </a:ln>
-        </p:spPr>
-        <p:style>
-          <a:lnRef idx="1">
-            <a:schemeClr val="accent1"/>
-          </a:lnRef>
-          <a:fillRef idx="3">
-            <a:schemeClr val="accent1"/>
-          </a:fillRef>
-          <a:effectRef idx="2">
-            <a:schemeClr val="accent1"/>
-          </a:effectRef>
-          <a:fontRef idx="minor">
-            <a:schemeClr val="lt1"/>
-          </a:fontRef>
-        </p:style>
-        <p:txBody>
-          <a:bodyPr rtlCol="0" anchor="ctr"/>
-          <a:lstStyle/>
-          <a:p>
-            <a:pPr algn="ctr"/>
-          </a:p>
-        </p:txBody>
-      </p:sp>
-      <p:sp>
-        <p:nvSpPr>
-          <p:cNvPr id="3" name="Rectangle 2"/>
-          <p:cNvSpPr/>
-          <p:nvPr/>
-        </p:nvSpPr>
-        <p:spPr>
-          <a:xfrm>
-            <a:off x="23000000" y="0"/>
-            <a:ext cx="1384000" cy="13716000"/>
-          </a:xfrm>
-          <a:prstGeom prst="rect">
-            <a:avLst/>
-          </a:prstGeom>
-          <a:solidFill>
-            <a:srgbClr val="D9D9D9"/>
-          </a:solidFill>
-          <a:ln>
-            <a:noFill/>
-          </a:ln>
-        </p:spPr>
-        <p:style>
-          <a:lnRef idx="1">
-            <a:schemeClr val="accent1"/>
-          </a:lnRef>
-          <a:fillRef idx="3">
-            <a:schemeClr val="accent1"/>
-          </a:fillRef>
-          <a:effectRef idx="2">
-            <a:schemeClr val="accent1"/>
-          </a:effectRef>
-          <a:fontRef idx="minor">
-            <a:schemeClr val="lt1"/>
-          </a:fontRef>
-        </p:style>
-        <p:txBody>
-          <a:bodyPr rtlCol="0" anchor="ctr"/>
-          <a:lstStyle/>
-          <a:p>
-            <a:pPr algn="ctr"/>
-          </a:p>
-        </p:txBody>
-      </p:sp>
-      <p:sp>
-        <p:nvSpPr>
-          <p:cNvPr id="4" name="TextBox 3"/>
-          <p:cNvSpPr txBox="1"/>
-          <p:nvPr/>
-        </p:nvSpPr>
-        <p:spPr>
-          <a:xfrm>
-            <a:off x="900000" y="5200000"/>
-            <a:ext cx="20000000" cy="1000000"/>
-          </a:xfrm>
-          <a:prstGeom prst="rect">
-            <a:avLst/>
-          </a:prstGeom>
-          <a:noFill/>
-        </p:spPr>
-        <p:txBody>
-          <a:bodyPr wrap="square" anchor="t"/>
-          <a:lstStyle/>
-          <a:p>
-            <a:pPr algn="l"/>
-            <a:r>
-              <a:rPr sz="3600" b="1">
-                <a:solidFill>
-                  <a:srgbClr val="2C2C2C"/>
-                </a:solidFill>
-                <a:latin typeface="Arial"/>
-              </a:rPr>
-              <a:t>БЛАГОДАРИМ ЗА ВНИМАНИЕ</a:t>
-            </a:r>
-          </a:p>
-        </p:txBody>
-      </p:sp>
-      <p:sp>
-        <p:nvSpPr>
-          <p:cNvPr id="5" name="Rectangle 4"/>
-          <p:cNvSpPr/>
-          <p:nvPr/>
-        </p:nvSpPr>
-        <p:spPr>
-          <a:xfrm>
-            <a:off x="900000" y="6400000"/>
-            <a:ext cx="10000000" cy="25000"/>
-          </a:xfrm>
-          <a:prstGeom prst="rect">
-            <a:avLst/>
-          </a:prstGeom>
-          <a:solidFill>
-            <a:srgbClr val="2C2C2C"/>
-          </a:solidFill>
-          <a:ln>
-            <a:noFill/>
-          </a:ln>
-        </p:spPr>
-        <p:style>
-          <a:lnRef idx="1">
-            <a:schemeClr val="accent1"/>
-          </a:lnRef>
-          <a:fillRef idx="3">
-            <a:schemeClr val="accent1"/>
-          </a:fillRef>
-          <a:effectRef idx="2">
-            <a:schemeClr val="accent1"/>
-          </a:effectRef>
-          <a:fontRef idx="minor">
-            <a:schemeClr val="lt1"/>
-          </a:fontRef>
-        </p:style>
-        <p:txBody>
-          <a:bodyPr rtlCol="0" anchor="ctr"/>
-          <a:lstStyle/>
-          <a:p>
-            <a:pPr algn="ctr"/>
-          </a:p>
-        </p:txBody>
-      </p:sp>
-      <p:sp>
-        <p:nvSpPr>
-          <p:cNvPr id="6" name="TextBox 5"/>
-          <p:cNvSpPr txBox="1"/>
-          <p:nvPr/>
-        </p:nvSpPr>
-        <p:spPr>
-          <a:xfrm>
-            <a:off x="900000" y="6700000"/>
-            <a:ext cx="20000000" cy="500000"/>
-          </a:xfrm>
-          <a:prstGeom prst="rect">
-            <a:avLst/>
-          </a:prstGeom>
-          <a:noFill/>
-        </p:spPr>
-        <p:txBody>
-          <a:bodyPr wrap="square" anchor="t"/>
-          <a:lstStyle/>
-          <a:p>
-            <a:pPr algn="l"/>
-            <a:r>
-              <a:rPr sz="1400" b="0">
-                <a:solidFill>
-                  <a:srgbClr val="6F6F6F"/>
-                </a:solidFill>
-                <a:latin typeface="Arial"/>
+                <a:latin typeface="Open Sans"/>
+                <a:ea typeface="Open Sans"/>
+                <a:cs typeface="Open Sans"/>
               </a:rPr>
               <a:t>Тема 2 · Оказание первой помощи при наружных кровотечениях</a:t>
             </a:r>
@@ -3614,7 +3412,7 @@
             <a:avLst/>
           </a:prstGeom>
           <a:solidFill>
-            <a:srgbClr val="F7F7F7"/>
+            <a:srgbClr val="FFFFFF"/>
           </a:solidFill>
           <a:ln>
             <a:noFill/>
@@ -3650,14 +3448,14 @@
         </p:nvSpPr>
         <p:spPr>
           <a:xfrm>
-            <a:off x="23000000" y="0"/>
-            <a:ext cx="1384000" cy="13716000"/>
+            <a:off x="0" y="0"/>
+            <a:ext cx="24384000" cy="120000"/>
           </a:xfrm>
           <a:prstGeom prst="rect">
             <a:avLst/>
           </a:prstGeom>
           <a:solidFill>
-            <a:srgbClr val="D9D9D9"/>
+            <a:srgbClr val="DDDDDD"/>
           </a:solidFill>
           <a:ln>
             <a:noFill/>
@@ -3687,20 +3485,57 @@
       </p:sp>
       <p:sp>
         <p:nvSpPr>
-          <p:cNvPr id="4" name="Rectangle 3"/>
+          <p:cNvPr id="4" name="TextBox 3"/>
+          <p:cNvSpPr txBox="1"/>
+          <p:nvPr/>
+        </p:nvSpPr>
+        <p:spPr>
+          <a:xfrm>
+            <a:off x="800000" y="350000"/>
+            <a:ext cx="22800000" cy="1000000"/>
+          </a:xfrm>
+          <a:prstGeom prst="rect">
+            <a:avLst/>
+          </a:prstGeom>
+          <a:noFill/>
+        </p:spPr>
+        <p:txBody>
+          <a:bodyPr wrap="square" anchor="t">
+            <a:spAutoFit/>
+          </a:bodyPr>
+          <a:lstStyle/>
+          <a:p>
+            <a:pPr algn="l"/>
+            <a:r>
+              <a:rPr sz="4600" b="1">
+                <a:solidFill>
+                  <a:srgbClr val="333333"/>
+                </a:solidFill>
+                <a:latin typeface="Open Sans"/>
+                <a:ea typeface="Open Sans"/>
+                <a:cs typeface="Open Sans"/>
+              </a:rPr>
+              <a:t>Содержание</a:t>
+            </a:r>
+          </a:p>
+        </p:txBody>
+      </p:sp>
+      <p:sp>
+        <p:nvSpPr>
+          <p:cNvPr id="5" name="Rectangle 4"/>
           <p:cNvSpPr/>
           <p:nvPr/>
         </p:nvSpPr>
         <p:spPr>
           <a:xfrm>
-            <a:off x="0" y="5600000"/>
-            <a:ext cx="700000" cy="700000"/>
+            <a:off x="800000" y="1450000"/>
+            <a:ext cx="22800000" cy="20000"/>
           </a:xfrm>
           <a:prstGeom prst="rect">
             <a:avLst/>
           </a:prstGeom>
           <a:solidFill>
-            <a:srgbClr val="4D4D4D"/>
+            <a:srgbClr val="E1E1E1"/>
           </a:solidFill>
           <a:ln>
             <a:noFill/>
@@ -3730,119 +3565,20 @@
       </p:sp>
       <p:sp>
         <p:nvSpPr>
-          <p:cNvPr id="5" name="TextBox 4"/>
-          <p:cNvSpPr txBox="1"/>
-          <p:nvPr/>
-        </p:nvSpPr>
-        <p:spPr>
-          <a:xfrm>
-            <a:off x="0" y="5680000"/>
-            <a:ext cx="700000" cy="550000"/>
-          </a:xfrm>
-          <a:prstGeom prst="rect">
-            <a:avLst/>
-          </a:prstGeom>
-          <a:noFill/>
-        </p:spPr>
-        <p:txBody>
-          <a:bodyPr wrap="square" anchor="ctr"/>
-          <a:lstStyle/>
-          <a:p>
-            <a:pPr algn="ctr"/>
-            <a:r>
-              <a:rPr sz="1800" b="1">
-                <a:solidFill>
-                  <a:srgbClr val="FFFFFF"/>
-                </a:solidFill>
-                <a:latin typeface="Arial"/>
-              </a:rPr>
-              <a:t>2</a:t>
-            </a:r>
-          </a:p>
-        </p:txBody>
-      </p:sp>
-      <p:sp>
-        <p:nvSpPr>
-          <p:cNvPr id="6" name="TextBox 5"/>
-          <p:cNvSpPr txBox="1"/>
-          <p:nvPr/>
-        </p:nvSpPr>
-        <p:spPr>
-          <a:xfrm>
-            <a:off x="900000" y="1450000"/>
-            <a:ext cx="20000000" cy="350000"/>
-          </a:xfrm>
-          <a:prstGeom prst="rect">
-            <a:avLst/>
-          </a:prstGeom>
-          <a:noFill/>
-        </p:spPr>
-        <p:txBody>
-          <a:bodyPr wrap="square" anchor="t"/>
-          <a:lstStyle/>
-          <a:p>
-            <a:pPr algn="l"/>
-            <a:r>
-              <a:rPr sz="1200" b="0">
-                <a:solidFill>
-                  <a:srgbClr val="6F6F6F"/>
-                </a:solidFill>
-                <a:latin typeface="Arial"/>
-              </a:rPr>
-              <a:t>Тема 2 · Оказание первой помощи при наружных кровотечениях</a:t>
-            </a:r>
-          </a:p>
-        </p:txBody>
-      </p:sp>
-      <p:sp>
-        <p:nvSpPr>
-          <p:cNvPr id="7" name="TextBox 6"/>
-          <p:cNvSpPr txBox="1"/>
-          <p:nvPr/>
-        </p:nvSpPr>
-        <p:spPr>
-          <a:xfrm>
-            <a:off x="900000" y="500000"/>
-            <a:ext cx="21000000" cy="900000"/>
-          </a:xfrm>
-          <a:prstGeom prst="rect">
-            <a:avLst/>
-          </a:prstGeom>
-          <a:noFill/>
-        </p:spPr>
-        <p:txBody>
-          <a:bodyPr wrap="square" anchor="t"/>
-          <a:lstStyle/>
-          <a:p>
-            <a:pPr algn="l"/>
-            <a:r>
-              <a:rPr sz="2800" b="1">
-                <a:solidFill>
-                  <a:srgbClr val="2C2C2C"/>
-                </a:solidFill>
-                <a:latin typeface="Arial"/>
-              </a:rPr>
-              <a:t>СОДЕРЖАНИЕ</a:t>
-            </a:r>
-          </a:p>
-        </p:txBody>
-      </p:sp>
-      <p:sp>
-        <p:nvSpPr>
-          <p:cNvPr id="8" name="Rectangle 7"/>
+          <p:cNvPr id="6" name="Rounded Rectangle 5"/>
           <p:cNvSpPr/>
           <p:nvPr/>
         </p:nvSpPr>
         <p:spPr>
           <a:xfrm>
-            <a:off x="900000" y="1350000"/>
-            <a:ext cx="20000000" cy="25000"/>
-          </a:xfrm>
-          <a:prstGeom prst="rect">
+            <a:off x="800000" y="1950000"/>
+            <a:ext cx="900000" cy="900000"/>
+          </a:xfrm>
+          <a:prstGeom prst="roundRect">
             <a:avLst/>
           </a:prstGeom>
           <a:solidFill>
-            <a:srgbClr val="B8B8B8"/>
+            <a:srgbClr val="0055AA"/>
           </a:solidFill>
           <a:ln>
             <a:noFill/>
@@ -3872,14 +3608,14 @@
       </p:sp>
       <p:sp>
         <p:nvSpPr>
-          <p:cNvPr id="9" name="TextBox 8"/>
+          <p:cNvPr id="7" name="TextBox 6"/>
           <p:cNvSpPr txBox="1"/>
           <p:nvPr/>
         </p:nvSpPr>
         <p:spPr>
           <a:xfrm>
-            <a:off x="900000" y="1450000"/>
-            <a:ext cx="20000000" cy="350000"/>
+            <a:off x="800000" y="1950000"/>
+            <a:ext cx="900000" cy="900000"/>
           </a:xfrm>
           <a:prstGeom prst="rect">
             <a:avLst/>
@@ -3887,41 +3623,47 @@
           <a:noFill/>
         </p:spPr>
         <p:txBody>
-          <a:bodyPr wrap="square" anchor="t"/>
-          <a:lstStyle/>
-          <a:p>
-            <a:pPr algn="l"/>
-            <a:r>
-              <a:rPr sz="1200" b="0">
+          <a:bodyPr wrap="square" anchor="ctr">
+            <a:spAutoFit/>
+          </a:bodyPr>
+          <a:lstStyle/>
+          <a:p>
+            <a:pPr algn="ctr"/>
+            <a:r>
+              <a:rPr sz="3200" b="1">
                 <a:solidFill>
-                  <a:srgbClr val="6F6F6F"/>
+                  <a:srgbClr val="FFFFFF"/>
                 </a:solidFill>
-                <a:latin typeface="Arial"/>
+                <a:latin typeface="Open Sans"/>
+                <a:ea typeface="Open Sans"/>
+                <a:cs typeface="Open Sans"/>
               </a:rPr>
-              <a:t>Оказание первой помощи при наружных кровотечениях</a:t>
-            </a:r>
-          </a:p>
-        </p:txBody>
-      </p:sp>
-      <p:sp>
-        <p:nvSpPr>
-          <p:cNvPr id="10" name="Rectangle 9"/>
+              <a:t>1</a:t>
+            </a:r>
+          </a:p>
+        </p:txBody>
+      </p:sp>
+      <p:sp>
+        <p:nvSpPr>
+          <p:cNvPr id="8" name="Rectangle 7"/>
           <p:cNvSpPr/>
           <p:nvPr/>
         </p:nvSpPr>
         <p:spPr>
           <a:xfrm>
-            <a:off x="900000" y="2000000"/>
-            <a:ext cx="700000" cy="700000"/>
+            <a:off x="1900000" y="1950000"/>
+            <a:ext cx="20500000" cy="900000"/>
           </a:xfrm>
           <a:prstGeom prst="rect">
             <a:avLst/>
           </a:prstGeom>
           <a:solidFill>
-            <a:srgbClr val="0082B9"/>
+            <a:srgbClr val="FFFFFF"/>
           </a:solidFill>
-          <a:ln>
-            <a:noFill/>
+          <a:ln w="12700">
+            <a:solidFill>
+              <a:srgbClr val="E1E1E1"/>
+            </a:solidFill>
           </a:ln>
         </p:spPr>
         <p:style>
@@ -3948,14 +3690,14 @@
       </p:sp>
       <p:sp>
         <p:nvSpPr>
-          <p:cNvPr id="11" name="TextBox 10"/>
+          <p:cNvPr id="9" name="TextBox 8"/>
           <p:cNvSpPr txBox="1"/>
           <p:nvPr/>
         </p:nvSpPr>
         <p:spPr>
           <a:xfrm>
-            <a:off x="900000" y="2000000"/>
-            <a:ext cx="700000" cy="700000"/>
+            <a:off x="2200000" y="1950000"/>
+            <a:ext cx="19500000" cy="900000"/>
           </a:xfrm>
           <a:prstGeom prst="rect">
             <a:avLst/>
@@ -3963,43 +3705,45 @@
           <a:noFill/>
         </p:spPr>
         <p:txBody>
-          <a:bodyPr wrap="square" anchor="ctr"/>
-          <a:lstStyle/>
-          <a:p>
-            <a:pPr algn="ctr"/>
-            <a:r>
-              <a:rPr sz="2200" b="1">
+          <a:bodyPr wrap="square" anchor="ctr">
+            <a:spAutoFit/>
+          </a:bodyPr>
+          <a:lstStyle/>
+          <a:p>
+            <a:pPr algn="l"/>
+            <a:r>
+              <a:rPr sz="3200" b="0">
                 <a:solidFill>
-                  <a:srgbClr val="FFFFFF"/>
+                  <a:srgbClr val="333333"/>
                 </a:solidFill>
-                <a:latin typeface="Arial"/>
+                <a:latin typeface="Open Sans"/>
+                <a:ea typeface="Open Sans"/>
+                <a:cs typeface="Open Sans"/>
               </a:rPr>
-              <a:t>1</a:t>
-            </a:r>
-          </a:p>
-        </p:txBody>
-      </p:sp>
-      <p:sp>
-        <p:nvSpPr>
-          <p:cNvPr id="12" name="Rectangle 11"/>
+              <a:t>Виды наружного кровотечения</a:t>
+            </a:r>
+          </a:p>
+        </p:txBody>
+      </p:sp>
+      <p:sp>
+        <p:nvSpPr>
+          <p:cNvPr id="10" name="Rounded Rectangle 9"/>
           <p:cNvSpPr/>
           <p:nvPr/>
         </p:nvSpPr>
         <p:spPr>
           <a:xfrm>
-            <a:off x="1700000" y="2000000"/>
-            <a:ext cx="19000000" cy="700000"/>
-          </a:xfrm>
-          <a:prstGeom prst="rect">
+            <a:off x="800000" y="3150000"/>
+            <a:ext cx="900000" cy="900000"/>
+          </a:xfrm>
+          <a:prstGeom prst="roundRect">
             <a:avLst/>
           </a:prstGeom>
           <a:solidFill>
-            <a:srgbClr val="FFFFFF"/>
+            <a:srgbClr val="0055AA"/>
           </a:solidFill>
           <a:ln>
-            <a:solidFill>
-              <a:srgbClr val="B8B8B8"/>
-            </a:solidFill>
+            <a:noFill/>
           </a:ln>
         </p:spPr>
         <p:style>
@@ -4026,14 +3770,14 @@
       </p:sp>
       <p:sp>
         <p:nvSpPr>
-          <p:cNvPr id="13" name="TextBox 12"/>
+          <p:cNvPr id="11" name="TextBox 10"/>
           <p:cNvSpPr txBox="1"/>
           <p:nvPr/>
         </p:nvSpPr>
         <p:spPr>
           <a:xfrm>
-            <a:off x="2000000" y="2000000"/>
-            <a:ext cx="18000000" cy="700000"/>
+            <a:off x="800000" y="3150000"/>
+            <a:ext cx="900000" cy="900000"/>
           </a:xfrm>
           <a:prstGeom prst="rect">
             <a:avLst/>
@@ -4041,41 +3785,47 @@
           <a:noFill/>
         </p:spPr>
         <p:txBody>
-          <a:bodyPr wrap="square" anchor="ctr"/>
-          <a:lstStyle/>
-          <a:p>
-            <a:pPr algn="l"/>
-            <a:r>
-              <a:rPr sz="1800" b="0">
+          <a:bodyPr wrap="square" anchor="ctr">
+            <a:spAutoFit/>
+          </a:bodyPr>
+          <a:lstStyle/>
+          <a:p>
+            <a:pPr algn="ctr"/>
+            <a:r>
+              <a:rPr sz="3200" b="1">
                 <a:solidFill>
-                  <a:srgbClr val="2C2C2C"/>
+                  <a:srgbClr val="FFFFFF"/>
                 </a:solidFill>
-                <a:latin typeface="Arial"/>
+                <a:latin typeface="Open Sans"/>
+                <a:ea typeface="Open Sans"/>
+                <a:cs typeface="Open Sans"/>
               </a:rPr>
-              <a:t>Виды наружного кровотечения: артериальное, венозное, капиллярное</a:t>
-            </a:r>
-          </a:p>
-        </p:txBody>
-      </p:sp>
-      <p:sp>
-        <p:nvSpPr>
-          <p:cNvPr id="14" name="Rectangle 13"/>
+              <a:t>2</a:t>
+            </a:r>
+          </a:p>
+        </p:txBody>
+      </p:sp>
+      <p:sp>
+        <p:nvSpPr>
+          <p:cNvPr id="12" name="Rectangle 11"/>
           <p:cNvSpPr/>
           <p:nvPr/>
         </p:nvSpPr>
         <p:spPr>
           <a:xfrm>
-            <a:off x="900000" y="2950000"/>
-            <a:ext cx="700000" cy="700000"/>
+            <a:off x="1900000" y="3150000"/>
+            <a:ext cx="20500000" cy="900000"/>
           </a:xfrm>
           <a:prstGeom prst="rect">
             <a:avLst/>
           </a:prstGeom>
           <a:solidFill>
-            <a:srgbClr val="0082B9"/>
+            <a:srgbClr val="FFFFFF"/>
           </a:solidFill>
-          <a:ln>
-            <a:noFill/>
+          <a:ln w="12700">
+            <a:solidFill>
+              <a:srgbClr val="E1E1E1"/>
+            </a:solidFill>
           </a:ln>
         </p:spPr>
         <p:style>
@@ -4102,14 +3852,14 @@
       </p:sp>
       <p:sp>
         <p:nvSpPr>
-          <p:cNvPr id="15" name="TextBox 14"/>
+          <p:cNvPr id="13" name="TextBox 12"/>
           <p:cNvSpPr txBox="1"/>
           <p:nvPr/>
         </p:nvSpPr>
         <p:spPr>
           <a:xfrm>
-            <a:off x="900000" y="2950000"/>
-            <a:ext cx="700000" cy="700000"/>
+            <a:off x="2200000" y="3150000"/>
+            <a:ext cx="19500000" cy="900000"/>
           </a:xfrm>
           <a:prstGeom prst="rect">
             <a:avLst/>
@@ -4117,43 +3867,45 @@
           <a:noFill/>
         </p:spPr>
         <p:txBody>
-          <a:bodyPr wrap="square" anchor="ctr"/>
-          <a:lstStyle/>
-          <a:p>
-            <a:pPr algn="ctr"/>
-            <a:r>
-              <a:rPr sz="2200" b="1">
+          <a:bodyPr wrap="square" anchor="ctr">
+            <a:spAutoFit/>
+          </a:bodyPr>
+          <a:lstStyle/>
+          <a:p>
+            <a:pPr algn="l"/>
+            <a:r>
+              <a:rPr sz="3200" b="0">
                 <a:solidFill>
-                  <a:srgbClr val="FFFFFF"/>
+                  <a:srgbClr val="333333"/>
                 </a:solidFill>
-                <a:latin typeface="Arial"/>
+                <a:latin typeface="Open Sans"/>
+                <a:ea typeface="Open Sans"/>
+                <a:cs typeface="Open Sans"/>
               </a:rPr>
-              <a:t>2</a:t>
-            </a:r>
-          </a:p>
-        </p:txBody>
-      </p:sp>
-      <p:sp>
-        <p:nvSpPr>
-          <p:cNvPr id="16" name="Rectangle 15"/>
+              <a:t>Сравнительная характеристика</a:t>
+            </a:r>
+          </a:p>
+        </p:txBody>
+      </p:sp>
+      <p:sp>
+        <p:nvSpPr>
+          <p:cNvPr id="14" name="Rounded Rectangle 13"/>
           <p:cNvSpPr/>
           <p:nvPr/>
         </p:nvSpPr>
         <p:spPr>
           <a:xfrm>
-            <a:off x="1700000" y="2950000"/>
-            <a:ext cx="19000000" cy="700000"/>
-          </a:xfrm>
-          <a:prstGeom prst="rect">
+            <a:off x="800000" y="4350000"/>
+            <a:ext cx="900000" cy="900000"/>
+          </a:xfrm>
+          <a:prstGeom prst="roundRect">
             <a:avLst/>
           </a:prstGeom>
           <a:solidFill>
-            <a:srgbClr val="FFFFFF"/>
+            <a:srgbClr val="0055AA"/>
           </a:solidFill>
           <a:ln>
-            <a:solidFill>
-              <a:srgbClr val="B8B8B8"/>
-            </a:solidFill>
+            <a:noFill/>
           </a:ln>
         </p:spPr>
         <p:style>
@@ -4180,14 +3932,14 @@
       </p:sp>
       <p:sp>
         <p:nvSpPr>
-          <p:cNvPr id="17" name="TextBox 16"/>
+          <p:cNvPr id="15" name="TextBox 14"/>
           <p:cNvSpPr txBox="1"/>
           <p:nvPr/>
         </p:nvSpPr>
         <p:spPr>
           <a:xfrm>
-            <a:off x="2000000" y="2950000"/>
-            <a:ext cx="18000000" cy="700000"/>
+            <a:off x="800000" y="4350000"/>
+            <a:ext cx="900000" cy="900000"/>
           </a:xfrm>
           <a:prstGeom prst="rect">
             <a:avLst/>
@@ -4195,41 +3947,47 @@
           <a:noFill/>
         </p:spPr>
         <p:txBody>
-          <a:bodyPr wrap="square" anchor="ctr"/>
-          <a:lstStyle/>
-          <a:p>
-            <a:pPr algn="l"/>
-            <a:r>
-              <a:rPr sz="1800" b="0">
+          <a:bodyPr wrap="square" anchor="ctr">
+            <a:spAutoFit/>
+          </a:bodyPr>
+          <a:lstStyle/>
+          <a:p>
+            <a:pPr algn="ctr"/>
+            <a:r>
+              <a:rPr sz="3200" b="1">
                 <a:solidFill>
-                  <a:srgbClr val="2C2C2C"/>
+                  <a:srgbClr val="FFFFFF"/>
                 </a:solidFill>
-                <a:latin typeface="Arial"/>
+                <a:latin typeface="Open Sans"/>
+                <a:ea typeface="Open Sans"/>
+                <a:cs typeface="Open Sans"/>
               </a:rPr>
-              <a:t>Сравнительная характеристика видов кровотечения</a:t>
-            </a:r>
-          </a:p>
-        </p:txBody>
-      </p:sp>
-      <p:sp>
-        <p:nvSpPr>
-          <p:cNvPr id="18" name="Rectangle 17"/>
+              <a:t>3</a:t>
+            </a:r>
+          </a:p>
+        </p:txBody>
+      </p:sp>
+      <p:sp>
+        <p:nvSpPr>
+          <p:cNvPr id="16" name="Rectangle 15"/>
           <p:cNvSpPr/>
           <p:nvPr/>
         </p:nvSpPr>
         <p:spPr>
           <a:xfrm>
-            <a:off x="900000" y="3900000"/>
-            <a:ext cx="700000" cy="700000"/>
+            <a:off x="1900000" y="4350000"/>
+            <a:ext cx="20500000" cy="900000"/>
           </a:xfrm>
           <a:prstGeom prst="rect">
             <a:avLst/>
           </a:prstGeom>
           <a:solidFill>
-            <a:srgbClr val="0082B9"/>
+            <a:srgbClr val="FFFFFF"/>
           </a:solidFill>
-          <a:ln>
-            <a:noFill/>
+          <a:ln w="12700">
+            <a:solidFill>
+              <a:srgbClr val="E1E1E1"/>
+            </a:solidFill>
           </a:ln>
         </p:spPr>
         <p:style>
@@ -4256,14 +4014,14 @@
       </p:sp>
       <p:sp>
         <p:nvSpPr>
-          <p:cNvPr id="19" name="TextBox 18"/>
+          <p:cNvPr id="17" name="TextBox 16"/>
           <p:cNvSpPr txBox="1"/>
           <p:nvPr/>
         </p:nvSpPr>
         <p:spPr>
           <a:xfrm>
-            <a:off x="900000" y="3900000"/>
-            <a:ext cx="700000" cy="700000"/>
+            <a:off x="2200000" y="4350000"/>
+            <a:ext cx="19500000" cy="900000"/>
           </a:xfrm>
           <a:prstGeom prst="rect">
             <a:avLst/>
@@ -4271,43 +4029,45 @@
           <a:noFill/>
         </p:spPr>
         <p:txBody>
-          <a:bodyPr wrap="square" anchor="ctr"/>
-          <a:lstStyle/>
-          <a:p>
-            <a:pPr algn="ctr"/>
-            <a:r>
-              <a:rPr sz="2200" b="1">
+          <a:bodyPr wrap="square" anchor="ctr">
+            <a:spAutoFit/>
+          </a:bodyPr>
+          <a:lstStyle/>
+          <a:p>
+            <a:pPr algn="l"/>
+            <a:r>
+              <a:rPr sz="3200" b="0">
                 <a:solidFill>
-                  <a:srgbClr val="FFFFFF"/>
+                  <a:srgbClr val="333333"/>
                 </a:solidFill>
-                <a:latin typeface="Arial"/>
+                <a:latin typeface="Open Sans"/>
+                <a:ea typeface="Open Sans"/>
+                <a:cs typeface="Open Sans"/>
               </a:rPr>
-              <a:t>3</a:t>
-            </a:r>
-          </a:p>
-        </p:txBody>
-      </p:sp>
-      <p:sp>
-        <p:nvSpPr>
-          <p:cNvPr id="20" name="Rectangle 19"/>
+              <a:t>Признаки острой кровопотери и объём</a:t>
+            </a:r>
+          </a:p>
+        </p:txBody>
+      </p:sp>
+      <p:sp>
+        <p:nvSpPr>
+          <p:cNvPr id="18" name="Rounded Rectangle 17"/>
           <p:cNvSpPr/>
           <p:nvPr/>
         </p:nvSpPr>
         <p:spPr>
           <a:xfrm>
-            <a:off x="1700000" y="3900000"/>
-            <a:ext cx="19000000" cy="700000"/>
-          </a:xfrm>
-          <a:prstGeom prst="rect">
+            <a:off x="800000" y="5550000"/>
+            <a:ext cx="900000" cy="900000"/>
+          </a:xfrm>
+          <a:prstGeom prst="roundRect">
             <a:avLst/>
           </a:prstGeom>
           <a:solidFill>
-            <a:srgbClr val="FFFFFF"/>
+            <a:srgbClr val="0055AA"/>
           </a:solidFill>
           <a:ln>
-            <a:solidFill>
-              <a:srgbClr val="B8B8B8"/>
-            </a:solidFill>
+            <a:noFill/>
           </a:ln>
         </p:spPr>
         <p:style>
@@ -4334,14 +4094,14 @@
       </p:sp>
       <p:sp>
         <p:nvSpPr>
-          <p:cNvPr id="21" name="TextBox 20"/>
+          <p:cNvPr id="19" name="TextBox 18"/>
           <p:cNvSpPr txBox="1"/>
           <p:nvPr/>
         </p:nvSpPr>
         <p:spPr>
           <a:xfrm>
-            <a:off x="2000000" y="3900000"/>
-            <a:ext cx="18000000" cy="700000"/>
+            <a:off x="800000" y="5550000"/>
+            <a:ext cx="900000" cy="900000"/>
           </a:xfrm>
           <a:prstGeom prst="rect">
             <a:avLst/>
@@ -4349,41 +4109,47 @@
           <a:noFill/>
         </p:spPr>
         <p:txBody>
-          <a:bodyPr wrap="square" anchor="ctr"/>
-          <a:lstStyle/>
-          <a:p>
-            <a:pPr algn="l"/>
-            <a:r>
-              <a:rPr sz="1800" b="0">
+          <a:bodyPr wrap="square" anchor="ctr">
+            <a:spAutoFit/>
+          </a:bodyPr>
+          <a:lstStyle/>
+          <a:p>
+            <a:pPr algn="ctr"/>
+            <a:r>
+              <a:rPr sz="3200" b="1">
                 <a:solidFill>
-                  <a:srgbClr val="2C2C2C"/>
+                  <a:srgbClr val="FFFFFF"/>
                 </a:solidFill>
-                <a:latin typeface="Arial"/>
+                <a:latin typeface="Open Sans"/>
+                <a:ea typeface="Open Sans"/>
+                <a:cs typeface="Open Sans"/>
               </a:rPr>
-              <a:t>Признаки острой кровопотери и оценка объёма</a:t>
-            </a:r>
-          </a:p>
-        </p:txBody>
-      </p:sp>
-      <p:sp>
-        <p:nvSpPr>
-          <p:cNvPr id="22" name="Rectangle 21"/>
+              <a:t>4</a:t>
+            </a:r>
+          </a:p>
+        </p:txBody>
+      </p:sp>
+      <p:sp>
+        <p:nvSpPr>
+          <p:cNvPr id="20" name="Rectangle 19"/>
           <p:cNvSpPr/>
           <p:nvPr/>
         </p:nvSpPr>
         <p:spPr>
           <a:xfrm>
-            <a:off x="900000" y="4850000"/>
-            <a:ext cx="700000" cy="700000"/>
+            <a:off x="1900000" y="5550000"/>
+            <a:ext cx="20500000" cy="900000"/>
           </a:xfrm>
           <a:prstGeom prst="rect">
             <a:avLst/>
           </a:prstGeom>
           <a:solidFill>
-            <a:srgbClr val="0082B9"/>
+            <a:srgbClr val="FFFFFF"/>
           </a:solidFill>
-          <a:ln>
-            <a:noFill/>
+          <a:ln w="12700">
+            <a:solidFill>
+              <a:srgbClr val="E1E1E1"/>
+            </a:solidFill>
           </a:ln>
         </p:spPr>
         <p:style>
@@ -4410,14 +4176,14 @@
       </p:sp>
       <p:sp>
         <p:nvSpPr>
-          <p:cNvPr id="23" name="TextBox 22"/>
+          <p:cNvPr id="21" name="TextBox 20"/>
           <p:cNvSpPr txBox="1"/>
           <p:nvPr/>
         </p:nvSpPr>
         <p:spPr>
           <a:xfrm>
-            <a:off x="900000" y="4850000"/>
-            <a:ext cx="700000" cy="700000"/>
+            <a:off x="2200000" y="5550000"/>
+            <a:ext cx="19500000" cy="900000"/>
           </a:xfrm>
           <a:prstGeom prst="rect">
             <a:avLst/>
@@ -4425,96 +4191,22 @@
           <a:noFill/>
         </p:spPr>
         <p:txBody>
-          <a:bodyPr wrap="square" anchor="ctr"/>
-          <a:lstStyle/>
-          <a:p>
-            <a:pPr algn="ctr"/>
-            <a:r>
-              <a:rPr sz="2200" b="1">
+          <a:bodyPr wrap="square" anchor="ctr">
+            <a:spAutoFit/>
+          </a:bodyPr>
+          <a:lstStyle/>
+          <a:p>
+            <a:pPr algn="l"/>
+            <a:r>
+              <a:rPr sz="3200" b="0">
                 <a:solidFill>
-                  <a:srgbClr val="FFFFFF"/>
+                  <a:srgbClr val="333333"/>
                 </a:solidFill>
-                <a:latin typeface="Arial"/>
+                <a:latin typeface="Open Sans"/>
+                <a:ea typeface="Open Sans"/>
+                <a:cs typeface="Open Sans"/>
               </a:rPr>
-              <a:t>4</a:t>
-            </a:r>
-          </a:p>
-        </p:txBody>
-      </p:sp>
-      <p:sp>
-        <p:nvSpPr>
-          <p:cNvPr id="24" name="Rectangle 23"/>
-          <p:cNvSpPr/>
-          <p:nvPr/>
-        </p:nvSpPr>
-        <p:spPr>
-          <a:xfrm>
-            <a:off x="1700000" y="4850000"/>
-            <a:ext cx="19000000" cy="700000"/>
-          </a:xfrm>
-          <a:prstGeom prst="rect">
-            <a:avLst/>
-          </a:prstGeom>
-          <a:solidFill>
-            <a:srgbClr val="FFFFFF"/>
-          </a:solidFill>
-          <a:ln>
-            <a:solidFill>
-              <a:srgbClr val="B8B8B8"/>
-            </a:solidFill>
-          </a:ln>
-        </p:spPr>
-        <p:style>
-          <a:lnRef idx="1">
-            <a:schemeClr val="accent1"/>
-          </a:lnRef>
-          <a:fillRef idx="3">
-            <a:schemeClr val="accent1"/>
-          </a:fillRef>
-          <a:effectRef idx="2">
-            <a:schemeClr val="accent1"/>
-          </a:effectRef>
-          <a:fontRef idx="minor">
-            <a:schemeClr val="lt1"/>
-          </a:fontRef>
-        </p:style>
-        <p:txBody>
-          <a:bodyPr rtlCol="0" anchor="ctr"/>
-          <a:lstStyle/>
-          <a:p>
-            <a:pPr algn="ctr"/>
-          </a:p>
-        </p:txBody>
-      </p:sp>
-      <p:sp>
-        <p:nvSpPr>
-          <p:cNvPr id="25" name="TextBox 24"/>
-          <p:cNvSpPr txBox="1"/>
-          <p:nvPr/>
-        </p:nvSpPr>
-        <p:spPr>
-          <a:xfrm>
-            <a:off x="2000000" y="4850000"/>
-            <a:ext cx="18000000" cy="700000"/>
-          </a:xfrm>
-          <a:prstGeom prst="rect">
-            <a:avLst/>
-          </a:prstGeom>
-          <a:noFill/>
-        </p:spPr>
-        <p:txBody>
-          <a:bodyPr wrap="square" anchor="ctr"/>
-          <a:lstStyle/>
-          <a:p>
-            <a:pPr algn="l"/>
-            <a:r>
-              <a:rPr sz="1800" b="0">
-                <a:solidFill>
-                  <a:srgbClr val="2C2C2C"/>
-                </a:solidFill>
-                <a:latin typeface="Arial"/>
-              </a:rPr>
-              <a:t>Признаки скрытого (внутреннего) кровотечения — кратко</a:t>
+              <a:t>Скрытое (внутреннее) кровотечение</a:t>
             </a:r>
           </a:p>
         </p:txBody>
@@ -4537,20 +4229,12 @@
         <p:nvPr/>
       </p:nvGrpSpPr>
       <p:grpSpPr/>
-      <p:pic>
-        <p:nvPicPr>
-          <p:cNvPr id="2" name="Picture 1" descr="page_02.png"/>
-          <p:cNvPicPr>
-            <a:picLocks noChangeAspect="1"/>
-          </p:cNvPicPr>
-          <p:nvPr/>
-        </p:nvPicPr>
-        <p:blipFill>
-          <a:blip r:embed="rId2"/>
-          <a:stretch>
-            <a:fillRect/>
-          </a:stretch>
-        </p:blipFill>
+      <p:sp>
+        <p:nvSpPr>
+          <p:cNvPr id="2" name="Rectangle 1"/>
+          <p:cNvSpPr/>
+          <p:nvPr/>
+        </p:nvSpPr>
         <p:spPr>
           <a:xfrm>
             <a:off x="0" y="0"/>
@@ -4559,8 +4243,760 @@
           <a:prstGeom prst="rect">
             <a:avLst/>
           </a:prstGeom>
-        </p:spPr>
-      </p:pic>
+          <a:solidFill>
+            <a:srgbClr val="FFFFFF"/>
+          </a:solidFill>
+          <a:ln>
+            <a:noFill/>
+          </a:ln>
+        </p:spPr>
+        <p:style>
+          <a:lnRef idx="1">
+            <a:schemeClr val="accent1"/>
+          </a:lnRef>
+          <a:fillRef idx="3">
+            <a:schemeClr val="accent1"/>
+          </a:fillRef>
+          <a:effectRef idx="2">
+            <a:schemeClr val="accent1"/>
+          </a:effectRef>
+          <a:fontRef idx="minor">
+            <a:schemeClr val="lt1"/>
+          </a:fontRef>
+        </p:style>
+        <p:txBody>
+          <a:bodyPr rtlCol="0" anchor="ctr"/>
+          <a:lstStyle/>
+          <a:p>
+            <a:pPr algn="ctr"/>
+          </a:p>
+        </p:txBody>
+      </p:sp>
+      <p:sp>
+        <p:nvSpPr>
+          <p:cNvPr id="3" name="Rectangle 2"/>
+          <p:cNvSpPr/>
+          <p:nvPr/>
+        </p:nvSpPr>
+        <p:spPr>
+          <a:xfrm>
+            <a:off x="0" y="0"/>
+            <a:ext cx="24384000" cy="120000"/>
+          </a:xfrm>
+          <a:prstGeom prst="rect">
+            <a:avLst/>
+          </a:prstGeom>
+          <a:solidFill>
+            <a:srgbClr val="DDDDDD"/>
+          </a:solidFill>
+          <a:ln>
+            <a:noFill/>
+          </a:ln>
+        </p:spPr>
+        <p:style>
+          <a:lnRef idx="1">
+            <a:schemeClr val="accent1"/>
+          </a:lnRef>
+          <a:fillRef idx="3">
+            <a:schemeClr val="accent1"/>
+          </a:fillRef>
+          <a:effectRef idx="2">
+            <a:schemeClr val="accent1"/>
+          </a:effectRef>
+          <a:fontRef idx="minor">
+            <a:schemeClr val="lt1"/>
+          </a:fontRef>
+        </p:style>
+        <p:txBody>
+          <a:bodyPr rtlCol="0" anchor="ctr"/>
+          <a:lstStyle/>
+          <a:p>
+            <a:pPr algn="ctr"/>
+          </a:p>
+        </p:txBody>
+      </p:sp>
+      <p:sp>
+        <p:nvSpPr>
+          <p:cNvPr id="4" name="TextBox 3"/>
+          <p:cNvSpPr txBox="1"/>
+          <p:nvPr/>
+        </p:nvSpPr>
+        <p:spPr>
+          <a:xfrm>
+            <a:off x="800000" y="350000"/>
+            <a:ext cx="22800000" cy="1000000"/>
+          </a:xfrm>
+          <a:prstGeom prst="rect">
+            <a:avLst/>
+          </a:prstGeom>
+          <a:noFill/>
+        </p:spPr>
+        <p:txBody>
+          <a:bodyPr wrap="square" anchor="t">
+            <a:spAutoFit/>
+          </a:bodyPr>
+          <a:lstStyle/>
+          <a:p>
+            <a:pPr algn="l"/>
+            <a:r>
+              <a:rPr sz="4600" b="1">
+                <a:solidFill>
+                  <a:srgbClr val="333333"/>
+                </a:solidFill>
+                <a:latin typeface="Open Sans"/>
+                <a:ea typeface="Open Sans"/>
+                <a:cs typeface="Open Sans"/>
+              </a:rPr>
+              <a:t>Виды наружного кровотечения</a:t>
+            </a:r>
+          </a:p>
+        </p:txBody>
+      </p:sp>
+      <p:sp>
+        <p:nvSpPr>
+          <p:cNvPr id="5" name="Rectangle 4"/>
+          <p:cNvSpPr/>
+          <p:nvPr/>
+        </p:nvSpPr>
+        <p:spPr>
+          <a:xfrm>
+            <a:off x="800000" y="1450000"/>
+            <a:ext cx="22800000" cy="20000"/>
+          </a:xfrm>
+          <a:prstGeom prst="rect">
+            <a:avLst/>
+          </a:prstGeom>
+          <a:solidFill>
+            <a:srgbClr val="E1E1E1"/>
+          </a:solidFill>
+          <a:ln>
+            <a:noFill/>
+          </a:ln>
+        </p:spPr>
+        <p:style>
+          <a:lnRef idx="1">
+            <a:schemeClr val="accent1"/>
+          </a:lnRef>
+          <a:fillRef idx="3">
+            <a:schemeClr val="accent1"/>
+          </a:fillRef>
+          <a:effectRef idx="2">
+            <a:schemeClr val="accent1"/>
+          </a:effectRef>
+          <a:fontRef idx="minor">
+            <a:schemeClr val="lt1"/>
+          </a:fontRef>
+        </p:style>
+        <p:txBody>
+          <a:bodyPr rtlCol="0" anchor="ctr"/>
+          <a:lstStyle/>
+          <a:p>
+            <a:pPr algn="ctr"/>
+          </a:p>
+        </p:txBody>
+      </p:sp>
+      <p:sp>
+        <p:nvSpPr>
+          <p:cNvPr id="6" name="Rectangle 5"/>
+          <p:cNvSpPr/>
+          <p:nvPr/>
+        </p:nvSpPr>
+        <p:spPr>
+          <a:xfrm>
+            <a:off x="800000" y="2150000"/>
+            <a:ext cx="7200000" cy="9000000"/>
+          </a:xfrm>
+          <a:prstGeom prst="rect">
+            <a:avLst/>
+          </a:prstGeom>
+          <a:solidFill>
+            <a:srgbClr val="FFFFFF"/>
+          </a:solidFill>
+          <a:ln w="12700">
+            <a:solidFill>
+              <a:srgbClr val="E1E1E1"/>
+            </a:solidFill>
+          </a:ln>
+        </p:spPr>
+        <p:style>
+          <a:lnRef idx="1">
+            <a:schemeClr val="accent1"/>
+          </a:lnRef>
+          <a:fillRef idx="3">
+            <a:schemeClr val="accent1"/>
+          </a:fillRef>
+          <a:effectRef idx="2">
+            <a:schemeClr val="accent1"/>
+          </a:effectRef>
+          <a:fontRef idx="minor">
+            <a:schemeClr val="lt1"/>
+          </a:fontRef>
+        </p:style>
+        <p:txBody>
+          <a:bodyPr rtlCol="0" anchor="ctr"/>
+          <a:lstStyle/>
+          <a:p>
+            <a:pPr algn="ctr"/>
+          </a:p>
+        </p:txBody>
+      </p:sp>
+      <p:sp>
+        <p:nvSpPr>
+          <p:cNvPr id="7" name="Oval 6"/>
+          <p:cNvSpPr/>
+          <p:nvPr/>
+        </p:nvSpPr>
+        <p:spPr>
+          <a:xfrm>
+            <a:off x="3600000" y="2750000"/>
+            <a:ext cx="1400000" cy="1400000"/>
+          </a:xfrm>
+          <a:prstGeom prst="ellipse">
+            <a:avLst/>
+          </a:prstGeom>
+          <a:solidFill>
+            <a:srgbClr val="CC0000"/>
+          </a:solidFill>
+          <a:ln>
+            <a:noFill/>
+          </a:ln>
+        </p:spPr>
+        <p:style>
+          <a:lnRef idx="1">
+            <a:schemeClr val="accent1"/>
+          </a:lnRef>
+          <a:fillRef idx="3">
+            <a:schemeClr val="accent1"/>
+          </a:fillRef>
+          <a:effectRef idx="2">
+            <a:schemeClr val="accent1"/>
+          </a:effectRef>
+          <a:fontRef idx="minor">
+            <a:schemeClr val="lt1"/>
+          </a:fontRef>
+        </p:style>
+        <p:txBody>
+          <a:bodyPr rtlCol="0" anchor="ctr"/>
+          <a:lstStyle/>
+          <a:p>
+            <a:pPr algn="ctr"/>
+          </a:p>
+        </p:txBody>
+      </p:sp>
+      <p:sp>
+        <p:nvSpPr>
+          <p:cNvPr id="8" name="TextBox 7"/>
+          <p:cNvSpPr txBox="1"/>
+          <p:nvPr/>
+        </p:nvSpPr>
+        <p:spPr>
+          <a:xfrm>
+            <a:off x="3600000" y="2750000"/>
+            <a:ext cx="1400000" cy="1400000"/>
+          </a:xfrm>
+          <a:prstGeom prst="rect">
+            <a:avLst/>
+          </a:prstGeom>
+          <a:noFill/>
+        </p:spPr>
+        <p:txBody>
+          <a:bodyPr wrap="square" anchor="ctr">
+            <a:spAutoFit/>
+          </a:bodyPr>
+          <a:lstStyle/>
+          <a:p>
+            <a:pPr algn="ctr"/>
+            <a:r>
+              <a:rPr sz="2000" b="1">
+                <a:solidFill>
+                  <a:srgbClr val="FFFFFF"/>
+                </a:solidFill>
+                <a:latin typeface="Open Sans"/>
+                <a:ea typeface="Open Sans"/>
+                <a:cs typeface="Open Sans"/>
+              </a:rPr>
+              <a:t>А</a:t>
+            </a:r>
+          </a:p>
+        </p:txBody>
+      </p:sp>
+      <p:sp>
+        <p:nvSpPr>
+          <p:cNvPr id="9" name="TextBox 8"/>
+          <p:cNvSpPr txBox="1"/>
+          <p:nvPr/>
+        </p:nvSpPr>
+        <p:spPr>
+          <a:xfrm>
+            <a:off x="1200000" y="4550000"/>
+            <a:ext cx="6400000" cy="900000"/>
+          </a:xfrm>
+          <a:prstGeom prst="rect">
+            <a:avLst/>
+          </a:prstGeom>
+          <a:noFill/>
+        </p:spPr>
+        <p:txBody>
+          <a:bodyPr wrap="square" anchor="t">
+            <a:spAutoFit/>
+          </a:bodyPr>
+          <a:lstStyle/>
+          <a:p>
+            <a:pPr algn="ctr"/>
+            <a:r>
+              <a:rPr sz="2600" b="1">
+                <a:solidFill>
+                  <a:srgbClr val="333333"/>
+                </a:solidFill>
+                <a:latin typeface="Open Sans"/>
+                <a:ea typeface="Open Sans"/>
+                <a:cs typeface="Open Sans"/>
+              </a:rPr>
+              <a:t>Артериальное</a:t>
+            </a:r>
+          </a:p>
+        </p:txBody>
+      </p:sp>
+      <p:sp>
+        <p:nvSpPr>
+          <p:cNvPr id="10" name="TextBox 9"/>
+          <p:cNvSpPr txBox="1"/>
+          <p:nvPr/>
+        </p:nvSpPr>
+        <p:spPr>
+          <a:xfrm>
+            <a:off x="1300000" y="5750000"/>
+            <a:ext cx="6200000" cy="4500000"/>
+          </a:xfrm>
+          <a:prstGeom prst="rect">
+            <a:avLst/>
+          </a:prstGeom>
+          <a:noFill/>
+        </p:spPr>
+        <p:txBody>
+          <a:bodyPr wrap="square" anchor="t">
+            <a:spAutoFit/>
+          </a:bodyPr>
+          <a:lstStyle/>
+          <a:p>
+            <a:pPr algn="ctr"/>
+            <a:r>
+              <a:rPr sz="2400" b="0">
+                <a:solidFill>
+                  <a:srgbClr val="333333"/>
+                </a:solidFill>
+                <a:latin typeface="Open Sans"/>
+                <a:ea typeface="Open Sans"/>
+                <a:cs typeface="Open Sans"/>
+              </a:rPr>
+              <a:t>Алая кровь
+пульсирующей струёй
+Опасность: критическая</a:t>
+            </a:r>
+          </a:p>
+        </p:txBody>
+      </p:sp>
+      <p:sp>
+        <p:nvSpPr>
+          <p:cNvPr id="11" name="Rectangle 10"/>
+          <p:cNvSpPr/>
+          <p:nvPr/>
+        </p:nvSpPr>
+        <p:spPr>
+          <a:xfrm>
+            <a:off x="8400000" y="2150000"/>
+            <a:ext cx="7200000" cy="9000000"/>
+          </a:xfrm>
+          <a:prstGeom prst="rect">
+            <a:avLst/>
+          </a:prstGeom>
+          <a:solidFill>
+            <a:srgbClr val="FFFFFF"/>
+          </a:solidFill>
+          <a:ln w="12700">
+            <a:solidFill>
+              <a:srgbClr val="E1E1E1"/>
+            </a:solidFill>
+          </a:ln>
+        </p:spPr>
+        <p:style>
+          <a:lnRef idx="1">
+            <a:schemeClr val="accent1"/>
+          </a:lnRef>
+          <a:fillRef idx="3">
+            <a:schemeClr val="accent1"/>
+          </a:fillRef>
+          <a:effectRef idx="2">
+            <a:schemeClr val="accent1"/>
+          </a:effectRef>
+          <a:fontRef idx="minor">
+            <a:schemeClr val="lt1"/>
+          </a:fontRef>
+        </p:style>
+        <p:txBody>
+          <a:bodyPr rtlCol="0" anchor="ctr"/>
+          <a:lstStyle/>
+          <a:p>
+            <a:pPr algn="ctr"/>
+          </a:p>
+        </p:txBody>
+      </p:sp>
+      <p:sp>
+        <p:nvSpPr>
+          <p:cNvPr id="12" name="Oval 11"/>
+          <p:cNvSpPr/>
+          <p:nvPr/>
+        </p:nvSpPr>
+        <p:spPr>
+          <a:xfrm>
+            <a:off x="11200000" y="2750000"/>
+            <a:ext cx="1400000" cy="1400000"/>
+          </a:xfrm>
+          <a:prstGeom prst="ellipse">
+            <a:avLst/>
+          </a:prstGeom>
+          <a:solidFill>
+            <a:srgbClr val="0055AA"/>
+          </a:solidFill>
+          <a:ln>
+            <a:noFill/>
+          </a:ln>
+        </p:spPr>
+        <p:style>
+          <a:lnRef idx="1">
+            <a:schemeClr val="accent1"/>
+          </a:lnRef>
+          <a:fillRef idx="3">
+            <a:schemeClr val="accent1"/>
+          </a:fillRef>
+          <a:effectRef idx="2">
+            <a:schemeClr val="accent1"/>
+          </a:effectRef>
+          <a:fontRef idx="minor">
+            <a:schemeClr val="lt1"/>
+          </a:fontRef>
+        </p:style>
+        <p:txBody>
+          <a:bodyPr rtlCol="0" anchor="ctr"/>
+          <a:lstStyle/>
+          <a:p>
+            <a:pPr algn="ctr"/>
+          </a:p>
+        </p:txBody>
+      </p:sp>
+      <p:sp>
+        <p:nvSpPr>
+          <p:cNvPr id="13" name="TextBox 12"/>
+          <p:cNvSpPr txBox="1"/>
+          <p:nvPr/>
+        </p:nvSpPr>
+        <p:spPr>
+          <a:xfrm>
+            <a:off x="11200000" y="2750000"/>
+            <a:ext cx="1400000" cy="1400000"/>
+          </a:xfrm>
+          <a:prstGeom prst="rect">
+            <a:avLst/>
+          </a:prstGeom>
+          <a:noFill/>
+        </p:spPr>
+        <p:txBody>
+          <a:bodyPr wrap="square" anchor="ctr">
+            <a:spAutoFit/>
+          </a:bodyPr>
+          <a:lstStyle/>
+          <a:p>
+            <a:pPr algn="ctr"/>
+            <a:r>
+              <a:rPr sz="2000" b="1">
+                <a:solidFill>
+                  <a:srgbClr val="FFFFFF"/>
+                </a:solidFill>
+                <a:latin typeface="Open Sans"/>
+                <a:ea typeface="Open Sans"/>
+                <a:cs typeface="Open Sans"/>
+              </a:rPr>
+              <a:t>В</a:t>
+            </a:r>
+          </a:p>
+        </p:txBody>
+      </p:sp>
+      <p:sp>
+        <p:nvSpPr>
+          <p:cNvPr id="14" name="TextBox 13"/>
+          <p:cNvSpPr txBox="1"/>
+          <p:nvPr/>
+        </p:nvSpPr>
+        <p:spPr>
+          <a:xfrm>
+            <a:off x="8800000" y="4550000"/>
+            <a:ext cx="6400000" cy="900000"/>
+          </a:xfrm>
+          <a:prstGeom prst="rect">
+            <a:avLst/>
+          </a:prstGeom>
+          <a:noFill/>
+        </p:spPr>
+        <p:txBody>
+          <a:bodyPr wrap="square" anchor="t">
+            <a:spAutoFit/>
+          </a:bodyPr>
+          <a:lstStyle/>
+          <a:p>
+            <a:pPr algn="ctr"/>
+            <a:r>
+              <a:rPr sz="2600" b="1">
+                <a:solidFill>
+                  <a:srgbClr val="333333"/>
+                </a:solidFill>
+                <a:latin typeface="Open Sans"/>
+                <a:ea typeface="Open Sans"/>
+                <a:cs typeface="Open Sans"/>
+              </a:rPr>
+              <a:t>Венозное</a:t>
+            </a:r>
+          </a:p>
+        </p:txBody>
+      </p:sp>
+      <p:sp>
+        <p:nvSpPr>
+          <p:cNvPr id="15" name="TextBox 14"/>
+          <p:cNvSpPr txBox="1"/>
+          <p:nvPr/>
+        </p:nvSpPr>
+        <p:spPr>
+          <a:xfrm>
+            <a:off x="8900000" y="5750000"/>
+            <a:ext cx="6200000" cy="4500000"/>
+          </a:xfrm>
+          <a:prstGeom prst="rect">
+            <a:avLst/>
+          </a:prstGeom>
+          <a:noFill/>
+        </p:spPr>
+        <p:txBody>
+          <a:bodyPr wrap="square" anchor="t">
+            <a:spAutoFit/>
+          </a:bodyPr>
+          <a:lstStyle/>
+          <a:p>
+            <a:pPr algn="ctr"/>
+            <a:r>
+              <a:rPr sz="2400" b="0">
+                <a:solidFill>
+                  <a:srgbClr val="333333"/>
+                </a:solidFill>
+                <a:latin typeface="Open Sans"/>
+                <a:ea typeface="Open Sans"/>
+                <a:cs typeface="Open Sans"/>
+              </a:rPr>
+              <a:t>Тёмная кровь
+равномерной струёй
+Опасность: высокая</a:t>
+            </a:r>
+          </a:p>
+        </p:txBody>
+      </p:sp>
+      <p:sp>
+        <p:nvSpPr>
+          <p:cNvPr id="16" name="Rectangle 15"/>
+          <p:cNvSpPr/>
+          <p:nvPr/>
+        </p:nvSpPr>
+        <p:spPr>
+          <a:xfrm>
+            <a:off x="16000000" y="2150000"/>
+            <a:ext cx="7200000" cy="9000000"/>
+          </a:xfrm>
+          <a:prstGeom prst="rect">
+            <a:avLst/>
+          </a:prstGeom>
+          <a:solidFill>
+            <a:srgbClr val="FFFFFF"/>
+          </a:solidFill>
+          <a:ln w="12700">
+            <a:solidFill>
+              <a:srgbClr val="E1E1E1"/>
+            </a:solidFill>
+          </a:ln>
+        </p:spPr>
+        <p:style>
+          <a:lnRef idx="1">
+            <a:schemeClr val="accent1"/>
+          </a:lnRef>
+          <a:fillRef idx="3">
+            <a:schemeClr val="accent1"/>
+          </a:fillRef>
+          <a:effectRef idx="2">
+            <a:schemeClr val="accent1"/>
+          </a:effectRef>
+          <a:fontRef idx="minor">
+            <a:schemeClr val="lt1"/>
+          </a:fontRef>
+        </p:style>
+        <p:txBody>
+          <a:bodyPr rtlCol="0" anchor="ctr"/>
+          <a:lstStyle/>
+          <a:p>
+            <a:pPr algn="ctr"/>
+          </a:p>
+        </p:txBody>
+      </p:sp>
+      <p:sp>
+        <p:nvSpPr>
+          <p:cNvPr id="17" name="Oval 16"/>
+          <p:cNvSpPr/>
+          <p:nvPr/>
+        </p:nvSpPr>
+        <p:spPr>
+          <a:xfrm>
+            <a:off x="18800000" y="2750000"/>
+            <a:ext cx="1400000" cy="1400000"/>
+          </a:xfrm>
+          <a:prstGeom prst="ellipse">
+            <a:avLst/>
+          </a:prstGeom>
+          <a:solidFill>
+            <a:srgbClr val="DDDDDD"/>
+          </a:solidFill>
+          <a:ln>
+            <a:noFill/>
+          </a:ln>
+        </p:spPr>
+        <p:style>
+          <a:lnRef idx="1">
+            <a:schemeClr val="accent1"/>
+          </a:lnRef>
+          <a:fillRef idx="3">
+            <a:schemeClr val="accent1"/>
+          </a:fillRef>
+          <a:effectRef idx="2">
+            <a:schemeClr val="accent1"/>
+          </a:effectRef>
+          <a:fontRef idx="minor">
+            <a:schemeClr val="lt1"/>
+          </a:fontRef>
+        </p:style>
+        <p:txBody>
+          <a:bodyPr rtlCol="0" anchor="ctr"/>
+          <a:lstStyle/>
+          <a:p>
+            <a:pPr algn="ctr"/>
+          </a:p>
+        </p:txBody>
+      </p:sp>
+      <p:sp>
+        <p:nvSpPr>
+          <p:cNvPr id="18" name="TextBox 17"/>
+          <p:cNvSpPr txBox="1"/>
+          <p:nvPr/>
+        </p:nvSpPr>
+        <p:spPr>
+          <a:xfrm>
+            <a:off x="18800000" y="2750000"/>
+            <a:ext cx="1400000" cy="1400000"/>
+          </a:xfrm>
+          <a:prstGeom prst="rect">
+            <a:avLst/>
+          </a:prstGeom>
+          <a:noFill/>
+        </p:spPr>
+        <p:txBody>
+          <a:bodyPr wrap="square" anchor="ctr">
+            <a:spAutoFit/>
+          </a:bodyPr>
+          <a:lstStyle/>
+          <a:p>
+            <a:pPr algn="ctr"/>
+            <a:r>
+              <a:rPr sz="2000" b="1">
+                <a:solidFill>
+                  <a:srgbClr val="FFFFFF"/>
+                </a:solidFill>
+                <a:latin typeface="Open Sans"/>
+                <a:ea typeface="Open Sans"/>
+                <a:cs typeface="Open Sans"/>
+              </a:rPr>
+              <a:t>К</a:t>
+            </a:r>
+          </a:p>
+        </p:txBody>
+      </p:sp>
+      <p:sp>
+        <p:nvSpPr>
+          <p:cNvPr id="19" name="TextBox 18"/>
+          <p:cNvSpPr txBox="1"/>
+          <p:nvPr/>
+        </p:nvSpPr>
+        <p:spPr>
+          <a:xfrm>
+            <a:off x="16400000" y="4550000"/>
+            <a:ext cx="6400000" cy="900000"/>
+          </a:xfrm>
+          <a:prstGeom prst="rect">
+            <a:avLst/>
+          </a:prstGeom>
+          <a:noFill/>
+        </p:spPr>
+        <p:txBody>
+          <a:bodyPr wrap="square" anchor="t">
+            <a:spAutoFit/>
+          </a:bodyPr>
+          <a:lstStyle/>
+          <a:p>
+            <a:pPr algn="ctr"/>
+            <a:r>
+              <a:rPr sz="2600" b="1">
+                <a:solidFill>
+                  <a:srgbClr val="333333"/>
+                </a:solidFill>
+                <a:latin typeface="Open Sans"/>
+                <a:ea typeface="Open Sans"/>
+                <a:cs typeface="Open Sans"/>
+              </a:rPr>
+              <a:t>Капиллярное</a:t>
+            </a:r>
+          </a:p>
+        </p:txBody>
+      </p:sp>
+      <p:sp>
+        <p:nvSpPr>
+          <p:cNvPr id="20" name="TextBox 19"/>
+          <p:cNvSpPr txBox="1"/>
+          <p:nvPr/>
+        </p:nvSpPr>
+        <p:spPr>
+          <a:xfrm>
+            <a:off x="16500000" y="5750000"/>
+            <a:ext cx="6200000" cy="4500000"/>
+          </a:xfrm>
+          <a:prstGeom prst="rect">
+            <a:avLst/>
+          </a:prstGeom>
+          <a:noFill/>
+        </p:spPr>
+        <p:txBody>
+          <a:bodyPr wrap="square" anchor="t">
+            <a:spAutoFit/>
+          </a:bodyPr>
+          <a:lstStyle/>
+          <a:p>
+            <a:pPr algn="ctr"/>
+            <a:r>
+              <a:rPr sz="2400" b="0">
+                <a:solidFill>
+                  <a:srgbClr val="333333"/>
+                </a:solidFill>
+                <a:latin typeface="Open Sans"/>
+                <a:ea typeface="Open Sans"/>
+                <a:cs typeface="Open Sans"/>
+              </a:rPr>
+              <a:t>Сочится по поверхности
+Опасность: обычно низкая</a:t>
+            </a:r>
+          </a:p>
+        </p:txBody>
+      </p:sp>
     </p:spTree>
   </p:cSld>
   <p:clrMapOvr>
@@ -4579,20 +5015,12 @@
         <p:nvPr/>
       </p:nvGrpSpPr>
       <p:grpSpPr/>
-      <p:pic>
-        <p:nvPicPr>
-          <p:cNvPr id="2" name="Picture 1" descr="page_03.png"/>
-          <p:cNvPicPr>
-            <a:picLocks noChangeAspect="1"/>
-          </p:cNvPicPr>
-          <p:nvPr/>
-        </p:nvPicPr>
-        <p:blipFill>
-          <a:blip r:embed="rId2"/>
-          <a:stretch>
-            <a:fillRect/>
-          </a:stretch>
-        </p:blipFill>
+      <p:sp>
+        <p:nvSpPr>
+          <p:cNvPr id="2" name="Rectangle 1"/>
+          <p:cNvSpPr/>
+          <p:nvPr/>
+        </p:nvSpPr>
         <p:spPr>
           <a:xfrm>
             <a:off x="0" y="0"/>
@@ -4601,8 +5029,798 @@
           <a:prstGeom prst="rect">
             <a:avLst/>
           </a:prstGeom>
-        </p:spPr>
-      </p:pic>
+          <a:solidFill>
+            <a:srgbClr val="FFFFFF"/>
+          </a:solidFill>
+          <a:ln>
+            <a:noFill/>
+          </a:ln>
+        </p:spPr>
+        <p:style>
+          <a:lnRef idx="1">
+            <a:schemeClr val="accent1"/>
+          </a:lnRef>
+          <a:fillRef idx="3">
+            <a:schemeClr val="accent1"/>
+          </a:fillRef>
+          <a:effectRef idx="2">
+            <a:schemeClr val="accent1"/>
+          </a:effectRef>
+          <a:fontRef idx="minor">
+            <a:schemeClr val="lt1"/>
+          </a:fontRef>
+        </p:style>
+        <p:txBody>
+          <a:bodyPr rtlCol="0" anchor="ctr"/>
+          <a:lstStyle/>
+          <a:p>
+            <a:pPr algn="ctr"/>
+          </a:p>
+        </p:txBody>
+      </p:sp>
+      <p:sp>
+        <p:nvSpPr>
+          <p:cNvPr id="3" name="Rectangle 2"/>
+          <p:cNvSpPr/>
+          <p:nvPr/>
+        </p:nvSpPr>
+        <p:spPr>
+          <a:xfrm>
+            <a:off x="0" y="0"/>
+            <a:ext cx="24384000" cy="120000"/>
+          </a:xfrm>
+          <a:prstGeom prst="rect">
+            <a:avLst/>
+          </a:prstGeom>
+          <a:solidFill>
+            <a:srgbClr val="DDDDDD"/>
+          </a:solidFill>
+          <a:ln>
+            <a:noFill/>
+          </a:ln>
+        </p:spPr>
+        <p:style>
+          <a:lnRef idx="1">
+            <a:schemeClr val="accent1"/>
+          </a:lnRef>
+          <a:fillRef idx="3">
+            <a:schemeClr val="accent1"/>
+          </a:fillRef>
+          <a:effectRef idx="2">
+            <a:schemeClr val="accent1"/>
+          </a:effectRef>
+          <a:fontRef idx="minor">
+            <a:schemeClr val="lt1"/>
+          </a:fontRef>
+        </p:style>
+        <p:txBody>
+          <a:bodyPr rtlCol="0" anchor="ctr"/>
+          <a:lstStyle/>
+          <a:p>
+            <a:pPr algn="ctr"/>
+          </a:p>
+        </p:txBody>
+      </p:sp>
+      <p:sp>
+        <p:nvSpPr>
+          <p:cNvPr id="4" name="TextBox 3"/>
+          <p:cNvSpPr txBox="1"/>
+          <p:nvPr/>
+        </p:nvSpPr>
+        <p:spPr>
+          <a:xfrm>
+            <a:off x="800000" y="350000"/>
+            <a:ext cx="22800000" cy="1000000"/>
+          </a:xfrm>
+          <a:prstGeom prst="rect">
+            <a:avLst/>
+          </a:prstGeom>
+          <a:noFill/>
+        </p:spPr>
+        <p:txBody>
+          <a:bodyPr wrap="square" anchor="t">
+            <a:spAutoFit/>
+          </a:bodyPr>
+          <a:lstStyle/>
+          <a:p>
+            <a:pPr algn="l"/>
+            <a:r>
+              <a:rPr sz="4600" b="1">
+                <a:solidFill>
+                  <a:srgbClr val="333333"/>
+                </a:solidFill>
+                <a:latin typeface="Open Sans"/>
+                <a:ea typeface="Open Sans"/>
+                <a:cs typeface="Open Sans"/>
+              </a:rPr>
+              <a:t>Сравнительная таблица видов кровотечения</a:t>
+            </a:r>
+          </a:p>
+        </p:txBody>
+      </p:sp>
+      <p:sp>
+        <p:nvSpPr>
+          <p:cNvPr id="5" name="Rectangle 4"/>
+          <p:cNvSpPr/>
+          <p:nvPr/>
+        </p:nvSpPr>
+        <p:spPr>
+          <a:xfrm>
+            <a:off x="800000" y="1450000"/>
+            <a:ext cx="22800000" cy="20000"/>
+          </a:xfrm>
+          <a:prstGeom prst="rect">
+            <a:avLst/>
+          </a:prstGeom>
+          <a:solidFill>
+            <a:srgbClr val="E1E1E1"/>
+          </a:solidFill>
+          <a:ln>
+            <a:noFill/>
+          </a:ln>
+        </p:spPr>
+        <p:style>
+          <a:lnRef idx="1">
+            <a:schemeClr val="accent1"/>
+          </a:lnRef>
+          <a:fillRef idx="3">
+            <a:schemeClr val="accent1"/>
+          </a:fillRef>
+          <a:effectRef idx="2">
+            <a:schemeClr val="accent1"/>
+          </a:effectRef>
+          <a:fontRef idx="minor">
+            <a:schemeClr val="lt1"/>
+          </a:fontRef>
+        </p:style>
+        <p:txBody>
+          <a:bodyPr rtlCol="0" anchor="ctr"/>
+          <a:lstStyle/>
+          <a:p>
+            <a:pPr algn="ctr"/>
+          </a:p>
+        </p:txBody>
+      </p:sp>
+      <p:graphicFrame>
+        <p:nvGraphicFramePr>
+          <p:cNvPr id="6" name="Table 5"/>
+          <p:cNvGraphicFramePr>
+            <a:graphicFrameLocks noGrp="1"/>
+          </p:cNvGraphicFramePr>
+          <p:nvPr/>
+        </p:nvGraphicFramePr>
+        <p:xfrm>
+          <a:off x="800000" y="2050000"/>
+          <a:ext cx="22800000" cy="9000000"/>
+        </p:xfrm>
+        <a:graphic>
+          <a:graphicData uri="http://schemas.openxmlformats.org/drawingml/2006/table">
+            <a:tbl>
+              <a:tblPr firstRow="1" bandRow="1">
+                <a:tableStyleId>{5C22544A-7EE6-4342-B048-85BDC9FD1C3A}</a:tableStyleId>
+              </a:tblPr>
+              <a:tblGrid>
+                <a:gridCol w="5700000"/>
+                <a:gridCol w="5700000"/>
+                <a:gridCol w="5700000"/>
+                <a:gridCol w="5700000"/>
+              </a:tblGrid>
+              <a:tr h="1500000">
+                <a:tc>
+                  <a:txBody>
+                    <a:bodyPr/>
+                    <a:lstStyle/>
+                    <a:p>
+                      <a:pPr algn="l"/>
+                      <a:r>
+                        <a:rPr sz="2200" b="1">
+                          <a:solidFill>
+                            <a:srgbClr val="FFFFFF"/>
+                          </a:solidFill>
+                          <a:latin typeface="Open Sans"/>
+                          <a:ea typeface="Open Sans"/>
+                          <a:cs typeface="Open Sans"/>
+                        </a:rPr>
+                        <a:t>Признак</a:t>
+                      </a:r>
+                    </a:p>
+                  </a:txBody>
+                  <a:tcPr>
+                    <a:solidFill>
+                      <a:srgbClr val="0055AA"/>
+                    </a:solidFill>
+                  </a:tcPr>
+                </a:tc>
+                <a:tc>
+                  <a:txBody>
+                    <a:bodyPr/>
+                    <a:lstStyle/>
+                    <a:p>
+                      <a:pPr algn="l"/>
+                      <a:r>
+                        <a:rPr sz="2200" b="1">
+                          <a:solidFill>
+                            <a:srgbClr val="FFFFFF"/>
+                          </a:solidFill>
+                          <a:latin typeface="Open Sans"/>
+                          <a:ea typeface="Open Sans"/>
+                          <a:cs typeface="Open Sans"/>
+                        </a:rPr>
+                        <a:t>Артериальное</a:t>
+                      </a:r>
+                    </a:p>
+                  </a:txBody>
+                  <a:tcPr>
+                    <a:solidFill>
+                      <a:srgbClr val="0055AA"/>
+                    </a:solidFill>
+                  </a:tcPr>
+                </a:tc>
+                <a:tc>
+                  <a:txBody>
+                    <a:bodyPr/>
+                    <a:lstStyle/>
+                    <a:p>
+                      <a:pPr algn="l"/>
+                      <a:r>
+                        <a:rPr sz="2200" b="1">
+                          <a:solidFill>
+                            <a:srgbClr val="FFFFFF"/>
+                          </a:solidFill>
+                          <a:latin typeface="Open Sans"/>
+                          <a:ea typeface="Open Sans"/>
+                          <a:cs typeface="Open Sans"/>
+                        </a:rPr>
+                        <a:t>Венозное</a:t>
+                      </a:r>
+                    </a:p>
+                  </a:txBody>
+                  <a:tcPr>
+                    <a:solidFill>
+                      <a:srgbClr val="0055AA"/>
+                    </a:solidFill>
+                  </a:tcPr>
+                </a:tc>
+                <a:tc>
+                  <a:txBody>
+                    <a:bodyPr/>
+                    <a:lstStyle/>
+                    <a:p>
+                      <a:pPr algn="l"/>
+                      <a:r>
+                        <a:rPr sz="2200" b="1">
+                          <a:solidFill>
+                            <a:srgbClr val="FFFFFF"/>
+                          </a:solidFill>
+                          <a:latin typeface="Open Sans"/>
+                          <a:ea typeface="Open Sans"/>
+                          <a:cs typeface="Open Sans"/>
+                        </a:rPr>
+                        <a:t>Капиллярное</a:t>
+                      </a:r>
+                    </a:p>
+                  </a:txBody>
+                  <a:tcPr>
+                    <a:solidFill>
+                      <a:srgbClr val="0055AA"/>
+                    </a:solidFill>
+                  </a:tcPr>
+                </a:tc>
+              </a:tr>
+              <a:tr h="1500000">
+                <a:tc>
+                  <a:txBody>
+                    <a:bodyPr/>
+                    <a:lstStyle/>
+                    <a:p>
+                      <a:pPr algn="l"/>
+                      <a:r>
+                        <a:rPr sz="2200" b="0">
+                          <a:solidFill>
+                            <a:srgbClr val="333333"/>
+                          </a:solidFill>
+                          <a:latin typeface="Open Sans"/>
+                          <a:ea typeface="Open Sans"/>
+                          <a:cs typeface="Open Sans"/>
+                        </a:rPr>
+                        <a:t>Цвет крови</a:t>
+                      </a:r>
+                    </a:p>
+                  </a:txBody>
+                  <a:tcPr>
+                    <a:solidFill>
+                      <a:srgbClr val="FFFFFF"/>
+                    </a:solidFill>
+                  </a:tcPr>
+                </a:tc>
+                <a:tc>
+                  <a:txBody>
+                    <a:bodyPr/>
+                    <a:lstStyle/>
+                    <a:p>
+                      <a:pPr algn="l"/>
+                      <a:r>
+                        <a:rPr sz="2200" b="1">
+                          <a:solidFill>
+                            <a:srgbClr val="CC0000"/>
+                          </a:solidFill>
+                          <a:latin typeface="Open Sans"/>
+                          <a:ea typeface="Open Sans"/>
+                          <a:cs typeface="Open Sans"/>
+                        </a:rPr>
+                        <a:t>Алый, яркий</a:t>
+                      </a:r>
+                    </a:p>
+                  </a:txBody>
+                  <a:tcPr>
+                    <a:solidFill>
+                      <a:srgbClr val="FFFFFF"/>
+                    </a:solidFill>
+                  </a:tcPr>
+                </a:tc>
+                <a:tc>
+                  <a:txBody>
+                    <a:bodyPr/>
+                    <a:lstStyle/>
+                    <a:p>
+                      <a:pPr algn="l"/>
+                      <a:r>
+                        <a:rPr sz="2200" b="0">
+                          <a:solidFill>
+                            <a:srgbClr val="333333"/>
+                          </a:solidFill>
+                          <a:latin typeface="Open Sans"/>
+                          <a:ea typeface="Open Sans"/>
+                          <a:cs typeface="Open Sans"/>
+                        </a:rPr>
+                        <a:t>Тёмный, вишнёвый</a:t>
+                      </a:r>
+                    </a:p>
+                  </a:txBody>
+                  <a:tcPr>
+                    <a:solidFill>
+                      <a:srgbClr val="FFFFFF"/>
+                    </a:solidFill>
+                  </a:tcPr>
+                </a:tc>
+                <a:tc>
+                  <a:txBody>
+                    <a:bodyPr/>
+                    <a:lstStyle/>
+                    <a:p>
+                      <a:pPr algn="l"/>
+                      <a:r>
+                        <a:rPr sz="2200" b="0">
+                          <a:solidFill>
+                            <a:srgbClr val="333333"/>
+                          </a:solidFill>
+                          <a:latin typeface="Open Sans"/>
+                          <a:ea typeface="Open Sans"/>
+                          <a:cs typeface="Open Sans"/>
+                        </a:rPr>
+                        <a:t>Красный</a:t>
+                      </a:r>
+                    </a:p>
+                  </a:txBody>
+                  <a:tcPr>
+                    <a:solidFill>
+                      <a:srgbClr val="FFFFFF"/>
+                    </a:solidFill>
+                  </a:tcPr>
+                </a:tc>
+              </a:tr>
+              <a:tr h="1500000">
+                <a:tc>
+                  <a:txBody>
+                    <a:bodyPr/>
+                    <a:lstStyle/>
+                    <a:p>
+                      <a:pPr algn="l"/>
+                      <a:r>
+                        <a:rPr sz="2200" b="0">
+                          <a:solidFill>
+                            <a:srgbClr val="333333"/>
+                          </a:solidFill>
+                          <a:latin typeface="Open Sans"/>
+                          <a:ea typeface="Open Sans"/>
+                          <a:cs typeface="Open Sans"/>
+                        </a:rPr>
+                        <a:t>Характер</a:t>
+                      </a:r>
+                    </a:p>
+                  </a:txBody>
+                  <a:tcPr>
+                    <a:solidFill>
+                      <a:srgbClr val="F5F5F5"/>
+                    </a:solidFill>
+                  </a:tcPr>
+                </a:tc>
+                <a:tc>
+                  <a:txBody>
+                    <a:bodyPr/>
+                    <a:lstStyle/>
+                    <a:p>
+                      <a:pPr algn="l"/>
+                      <a:r>
+                        <a:rPr sz="2200" b="1">
+                          <a:solidFill>
+                            <a:srgbClr val="CC0000"/>
+                          </a:solidFill>
+                          <a:latin typeface="Open Sans"/>
+                          <a:ea typeface="Open Sans"/>
+                          <a:cs typeface="Open Sans"/>
+                        </a:rPr>
+                        <a:t>Пульсирующей струёй</a:t>
+                      </a:r>
+                    </a:p>
+                  </a:txBody>
+                  <a:tcPr>
+                    <a:solidFill>
+                      <a:srgbClr val="F5F5F5"/>
+                    </a:solidFill>
+                  </a:tcPr>
+                </a:tc>
+                <a:tc>
+                  <a:txBody>
+                    <a:bodyPr/>
+                    <a:lstStyle/>
+                    <a:p>
+                      <a:pPr algn="l"/>
+                      <a:r>
+                        <a:rPr sz="2200" b="0">
+                          <a:solidFill>
+                            <a:srgbClr val="333333"/>
+                          </a:solidFill>
+                          <a:latin typeface="Open Sans"/>
+                          <a:ea typeface="Open Sans"/>
+                          <a:cs typeface="Open Sans"/>
+                        </a:rPr>
+                        <a:t>Равномерной струёй</a:t>
+                      </a:r>
+                    </a:p>
+                  </a:txBody>
+                  <a:tcPr>
+                    <a:solidFill>
+                      <a:srgbClr val="F5F5F5"/>
+                    </a:solidFill>
+                  </a:tcPr>
+                </a:tc>
+                <a:tc>
+                  <a:txBody>
+                    <a:bodyPr/>
+                    <a:lstStyle/>
+                    <a:p>
+                      <a:pPr algn="l"/>
+                      <a:r>
+                        <a:rPr sz="2200" b="0">
+                          <a:solidFill>
+                            <a:srgbClr val="333333"/>
+                          </a:solidFill>
+                          <a:latin typeface="Open Sans"/>
+                          <a:ea typeface="Open Sans"/>
+                          <a:cs typeface="Open Sans"/>
+                        </a:rPr>
+                        <a:t>Сочится</a:t>
+                      </a:r>
+                    </a:p>
+                  </a:txBody>
+                  <a:tcPr>
+                    <a:solidFill>
+                      <a:srgbClr val="F5F5F5"/>
+                    </a:solidFill>
+                  </a:tcPr>
+                </a:tc>
+              </a:tr>
+              <a:tr h="1500000">
+                <a:tc>
+                  <a:txBody>
+                    <a:bodyPr/>
+                    <a:lstStyle/>
+                    <a:p>
+                      <a:pPr algn="l"/>
+                      <a:r>
+                        <a:rPr sz="2200" b="0">
+                          <a:solidFill>
+                            <a:srgbClr val="333333"/>
+                          </a:solidFill>
+                          <a:latin typeface="Open Sans"/>
+                          <a:ea typeface="Open Sans"/>
+                          <a:cs typeface="Open Sans"/>
+                        </a:rPr>
+                        <a:t>Скорость</a:t>
+                      </a:r>
+                    </a:p>
+                  </a:txBody>
+                  <a:tcPr>
+                    <a:solidFill>
+                      <a:srgbClr val="FFFFFF"/>
+                    </a:solidFill>
+                  </a:tcPr>
+                </a:tc>
+                <a:tc>
+                  <a:txBody>
+                    <a:bodyPr/>
+                    <a:lstStyle/>
+                    <a:p>
+                      <a:pPr algn="l"/>
+                      <a:r>
+                        <a:rPr sz="2200" b="0">
+                          <a:solidFill>
+                            <a:srgbClr val="333333"/>
+                          </a:solidFill>
+                          <a:latin typeface="Open Sans"/>
+                          <a:ea typeface="Open Sans"/>
+                          <a:cs typeface="Open Sans"/>
+                        </a:rPr>
+                        <a:t>Очень быстрая</a:t>
+                      </a:r>
+                    </a:p>
+                  </a:txBody>
+                  <a:tcPr>
+                    <a:solidFill>
+                      <a:srgbClr val="FFFFFF"/>
+                    </a:solidFill>
+                  </a:tcPr>
+                </a:tc>
+                <a:tc>
+                  <a:txBody>
+                    <a:bodyPr/>
+                    <a:lstStyle/>
+                    <a:p>
+                      <a:pPr algn="l"/>
+                      <a:r>
+                        <a:rPr sz="2200" b="0">
+                          <a:solidFill>
+                            <a:srgbClr val="333333"/>
+                          </a:solidFill>
+                          <a:latin typeface="Open Sans"/>
+                          <a:ea typeface="Open Sans"/>
+                          <a:cs typeface="Open Sans"/>
+                        </a:rPr>
+                        <a:t>Умеренная / быстрая</a:t>
+                      </a:r>
+                    </a:p>
+                  </a:txBody>
+                  <a:tcPr>
+                    <a:solidFill>
+                      <a:srgbClr val="FFFFFF"/>
+                    </a:solidFill>
+                  </a:tcPr>
+                </a:tc>
+                <a:tc>
+                  <a:txBody>
+                    <a:bodyPr/>
+                    <a:lstStyle/>
+                    <a:p>
+                      <a:pPr algn="l"/>
+                      <a:r>
+                        <a:rPr sz="2200" b="0">
+                          <a:solidFill>
+                            <a:srgbClr val="333333"/>
+                          </a:solidFill>
+                          <a:latin typeface="Open Sans"/>
+                          <a:ea typeface="Open Sans"/>
+                          <a:cs typeface="Open Sans"/>
+                        </a:rPr>
+                        <a:t>Медленная</a:t>
+                      </a:r>
+                    </a:p>
+                  </a:txBody>
+                  <a:tcPr>
+                    <a:solidFill>
+                      <a:srgbClr val="FFFFFF"/>
+                    </a:solidFill>
+                  </a:tcPr>
+                </a:tc>
+              </a:tr>
+              <a:tr h="1500000">
+                <a:tc>
+                  <a:txBody>
+                    <a:bodyPr/>
+                    <a:lstStyle/>
+                    <a:p>
+                      <a:pPr algn="l"/>
+                      <a:r>
+                        <a:rPr sz="2200" b="0">
+                          <a:solidFill>
+                            <a:srgbClr val="333333"/>
+                          </a:solidFill>
+                          <a:latin typeface="Open Sans"/>
+                          <a:ea typeface="Open Sans"/>
+                          <a:cs typeface="Open Sans"/>
+                        </a:rPr>
+                        <a:t>Опасность</a:t>
+                      </a:r>
+                    </a:p>
+                  </a:txBody>
+                  <a:tcPr>
+                    <a:solidFill>
+                      <a:srgbClr val="F5F5F5"/>
+                    </a:solidFill>
+                  </a:tcPr>
+                </a:tc>
+                <a:tc>
+                  <a:txBody>
+                    <a:bodyPr/>
+                    <a:lstStyle/>
+                    <a:p>
+                      <a:pPr algn="l"/>
+                      <a:r>
+                        <a:rPr sz="2200" b="1">
+                          <a:solidFill>
+                            <a:srgbClr val="CC0000"/>
+                          </a:solidFill>
+                          <a:latin typeface="Open Sans"/>
+                          <a:ea typeface="Open Sans"/>
+                          <a:cs typeface="Open Sans"/>
+                        </a:rPr>
+                        <a:t>Критическая — минуты</a:t>
+                      </a:r>
+                    </a:p>
+                  </a:txBody>
+                  <a:tcPr>
+                    <a:solidFill>
+                      <a:srgbClr val="F5F5F5"/>
+                    </a:solidFill>
+                  </a:tcPr>
+                </a:tc>
+                <a:tc>
+                  <a:txBody>
+                    <a:bodyPr/>
+                    <a:lstStyle/>
+                    <a:p>
+                      <a:pPr algn="l"/>
+                      <a:r>
+                        <a:rPr sz="2200" b="0">
+                          <a:solidFill>
+                            <a:srgbClr val="333333"/>
+                          </a:solidFill>
+                          <a:latin typeface="Open Sans"/>
+                          <a:ea typeface="Open Sans"/>
+                          <a:cs typeface="Open Sans"/>
+                        </a:rPr>
+                        <a:t>Высокая при крупных венах</a:t>
+                      </a:r>
+                    </a:p>
+                  </a:txBody>
+                  <a:tcPr>
+                    <a:solidFill>
+                      <a:srgbClr val="F5F5F5"/>
+                    </a:solidFill>
+                  </a:tcPr>
+                </a:tc>
+                <a:tc>
+                  <a:txBody>
+                    <a:bodyPr/>
+                    <a:lstStyle/>
+                    <a:p>
+                      <a:pPr algn="l"/>
+                      <a:r>
+                        <a:rPr sz="2200" b="0">
+                          <a:solidFill>
+                            <a:srgbClr val="333333"/>
+                          </a:solidFill>
+                          <a:latin typeface="Open Sans"/>
+                          <a:ea typeface="Open Sans"/>
+                          <a:cs typeface="Open Sans"/>
+                        </a:rPr>
+                        <a:t>Обычно низкая</a:t>
+                      </a:r>
+                    </a:p>
+                  </a:txBody>
+                  <a:tcPr>
+                    <a:solidFill>
+                      <a:srgbClr val="F5F5F5"/>
+                    </a:solidFill>
+                  </a:tcPr>
+                </a:tc>
+              </a:tr>
+              <a:tr h="1500000">
+                <a:tc>
+                  <a:txBody>
+                    <a:bodyPr/>
+                    <a:lstStyle/>
+                    <a:p>
+                      <a:pPr algn="l"/>
+                      <a:r>
+                        <a:rPr sz="2200" b="0">
+                          <a:solidFill>
+                            <a:srgbClr val="333333"/>
+                          </a:solidFill>
+                          <a:latin typeface="Open Sans"/>
+                          <a:ea typeface="Open Sans"/>
+                          <a:cs typeface="Open Sans"/>
+                        </a:rPr>
+                        <a:t>Приоритет</a:t>
+                      </a:r>
+                    </a:p>
+                  </a:txBody>
+                  <a:tcPr>
+                    <a:solidFill>
+                      <a:srgbClr val="FFFFFF"/>
+                    </a:solidFill>
+                  </a:tcPr>
+                </a:tc>
+                <a:tc>
+                  <a:txBody>
+                    <a:bodyPr/>
+                    <a:lstStyle/>
+                    <a:p>
+                      <a:pPr algn="l"/>
+                      <a:r>
+                        <a:rPr sz="2200" b="0">
+                          <a:solidFill>
+                            <a:srgbClr val="333333"/>
+                          </a:solidFill>
+                          <a:latin typeface="Open Sans"/>
+                          <a:ea typeface="Open Sans"/>
+                          <a:cs typeface="Open Sans"/>
+                        </a:rPr>
+                        <a:t>Немедленно</a:t>
+                      </a:r>
+                    </a:p>
+                  </a:txBody>
+                  <a:tcPr>
+                    <a:solidFill>
+                      <a:srgbClr val="FFFFFF"/>
+                    </a:solidFill>
+                  </a:tcPr>
+                </a:tc>
+                <a:tc>
+                  <a:txBody>
+                    <a:bodyPr/>
+                    <a:lstStyle/>
+                    <a:p>
+                      <a:pPr algn="l"/>
+                      <a:r>
+                        <a:rPr sz="2200" b="0">
+                          <a:solidFill>
+                            <a:srgbClr val="333333"/>
+                          </a:solidFill>
+                          <a:latin typeface="Open Sans"/>
+                          <a:ea typeface="Open Sans"/>
+                          <a:cs typeface="Open Sans"/>
+                        </a:rPr>
+                        <a:t>Быстро</a:t>
+                      </a:r>
+                    </a:p>
+                  </a:txBody>
+                  <a:tcPr>
+                    <a:solidFill>
+                      <a:srgbClr val="FFFFFF"/>
+                    </a:solidFill>
+                  </a:tcPr>
+                </a:tc>
+                <a:tc>
+                  <a:txBody>
+                    <a:bodyPr/>
+                    <a:lstStyle/>
+                    <a:p>
+                      <a:pPr algn="l"/>
+                      <a:r>
+                        <a:rPr sz="2200" b="0">
+                          <a:solidFill>
+                            <a:srgbClr val="333333"/>
+                          </a:solidFill>
+                          <a:latin typeface="Open Sans"/>
+                          <a:ea typeface="Open Sans"/>
+                          <a:cs typeface="Open Sans"/>
+                        </a:rPr>
+                        <a:t>По ситуации</a:t>
+                      </a:r>
+                    </a:p>
+                  </a:txBody>
+                  <a:tcPr>
+                    <a:solidFill>
+                      <a:srgbClr val="FFFFFF"/>
+                    </a:solidFill>
+                  </a:tcPr>
+                </a:tc>
+              </a:tr>
+            </a:tbl>
+          </a:graphicData>
+        </a:graphic>
+      </p:graphicFrame>
     </p:spTree>
   </p:cSld>
   <p:clrMapOvr>
@@ -4636,7 +5854,7 @@
             <a:avLst/>
           </a:prstGeom>
           <a:solidFill>
-            <a:srgbClr val="F7F7F7"/>
+            <a:srgbClr val="FFFFFF"/>
           </a:solidFill>
           <a:ln>
             <a:noFill/>
@@ -4672,14 +5890,14 @@
         </p:nvSpPr>
         <p:spPr>
           <a:xfrm>
-            <a:off x="23000000" y="0"/>
-            <a:ext cx="1384000" cy="13716000"/>
+            <a:off x="0" y="0"/>
+            <a:ext cx="24384000" cy="120000"/>
           </a:xfrm>
           <a:prstGeom prst="rect">
             <a:avLst/>
           </a:prstGeom>
           <a:solidFill>
-            <a:srgbClr val="D9D9D9"/>
+            <a:srgbClr val="DDDDDD"/>
           </a:solidFill>
           <a:ln>
             <a:noFill/>
@@ -4709,20 +5927,57 @@
       </p:sp>
       <p:sp>
         <p:nvSpPr>
-          <p:cNvPr id="4" name="Rectangle 3"/>
+          <p:cNvPr id="4" name="TextBox 3"/>
+          <p:cNvSpPr txBox="1"/>
+          <p:nvPr/>
+        </p:nvSpPr>
+        <p:spPr>
+          <a:xfrm>
+            <a:off x="800000" y="350000"/>
+            <a:ext cx="22800000" cy="1000000"/>
+          </a:xfrm>
+          <a:prstGeom prst="rect">
+            <a:avLst/>
+          </a:prstGeom>
+          <a:noFill/>
+        </p:spPr>
+        <p:txBody>
+          <a:bodyPr wrap="square" anchor="t">
+            <a:spAutoFit/>
+          </a:bodyPr>
+          <a:lstStyle/>
+          <a:p>
+            <a:pPr algn="l"/>
+            <a:r>
+              <a:rPr sz="4600" b="1">
+                <a:solidFill>
+                  <a:srgbClr val="333333"/>
+                </a:solidFill>
+                <a:latin typeface="Open Sans"/>
+                <a:ea typeface="Open Sans"/>
+                <a:cs typeface="Open Sans"/>
+              </a:rPr>
+              <a:t>Признаки острой кровопотери</a:t>
+            </a:r>
+          </a:p>
+        </p:txBody>
+      </p:sp>
+      <p:sp>
+        <p:nvSpPr>
+          <p:cNvPr id="5" name="Rectangle 4"/>
           <p:cNvSpPr/>
           <p:nvPr/>
         </p:nvSpPr>
         <p:spPr>
           <a:xfrm>
-            <a:off x="0" y="5600000"/>
-            <a:ext cx="700000" cy="700000"/>
+            <a:off x="800000" y="1450000"/>
+            <a:ext cx="22800000" cy="20000"/>
           </a:xfrm>
           <a:prstGeom prst="rect">
             <a:avLst/>
           </a:prstGeom>
           <a:solidFill>
-            <a:srgbClr val="4D4D4D"/>
+            <a:srgbClr val="E1E1E1"/>
           </a:solidFill>
           <a:ln>
             <a:noFill/>
@@ -4752,47 +6007,14 @@
       </p:sp>
       <p:sp>
         <p:nvSpPr>
-          <p:cNvPr id="5" name="TextBox 4"/>
-          <p:cNvSpPr txBox="1"/>
-          <p:nvPr/>
-        </p:nvSpPr>
-        <p:spPr>
-          <a:xfrm>
-            <a:off x="0" y="5680000"/>
-            <a:ext cx="700000" cy="550000"/>
-          </a:xfrm>
-          <a:prstGeom prst="rect">
-            <a:avLst/>
-          </a:prstGeom>
-          <a:noFill/>
-        </p:spPr>
-        <p:txBody>
-          <a:bodyPr wrap="square" anchor="ctr"/>
-          <a:lstStyle/>
-          <a:p>
-            <a:pPr algn="ctr"/>
-            <a:r>
-              <a:rPr sz="1800" b="1">
-                <a:solidFill>
-                  <a:srgbClr val="FFFFFF"/>
-                </a:solidFill>
-                <a:latin typeface="Arial"/>
-              </a:rPr>
-              <a:t>5</a:t>
-            </a:r>
-          </a:p>
-        </p:txBody>
-      </p:sp>
-      <p:sp>
-        <p:nvSpPr>
           <p:cNvPr id="6" name="TextBox 5"/>
           <p:cNvSpPr txBox="1"/>
           <p:nvPr/>
         </p:nvSpPr>
         <p:spPr>
           <a:xfrm>
-            <a:off x="900000" y="500000"/>
-            <a:ext cx="21000000" cy="900000"/>
+            <a:off x="800000" y="1950000"/>
+            <a:ext cx="22800000" cy="8500000"/>
           </a:xfrm>
           <a:prstGeom prst="rect">
             <a:avLst/>
@@ -4800,618 +6022,120 @@
           <a:noFill/>
         </p:spPr>
         <p:txBody>
-          <a:bodyPr wrap="square" anchor="t"/>
-          <a:lstStyle/>
-          <a:p>
-            <a:pPr algn="l"/>
-            <a:r>
-              <a:rPr sz="2800" b="1">
+          <a:bodyPr wrap="square">
+            <a:spAutoFit/>
+          </a:bodyPr>
+          <a:lstStyle/>
+          <a:p>
+            <a:pPr algn="l">
+              <a:spcAft>
+                <a:spcPts val="1000"/>
+              </a:spcAft>
+            </a:pPr>
+            <a:r>
+              <a:rPr sz="3200" b="0">
                 <a:solidFill>
-                  <a:srgbClr val="2C2C2C"/>
+                  <a:srgbClr val="333333"/>
                 </a:solidFill>
-                <a:latin typeface="Arial"/>
+                <a:latin typeface="Open Sans"/>
+                <a:ea typeface="Open Sans"/>
+                <a:cs typeface="Open Sans"/>
               </a:rPr>
-              <a:t>СРАВНИТЕЛЬНАЯ ТАБЛИЦА ВИДОВ КРОВОТЕЧЕНИЯ</a:t>
-            </a:r>
-          </a:p>
-        </p:txBody>
-      </p:sp>
-      <p:sp>
-        <p:nvSpPr>
-          <p:cNvPr id="7" name="Rectangle 6"/>
-          <p:cNvSpPr/>
-          <p:nvPr/>
-        </p:nvSpPr>
-        <p:spPr>
-          <a:xfrm>
-            <a:off x="900000" y="1350000"/>
-            <a:ext cx="20000000" cy="25000"/>
-          </a:xfrm>
-          <a:prstGeom prst="rect">
-            <a:avLst/>
-          </a:prstGeom>
-          <a:solidFill>
-            <a:srgbClr val="B8B8B8"/>
-          </a:solidFill>
-          <a:ln>
-            <a:noFill/>
-          </a:ln>
-        </p:spPr>
-        <p:style>
-          <a:lnRef idx="1">
-            <a:schemeClr val="accent1"/>
-          </a:lnRef>
-          <a:fillRef idx="3">
-            <a:schemeClr val="accent1"/>
-          </a:fillRef>
-          <a:effectRef idx="2">
-            <a:schemeClr val="accent1"/>
-          </a:effectRef>
-          <a:fontRef idx="minor">
-            <a:schemeClr val="lt1"/>
-          </a:fontRef>
-        </p:style>
-        <p:txBody>
-          <a:bodyPr rtlCol="0" anchor="ctr"/>
-          <a:lstStyle/>
-          <a:p>
-            <a:pPr algn="ctr"/>
-          </a:p>
-        </p:txBody>
-      </p:sp>
-      <p:sp>
-        <p:nvSpPr>
-          <p:cNvPr id="8" name="TextBox 7"/>
-          <p:cNvSpPr txBox="1"/>
-          <p:nvPr/>
-        </p:nvSpPr>
-        <p:spPr>
-          <a:xfrm>
-            <a:off x="900000" y="1450000"/>
-            <a:ext cx="20000000" cy="350000"/>
-          </a:xfrm>
-          <a:prstGeom prst="rect">
-            <a:avLst/>
-          </a:prstGeom>
-          <a:noFill/>
-        </p:spPr>
-        <p:txBody>
-          <a:bodyPr wrap="square" anchor="t"/>
-          <a:lstStyle/>
-          <a:p>
-            <a:pPr algn="l"/>
-            <a:r>
-              <a:rPr sz="1200" b="0">
+              <a:t>•  Резкая общая слабость, жажда, головокружение.</a:t>
+            </a:r>
+          </a:p>
+          <a:p>
+            <a:pPr algn="l">
+              <a:spcAft>
+                <a:spcPts val="1000"/>
+              </a:spcAft>
+            </a:pPr>
+            <a:r>
+              <a:rPr sz="3200" b="0">
                 <a:solidFill>
-                  <a:srgbClr val="6F6F6F"/>
+                  <a:srgbClr val="333333"/>
                 </a:solidFill>
-                <a:latin typeface="Arial"/>
+                <a:latin typeface="Open Sans"/>
+                <a:ea typeface="Open Sans"/>
+                <a:cs typeface="Open Sans"/>
               </a:rPr>
-              <a:t>Оказание первой помощи при наружных кровотечениях</a:t>
-            </a:r>
-          </a:p>
-        </p:txBody>
-      </p:sp>
-      <p:graphicFrame>
-        <p:nvGraphicFramePr>
-          <p:cNvPr id="9" name="Table 8"/>
-          <p:cNvGraphicFramePr>
-            <a:graphicFrameLocks noGrp="1"/>
-          </p:cNvGraphicFramePr>
-          <p:nvPr/>
-        </p:nvGraphicFramePr>
-        <p:xfrm>
-          <a:off x="900000" y="2000000"/>
-          <a:ext cx="20500000" cy="5400000"/>
-        </p:xfrm>
-        <a:graphic>
-          <a:graphicData uri="http://schemas.openxmlformats.org/drawingml/2006/table">
-            <a:tbl>
-              <a:tblPr firstRow="1" bandRow="1">
-                <a:tableStyleId>{5C22544A-7EE6-4342-B048-85BDC9FD1C3A}</a:tableStyleId>
-              </a:tblPr>
-              <a:tblGrid>
-                <a:gridCol w="5125000"/>
-                <a:gridCol w="5125000"/>
-                <a:gridCol w="5125000"/>
-                <a:gridCol w="5125000"/>
-              </a:tblGrid>
-              <a:tr h="900000">
-                <a:tc>
-                  <a:txBody>
-                    <a:bodyPr/>
-                    <a:lstStyle/>
-                    <a:p>
-                      <a:r>
-                        <a:rPr b="1" sz="1300">
-                          <a:solidFill>
-                            <a:srgbClr val="FFFFFF"/>
-                          </a:solidFill>
-                          <a:latin typeface="Arial"/>
-                        </a:rPr>
-                        <a:t>Признак</a:t>
-                      </a:r>
-                    </a:p>
-                  </a:txBody>
-                  <a:tcPr>
-                    <a:solidFill>
-                      <a:srgbClr val="0082B9"/>
-                    </a:solidFill>
-                  </a:tcPr>
-                </a:tc>
-                <a:tc>
-                  <a:txBody>
-                    <a:bodyPr/>
-                    <a:lstStyle/>
-                    <a:p>
-                      <a:r>
-                        <a:rPr b="1" sz="1300">
-                          <a:solidFill>
-                            <a:srgbClr val="FFFFFF"/>
-                          </a:solidFill>
-                          <a:latin typeface="Arial"/>
-                        </a:rPr>
-                        <a:t>Артериальное</a:t>
-                      </a:r>
-                    </a:p>
-                  </a:txBody>
-                  <a:tcPr>
-                    <a:solidFill>
-                      <a:srgbClr val="0082B9"/>
-                    </a:solidFill>
-                  </a:tcPr>
-                </a:tc>
-                <a:tc>
-                  <a:txBody>
-                    <a:bodyPr/>
-                    <a:lstStyle/>
-                    <a:p>
-                      <a:r>
-                        <a:rPr b="1" sz="1300">
-                          <a:solidFill>
-                            <a:srgbClr val="FFFFFF"/>
-                          </a:solidFill>
-                          <a:latin typeface="Arial"/>
-                        </a:rPr>
-                        <a:t>Венозное</a:t>
-                      </a:r>
-                    </a:p>
-                  </a:txBody>
-                  <a:tcPr>
-                    <a:solidFill>
-                      <a:srgbClr val="0082B9"/>
-                    </a:solidFill>
-                  </a:tcPr>
-                </a:tc>
-                <a:tc>
-                  <a:txBody>
-                    <a:bodyPr/>
-                    <a:lstStyle/>
-                    <a:p>
-                      <a:r>
-                        <a:rPr b="1" sz="1300">
-                          <a:solidFill>
-                            <a:srgbClr val="FFFFFF"/>
-                          </a:solidFill>
-                          <a:latin typeface="Arial"/>
-                        </a:rPr>
-                        <a:t>Капиллярное</a:t>
-                      </a:r>
-                    </a:p>
-                  </a:txBody>
-                  <a:tcPr>
-                    <a:solidFill>
-                      <a:srgbClr val="0082B9"/>
-                    </a:solidFill>
-                  </a:tcPr>
-                </a:tc>
-              </a:tr>
-              <a:tr h="900000">
-                <a:tc>
-                  <a:txBody>
-                    <a:bodyPr/>
-                    <a:lstStyle/>
-                    <a:p>
-                      <a:r>
-                        <a:rPr sz="1200">
-                          <a:solidFill>
-                            <a:srgbClr val="2C2C2C"/>
-                          </a:solidFill>
-                          <a:latin typeface="Arial"/>
-                        </a:rPr>
-                        <a:t>Цвет крови</a:t>
-                      </a:r>
-                    </a:p>
-                  </a:txBody>
-                  <a:tcPr/>
-                </a:tc>
-                <a:tc>
-                  <a:txBody>
-                    <a:bodyPr/>
-                    <a:lstStyle/>
-                    <a:p>
-                      <a:r>
-                        <a:rPr sz="1200" b="1">
-                          <a:solidFill>
-                            <a:srgbClr val="C02828"/>
-                          </a:solidFill>
-                          <a:latin typeface="Arial"/>
-                        </a:rPr>
-                        <a:t>Алый, яркий</a:t>
-                      </a:r>
-                    </a:p>
-                  </a:txBody>
-                  <a:tcPr/>
-                </a:tc>
-                <a:tc>
-                  <a:txBody>
-                    <a:bodyPr/>
-                    <a:lstStyle/>
-                    <a:p>
-                      <a:r>
-                        <a:rPr sz="1200">
-                          <a:solidFill>
-                            <a:srgbClr val="2C2C2C"/>
-                          </a:solidFill>
-                          <a:latin typeface="Arial"/>
-                        </a:rPr>
-                        <a:t>Тёмный, вишнёвый</a:t>
-                      </a:r>
-                    </a:p>
-                  </a:txBody>
-                  <a:tcPr/>
-                </a:tc>
-                <a:tc>
-                  <a:txBody>
-                    <a:bodyPr/>
-                    <a:lstStyle/>
-                    <a:p>
-                      <a:r>
-                        <a:rPr sz="1200">
-                          <a:solidFill>
-                            <a:srgbClr val="2C2C2C"/>
-                          </a:solidFill>
-                          <a:latin typeface="Arial"/>
-                        </a:rPr>
-                        <a:t>Красный</a:t>
-                      </a:r>
-                    </a:p>
-                  </a:txBody>
-                  <a:tcPr/>
-                </a:tc>
-              </a:tr>
-              <a:tr h="900000">
-                <a:tc>
-                  <a:txBody>
-                    <a:bodyPr/>
-                    <a:lstStyle/>
-                    <a:p>
-                      <a:r>
-                        <a:rPr sz="1200">
-                          <a:solidFill>
-                            <a:srgbClr val="2C2C2C"/>
-                          </a:solidFill>
-                          <a:latin typeface="Arial"/>
-                        </a:rPr>
-                        <a:t>Характер</a:t>
-                      </a:r>
-                    </a:p>
-                  </a:txBody>
-                  <a:tcPr>
-                    <a:solidFill>
-                      <a:srgbClr val="F0F0F0"/>
-                    </a:solidFill>
-                  </a:tcPr>
-                </a:tc>
-                <a:tc>
-                  <a:txBody>
-                    <a:bodyPr/>
-                    <a:lstStyle/>
-                    <a:p>
-                      <a:r>
-                        <a:rPr sz="1200" b="1">
-                          <a:solidFill>
-                            <a:srgbClr val="C02828"/>
-                          </a:solidFill>
-                          <a:latin typeface="Arial"/>
-                        </a:rPr>
-                        <a:t>Пульсирующей струёй</a:t>
-                      </a:r>
-                    </a:p>
-                  </a:txBody>
-                  <a:tcPr>
-                    <a:solidFill>
-                      <a:srgbClr val="F0F0F0"/>
-                    </a:solidFill>
-                  </a:tcPr>
-                </a:tc>
-                <a:tc>
-                  <a:txBody>
-                    <a:bodyPr/>
-                    <a:lstStyle/>
-                    <a:p>
-                      <a:r>
-                        <a:rPr sz="1200">
-                          <a:solidFill>
-                            <a:srgbClr val="2C2C2C"/>
-                          </a:solidFill>
-                          <a:latin typeface="Arial"/>
-                        </a:rPr>
-                        <a:t>Равномерной струёй</a:t>
-                      </a:r>
-                    </a:p>
-                  </a:txBody>
-                  <a:tcPr>
-                    <a:solidFill>
-                      <a:srgbClr val="F0F0F0"/>
-                    </a:solidFill>
-                  </a:tcPr>
-                </a:tc>
-                <a:tc>
-                  <a:txBody>
-                    <a:bodyPr/>
-                    <a:lstStyle/>
-                    <a:p>
-                      <a:r>
-                        <a:rPr sz="1200">
-                          <a:solidFill>
-                            <a:srgbClr val="2C2C2C"/>
-                          </a:solidFill>
-                          <a:latin typeface="Arial"/>
-                        </a:rPr>
-                        <a:t>Сочится по поверхности</a:t>
-                      </a:r>
-                    </a:p>
-                  </a:txBody>
-                  <a:tcPr>
-                    <a:solidFill>
-                      <a:srgbClr val="F0F0F0"/>
-                    </a:solidFill>
-                  </a:tcPr>
-                </a:tc>
-              </a:tr>
-              <a:tr h="900000">
-                <a:tc>
-                  <a:txBody>
-                    <a:bodyPr/>
-                    <a:lstStyle/>
-                    <a:p>
-                      <a:r>
-                        <a:rPr sz="1200">
-                          <a:solidFill>
-                            <a:srgbClr val="2C2C2C"/>
-                          </a:solidFill>
-                          <a:latin typeface="Arial"/>
-                        </a:rPr>
-                        <a:t>Скорость</a:t>
-                      </a:r>
-                    </a:p>
-                  </a:txBody>
-                  <a:tcPr/>
-                </a:tc>
-                <a:tc>
-                  <a:txBody>
-                    <a:bodyPr/>
-                    <a:lstStyle/>
-                    <a:p>
-                      <a:r>
-                        <a:rPr sz="1200">
-                          <a:solidFill>
-                            <a:srgbClr val="2C2C2C"/>
-                          </a:solidFill>
-                          <a:latin typeface="Arial"/>
-                        </a:rPr>
-                        <a:t>Очень быстрая</a:t>
-                      </a:r>
-                    </a:p>
-                  </a:txBody>
-                  <a:tcPr/>
-                </a:tc>
-                <a:tc>
-                  <a:txBody>
-                    <a:bodyPr/>
-                    <a:lstStyle/>
-                    <a:p>
-                      <a:r>
-                        <a:rPr sz="1200">
-                          <a:solidFill>
-                            <a:srgbClr val="2C2C2C"/>
-                          </a:solidFill>
-                          <a:latin typeface="Arial"/>
-                        </a:rPr>
-                        <a:t>Умеренная / быстрая</a:t>
-                      </a:r>
-                    </a:p>
-                  </a:txBody>
-                  <a:tcPr/>
-                </a:tc>
-                <a:tc>
-                  <a:txBody>
-                    <a:bodyPr/>
-                    <a:lstStyle/>
-                    <a:p>
-                      <a:r>
-                        <a:rPr sz="1200">
-                          <a:solidFill>
-                            <a:srgbClr val="2C2C2C"/>
-                          </a:solidFill>
-                          <a:latin typeface="Arial"/>
-                        </a:rPr>
-                        <a:t>Медленная</a:t>
-                      </a:r>
-                    </a:p>
-                  </a:txBody>
-                  <a:tcPr/>
-                </a:tc>
-              </a:tr>
-              <a:tr h="900000">
-                <a:tc>
-                  <a:txBody>
-                    <a:bodyPr/>
-                    <a:lstStyle/>
-                    <a:p>
-                      <a:r>
-                        <a:rPr sz="1200">
-                          <a:solidFill>
-                            <a:srgbClr val="2C2C2C"/>
-                          </a:solidFill>
-                          <a:latin typeface="Arial"/>
-                        </a:rPr>
-                        <a:t>Опасность</a:t>
-                      </a:r>
-                    </a:p>
-                  </a:txBody>
-                  <a:tcPr>
-                    <a:solidFill>
-                      <a:srgbClr val="F0F0F0"/>
-                    </a:solidFill>
-                  </a:tcPr>
-                </a:tc>
-                <a:tc>
-                  <a:txBody>
-                    <a:bodyPr/>
-                    <a:lstStyle/>
-                    <a:p>
-                      <a:r>
-                        <a:rPr sz="1200">
-                          <a:solidFill>
-                            <a:srgbClr val="2C2C2C"/>
-                          </a:solidFill>
-                          <a:latin typeface="Arial"/>
-                        </a:rPr>
-                        <a:t>Критическая — минуты</a:t>
-                      </a:r>
-                    </a:p>
-                  </a:txBody>
-                  <a:tcPr>
-                    <a:solidFill>
-                      <a:srgbClr val="F0F0F0"/>
-                    </a:solidFill>
-                  </a:tcPr>
-                </a:tc>
-                <a:tc>
-                  <a:txBody>
-                    <a:bodyPr/>
-                    <a:lstStyle/>
-                    <a:p>
-                      <a:r>
-                        <a:rPr sz="1200">
-                          <a:solidFill>
-                            <a:srgbClr val="2C2C2C"/>
-                          </a:solidFill>
-                          <a:latin typeface="Arial"/>
-                        </a:rPr>
-                        <a:t>Высокая при крупных венах</a:t>
-                      </a:r>
-                    </a:p>
-                  </a:txBody>
-                  <a:tcPr>
-                    <a:solidFill>
-                      <a:srgbClr val="F0F0F0"/>
-                    </a:solidFill>
-                  </a:tcPr>
-                </a:tc>
-                <a:tc>
-                  <a:txBody>
-                    <a:bodyPr/>
-                    <a:lstStyle/>
-                    <a:p>
-                      <a:r>
-                        <a:rPr sz="1200">
-                          <a:solidFill>
-                            <a:srgbClr val="2C2C2C"/>
-                          </a:solidFill>
-                          <a:latin typeface="Arial"/>
-                        </a:rPr>
-                        <a:t>Обычно низкая</a:t>
-                      </a:r>
-                    </a:p>
-                  </a:txBody>
-                  <a:tcPr>
-                    <a:solidFill>
-                      <a:srgbClr val="F0F0F0"/>
-                    </a:solidFill>
-                  </a:tcPr>
-                </a:tc>
-              </a:tr>
-              <a:tr h="900000">
-                <a:tc>
-                  <a:txBody>
-                    <a:bodyPr/>
-                    <a:lstStyle/>
-                    <a:p>
-                      <a:r>
-                        <a:rPr sz="1200">
-                          <a:solidFill>
-                            <a:srgbClr val="2C2C2C"/>
-                          </a:solidFill>
-                          <a:latin typeface="Arial"/>
-                        </a:rPr>
-                        <a:t>Приоритет помощи</a:t>
-                      </a:r>
-                    </a:p>
-                  </a:txBody>
-                  <a:tcPr/>
-                </a:tc>
-                <a:tc>
-                  <a:txBody>
-                    <a:bodyPr/>
-                    <a:lstStyle/>
-                    <a:p>
-                      <a:r>
-                        <a:rPr sz="1200">
-                          <a:solidFill>
-                            <a:srgbClr val="2C2C2C"/>
-                          </a:solidFill>
-                          <a:latin typeface="Arial"/>
-                        </a:rPr>
-                        <a:t>Немедленно</a:t>
-                      </a:r>
-                    </a:p>
-                  </a:txBody>
-                  <a:tcPr/>
-                </a:tc>
-                <a:tc>
-                  <a:txBody>
-                    <a:bodyPr/>
-                    <a:lstStyle/>
-                    <a:p>
-                      <a:r>
-                        <a:rPr sz="1200">
-                          <a:solidFill>
-                            <a:srgbClr val="2C2C2C"/>
-                          </a:solidFill>
-                          <a:latin typeface="Arial"/>
-                        </a:rPr>
-                        <a:t>Быстро</a:t>
-                      </a:r>
-                    </a:p>
-                  </a:txBody>
-                  <a:tcPr/>
-                </a:tc>
-                <a:tc>
-                  <a:txBody>
-                    <a:bodyPr/>
-                    <a:lstStyle/>
-                    <a:p>
-                      <a:r>
-                        <a:rPr sz="1200">
-                          <a:solidFill>
-                            <a:srgbClr val="2C2C2C"/>
-                          </a:solidFill>
-                          <a:latin typeface="Arial"/>
-                        </a:rPr>
-                        <a:t>По ситуации</a:t>
-                      </a:r>
-                    </a:p>
-                  </a:txBody>
-                  <a:tcPr/>
-                </a:tc>
-              </a:tr>
-            </a:tbl>
-          </a:graphicData>
-        </a:graphic>
-      </p:graphicFrame>
+              <a:t>•  Мелькание «мушек» перед глазами; обморок при попытке встать.</a:t>
+            </a:r>
+          </a:p>
+          <a:p>
+            <a:pPr algn="l">
+              <a:spcAft>
+                <a:spcPts val="1000"/>
+              </a:spcAft>
+            </a:pPr>
+            <a:r>
+              <a:rPr sz="3200" b="0">
+                <a:solidFill>
+                  <a:srgbClr val="333333"/>
+                </a:solidFill>
+                <a:latin typeface="Open Sans"/>
+                <a:ea typeface="Open Sans"/>
+                <a:cs typeface="Open Sans"/>
+              </a:rPr>
+              <a:t>•  Бледная, влажная, холодная кожа.</a:t>
+            </a:r>
+          </a:p>
+          <a:p>
+            <a:pPr algn="l">
+              <a:spcAft>
+                <a:spcPts val="1000"/>
+              </a:spcAft>
+            </a:pPr>
+            <a:r>
+              <a:rPr sz="3200" b="0">
+                <a:solidFill>
+                  <a:srgbClr val="333333"/>
+                </a:solidFill>
+                <a:latin typeface="Open Sans"/>
+                <a:ea typeface="Open Sans"/>
+                <a:cs typeface="Open Sans"/>
+              </a:rPr>
+              <a:t>•  Учащённое сердцебиение и частое дыхание.</a:t>
+            </a:r>
+          </a:p>
+          <a:p>
+            <a:pPr algn="l">
+              <a:spcAft>
+                <a:spcPts val="1000"/>
+              </a:spcAft>
+            </a:pPr>
+            <a:r>
+              <a:rPr sz="3200" b="0">
+                <a:solidFill>
+                  <a:srgbClr val="333333"/>
+                </a:solidFill>
+                <a:latin typeface="Open Sans"/>
+                <a:ea typeface="Open Sans"/>
+                <a:cs typeface="Open Sans"/>
+              </a:rPr>
+              <a:t>•  Тревога, возбуждение → затем апатия.</a:t>
+            </a:r>
+          </a:p>
+          <a:p>
+            <a:pPr algn="l">
+              <a:spcAft>
+                <a:spcPts val="1000"/>
+              </a:spcAft>
+            </a:pPr>
+            <a:r>
+              <a:rPr sz="3200" b="0">
+                <a:solidFill>
+                  <a:srgbClr val="333333"/>
+                </a:solidFill>
+                <a:latin typeface="Open Sans"/>
+                <a:ea typeface="Open Sans"/>
+                <a:cs typeface="Open Sans"/>
+              </a:rPr>
+              <a:t>•  Слабый / нитевидный пульс при тяжёлой кровопотере.</a:t>
+            </a:r>
+          </a:p>
+        </p:txBody>
+      </p:sp>
     </p:spTree>
   </p:cSld>
   <p:clrMapOvr>
@@ -5445,7 +6169,7 @@
             <a:avLst/>
           </a:prstGeom>
           <a:solidFill>
-            <a:srgbClr val="F7F7F7"/>
+            <a:srgbClr val="FFFFFF"/>
           </a:solidFill>
           <a:ln>
             <a:noFill/>
@@ -5481,14 +6205,14 @@
         </p:nvSpPr>
         <p:spPr>
           <a:xfrm>
-            <a:off x="23000000" y="0"/>
-            <a:ext cx="1384000" cy="13716000"/>
+            <a:off x="0" y="0"/>
+            <a:ext cx="24384000" cy="120000"/>
           </a:xfrm>
           <a:prstGeom prst="rect">
             <a:avLst/>
           </a:prstGeom>
           <a:solidFill>
-            <a:srgbClr val="D9D9D9"/>
+            <a:srgbClr val="DDDDDD"/>
           </a:solidFill>
           <a:ln>
             <a:noFill/>
@@ -5518,20 +6242,57 @@
       </p:sp>
       <p:sp>
         <p:nvSpPr>
-          <p:cNvPr id="4" name="Rectangle 3"/>
+          <p:cNvPr id="4" name="TextBox 3"/>
+          <p:cNvSpPr txBox="1"/>
+          <p:nvPr/>
+        </p:nvSpPr>
+        <p:spPr>
+          <a:xfrm>
+            <a:off x="800000" y="350000"/>
+            <a:ext cx="22800000" cy="1000000"/>
+          </a:xfrm>
+          <a:prstGeom prst="rect">
+            <a:avLst/>
+          </a:prstGeom>
+          <a:noFill/>
+        </p:spPr>
+        <p:txBody>
+          <a:bodyPr wrap="square" anchor="t">
+            <a:spAutoFit/>
+          </a:bodyPr>
+          <a:lstStyle/>
+          <a:p>
+            <a:pPr algn="l"/>
+            <a:r>
+              <a:rPr sz="4600" b="1">
+                <a:solidFill>
+                  <a:srgbClr val="333333"/>
+                </a:solidFill>
+                <a:latin typeface="Open Sans"/>
+                <a:ea typeface="Open Sans"/>
+                <a:cs typeface="Open Sans"/>
+              </a:rPr>
+              <a:t>Оценка объёма кровопотери</a:t>
+            </a:r>
+          </a:p>
+        </p:txBody>
+      </p:sp>
+      <p:sp>
+        <p:nvSpPr>
+          <p:cNvPr id="5" name="Rectangle 4"/>
           <p:cNvSpPr/>
           <p:nvPr/>
         </p:nvSpPr>
         <p:spPr>
           <a:xfrm>
-            <a:off x="0" y="5600000"/>
-            <a:ext cx="700000" cy="700000"/>
+            <a:off x="800000" y="1450000"/>
+            <a:ext cx="22800000" cy="20000"/>
           </a:xfrm>
           <a:prstGeom prst="rect">
             <a:avLst/>
           </a:prstGeom>
           <a:solidFill>
-            <a:srgbClr val="4D4D4D"/>
+            <a:srgbClr val="E1E1E1"/>
           </a:solidFill>
           <a:ln>
             <a:noFill/>
@@ -5559,16 +6320,428 @@
           </a:p>
         </p:txBody>
       </p:sp>
-      <p:sp>
-        <p:nvSpPr>
-          <p:cNvPr id="5" name="TextBox 4"/>
+      <p:graphicFrame>
+        <p:nvGraphicFramePr>
+          <p:cNvPr id="6" name="Table 5"/>
+          <p:cNvGraphicFramePr>
+            <a:graphicFrameLocks noGrp="1"/>
+          </p:cNvGraphicFramePr>
+          <p:nvPr/>
+        </p:nvGraphicFramePr>
+        <p:xfrm>
+          <a:off x="800000" y="2050000"/>
+          <a:ext cx="22800000" cy="7500000"/>
+        </p:xfrm>
+        <a:graphic>
+          <a:graphicData uri="http://schemas.openxmlformats.org/drawingml/2006/table">
+            <a:tbl>
+              <a:tblPr firstRow="1" bandRow="1">
+                <a:tableStyleId>{5C22544A-7EE6-4342-B048-85BDC9FD1C3A}</a:tableStyleId>
+              </a:tblPr>
+              <a:tblGrid>
+                <a:gridCol w="7600000"/>
+                <a:gridCol w="7600000"/>
+                <a:gridCol w="7600000"/>
+              </a:tblGrid>
+              <a:tr h="1500000">
+                <a:tc>
+                  <a:txBody>
+                    <a:bodyPr/>
+                    <a:lstStyle/>
+                    <a:p>
+                      <a:pPr algn="l"/>
+                      <a:r>
+                        <a:rPr sz="2200" b="1">
+                          <a:solidFill>
+                            <a:srgbClr val="FFFFFF"/>
+                          </a:solidFill>
+                          <a:latin typeface="Open Sans"/>
+                          <a:ea typeface="Open Sans"/>
+                          <a:cs typeface="Open Sans"/>
+                        </a:rPr>
+                        <a:t>Объём</a:t>
+                      </a:r>
+                    </a:p>
+                  </a:txBody>
+                  <a:tcPr>
+                    <a:solidFill>
+                      <a:srgbClr val="0055AA"/>
+                    </a:solidFill>
+                  </a:tcPr>
+                </a:tc>
+                <a:tc>
+                  <a:txBody>
+                    <a:bodyPr/>
+                    <a:lstStyle/>
+                    <a:p>
+                      <a:pPr algn="l"/>
+                      <a:r>
+                        <a:rPr sz="2200" b="1">
+                          <a:solidFill>
+                            <a:srgbClr val="FFFFFF"/>
+                          </a:solidFill>
+                          <a:latin typeface="Open Sans"/>
+                          <a:ea typeface="Open Sans"/>
+                          <a:cs typeface="Open Sans"/>
+                        </a:rPr>
+                        <a:t>Доля ОЦК</a:t>
+                      </a:r>
+                    </a:p>
+                  </a:txBody>
+                  <a:tcPr>
+                    <a:solidFill>
+                      <a:srgbClr val="0055AA"/>
+                    </a:solidFill>
+                  </a:tcPr>
+                </a:tc>
+                <a:tc>
+                  <a:txBody>
+                    <a:bodyPr/>
+                    <a:lstStyle/>
+                    <a:p>
+                      <a:pPr algn="l"/>
+                      <a:r>
+                        <a:rPr sz="2200" b="1">
+                          <a:solidFill>
+                            <a:srgbClr val="FFFFFF"/>
+                          </a:solidFill>
+                          <a:latin typeface="Open Sans"/>
+                          <a:ea typeface="Open Sans"/>
+                          <a:cs typeface="Open Sans"/>
+                        </a:rPr>
+                        <a:t>Состояние пострадавшего</a:t>
+                      </a:r>
+                    </a:p>
+                  </a:txBody>
+                  <a:tcPr>
+                    <a:solidFill>
+                      <a:srgbClr val="0055AA"/>
+                    </a:solidFill>
+                  </a:tcPr>
+                </a:tc>
+              </a:tr>
+              <a:tr h="1500000">
+                <a:tc>
+                  <a:txBody>
+                    <a:bodyPr/>
+                    <a:lstStyle/>
+                    <a:p>
+                      <a:pPr algn="l"/>
+                      <a:r>
+                        <a:rPr sz="2200" b="0">
+                          <a:solidFill>
+                            <a:srgbClr val="333333"/>
+                          </a:solidFill>
+                          <a:latin typeface="Open Sans"/>
+                          <a:ea typeface="Open Sans"/>
+                          <a:cs typeface="Open Sans"/>
+                        </a:rPr>
+                        <a:t>До ~500 мл</a:t>
+                      </a:r>
+                    </a:p>
+                  </a:txBody>
+                  <a:tcPr>
+                    <a:solidFill>
+                      <a:srgbClr val="FFFFFF"/>
+                    </a:solidFill>
+                  </a:tcPr>
+                </a:tc>
+                <a:tc>
+                  <a:txBody>
+                    <a:bodyPr/>
+                    <a:lstStyle/>
+                    <a:p>
+                      <a:pPr algn="l"/>
+                      <a:r>
+                        <a:rPr sz="2200" b="0">
+                          <a:solidFill>
+                            <a:srgbClr val="333333"/>
+                          </a:solidFill>
+                          <a:latin typeface="Open Sans"/>
+                          <a:ea typeface="Open Sans"/>
+                          <a:cs typeface="Open Sans"/>
+                        </a:rPr>
+                        <a:t>≈ 10%</a:t>
+                      </a:r>
+                    </a:p>
+                  </a:txBody>
+                  <a:tcPr>
+                    <a:solidFill>
+                      <a:srgbClr val="FFFFFF"/>
+                    </a:solidFill>
+                  </a:tcPr>
+                </a:tc>
+                <a:tc>
+                  <a:txBody>
+                    <a:bodyPr/>
+                    <a:lstStyle/>
+                    <a:p>
+                      <a:pPr algn="l"/>
+                      <a:r>
+                        <a:rPr sz="2200" b="0">
+                          <a:solidFill>
+                            <a:srgbClr val="333333"/>
+                          </a:solidFill>
+                          <a:latin typeface="Open Sans"/>
+                          <a:ea typeface="Open Sans"/>
+                          <a:cs typeface="Open Sans"/>
+                        </a:rPr>
+                        <a:t>Слабость, жажда</a:t>
+                      </a:r>
+                    </a:p>
+                  </a:txBody>
+                  <a:tcPr>
+                    <a:solidFill>
+                      <a:srgbClr val="FFFFFF"/>
+                    </a:solidFill>
+                  </a:tcPr>
+                </a:tc>
+              </a:tr>
+              <a:tr h="1500000">
+                <a:tc>
+                  <a:txBody>
+                    <a:bodyPr/>
+                    <a:lstStyle/>
+                    <a:p>
+                      <a:pPr algn="l"/>
+                      <a:r>
+                        <a:rPr sz="2200" b="0">
+                          <a:solidFill>
+                            <a:srgbClr val="333333"/>
+                          </a:solidFill>
+                          <a:latin typeface="Open Sans"/>
+                          <a:ea typeface="Open Sans"/>
+                          <a:cs typeface="Open Sans"/>
+                        </a:rPr>
+                        <a:t>500–1000 мл</a:t>
+                      </a:r>
+                    </a:p>
+                  </a:txBody>
+                  <a:tcPr>
+                    <a:solidFill>
+                      <a:srgbClr val="F5F5F5"/>
+                    </a:solidFill>
+                  </a:tcPr>
+                </a:tc>
+                <a:tc>
+                  <a:txBody>
+                    <a:bodyPr/>
+                    <a:lstStyle/>
+                    <a:p>
+                      <a:pPr algn="l"/>
+                      <a:r>
+                        <a:rPr sz="2200" b="0">
+                          <a:solidFill>
+                            <a:srgbClr val="333333"/>
+                          </a:solidFill>
+                          <a:latin typeface="Open Sans"/>
+                          <a:ea typeface="Open Sans"/>
+                          <a:cs typeface="Open Sans"/>
+                        </a:rPr>
+                        <a:t>≈ 10–20%</a:t>
+                      </a:r>
+                    </a:p>
+                  </a:txBody>
+                  <a:tcPr>
+                    <a:solidFill>
+                      <a:srgbClr val="F5F5F5"/>
+                    </a:solidFill>
+                  </a:tcPr>
+                </a:tc>
+                <a:tc>
+                  <a:txBody>
+                    <a:bodyPr/>
+                    <a:lstStyle/>
+                    <a:p>
+                      <a:pPr algn="l"/>
+                      <a:r>
+                        <a:rPr sz="2200" b="0">
+                          <a:solidFill>
+                            <a:srgbClr val="333333"/>
+                          </a:solidFill>
+                          <a:latin typeface="Open Sans"/>
+                          <a:ea typeface="Open Sans"/>
+                          <a:cs typeface="Open Sans"/>
+                        </a:rPr>
+                        <a:t>Бледность, тахикардия</a:t>
+                      </a:r>
+                    </a:p>
+                  </a:txBody>
+                  <a:tcPr>
+                    <a:solidFill>
+                      <a:srgbClr val="F5F5F5"/>
+                    </a:solidFill>
+                  </a:tcPr>
+                </a:tc>
+              </a:tr>
+              <a:tr h="1500000">
+                <a:tc>
+                  <a:txBody>
+                    <a:bodyPr/>
+                    <a:lstStyle/>
+                    <a:p>
+                      <a:pPr algn="l"/>
+                      <a:r>
+                        <a:rPr sz="2200" b="0">
+                          <a:solidFill>
+                            <a:srgbClr val="333333"/>
+                          </a:solidFill>
+                          <a:latin typeface="Open Sans"/>
+                          <a:ea typeface="Open Sans"/>
+                          <a:cs typeface="Open Sans"/>
+                        </a:rPr>
+                        <a:t>1000–1500 мл</a:t>
+                      </a:r>
+                    </a:p>
+                  </a:txBody>
+                  <a:tcPr>
+                    <a:solidFill>
+                      <a:srgbClr val="FFFFFF"/>
+                    </a:solidFill>
+                  </a:tcPr>
+                </a:tc>
+                <a:tc>
+                  <a:txBody>
+                    <a:bodyPr/>
+                    <a:lstStyle/>
+                    <a:p>
+                      <a:pPr algn="l"/>
+                      <a:r>
+                        <a:rPr sz="2200" b="1">
+                          <a:solidFill>
+                            <a:srgbClr val="CC0000"/>
+                          </a:solidFill>
+                          <a:latin typeface="Open Sans"/>
+                          <a:ea typeface="Open Sans"/>
+                          <a:cs typeface="Open Sans"/>
+                        </a:rPr>
+                        <a:t>≈ 20–30%</a:t>
+                      </a:r>
+                    </a:p>
+                  </a:txBody>
+                  <a:tcPr>
+                    <a:solidFill>
+                      <a:srgbClr val="FFFFFF"/>
+                    </a:solidFill>
+                  </a:tcPr>
+                </a:tc>
+                <a:tc>
+                  <a:txBody>
+                    <a:bodyPr/>
+                    <a:lstStyle/>
+                    <a:p>
+                      <a:pPr algn="l"/>
+                      <a:r>
+                        <a:rPr sz="2200" b="0">
+                          <a:solidFill>
+                            <a:srgbClr val="333333"/>
+                          </a:solidFill>
+                          <a:latin typeface="Open Sans"/>
+                          <a:ea typeface="Open Sans"/>
+                          <a:cs typeface="Open Sans"/>
+                        </a:rPr>
+                        <a:t>Головокружение, холодный пот, обмороки</a:t>
+                      </a:r>
+                    </a:p>
+                  </a:txBody>
+                  <a:tcPr>
+                    <a:solidFill>
+                      <a:srgbClr val="FFFFFF"/>
+                    </a:solidFill>
+                  </a:tcPr>
+                </a:tc>
+              </a:tr>
+              <a:tr h="1500000">
+                <a:tc>
+                  <a:txBody>
+                    <a:bodyPr/>
+                    <a:lstStyle/>
+                    <a:p>
+                      <a:pPr algn="l"/>
+                      <a:r>
+                        <a:rPr sz="2200" b="0">
+                          <a:solidFill>
+                            <a:srgbClr val="333333"/>
+                          </a:solidFill>
+                          <a:latin typeface="Open Sans"/>
+                          <a:ea typeface="Open Sans"/>
+                          <a:cs typeface="Open Sans"/>
+                        </a:rPr>
+                        <a:t>Более 1500–2000 мл</a:t>
+                      </a:r>
+                    </a:p>
+                  </a:txBody>
+                  <a:tcPr>
+                    <a:solidFill>
+                      <a:srgbClr val="F5F5F5"/>
+                    </a:solidFill>
+                  </a:tcPr>
+                </a:tc>
+                <a:tc>
+                  <a:txBody>
+                    <a:bodyPr/>
+                    <a:lstStyle/>
+                    <a:p>
+                      <a:pPr algn="l"/>
+                      <a:r>
+                        <a:rPr sz="2200" b="1">
+                          <a:solidFill>
+                            <a:srgbClr val="CC0000"/>
+                          </a:solidFill>
+                          <a:latin typeface="Open Sans"/>
+                          <a:ea typeface="Open Sans"/>
+                          <a:cs typeface="Open Sans"/>
+                        </a:rPr>
+                        <a:t>&gt; 30%</a:t>
+                      </a:r>
+                    </a:p>
+                  </a:txBody>
+                  <a:tcPr>
+                    <a:solidFill>
+                      <a:srgbClr val="F5F5F5"/>
+                    </a:solidFill>
+                  </a:tcPr>
+                </a:tc>
+                <a:tc>
+                  <a:txBody>
+                    <a:bodyPr/>
+                    <a:lstStyle/>
+                    <a:p>
+                      <a:pPr algn="l"/>
+                      <a:r>
+                        <a:rPr sz="2200" b="0">
+                          <a:solidFill>
+                            <a:srgbClr val="333333"/>
+                          </a:solidFill>
+                          <a:latin typeface="Open Sans"/>
+                          <a:ea typeface="Open Sans"/>
+                          <a:cs typeface="Open Sans"/>
+                        </a:rPr>
+                        <a:t>Угроза жизни, шок, потеря сознания</a:t>
+                      </a:r>
+                    </a:p>
+                  </a:txBody>
+                  <a:tcPr>
+                    <a:solidFill>
+                      <a:srgbClr val="F5F5F5"/>
+                    </a:solidFill>
+                  </a:tcPr>
+                </a:tc>
+              </a:tr>
+            </a:tbl>
+          </a:graphicData>
+        </a:graphic>
+      </p:graphicFrame>
+      <p:sp>
+        <p:nvSpPr>
+          <p:cNvPr id="7" name="TextBox 6"/>
           <p:cNvSpPr txBox="1"/>
           <p:nvPr/>
         </p:nvSpPr>
         <p:spPr>
           <a:xfrm>
-            <a:off x="0" y="5680000"/>
-            <a:ext cx="700000" cy="550000"/>
+            <a:off x="800000" y="11500000"/>
+            <a:ext cx="22800000" cy="1200000"/>
           </a:xfrm>
           <a:prstGeom prst="rect">
             <a:avLst/>
@@ -5576,246 +6749,22 @@
           <a:noFill/>
         </p:spPr>
         <p:txBody>
-          <a:bodyPr wrap="square" anchor="ctr"/>
-          <a:lstStyle/>
-          <a:p>
-            <a:pPr algn="ctr"/>
-            <a:r>
-              <a:rPr sz="1800" b="1">
-                <a:solidFill>
-                  <a:srgbClr val="FFFFFF"/>
-                </a:solidFill>
-                <a:latin typeface="Arial"/>
-              </a:rPr>
-              <a:t>6</a:t>
-            </a:r>
-          </a:p>
-        </p:txBody>
-      </p:sp>
-      <p:sp>
-        <p:nvSpPr>
-          <p:cNvPr id="6" name="TextBox 5"/>
-          <p:cNvSpPr txBox="1"/>
-          <p:nvPr/>
-        </p:nvSpPr>
-        <p:spPr>
-          <a:xfrm>
-            <a:off x="900000" y="500000"/>
-            <a:ext cx="21000000" cy="900000"/>
-          </a:xfrm>
-          <a:prstGeom prst="rect">
-            <a:avLst/>
-          </a:prstGeom>
-          <a:noFill/>
-        </p:spPr>
-        <p:txBody>
-          <a:bodyPr wrap="square" anchor="t"/>
-          <a:lstStyle/>
-          <a:p>
-            <a:pPr algn="l"/>
-            <a:r>
-              <a:rPr sz="2800" b="1">
-                <a:solidFill>
-                  <a:srgbClr val="2C2C2C"/>
-                </a:solidFill>
-                <a:latin typeface="Arial"/>
-              </a:rPr>
-              <a:t>ПРИЗНАКИ ОСТРОЙ КРОВОПОТЕРИ</a:t>
-            </a:r>
-          </a:p>
-        </p:txBody>
-      </p:sp>
-      <p:sp>
-        <p:nvSpPr>
-          <p:cNvPr id="7" name="Rectangle 6"/>
-          <p:cNvSpPr/>
-          <p:nvPr/>
-        </p:nvSpPr>
-        <p:spPr>
-          <a:xfrm>
-            <a:off x="900000" y="1350000"/>
-            <a:ext cx="20000000" cy="25000"/>
-          </a:xfrm>
-          <a:prstGeom prst="rect">
-            <a:avLst/>
-          </a:prstGeom>
-          <a:solidFill>
-            <a:srgbClr val="B8B8B8"/>
-          </a:solidFill>
-          <a:ln>
-            <a:noFill/>
-          </a:ln>
-        </p:spPr>
-        <p:style>
-          <a:lnRef idx="1">
-            <a:schemeClr val="accent1"/>
-          </a:lnRef>
-          <a:fillRef idx="3">
-            <a:schemeClr val="accent1"/>
-          </a:fillRef>
-          <a:effectRef idx="2">
-            <a:schemeClr val="accent1"/>
-          </a:effectRef>
-          <a:fontRef idx="minor">
-            <a:schemeClr val="lt1"/>
-          </a:fontRef>
-        </p:style>
-        <p:txBody>
-          <a:bodyPr rtlCol="0" anchor="ctr"/>
-          <a:lstStyle/>
-          <a:p>
-            <a:pPr algn="ctr"/>
-          </a:p>
-        </p:txBody>
-      </p:sp>
-      <p:sp>
-        <p:nvSpPr>
-          <p:cNvPr id="8" name="TextBox 7"/>
-          <p:cNvSpPr txBox="1"/>
-          <p:nvPr/>
-        </p:nvSpPr>
-        <p:spPr>
-          <a:xfrm>
-            <a:off x="900000" y="1450000"/>
-            <a:ext cx="20000000" cy="350000"/>
-          </a:xfrm>
-          <a:prstGeom prst="rect">
-            <a:avLst/>
-          </a:prstGeom>
-          <a:noFill/>
-        </p:spPr>
-        <p:txBody>
-          <a:bodyPr wrap="square" anchor="t"/>
-          <a:lstStyle/>
-          <a:p>
-            <a:pPr algn="l"/>
-            <a:r>
-              <a:rPr sz="1200" b="0">
-                <a:solidFill>
-                  <a:srgbClr val="6F6F6F"/>
-                </a:solidFill>
-                <a:latin typeface="Arial"/>
-              </a:rPr>
-              <a:t>Оказание первой помощи при наружных кровотечениях</a:t>
-            </a:r>
-          </a:p>
-        </p:txBody>
-      </p:sp>
-      <p:sp>
-        <p:nvSpPr>
-          <p:cNvPr id="9" name="TextBox 8"/>
-          <p:cNvSpPr txBox="1"/>
-          <p:nvPr/>
-        </p:nvSpPr>
-        <p:spPr>
-          <a:xfrm>
-            <a:off x="900000" y="2000000"/>
-            <a:ext cx="20500000" cy="7500000"/>
-          </a:xfrm>
-          <a:prstGeom prst="rect">
-            <a:avLst/>
-          </a:prstGeom>
-          <a:noFill/>
-        </p:spPr>
-        <p:txBody>
-          <a:bodyPr wrap="square">
+          <a:bodyPr wrap="square" anchor="t">
             <a:spAutoFit/>
           </a:bodyPr>
           <a:lstStyle/>
           <a:p>
-            <a:pPr algn="l">
-              <a:spcAft>
-                <a:spcPts val="600"/>
-              </a:spcAft>
-            </a:pPr>
-            <a:r>
-              <a:rPr sz="1700" b="0">
+            <a:pPr algn="l"/>
+            <a:r>
+              <a:rPr sz="2400" b="1">
                 <a:solidFill>
-                  <a:srgbClr val="2C2C2C"/>
+                  <a:srgbClr val="CC0000"/>
                 </a:solidFill>
-                <a:latin typeface="Arial"/>
+                <a:latin typeface="Open Sans"/>
+                <a:ea typeface="Open Sans"/>
+                <a:cs typeface="Open Sans"/>
               </a:rPr>
-              <a:t>•  Резкая общая слабость, жажда, головокружение.</a:t>
-            </a:r>
-          </a:p>
-          <a:p>
-            <a:pPr algn="l">
-              <a:spcAft>
-                <a:spcPts val="600"/>
-              </a:spcAft>
-            </a:pPr>
-            <a:r>
-              <a:rPr sz="1700" b="0">
-                <a:solidFill>
-                  <a:srgbClr val="2C2C2C"/>
-                </a:solidFill>
-                <a:latin typeface="Arial"/>
-              </a:rPr>
-              <a:t>•  Мелькание «мушек» перед глазами; обморок (часто при попытке встать).</a:t>
-            </a:r>
-          </a:p>
-          <a:p>
-            <a:pPr algn="l">
-              <a:spcAft>
-                <a:spcPts val="600"/>
-              </a:spcAft>
-            </a:pPr>
-            <a:r>
-              <a:rPr sz="1700" b="0">
-                <a:solidFill>
-                  <a:srgbClr val="2C2C2C"/>
-                </a:solidFill>
-                <a:latin typeface="Arial"/>
-              </a:rPr>
-              <a:t>•  Бледная, влажная, холодная кожа.</a:t>
-            </a:r>
-          </a:p>
-          <a:p>
-            <a:pPr algn="l">
-              <a:spcAft>
-                <a:spcPts val="600"/>
-              </a:spcAft>
-            </a:pPr>
-            <a:r>
-              <a:rPr sz="1700" b="0">
-                <a:solidFill>
-                  <a:srgbClr val="2C2C2C"/>
-                </a:solidFill>
-                <a:latin typeface="Arial"/>
-              </a:rPr>
-              <a:t>•  Учащённое сердцебиение и частое дыхание.</a:t>
-            </a:r>
-          </a:p>
-          <a:p>
-            <a:pPr algn="l">
-              <a:spcAft>
-                <a:spcPts val="600"/>
-              </a:spcAft>
-            </a:pPr>
-            <a:r>
-              <a:rPr sz="1700" b="0">
-                <a:solidFill>
-                  <a:srgbClr val="2C2C2C"/>
-                </a:solidFill>
-                <a:latin typeface="Arial"/>
-              </a:rPr>
-              <a:t>•  Тревога, возбуждение → затем апатия (при нарастании кровопотери).</a:t>
-            </a:r>
-          </a:p>
-          <a:p>
-            <a:pPr algn="l">
-              <a:spcAft>
-                <a:spcPts val="600"/>
-              </a:spcAft>
-            </a:pPr>
-            <a:r>
-              <a:rPr sz="1700" b="0">
-                <a:solidFill>
-                  <a:srgbClr val="2C2C2C"/>
-                </a:solidFill>
-                <a:latin typeface="Arial"/>
-              </a:rPr>
-              <a:t>•  Снижение наполнения пульса; при тяжёлой кровопотере — нитевидный пульс.</a:t>
+              <a:t>Ориентиры условные; у детей и пожилых критический порог ниже.</a:t>
             </a:r>
           </a:p>
         </p:txBody>
@@ -5853,7 +6802,7 @@
             <a:avLst/>
           </a:prstGeom>
           <a:solidFill>
-            <a:srgbClr val="F7F7F7"/>
+            <a:srgbClr val="FFFFFF"/>
           </a:solidFill>
           <a:ln>
             <a:noFill/>
@@ -5889,14 +6838,14 @@
         </p:nvSpPr>
         <p:spPr>
           <a:xfrm>
-            <a:off x="23000000" y="0"/>
-            <a:ext cx="1384000" cy="13716000"/>
+            <a:off x="0" y="0"/>
+            <a:ext cx="24384000" cy="120000"/>
           </a:xfrm>
           <a:prstGeom prst="rect">
             <a:avLst/>
           </a:prstGeom>
           <a:solidFill>
-            <a:srgbClr val="D9D9D9"/>
+            <a:srgbClr val="DDDDDD"/>
           </a:solidFill>
           <a:ln>
             <a:noFill/>
@@ -5926,20 +6875,57 @@
       </p:sp>
       <p:sp>
         <p:nvSpPr>
-          <p:cNvPr id="4" name="Rectangle 3"/>
+          <p:cNvPr id="4" name="TextBox 3"/>
+          <p:cNvSpPr txBox="1"/>
+          <p:nvPr/>
+        </p:nvSpPr>
+        <p:spPr>
+          <a:xfrm>
+            <a:off x="800000" y="350000"/>
+            <a:ext cx="22800000" cy="1000000"/>
+          </a:xfrm>
+          <a:prstGeom prst="rect">
+            <a:avLst/>
+          </a:prstGeom>
+          <a:noFill/>
+        </p:spPr>
+        <p:txBody>
+          <a:bodyPr wrap="square" anchor="t">
+            <a:spAutoFit/>
+          </a:bodyPr>
+          <a:lstStyle/>
+          <a:p>
+            <a:pPr algn="l"/>
+            <a:r>
+              <a:rPr sz="4600" b="1">
+                <a:solidFill>
+                  <a:srgbClr val="333333"/>
+                </a:solidFill>
+                <a:latin typeface="Open Sans"/>
+                <a:ea typeface="Open Sans"/>
+                <a:cs typeface="Open Sans"/>
+              </a:rPr>
+              <a:t>Признаки скрытого (внутреннего) кровотечения</a:t>
+            </a:r>
+          </a:p>
+        </p:txBody>
+      </p:sp>
+      <p:sp>
+        <p:nvSpPr>
+          <p:cNvPr id="5" name="Rectangle 4"/>
           <p:cNvSpPr/>
           <p:nvPr/>
         </p:nvSpPr>
         <p:spPr>
           <a:xfrm>
-            <a:off x="0" y="5600000"/>
-            <a:ext cx="700000" cy="700000"/>
+            <a:off x="800000" y="1450000"/>
+            <a:ext cx="22800000" cy="20000"/>
           </a:xfrm>
           <a:prstGeom prst="rect">
             <a:avLst/>
           </a:prstGeom>
           <a:solidFill>
-            <a:srgbClr val="4D4D4D"/>
+            <a:srgbClr val="E1E1E1"/>
           </a:solidFill>
           <a:ln>
             <a:noFill/>
@@ -5969,47 +6955,14 @@
       </p:sp>
       <p:sp>
         <p:nvSpPr>
-          <p:cNvPr id="5" name="TextBox 4"/>
-          <p:cNvSpPr txBox="1"/>
-          <p:nvPr/>
-        </p:nvSpPr>
-        <p:spPr>
-          <a:xfrm>
-            <a:off x="0" y="5680000"/>
-            <a:ext cx="700000" cy="550000"/>
-          </a:xfrm>
-          <a:prstGeom prst="rect">
-            <a:avLst/>
-          </a:prstGeom>
-          <a:noFill/>
-        </p:spPr>
-        <p:txBody>
-          <a:bodyPr wrap="square" anchor="ctr"/>
-          <a:lstStyle/>
-          <a:p>
-            <a:pPr algn="ctr"/>
-            <a:r>
-              <a:rPr sz="1800" b="1">
-                <a:solidFill>
-                  <a:srgbClr val="FFFFFF"/>
-                </a:solidFill>
-                <a:latin typeface="Arial"/>
-              </a:rPr>
-              <a:t>7</a:t>
-            </a:r>
-          </a:p>
-        </p:txBody>
-      </p:sp>
-      <p:sp>
-        <p:nvSpPr>
           <p:cNvPr id="6" name="TextBox 5"/>
           <p:cNvSpPr txBox="1"/>
           <p:nvPr/>
         </p:nvSpPr>
         <p:spPr>
           <a:xfrm>
-            <a:off x="900000" y="500000"/>
-            <a:ext cx="21000000" cy="900000"/>
+            <a:off x="800000" y="1950000"/>
+            <a:ext cx="22800000" cy="7000000"/>
           </a:xfrm>
           <a:prstGeom prst="rect">
             <a:avLst/>
@@ -6017,38 +6970,136 @@
           <a:noFill/>
         </p:spPr>
         <p:txBody>
-          <a:bodyPr wrap="square" anchor="t"/>
-          <a:lstStyle/>
-          <a:p>
-            <a:pPr algn="l"/>
-            <a:r>
-              <a:rPr sz="2800" b="1">
+          <a:bodyPr wrap="square">
+            <a:spAutoFit/>
+          </a:bodyPr>
+          <a:lstStyle/>
+          <a:p>
+            <a:pPr algn="l">
+              <a:spcAft>
+                <a:spcPts val="1000"/>
+              </a:spcAft>
+            </a:pPr>
+            <a:r>
+              <a:rPr sz="3200" b="0">
                 <a:solidFill>
-                  <a:srgbClr val="2C2C2C"/>
+                  <a:srgbClr val="333333"/>
                 </a:solidFill>
-                <a:latin typeface="Arial"/>
+                <a:latin typeface="Open Sans"/>
+                <a:ea typeface="Open Sans"/>
+                <a:cs typeface="Open Sans"/>
               </a:rPr>
-              <a:t>ОЦЕНКА ОБЪЁМА КРОВОПОТЕРИ И СОСТОЯНИЕ</a:t>
-            </a:r>
-          </a:p>
-        </p:txBody>
-      </p:sp>
-      <p:sp>
-        <p:nvSpPr>
-          <p:cNvPr id="7" name="Rectangle 6"/>
+              <a:t>•  Кровь изливается в полости тела — снаружи может не быть видно.</a:t>
+            </a:r>
+          </a:p>
+          <a:p>
+            <a:pPr algn="l">
+              <a:spcAft>
+                <a:spcPts val="1000"/>
+              </a:spcAft>
+            </a:pPr>
+            <a:r>
+              <a:rPr sz="3200" b="0">
+                <a:solidFill>
+                  <a:srgbClr val="333333"/>
+                </a:solidFill>
+                <a:latin typeface="Open Sans"/>
+                <a:ea typeface="Open Sans"/>
+                <a:cs typeface="Open Sans"/>
+              </a:rPr>
+              <a:t>•  Бледность, холодный пот, нарастающая слабость, жажда.</a:t>
+            </a:r>
+          </a:p>
+          <a:p>
+            <a:pPr algn="l">
+              <a:spcAft>
+                <a:spcPts val="1000"/>
+              </a:spcAft>
+            </a:pPr>
+            <a:r>
+              <a:rPr sz="3200" b="0">
+                <a:solidFill>
+                  <a:srgbClr val="333333"/>
+                </a:solidFill>
+                <a:latin typeface="Open Sans"/>
+                <a:ea typeface="Open Sans"/>
+                <a:cs typeface="Open Sans"/>
+              </a:rPr>
+              <a:t>•  Учащённый слабый пульс, частое дыхание.</a:t>
+            </a:r>
+          </a:p>
+          <a:p>
+            <a:pPr algn="l">
+              <a:spcAft>
+                <a:spcPts val="1000"/>
+              </a:spcAft>
+            </a:pPr>
+            <a:r>
+              <a:rPr sz="3200" b="0">
+                <a:solidFill>
+                  <a:srgbClr val="333333"/>
+                </a:solidFill>
+                <a:latin typeface="Open Sans"/>
+                <a:ea typeface="Open Sans"/>
+                <a:cs typeface="Open Sans"/>
+              </a:rPr>
+              <a:t>•  Боль и напряжение живота (кровотечение в брюшную полость).</a:t>
+            </a:r>
+          </a:p>
+          <a:p>
+            <a:pPr algn="l">
+              <a:spcAft>
+                <a:spcPts val="1000"/>
+              </a:spcAft>
+            </a:pPr>
+            <a:r>
+              <a:rPr sz="3200" b="0">
+                <a:solidFill>
+                  <a:srgbClr val="333333"/>
+                </a:solidFill>
+                <a:latin typeface="Open Sans"/>
+                <a:ea typeface="Open Sans"/>
+                <a:cs typeface="Open Sans"/>
+              </a:rPr>
+              <a:t>•  При травме груди — одышка, слабость, бледность.</a:t>
+            </a:r>
+          </a:p>
+          <a:p>
+            <a:pPr algn="l">
+              <a:spcAft>
+                <a:spcPts val="1000"/>
+              </a:spcAft>
+            </a:pPr>
+            <a:r>
+              <a:rPr sz="3200" b="0">
+                <a:solidFill>
+                  <a:srgbClr val="333333"/>
+                </a:solidFill>
+                <a:latin typeface="Open Sans"/>
+                <a:ea typeface="Open Sans"/>
+                <a:cs typeface="Open Sans"/>
+              </a:rPr>
+              <a:t>•  Действия: вызвать СМП, положение, холод на живот, не кормить и не поить.</a:t>
+            </a:r>
+          </a:p>
+        </p:txBody>
+      </p:sp>
+      <p:sp>
+        <p:nvSpPr>
+          <p:cNvPr id="7" name="Rounded Rectangle 6"/>
           <p:cNvSpPr/>
           <p:nvPr/>
         </p:nvSpPr>
         <p:spPr>
           <a:xfrm>
-            <a:off x="900000" y="1350000"/>
-            <a:ext cx="20000000" cy="25000"/>
-          </a:xfrm>
-          <a:prstGeom prst="rect">
+            <a:off x="800000" y="11000000"/>
+            <a:ext cx="22800000" cy="1800000"/>
+          </a:xfrm>
+          <a:prstGeom prst="roundRect">
             <a:avLst/>
           </a:prstGeom>
           <a:solidFill>
-            <a:srgbClr val="B8B8B8"/>
+            <a:srgbClr val="FAFAFA"/>
           </a:solidFill>
           <a:ln>
             <a:noFill/>
@@ -6078,34 +7129,44 @@
       </p:sp>
       <p:sp>
         <p:nvSpPr>
-          <p:cNvPr id="8" name="TextBox 7"/>
-          <p:cNvSpPr txBox="1"/>
-          <p:nvPr/>
-        </p:nvSpPr>
-        <p:spPr>
-          <a:xfrm>
-            <a:off x="900000" y="1450000"/>
-            <a:ext cx="20000000" cy="350000"/>
-          </a:xfrm>
-          <a:prstGeom prst="rect">
-            <a:avLst/>
-          </a:prstGeom>
-          <a:noFill/>
-        </p:spPr>
-        <p:txBody>
-          <a:bodyPr wrap="square" anchor="t"/>
-          <a:lstStyle/>
-          <a:p>
-            <a:pPr algn="l"/>
-            <a:r>
-              <a:rPr sz="1200" b="0">
-                <a:solidFill>
-                  <a:srgbClr val="6F6F6F"/>
-                </a:solidFill>
-                <a:latin typeface="Arial"/>
-              </a:rPr>
-              <a:t>Оказание первой помощи при наружных кровотечениях</a:t>
-            </a:r>
+          <p:cNvPr id="8" name="Rectangle 7"/>
+          <p:cNvSpPr/>
+          <p:nvPr/>
+        </p:nvSpPr>
+        <p:spPr>
+          <a:xfrm>
+            <a:off x="800000" y="11000000"/>
+            <a:ext cx="120000" cy="1800000"/>
+          </a:xfrm>
+          <a:prstGeom prst="rect">
+            <a:avLst/>
+          </a:prstGeom>
+          <a:solidFill>
+            <a:srgbClr val="CC0000"/>
+          </a:solidFill>
+          <a:ln>
+            <a:noFill/>
+          </a:ln>
+        </p:spPr>
+        <p:style>
+          <a:lnRef idx="1">
+            <a:schemeClr val="accent1"/>
+          </a:lnRef>
+          <a:fillRef idx="3">
+            <a:schemeClr val="accent1"/>
+          </a:fillRef>
+          <a:effectRef idx="2">
+            <a:schemeClr val="accent1"/>
+          </a:effectRef>
+          <a:fontRef idx="minor">
+            <a:schemeClr val="lt1"/>
+          </a:fontRef>
+        </p:style>
+        <p:txBody>
+          <a:bodyPr rtlCol="0" anchor="ctr"/>
+          <a:lstStyle/>
+          <a:p>
+            <a:pPr algn="ctr"/>
           </a:p>
         </p:txBody>
       </p:sp>
@@ -6117,8 +7178,8 @@
         </p:nvSpPr>
         <p:spPr>
           <a:xfrm>
-            <a:off x="900000" y="2000000"/>
-            <a:ext cx="20500000" cy="7500000"/>
+            <a:off x="1200000" y="11300000"/>
+            <a:ext cx="21800000" cy="1400000"/>
           </a:xfrm>
           <a:prstGeom prst="rect">
             <a:avLst/>
@@ -6126,153 +7187,22 @@
           <a:noFill/>
         </p:spPr>
         <p:txBody>
-          <a:bodyPr wrap="square">
+          <a:bodyPr wrap="square" anchor="ctr">
             <a:spAutoFit/>
           </a:bodyPr>
           <a:lstStyle/>
           <a:p>
-            <a:pPr algn="l">
-              <a:spcAft>
-                <a:spcPts val="600"/>
-              </a:spcAft>
-            </a:pPr>
-            <a:r>
-              <a:rPr sz="1700" b="0">
+            <a:pPr algn="l"/>
+            <a:r>
+              <a:rPr sz="2600" b="1">
                 <a:solidFill>
-                  <a:srgbClr val="2C2C2C"/>
+                  <a:srgbClr val="CC0000"/>
                 </a:solidFill>
-                <a:latin typeface="Arial"/>
+                <a:latin typeface="Open Sans"/>
+                <a:ea typeface="Open Sans"/>
+                <a:cs typeface="Open Sans"/>
               </a:rPr>
-              <a:t>•  Ориентир для взрослого (объём циркулирующей крови ≈ 5 л):</a:t>
-            </a:r>
-          </a:p>
-          <a:p>
-            <a:pPr algn="l">
-              <a:spcAft>
-                <a:spcPts val="600"/>
-              </a:spcAft>
-            </a:pPr>
-            <a:r>
-              <a:rPr sz="1700" b="0">
-                <a:solidFill>
-                  <a:srgbClr val="2C2C2C"/>
-                </a:solidFill>
-                <a:latin typeface="Arial"/>
-              </a:rPr>
-              <a:t>•  До ~500 мл (≈10%) — обычно компенсируется, возможны слабость и жажда.</a:t>
-            </a:r>
-          </a:p>
-          <a:p>
-            <a:pPr algn="l">
-              <a:spcAft>
-                <a:spcPts val="600"/>
-              </a:spcAft>
-            </a:pPr>
-            <a:r>
-              <a:rPr sz="1700" b="0">
-                <a:solidFill>
-                  <a:srgbClr val="2C2C2C"/>
-                </a:solidFill>
-                <a:latin typeface="Arial"/>
-              </a:rPr>
-              <a:t>•  500–1000 мл (≈10–20%) — выраженная слабость, бледность, тахикардия.</a:t>
-            </a:r>
-          </a:p>
-          <a:p>
-            <a:pPr algn="l">
-              <a:spcAft>
-                <a:spcPts val="600"/>
-              </a:spcAft>
-            </a:pPr>
-            <a:r>
-              <a:rPr sz="1700" b="0">
-                <a:solidFill>
-                  <a:srgbClr val="2C2C2C"/>
-                </a:solidFill>
-                <a:latin typeface="Arial"/>
-              </a:rPr>
-              <a:t>•  1000–1500 мл (≈20–30%) — головокружение, холодный пот, обмороки.</a:t>
-            </a:r>
-          </a:p>
-          <a:p>
-            <a:pPr algn="l">
-              <a:spcAft>
-                <a:spcPts val="600"/>
-              </a:spcAft>
-            </a:pPr>
-            <a:r>
-              <a:rPr sz="1700" b="1">
-                <a:solidFill>
-                  <a:srgbClr val="C02828"/>
-                </a:solidFill>
-                <a:latin typeface="Arial"/>
-              </a:rPr>
-              <a:t>•  Более 1500–2000 мл (&gt;30%) — угроза жизни, шок, потеря сознания.</a:t>
-            </a:r>
-          </a:p>
-          <a:p>
-            <a:pPr algn="l">
-              <a:spcAft>
-                <a:spcPts val="600"/>
-              </a:spcAft>
-            </a:pPr>
-            <a:r>
-              <a:rPr sz="1700" b="0">
-                <a:solidFill>
-                  <a:srgbClr val="2C2C2C"/>
-                </a:solidFill>
-                <a:latin typeface="Arial"/>
-              </a:rPr>
-              <a:t>•  На месте происшествия ориентируйтесь на признаки, а не на точный подсчёт мл.</a:t>
-            </a:r>
-          </a:p>
-          <a:p>
-            <a:pPr algn="l">
-              <a:spcAft>
-                <a:spcPts val="600"/>
-              </a:spcAft>
-            </a:pPr>
-            <a:r>
-              <a:rPr sz="1700" b="0">
-                <a:solidFill>
-                  <a:srgbClr val="2C2C2C"/>
-                </a:solidFill>
-                <a:latin typeface="Arial"/>
-              </a:rPr>
-              <a:t>•  Любое продолжающееся наружное кровотечение останавливайте немедленно.</a:t>
-            </a:r>
-          </a:p>
-        </p:txBody>
-      </p:sp>
-      <p:sp>
-        <p:nvSpPr>
-          <p:cNvPr id="10" name="TextBox 9"/>
-          <p:cNvSpPr txBox="1"/>
-          <p:nvPr/>
-        </p:nvSpPr>
-        <p:spPr>
-          <a:xfrm>
-            <a:off x="900000" y="12200000"/>
-            <a:ext cx="20500000" cy="800000"/>
-          </a:xfrm>
-          <a:prstGeom prst="rect">
-            <a:avLst/>
-          </a:prstGeom>
-          <a:noFill/>
-        </p:spPr>
-        <p:txBody>
-          <a:bodyPr wrap="square" anchor="t"/>
-          <a:lstStyle/>
-          <a:p>
-            <a:pPr algn="l"/>
-            <a:r>
-              <a:rPr sz="1100" b="0">
-                <a:solidFill>
-                  <a:srgbClr val="6F6F6F"/>
-                </a:solidFill>
-                <a:latin typeface="Arial"/>
-              </a:rPr>
-              <a:t>Ориентиры условные; у детей и пожилых критический порог ниже.</a:t>
+              <a:t>Внутреннее кровотечение на месте не «останавливают» — нужна СМП.</a:t>
             </a:r>
           </a:p>
         </p:txBody>
@@ -6310,7 +7240,7 @@
             <a:avLst/>
           </a:prstGeom>
           <a:solidFill>
-            <a:srgbClr val="F7F7F7"/>
+            <a:srgbClr val="FFFFFF"/>
           </a:solidFill>
           <a:ln>
             <a:noFill/>
@@ -6346,14 +7276,14 @@
         </p:nvSpPr>
         <p:spPr>
           <a:xfrm>
-            <a:off x="23000000" y="0"/>
-            <a:ext cx="1384000" cy="13716000"/>
+            <a:off x="0" y="0"/>
+            <a:ext cx="24384000" cy="120000"/>
           </a:xfrm>
           <a:prstGeom prst="rect">
             <a:avLst/>
           </a:prstGeom>
           <a:solidFill>
-            <a:srgbClr val="D9D9D9"/>
+            <a:srgbClr val="DDDDDD"/>
           </a:solidFill>
           <a:ln>
             <a:noFill/>
@@ -6383,20 +7313,57 @@
       </p:sp>
       <p:sp>
         <p:nvSpPr>
-          <p:cNvPr id="4" name="Rectangle 3"/>
+          <p:cNvPr id="4" name="TextBox 3"/>
+          <p:cNvSpPr txBox="1"/>
+          <p:nvPr/>
+        </p:nvSpPr>
+        <p:spPr>
+          <a:xfrm>
+            <a:off x="800000" y="350000"/>
+            <a:ext cx="22800000" cy="1000000"/>
+          </a:xfrm>
+          <a:prstGeom prst="rect">
+            <a:avLst/>
+          </a:prstGeom>
+          <a:noFill/>
+        </p:spPr>
+        <p:txBody>
+          <a:bodyPr wrap="square" anchor="t">
+            <a:spAutoFit/>
+          </a:bodyPr>
+          <a:lstStyle/>
+          <a:p>
+            <a:pPr algn="l"/>
+            <a:r>
+              <a:rPr sz="4600" b="1">
+                <a:solidFill>
+                  <a:srgbClr val="333333"/>
+                </a:solidFill>
+                <a:latin typeface="Open Sans"/>
+                <a:ea typeface="Open Sans"/>
+                <a:cs typeface="Open Sans"/>
+              </a:rPr>
+              <a:t>Краткое резюме</a:t>
+            </a:r>
+          </a:p>
+        </p:txBody>
+      </p:sp>
+      <p:sp>
+        <p:nvSpPr>
+          <p:cNvPr id="5" name="Rectangle 4"/>
           <p:cNvSpPr/>
           <p:nvPr/>
         </p:nvSpPr>
         <p:spPr>
           <a:xfrm>
-            <a:off x="0" y="5600000"/>
-            <a:ext cx="700000" cy="700000"/>
+            <a:off x="800000" y="1450000"/>
+            <a:ext cx="22800000" cy="20000"/>
           </a:xfrm>
           <a:prstGeom prst="rect">
             <a:avLst/>
           </a:prstGeom>
           <a:solidFill>
-            <a:srgbClr val="4D4D4D"/>
+            <a:srgbClr val="E1E1E1"/>
           </a:solidFill>
           <a:ln>
             <a:noFill/>
@@ -6426,89 +7393,25 @@
       </p:sp>
       <p:sp>
         <p:nvSpPr>
-          <p:cNvPr id="5" name="TextBox 4"/>
-          <p:cNvSpPr txBox="1"/>
-          <p:nvPr/>
-        </p:nvSpPr>
-        <p:spPr>
-          <a:xfrm>
-            <a:off x="0" y="5680000"/>
-            <a:ext cx="700000" cy="550000"/>
-          </a:xfrm>
-          <a:prstGeom prst="rect">
-            <a:avLst/>
-          </a:prstGeom>
-          <a:noFill/>
-        </p:spPr>
-        <p:txBody>
-          <a:bodyPr wrap="square" anchor="ctr"/>
-          <a:lstStyle/>
-          <a:p>
-            <a:pPr algn="ctr"/>
-            <a:r>
-              <a:rPr sz="1800" b="1">
-                <a:solidFill>
-                  <a:srgbClr val="FFFFFF"/>
-                </a:solidFill>
-                <a:latin typeface="Arial"/>
-              </a:rPr>
-              <a:t>8</a:t>
-            </a:r>
-          </a:p>
-        </p:txBody>
-      </p:sp>
-      <p:sp>
-        <p:nvSpPr>
-          <p:cNvPr id="6" name="TextBox 5"/>
-          <p:cNvSpPr txBox="1"/>
-          <p:nvPr/>
-        </p:nvSpPr>
-        <p:spPr>
-          <a:xfrm>
-            <a:off x="900000" y="500000"/>
-            <a:ext cx="21000000" cy="900000"/>
-          </a:xfrm>
-          <a:prstGeom prst="rect">
-            <a:avLst/>
-          </a:prstGeom>
-          <a:noFill/>
-        </p:spPr>
-        <p:txBody>
-          <a:bodyPr wrap="square" anchor="t"/>
-          <a:lstStyle/>
-          <a:p>
-            <a:pPr algn="l"/>
-            <a:r>
-              <a:rPr sz="2800" b="1">
-                <a:solidFill>
-                  <a:srgbClr val="2C2C2C"/>
-                </a:solidFill>
-                <a:latin typeface="Arial"/>
-              </a:rPr>
-              <a:t>ПРИЗНАКИ СКРЫТОГО (ВНУТРЕННЕГО) КРОВОТЕЧЕНИЯ</a:t>
-            </a:r>
-          </a:p>
-        </p:txBody>
-      </p:sp>
-      <p:sp>
-        <p:nvSpPr>
-          <p:cNvPr id="7" name="Rectangle 6"/>
+          <p:cNvPr id="6" name="Rectangle 5"/>
           <p:cNvSpPr/>
           <p:nvPr/>
         </p:nvSpPr>
         <p:spPr>
           <a:xfrm>
-            <a:off x="900000" y="1350000"/>
-            <a:ext cx="20000000" cy="25000"/>
+            <a:off x="800000" y="1950000"/>
+            <a:ext cx="22800000" cy="1600000"/>
           </a:xfrm>
           <a:prstGeom prst="rect">
             <a:avLst/>
           </a:prstGeom>
           <a:solidFill>
-            <a:srgbClr val="B8B8B8"/>
+            <a:srgbClr val="FFFFFF"/>
           </a:solidFill>
-          <a:ln>
-            <a:noFill/>
+          <a:ln w="12700">
+            <a:solidFill>
+              <a:srgbClr val="E1E1E1"/>
+            </a:solidFill>
           </a:ln>
         </p:spPr>
         <p:style>
@@ -6535,172 +7438,20 @@
       </p:sp>
       <p:sp>
         <p:nvSpPr>
-          <p:cNvPr id="8" name="TextBox 7"/>
-          <p:cNvSpPr txBox="1"/>
-          <p:nvPr/>
-        </p:nvSpPr>
-        <p:spPr>
-          <a:xfrm>
-            <a:off x="900000" y="1450000"/>
-            <a:ext cx="20000000" cy="350000"/>
-          </a:xfrm>
-          <a:prstGeom prst="rect">
-            <a:avLst/>
-          </a:prstGeom>
-          <a:noFill/>
-        </p:spPr>
-        <p:txBody>
-          <a:bodyPr wrap="square" anchor="t"/>
-          <a:lstStyle/>
-          <a:p>
-            <a:pPr algn="l"/>
-            <a:r>
-              <a:rPr sz="1200" b="0">
-                <a:solidFill>
-                  <a:srgbClr val="6F6F6F"/>
-                </a:solidFill>
-                <a:latin typeface="Arial"/>
-              </a:rPr>
-              <a:t>Оказание первой помощи при наружных кровотечениях</a:t>
-            </a:r>
-          </a:p>
-        </p:txBody>
-      </p:sp>
-      <p:sp>
-        <p:nvSpPr>
-          <p:cNvPr id="9" name="TextBox 8"/>
-          <p:cNvSpPr txBox="1"/>
-          <p:nvPr/>
-        </p:nvSpPr>
-        <p:spPr>
-          <a:xfrm>
-            <a:off x="900000" y="2000000"/>
-            <a:ext cx="20500000" cy="7500000"/>
-          </a:xfrm>
-          <a:prstGeom prst="rect">
-            <a:avLst/>
-          </a:prstGeom>
-          <a:noFill/>
-        </p:spPr>
-        <p:txBody>
-          <a:bodyPr wrap="square">
-            <a:spAutoFit/>
-          </a:bodyPr>
-          <a:lstStyle/>
-          <a:p>
-            <a:pPr algn="l">
-              <a:spcAft>
-                <a:spcPts val="600"/>
-              </a:spcAft>
-            </a:pPr>
-            <a:r>
-              <a:rPr sz="1700" b="0">
-                <a:solidFill>
-                  <a:srgbClr val="2C2C2C"/>
-                </a:solidFill>
-                <a:latin typeface="Arial"/>
-              </a:rPr>
-              <a:t>•  Кратко для контекста: кровь изливается в полости тела, снаружи может не быть видно.</a:t>
-            </a:r>
-          </a:p>
-          <a:p>
-            <a:pPr algn="l">
-              <a:spcAft>
-                <a:spcPts val="600"/>
-              </a:spcAft>
-            </a:pPr>
-            <a:r>
-              <a:rPr sz="1700" b="0">
-                <a:solidFill>
-                  <a:srgbClr val="2C2C2C"/>
-                </a:solidFill>
-                <a:latin typeface="Arial"/>
-              </a:rPr>
-              <a:t>•  Бледность, холодный пот, нарастающая слабость, жажда.</a:t>
-            </a:r>
-          </a:p>
-          <a:p>
-            <a:pPr algn="l">
-              <a:spcAft>
-                <a:spcPts val="600"/>
-              </a:spcAft>
-            </a:pPr>
-            <a:r>
-              <a:rPr sz="1700" b="0">
-                <a:solidFill>
-                  <a:srgbClr val="2C2C2C"/>
-                </a:solidFill>
-                <a:latin typeface="Arial"/>
-              </a:rPr>
-              <a:t>•  Учащённый слабый пульс, частое дыхание, беспокойство или заторможенность.</a:t>
-            </a:r>
-          </a:p>
-          <a:p>
-            <a:pPr algn="l">
-              <a:spcAft>
-                <a:spcPts val="600"/>
-              </a:spcAft>
-            </a:pPr>
-            <a:r>
-              <a:rPr sz="1700" b="0">
-                <a:solidFill>
-                  <a:srgbClr val="2C2C2C"/>
-                </a:solidFill>
-                <a:latin typeface="Arial"/>
-              </a:rPr>
-              <a:t>•  Боль и напряжение живота, увеличение живота (при кровотечении в брюшную полость).</a:t>
-            </a:r>
-          </a:p>
-          <a:p>
-            <a:pPr algn="l">
-              <a:spcAft>
-                <a:spcPts val="600"/>
-              </a:spcAft>
-            </a:pPr>
-            <a:r>
-              <a:rPr sz="1700" b="0">
-                <a:solidFill>
-                  <a:srgbClr val="2C2C2C"/>
-                </a:solidFill>
-                <a:latin typeface="Arial"/>
-              </a:rPr>
-              <a:t>•  При травме груди — одышка, слабость, бледность (подозрение на гемоторакс).</a:t>
-            </a:r>
-          </a:p>
-          <a:p>
-            <a:pPr algn="l">
-              <a:spcAft>
-                <a:spcPts val="600"/>
-              </a:spcAft>
-            </a:pPr>
-            <a:r>
-              <a:rPr sz="1700" b="0">
-                <a:solidFill>
-                  <a:srgbClr val="2C2C2C"/>
-                </a:solidFill>
-                <a:latin typeface="Arial"/>
-              </a:rPr>
-              <a:t>•  Действия: вызвать СМП, придать оптимальное положение, холод на живот (при закрытой травме), не кормить и не поить, контролировать состояние.</a:t>
-            </a:r>
-          </a:p>
-        </p:txBody>
-      </p:sp>
-      <p:sp>
-        <p:nvSpPr>
-          <p:cNvPr id="10" name="Rectangle 9"/>
+          <p:cNvPr id="7" name="Rectangle 6"/>
           <p:cNvSpPr/>
           <p:nvPr/>
         </p:nvSpPr>
         <p:spPr>
           <a:xfrm>
-            <a:off x="900000" y="10500000"/>
-            <a:ext cx="20500000" cy="1800000"/>
+            <a:off x="800000" y="1950000"/>
+            <a:ext cx="120000" cy="1600000"/>
           </a:xfrm>
           <a:prstGeom prst="rect">
             <a:avLst/>
           </a:prstGeom>
           <a:solidFill>
-            <a:srgbClr val="F5F0E1"/>
+            <a:srgbClr val="0055AA"/>
           </a:solidFill>
           <a:ln>
             <a:noFill/>
@@ -6730,14 +7481,139 @@
       </p:sp>
       <p:sp>
         <p:nvSpPr>
+          <p:cNvPr id="8" name="TextBox 7"/>
+          <p:cNvSpPr txBox="1"/>
+          <p:nvPr/>
+        </p:nvSpPr>
+        <p:spPr>
+          <a:xfrm>
+            <a:off x="1200000" y="2250000"/>
+            <a:ext cx="21800000" cy="1100000"/>
+          </a:xfrm>
+          <a:prstGeom prst="rect">
+            <a:avLst/>
+          </a:prstGeom>
+          <a:noFill/>
+        </p:spPr>
+        <p:txBody>
+          <a:bodyPr wrap="square" anchor="ctr">
+            <a:spAutoFit/>
+          </a:bodyPr>
+          <a:lstStyle/>
+          <a:p>
+            <a:pPr algn="l"/>
+            <a:r>
+              <a:rPr sz="2600" b="0">
+                <a:solidFill>
+                  <a:srgbClr val="333333"/>
+                </a:solidFill>
+                <a:latin typeface="Open Sans"/>
+                <a:ea typeface="Open Sans"/>
+                <a:cs typeface="Open Sans"/>
+              </a:rPr>
+              <a:t>Артериальное — алая пульсирующая струя; венозное — тёмная струя; капиллярное — сочение.</a:t>
+            </a:r>
+          </a:p>
+        </p:txBody>
+      </p:sp>
+      <p:sp>
+        <p:nvSpPr>
+          <p:cNvPr id="9" name="Rectangle 8"/>
+          <p:cNvSpPr/>
+          <p:nvPr/>
+        </p:nvSpPr>
+        <p:spPr>
+          <a:xfrm>
+            <a:off x="800000" y="3850000"/>
+            <a:ext cx="22800000" cy="1600000"/>
+          </a:xfrm>
+          <a:prstGeom prst="rect">
+            <a:avLst/>
+          </a:prstGeom>
+          <a:solidFill>
+            <a:srgbClr val="FFFFFF"/>
+          </a:solidFill>
+          <a:ln w="12700">
+            <a:solidFill>
+              <a:srgbClr val="E1E1E1"/>
+            </a:solidFill>
+          </a:ln>
+        </p:spPr>
+        <p:style>
+          <a:lnRef idx="1">
+            <a:schemeClr val="accent1"/>
+          </a:lnRef>
+          <a:fillRef idx="3">
+            <a:schemeClr val="accent1"/>
+          </a:fillRef>
+          <a:effectRef idx="2">
+            <a:schemeClr val="accent1"/>
+          </a:effectRef>
+          <a:fontRef idx="minor">
+            <a:schemeClr val="lt1"/>
+          </a:fontRef>
+        </p:style>
+        <p:txBody>
+          <a:bodyPr rtlCol="0" anchor="ctr"/>
+          <a:lstStyle/>
+          <a:p>
+            <a:pPr algn="ctr"/>
+          </a:p>
+        </p:txBody>
+      </p:sp>
+      <p:sp>
+        <p:nvSpPr>
+          <p:cNvPr id="10" name="Rectangle 9"/>
+          <p:cNvSpPr/>
+          <p:nvPr/>
+        </p:nvSpPr>
+        <p:spPr>
+          <a:xfrm>
+            <a:off x="800000" y="3850000"/>
+            <a:ext cx="120000" cy="1600000"/>
+          </a:xfrm>
+          <a:prstGeom prst="rect">
+            <a:avLst/>
+          </a:prstGeom>
+          <a:solidFill>
+            <a:srgbClr val="0055AA"/>
+          </a:solidFill>
+          <a:ln>
+            <a:noFill/>
+          </a:ln>
+        </p:spPr>
+        <p:style>
+          <a:lnRef idx="1">
+            <a:schemeClr val="accent1"/>
+          </a:lnRef>
+          <a:fillRef idx="3">
+            <a:schemeClr val="accent1"/>
+          </a:fillRef>
+          <a:effectRef idx="2">
+            <a:schemeClr val="accent1"/>
+          </a:effectRef>
+          <a:fontRef idx="minor">
+            <a:schemeClr val="lt1"/>
+          </a:fontRef>
+        </p:style>
+        <p:txBody>
+          <a:bodyPr rtlCol="0" anchor="ctr"/>
+          <a:lstStyle/>
+          <a:p>
+            <a:pPr algn="ctr"/>
+          </a:p>
+        </p:txBody>
+      </p:sp>
+      <p:sp>
+        <p:nvSpPr>
           <p:cNvPr id="11" name="TextBox 10"/>
           <p:cNvSpPr txBox="1"/>
           <p:nvPr/>
         </p:nvSpPr>
         <p:spPr>
           <a:xfrm>
-            <a:off x="1100000" y="10800000"/>
-            <a:ext cx="20000000" cy="1400000"/>
+            <a:off x="1200000" y="4150000"/>
+            <a:ext cx="21800000" cy="1100000"/>
           </a:xfrm>
           <a:prstGeom prst="rect">
             <a:avLst/>
@@ -6745,18 +7621,272 @@
           <a:noFill/>
         </p:spPr>
         <p:txBody>
-          <a:bodyPr wrap="square" anchor="t"/>
+          <a:bodyPr wrap="square" anchor="ctr">
+            <a:spAutoFit/>
+          </a:bodyPr>
           <a:lstStyle/>
           <a:p>
             <a:pPr algn="l"/>
             <a:r>
-              <a:rPr sz="1400" b="1">
+              <a:rPr sz="2600" b="0">
                 <a:solidFill>
-                  <a:srgbClr val="C02828"/>
+                  <a:srgbClr val="333333"/>
                 </a:solidFill>
-                <a:latin typeface="Arial"/>
+                <a:latin typeface="Open Sans"/>
+                <a:ea typeface="Open Sans"/>
+                <a:cs typeface="Open Sans"/>
               </a:rPr>
-              <a:t>Внутреннее кровотечение самостоятельно не «останавливают» на месте — нужна скорая помощь.</a:t>
+              <a:t>Признаки кровопотери: слабость, жажда, бледность, холодный пот, тахикардия.</a:t>
+            </a:r>
+          </a:p>
+        </p:txBody>
+      </p:sp>
+      <p:sp>
+        <p:nvSpPr>
+          <p:cNvPr id="12" name="Rectangle 11"/>
+          <p:cNvSpPr/>
+          <p:nvPr/>
+        </p:nvSpPr>
+        <p:spPr>
+          <a:xfrm>
+            <a:off x="800000" y="5750000"/>
+            <a:ext cx="22800000" cy="1600000"/>
+          </a:xfrm>
+          <a:prstGeom prst="rect">
+            <a:avLst/>
+          </a:prstGeom>
+          <a:solidFill>
+            <a:srgbClr val="FFFFFF"/>
+          </a:solidFill>
+          <a:ln w="12700">
+            <a:solidFill>
+              <a:srgbClr val="E1E1E1"/>
+            </a:solidFill>
+          </a:ln>
+        </p:spPr>
+        <p:style>
+          <a:lnRef idx="1">
+            <a:schemeClr val="accent1"/>
+          </a:lnRef>
+          <a:fillRef idx="3">
+            <a:schemeClr val="accent1"/>
+          </a:fillRef>
+          <a:effectRef idx="2">
+            <a:schemeClr val="accent1"/>
+          </a:effectRef>
+          <a:fontRef idx="minor">
+            <a:schemeClr val="lt1"/>
+          </a:fontRef>
+        </p:style>
+        <p:txBody>
+          <a:bodyPr rtlCol="0" anchor="ctr"/>
+          <a:lstStyle/>
+          <a:p>
+            <a:pPr algn="ctr"/>
+          </a:p>
+        </p:txBody>
+      </p:sp>
+      <p:sp>
+        <p:nvSpPr>
+          <p:cNvPr id="13" name="Rectangle 12"/>
+          <p:cNvSpPr/>
+          <p:nvPr/>
+        </p:nvSpPr>
+        <p:spPr>
+          <a:xfrm>
+            <a:off x="800000" y="5750000"/>
+            <a:ext cx="120000" cy="1600000"/>
+          </a:xfrm>
+          <a:prstGeom prst="rect">
+            <a:avLst/>
+          </a:prstGeom>
+          <a:solidFill>
+            <a:srgbClr val="0055AA"/>
+          </a:solidFill>
+          <a:ln>
+            <a:noFill/>
+          </a:ln>
+        </p:spPr>
+        <p:style>
+          <a:lnRef idx="1">
+            <a:schemeClr val="accent1"/>
+          </a:lnRef>
+          <a:fillRef idx="3">
+            <a:schemeClr val="accent1"/>
+          </a:fillRef>
+          <a:effectRef idx="2">
+            <a:schemeClr val="accent1"/>
+          </a:effectRef>
+          <a:fontRef idx="minor">
+            <a:schemeClr val="lt1"/>
+          </a:fontRef>
+        </p:style>
+        <p:txBody>
+          <a:bodyPr rtlCol="0" anchor="ctr"/>
+          <a:lstStyle/>
+          <a:p>
+            <a:pPr algn="ctr"/>
+          </a:p>
+        </p:txBody>
+      </p:sp>
+      <p:sp>
+        <p:nvSpPr>
+          <p:cNvPr id="14" name="TextBox 13"/>
+          <p:cNvSpPr txBox="1"/>
+          <p:nvPr/>
+        </p:nvSpPr>
+        <p:spPr>
+          <a:xfrm>
+            <a:off x="1200000" y="6050000"/>
+            <a:ext cx="21800000" cy="1100000"/>
+          </a:xfrm>
+          <a:prstGeom prst="rect">
+            <a:avLst/>
+          </a:prstGeom>
+          <a:noFill/>
+        </p:spPr>
+        <p:txBody>
+          <a:bodyPr wrap="square" anchor="ctr">
+            <a:spAutoFit/>
+          </a:bodyPr>
+          <a:lstStyle/>
+          <a:p>
+            <a:pPr algn="l"/>
+            <a:r>
+              <a:rPr sz="2600" b="0">
+                <a:solidFill>
+                  <a:srgbClr val="333333"/>
+                </a:solidFill>
+                <a:latin typeface="Open Sans"/>
+                <a:ea typeface="Open Sans"/>
+                <a:cs typeface="Open Sans"/>
+              </a:rPr>
+              <a:t>Потеря &gt;30% ОЦК угрожает жизни; у детей порог ниже.</a:t>
+            </a:r>
+          </a:p>
+        </p:txBody>
+      </p:sp>
+      <p:sp>
+        <p:nvSpPr>
+          <p:cNvPr id="15" name="Rectangle 14"/>
+          <p:cNvSpPr/>
+          <p:nvPr/>
+        </p:nvSpPr>
+        <p:spPr>
+          <a:xfrm>
+            <a:off x="800000" y="7650000"/>
+            <a:ext cx="22800000" cy="1600000"/>
+          </a:xfrm>
+          <a:prstGeom prst="rect">
+            <a:avLst/>
+          </a:prstGeom>
+          <a:solidFill>
+            <a:srgbClr val="FFFFFF"/>
+          </a:solidFill>
+          <a:ln w="12700">
+            <a:solidFill>
+              <a:srgbClr val="E1E1E1"/>
+            </a:solidFill>
+          </a:ln>
+        </p:spPr>
+        <p:style>
+          <a:lnRef idx="1">
+            <a:schemeClr val="accent1"/>
+          </a:lnRef>
+          <a:fillRef idx="3">
+            <a:schemeClr val="accent1"/>
+          </a:fillRef>
+          <a:effectRef idx="2">
+            <a:schemeClr val="accent1"/>
+          </a:effectRef>
+          <a:fontRef idx="minor">
+            <a:schemeClr val="lt1"/>
+          </a:fontRef>
+        </p:style>
+        <p:txBody>
+          <a:bodyPr rtlCol="0" anchor="ctr"/>
+          <a:lstStyle/>
+          <a:p>
+            <a:pPr algn="ctr"/>
+          </a:p>
+        </p:txBody>
+      </p:sp>
+      <p:sp>
+        <p:nvSpPr>
+          <p:cNvPr id="16" name="Rectangle 15"/>
+          <p:cNvSpPr/>
+          <p:nvPr/>
+        </p:nvSpPr>
+        <p:spPr>
+          <a:xfrm>
+            <a:off x="800000" y="7650000"/>
+            <a:ext cx="120000" cy="1600000"/>
+          </a:xfrm>
+          <a:prstGeom prst="rect">
+            <a:avLst/>
+          </a:prstGeom>
+          <a:solidFill>
+            <a:srgbClr val="0055AA"/>
+          </a:solidFill>
+          <a:ln>
+            <a:noFill/>
+          </a:ln>
+        </p:spPr>
+        <p:style>
+          <a:lnRef idx="1">
+            <a:schemeClr val="accent1"/>
+          </a:lnRef>
+          <a:fillRef idx="3">
+            <a:schemeClr val="accent1"/>
+          </a:fillRef>
+          <a:effectRef idx="2">
+            <a:schemeClr val="accent1"/>
+          </a:effectRef>
+          <a:fontRef idx="minor">
+            <a:schemeClr val="lt1"/>
+          </a:fontRef>
+        </p:style>
+        <p:txBody>
+          <a:bodyPr rtlCol="0" anchor="ctr"/>
+          <a:lstStyle/>
+          <a:p>
+            <a:pPr algn="ctr"/>
+          </a:p>
+        </p:txBody>
+      </p:sp>
+      <p:sp>
+        <p:nvSpPr>
+          <p:cNvPr id="17" name="TextBox 16"/>
+          <p:cNvSpPr txBox="1"/>
+          <p:nvPr/>
+        </p:nvSpPr>
+        <p:spPr>
+          <a:xfrm>
+            <a:off x="1200000" y="7950000"/>
+            <a:ext cx="21800000" cy="1100000"/>
+          </a:xfrm>
+          <a:prstGeom prst="rect">
+            <a:avLst/>
+          </a:prstGeom>
+          <a:noFill/>
+        </p:spPr>
+        <p:txBody>
+          <a:bodyPr wrap="square" anchor="ctr">
+            <a:spAutoFit/>
+          </a:bodyPr>
+          <a:lstStyle/>
+          <a:p>
+            <a:pPr algn="l"/>
+            <a:r>
+              <a:rPr sz="2600" b="0">
+                <a:solidFill>
+                  <a:srgbClr val="333333"/>
+                </a:solidFill>
+                <a:latin typeface="Open Sans"/>
+                <a:ea typeface="Open Sans"/>
+                <a:cs typeface="Open Sans"/>
+              </a:rPr>
+              <a:t>При подозрении на внутреннее кровотечение — срочный вызов СМП.</a:t>
             </a:r>
           </a:p>
         </p:txBody>
@@ -6794,7 +7924,7 @@
             <a:avLst/>
           </a:prstGeom>
           <a:solidFill>
-            <a:srgbClr val="F7F7F7"/>
+            <a:srgbClr val="FFFFFF"/>
           </a:solidFill>
           <a:ln>
             <a:noFill/>
@@ -6830,14 +7960,14 @@
         </p:nvSpPr>
         <p:spPr>
           <a:xfrm>
-            <a:off x="23000000" y="0"/>
-            <a:ext cx="1384000" cy="13716000"/>
+            <a:off x="0" y="0"/>
+            <a:ext cx="24384000" cy="120000"/>
           </a:xfrm>
           <a:prstGeom prst="rect">
             <a:avLst/>
           </a:prstGeom>
           <a:solidFill>
-            <a:srgbClr val="D9D9D9"/>
+            <a:srgbClr val="DDDDDD"/>
           </a:solidFill>
           <a:ln>
             <a:noFill/>
@@ -6867,20 +7997,57 @@
       </p:sp>
       <p:sp>
         <p:nvSpPr>
-          <p:cNvPr id="4" name="Rectangle 3"/>
+          <p:cNvPr id="4" name="TextBox 3"/>
+          <p:cNvSpPr txBox="1"/>
+          <p:nvPr/>
+        </p:nvSpPr>
+        <p:spPr>
+          <a:xfrm>
+            <a:off x="800000" y="5500000"/>
+            <a:ext cx="22800000" cy="1200000"/>
+          </a:xfrm>
+          <a:prstGeom prst="rect">
+            <a:avLst/>
+          </a:prstGeom>
+          <a:noFill/>
+        </p:spPr>
+        <p:txBody>
+          <a:bodyPr wrap="square" anchor="t">
+            <a:spAutoFit/>
+          </a:bodyPr>
+          <a:lstStyle/>
+          <a:p>
+            <a:pPr algn="l"/>
+            <a:r>
+              <a:rPr sz="4600" b="1">
+                <a:solidFill>
+                  <a:srgbClr val="333333"/>
+                </a:solidFill>
+                <a:latin typeface="Open Sans"/>
+                <a:ea typeface="Open Sans"/>
+                <a:cs typeface="Open Sans"/>
+              </a:rPr>
+              <a:t>Спасибо за внимание</a:t>
+            </a:r>
+          </a:p>
+        </p:txBody>
+      </p:sp>
+      <p:sp>
+        <p:nvSpPr>
+          <p:cNvPr id="5" name="Rectangle 4"/>
           <p:cNvSpPr/>
           <p:nvPr/>
         </p:nvSpPr>
         <p:spPr>
           <a:xfrm>
-            <a:off x="0" y="5600000"/>
-            <a:ext cx="700000" cy="700000"/>
+            <a:off x="800000" y="6900000"/>
+            <a:ext cx="10000000" cy="20000"/>
           </a:xfrm>
           <a:prstGeom prst="rect">
             <a:avLst/>
           </a:prstGeom>
           <a:solidFill>
-            <a:srgbClr val="4D4D4D"/>
+            <a:srgbClr val="0055AA"/>
           </a:solidFill>
           <a:ln>
             <a:noFill/>
@@ -6910,47 +8077,14 @@
       </p:sp>
       <p:sp>
         <p:nvSpPr>
-          <p:cNvPr id="5" name="TextBox 4"/>
-          <p:cNvSpPr txBox="1"/>
-          <p:nvPr/>
-        </p:nvSpPr>
-        <p:spPr>
-          <a:xfrm>
-            <a:off x="0" y="5680000"/>
-            <a:ext cx="700000" cy="550000"/>
-          </a:xfrm>
-          <a:prstGeom prst="rect">
-            <a:avLst/>
-          </a:prstGeom>
-          <a:noFill/>
-        </p:spPr>
-        <p:txBody>
-          <a:bodyPr wrap="square" anchor="ctr"/>
-          <a:lstStyle/>
-          <a:p>
-            <a:pPr algn="ctr"/>
-            <a:r>
-              <a:rPr sz="1800" b="1">
-                <a:solidFill>
-                  <a:srgbClr val="FFFFFF"/>
-                </a:solidFill>
-                <a:latin typeface="Arial"/>
-              </a:rPr>
-              <a:t>9</a:t>
-            </a:r>
-          </a:p>
-        </p:txBody>
-      </p:sp>
-      <p:sp>
-        <p:nvSpPr>
           <p:cNvPr id="6" name="TextBox 5"/>
           <p:cNvSpPr txBox="1"/>
           <p:nvPr/>
         </p:nvSpPr>
         <p:spPr>
           <a:xfrm>
-            <a:off x="900000" y="500000"/>
-            <a:ext cx="21000000" cy="900000"/>
+            <a:off x="800000" y="7200000"/>
+            <a:ext cx="22800000" cy="500000"/>
           </a:xfrm>
           <a:prstGeom prst="rect">
             <a:avLst/>
@@ -6958,578 +8092,22 @@
           <a:noFill/>
         </p:spPr>
         <p:txBody>
-          <a:bodyPr wrap="square" anchor="t"/>
+          <a:bodyPr wrap="square" anchor="t">
+            <a:spAutoFit/>
+          </a:bodyPr>
           <a:lstStyle/>
           <a:p>
             <a:pPr algn="l"/>
             <a:r>
-              <a:rPr sz="2800" b="1">
+              <a:rPr sz="2000" b="0">
                 <a:solidFill>
-                  <a:srgbClr val="2C2C2C"/>
+                  <a:srgbClr val="333333"/>
                 </a:solidFill>
-                <a:latin typeface="Arial"/>
+                <a:latin typeface="Open Sans"/>
+                <a:ea typeface="Open Sans"/>
+                <a:cs typeface="Open Sans"/>
               </a:rPr>
-              <a:t>КРАТКОЕ РЕЗЮМЕ</a:t>
-            </a:r>
-          </a:p>
-        </p:txBody>
-      </p:sp>
-      <p:sp>
-        <p:nvSpPr>
-          <p:cNvPr id="7" name="Rectangle 6"/>
-          <p:cNvSpPr/>
-          <p:nvPr/>
-        </p:nvSpPr>
-        <p:spPr>
-          <a:xfrm>
-            <a:off x="900000" y="1350000"/>
-            <a:ext cx="20000000" cy="25000"/>
-          </a:xfrm>
-          <a:prstGeom prst="rect">
-            <a:avLst/>
-          </a:prstGeom>
-          <a:solidFill>
-            <a:srgbClr val="B8B8B8"/>
-          </a:solidFill>
-          <a:ln>
-            <a:noFill/>
-          </a:ln>
-        </p:spPr>
-        <p:style>
-          <a:lnRef idx="1">
-            <a:schemeClr val="accent1"/>
-          </a:lnRef>
-          <a:fillRef idx="3">
-            <a:schemeClr val="accent1"/>
-          </a:fillRef>
-          <a:effectRef idx="2">
-            <a:schemeClr val="accent1"/>
-          </a:effectRef>
-          <a:fontRef idx="minor">
-            <a:schemeClr val="lt1"/>
-          </a:fontRef>
-        </p:style>
-        <p:txBody>
-          <a:bodyPr rtlCol="0" anchor="ctr"/>
-          <a:lstStyle/>
-          <a:p>
-            <a:pPr algn="ctr"/>
-          </a:p>
-        </p:txBody>
-      </p:sp>
-      <p:sp>
-        <p:nvSpPr>
-          <p:cNvPr id="8" name="TextBox 7"/>
-          <p:cNvSpPr txBox="1"/>
-          <p:nvPr/>
-        </p:nvSpPr>
-        <p:spPr>
-          <a:xfrm>
-            <a:off x="900000" y="1450000"/>
-            <a:ext cx="20000000" cy="350000"/>
-          </a:xfrm>
-          <a:prstGeom prst="rect">
-            <a:avLst/>
-          </a:prstGeom>
-          <a:noFill/>
-        </p:spPr>
-        <p:txBody>
-          <a:bodyPr wrap="square" anchor="t"/>
-          <a:lstStyle/>
-          <a:p>
-            <a:pPr algn="l"/>
-            <a:r>
-              <a:rPr sz="1200" b="0">
-                <a:solidFill>
-                  <a:srgbClr val="6F6F6F"/>
-                </a:solidFill>
-                <a:latin typeface="Arial"/>
-              </a:rPr>
-              <a:t>Оказание первой помощи при наружных кровотечениях</a:t>
-            </a:r>
-          </a:p>
-        </p:txBody>
-      </p:sp>
-      <p:sp>
-        <p:nvSpPr>
-          <p:cNvPr id="9" name="Rectangle 8"/>
-          <p:cNvSpPr/>
-          <p:nvPr/>
-        </p:nvSpPr>
-        <p:spPr>
-          <a:xfrm>
-            <a:off x="900000" y="2000000"/>
-            <a:ext cx="20500000" cy="1400000"/>
-          </a:xfrm>
-          <a:prstGeom prst="rect">
-            <a:avLst/>
-          </a:prstGeom>
-          <a:solidFill>
-            <a:srgbClr val="FFFFFF"/>
-          </a:solidFill>
-          <a:ln>
-            <a:solidFill>
-              <a:srgbClr val="B8B8B8"/>
-            </a:solidFill>
-          </a:ln>
-        </p:spPr>
-        <p:style>
-          <a:lnRef idx="1">
-            <a:schemeClr val="accent1"/>
-          </a:lnRef>
-          <a:fillRef idx="3">
-            <a:schemeClr val="accent1"/>
-          </a:fillRef>
-          <a:effectRef idx="2">
-            <a:schemeClr val="accent1"/>
-          </a:effectRef>
-          <a:fontRef idx="minor">
-            <a:schemeClr val="lt1"/>
-          </a:fontRef>
-        </p:style>
-        <p:txBody>
-          <a:bodyPr rtlCol="0" anchor="ctr"/>
-          <a:lstStyle/>
-          <a:p>
-            <a:pPr algn="ctr"/>
-          </a:p>
-        </p:txBody>
-      </p:sp>
-      <p:sp>
-        <p:nvSpPr>
-          <p:cNvPr id="10" name="Rectangle 9"/>
-          <p:cNvSpPr/>
-          <p:nvPr/>
-        </p:nvSpPr>
-        <p:spPr>
-          <a:xfrm>
-            <a:off x="900000" y="2000000"/>
-            <a:ext cx="120000" cy="1400000"/>
-          </a:xfrm>
-          <a:prstGeom prst="rect">
-            <a:avLst/>
-          </a:prstGeom>
-          <a:solidFill>
-            <a:srgbClr val="0082B9"/>
-          </a:solidFill>
-          <a:ln>
-            <a:noFill/>
-          </a:ln>
-        </p:spPr>
-        <p:style>
-          <a:lnRef idx="1">
-            <a:schemeClr val="accent1"/>
-          </a:lnRef>
-          <a:fillRef idx="3">
-            <a:schemeClr val="accent1"/>
-          </a:fillRef>
-          <a:effectRef idx="2">
-            <a:schemeClr val="accent1"/>
-          </a:effectRef>
-          <a:fontRef idx="minor">
-            <a:schemeClr val="lt1"/>
-          </a:fontRef>
-        </p:style>
-        <p:txBody>
-          <a:bodyPr rtlCol="0" anchor="ctr"/>
-          <a:lstStyle/>
-          <a:p>
-            <a:pPr algn="ctr"/>
-          </a:p>
-        </p:txBody>
-      </p:sp>
-      <p:sp>
-        <p:nvSpPr>
-          <p:cNvPr id="11" name="TextBox 10"/>
-          <p:cNvSpPr txBox="1"/>
-          <p:nvPr/>
-        </p:nvSpPr>
-        <p:spPr>
-          <a:xfrm>
-            <a:off x="1300000" y="2350000"/>
-            <a:ext cx="19000000" cy="800000"/>
-          </a:xfrm>
-          <a:prstGeom prst="rect">
-            <a:avLst/>
-          </a:prstGeom>
-          <a:noFill/>
-        </p:spPr>
-        <p:txBody>
-          <a:bodyPr wrap="square" anchor="ctr"/>
-          <a:lstStyle/>
-          <a:p>
-            <a:pPr algn="l"/>
-            <a:r>
-              <a:rPr sz="1600" b="0">
-                <a:solidFill>
-                  <a:srgbClr val="2C2C2C"/>
-                </a:solidFill>
-                <a:latin typeface="Arial"/>
-              </a:rPr>
-              <a:t>Артериальное — алая кровь пульсирующей струёй; венозное — тёмная струя; капиллярное — сочение.</a:t>
-            </a:r>
-          </a:p>
-        </p:txBody>
-      </p:sp>
-      <p:sp>
-        <p:nvSpPr>
-          <p:cNvPr id="12" name="Rectangle 11"/>
-          <p:cNvSpPr/>
-          <p:nvPr/>
-        </p:nvSpPr>
-        <p:spPr>
-          <a:xfrm>
-            <a:off x="900000" y="3650000"/>
-            <a:ext cx="20500000" cy="1400000"/>
-          </a:xfrm>
-          <a:prstGeom prst="rect">
-            <a:avLst/>
-          </a:prstGeom>
-          <a:solidFill>
-            <a:srgbClr val="FFFFFF"/>
-          </a:solidFill>
-          <a:ln>
-            <a:solidFill>
-              <a:srgbClr val="B8B8B8"/>
-            </a:solidFill>
-          </a:ln>
-        </p:spPr>
-        <p:style>
-          <a:lnRef idx="1">
-            <a:schemeClr val="accent1"/>
-          </a:lnRef>
-          <a:fillRef idx="3">
-            <a:schemeClr val="accent1"/>
-          </a:fillRef>
-          <a:effectRef idx="2">
-            <a:schemeClr val="accent1"/>
-          </a:effectRef>
-          <a:fontRef idx="minor">
-            <a:schemeClr val="lt1"/>
-          </a:fontRef>
-        </p:style>
-        <p:txBody>
-          <a:bodyPr rtlCol="0" anchor="ctr"/>
-          <a:lstStyle/>
-          <a:p>
-            <a:pPr algn="ctr"/>
-          </a:p>
-        </p:txBody>
-      </p:sp>
-      <p:sp>
-        <p:nvSpPr>
-          <p:cNvPr id="13" name="Rectangle 12"/>
-          <p:cNvSpPr/>
-          <p:nvPr/>
-        </p:nvSpPr>
-        <p:spPr>
-          <a:xfrm>
-            <a:off x="900000" y="3650000"/>
-            <a:ext cx="120000" cy="1400000"/>
-          </a:xfrm>
-          <a:prstGeom prst="rect">
-            <a:avLst/>
-          </a:prstGeom>
-          <a:solidFill>
-            <a:srgbClr val="0082B9"/>
-          </a:solidFill>
-          <a:ln>
-            <a:noFill/>
-          </a:ln>
-        </p:spPr>
-        <p:style>
-          <a:lnRef idx="1">
-            <a:schemeClr val="accent1"/>
-          </a:lnRef>
-          <a:fillRef idx="3">
-            <a:schemeClr val="accent1"/>
-          </a:fillRef>
-          <a:effectRef idx="2">
-            <a:schemeClr val="accent1"/>
-          </a:effectRef>
-          <a:fontRef idx="minor">
-            <a:schemeClr val="lt1"/>
-          </a:fontRef>
-        </p:style>
-        <p:txBody>
-          <a:bodyPr rtlCol="0" anchor="ctr"/>
-          <a:lstStyle/>
-          <a:p>
-            <a:pPr algn="ctr"/>
-          </a:p>
-        </p:txBody>
-      </p:sp>
-      <p:sp>
-        <p:nvSpPr>
-          <p:cNvPr id="14" name="TextBox 13"/>
-          <p:cNvSpPr txBox="1"/>
-          <p:nvPr/>
-        </p:nvSpPr>
-        <p:spPr>
-          <a:xfrm>
-            <a:off x="1300000" y="4000000"/>
-            <a:ext cx="19000000" cy="800000"/>
-          </a:xfrm>
-          <a:prstGeom prst="rect">
-            <a:avLst/>
-          </a:prstGeom>
-          <a:noFill/>
-        </p:spPr>
-        <p:txBody>
-          <a:bodyPr wrap="square" anchor="ctr"/>
-          <a:lstStyle/>
-          <a:p>
-            <a:pPr algn="l"/>
-            <a:r>
-              <a:rPr sz="1600" b="0">
-                <a:solidFill>
-                  <a:srgbClr val="2C2C2C"/>
-                </a:solidFill>
-                <a:latin typeface="Arial"/>
-              </a:rPr>
-              <a:t>Признаки кровопотери: слабость, жажда, бледность, холодный пот, тахикардия, частое дыхание.</a:t>
-            </a:r>
-          </a:p>
-        </p:txBody>
-      </p:sp>
-      <p:sp>
-        <p:nvSpPr>
-          <p:cNvPr id="15" name="Rectangle 14"/>
-          <p:cNvSpPr/>
-          <p:nvPr/>
-        </p:nvSpPr>
-        <p:spPr>
-          <a:xfrm>
-            <a:off x="900000" y="5300000"/>
-            <a:ext cx="20500000" cy="1400000"/>
-          </a:xfrm>
-          <a:prstGeom prst="rect">
-            <a:avLst/>
-          </a:prstGeom>
-          <a:solidFill>
-            <a:srgbClr val="FFFFFF"/>
-          </a:solidFill>
-          <a:ln>
-            <a:solidFill>
-              <a:srgbClr val="B8B8B8"/>
-            </a:solidFill>
-          </a:ln>
-        </p:spPr>
-        <p:style>
-          <a:lnRef idx="1">
-            <a:schemeClr val="accent1"/>
-          </a:lnRef>
-          <a:fillRef idx="3">
-            <a:schemeClr val="accent1"/>
-          </a:fillRef>
-          <a:effectRef idx="2">
-            <a:schemeClr val="accent1"/>
-          </a:effectRef>
-          <a:fontRef idx="minor">
-            <a:schemeClr val="lt1"/>
-          </a:fontRef>
-        </p:style>
-        <p:txBody>
-          <a:bodyPr rtlCol="0" anchor="ctr"/>
-          <a:lstStyle/>
-          <a:p>
-            <a:pPr algn="ctr"/>
-          </a:p>
-        </p:txBody>
-      </p:sp>
-      <p:sp>
-        <p:nvSpPr>
-          <p:cNvPr id="16" name="Rectangle 15"/>
-          <p:cNvSpPr/>
-          <p:nvPr/>
-        </p:nvSpPr>
-        <p:spPr>
-          <a:xfrm>
-            <a:off x="900000" y="5300000"/>
-            <a:ext cx="120000" cy="1400000"/>
-          </a:xfrm>
-          <a:prstGeom prst="rect">
-            <a:avLst/>
-          </a:prstGeom>
-          <a:solidFill>
-            <a:srgbClr val="0082B9"/>
-          </a:solidFill>
-          <a:ln>
-            <a:noFill/>
-          </a:ln>
-        </p:spPr>
-        <p:style>
-          <a:lnRef idx="1">
-            <a:schemeClr val="accent1"/>
-          </a:lnRef>
-          <a:fillRef idx="3">
-            <a:schemeClr val="accent1"/>
-          </a:fillRef>
-          <a:effectRef idx="2">
-            <a:schemeClr val="accent1"/>
-          </a:effectRef>
-          <a:fontRef idx="minor">
-            <a:schemeClr val="lt1"/>
-          </a:fontRef>
-        </p:style>
-        <p:txBody>
-          <a:bodyPr rtlCol="0" anchor="ctr"/>
-          <a:lstStyle/>
-          <a:p>
-            <a:pPr algn="ctr"/>
-          </a:p>
-        </p:txBody>
-      </p:sp>
-      <p:sp>
-        <p:nvSpPr>
-          <p:cNvPr id="17" name="TextBox 16"/>
-          <p:cNvSpPr txBox="1"/>
-          <p:nvPr/>
-        </p:nvSpPr>
-        <p:spPr>
-          <a:xfrm>
-            <a:off x="1300000" y="5650000"/>
-            <a:ext cx="19000000" cy="800000"/>
-          </a:xfrm>
-          <a:prstGeom prst="rect">
-            <a:avLst/>
-          </a:prstGeom>
-          <a:noFill/>
-        </p:spPr>
-        <p:txBody>
-          <a:bodyPr wrap="square" anchor="ctr"/>
-          <a:lstStyle/>
-          <a:p>
-            <a:pPr algn="l"/>
-            <a:r>
-              <a:rPr sz="1600" b="0">
-                <a:solidFill>
-                  <a:srgbClr val="2C2C2C"/>
-                </a:solidFill>
-                <a:latin typeface="Arial"/>
-              </a:rPr>
-              <a:t>Потеря &gt;30% ОЦК угрожает жизни; у детей порог ниже.</a:t>
-            </a:r>
-          </a:p>
-        </p:txBody>
-      </p:sp>
-      <p:sp>
-        <p:nvSpPr>
-          <p:cNvPr id="18" name="Rectangle 17"/>
-          <p:cNvSpPr/>
-          <p:nvPr/>
-        </p:nvSpPr>
-        <p:spPr>
-          <a:xfrm>
-            <a:off x="900000" y="6950000"/>
-            <a:ext cx="20500000" cy="1400000"/>
-          </a:xfrm>
-          <a:prstGeom prst="rect">
-            <a:avLst/>
-          </a:prstGeom>
-          <a:solidFill>
-            <a:srgbClr val="FFFFFF"/>
-          </a:solidFill>
-          <a:ln>
-            <a:solidFill>
-              <a:srgbClr val="B8B8B8"/>
-            </a:solidFill>
-          </a:ln>
-        </p:spPr>
-        <p:style>
-          <a:lnRef idx="1">
-            <a:schemeClr val="accent1"/>
-          </a:lnRef>
-          <a:fillRef idx="3">
-            <a:schemeClr val="accent1"/>
-          </a:fillRef>
-          <a:effectRef idx="2">
-            <a:schemeClr val="accent1"/>
-          </a:effectRef>
-          <a:fontRef idx="minor">
-            <a:schemeClr val="lt1"/>
-          </a:fontRef>
-        </p:style>
-        <p:txBody>
-          <a:bodyPr rtlCol="0" anchor="ctr"/>
-          <a:lstStyle/>
-          <a:p>
-            <a:pPr algn="ctr"/>
-          </a:p>
-        </p:txBody>
-      </p:sp>
-      <p:sp>
-        <p:nvSpPr>
-          <p:cNvPr id="19" name="Rectangle 18"/>
-          <p:cNvSpPr/>
-          <p:nvPr/>
-        </p:nvSpPr>
-        <p:spPr>
-          <a:xfrm>
-            <a:off x="900000" y="6950000"/>
-            <a:ext cx="120000" cy="1400000"/>
-          </a:xfrm>
-          <a:prstGeom prst="rect">
-            <a:avLst/>
-          </a:prstGeom>
-          <a:solidFill>
-            <a:srgbClr val="0082B9"/>
-          </a:solidFill>
-          <a:ln>
-            <a:noFill/>
-          </a:ln>
-        </p:spPr>
-        <p:style>
-          <a:lnRef idx="1">
-            <a:schemeClr val="accent1"/>
-          </a:lnRef>
-          <a:fillRef idx="3">
-            <a:schemeClr val="accent1"/>
-          </a:fillRef>
-          <a:effectRef idx="2">
-            <a:schemeClr val="accent1"/>
-          </a:effectRef>
-          <a:fontRef idx="minor">
-            <a:schemeClr val="lt1"/>
-          </a:fontRef>
-        </p:style>
-        <p:txBody>
-          <a:bodyPr rtlCol="0" anchor="ctr"/>
-          <a:lstStyle/>
-          <a:p>
-            <a:pPr algn="ctr"/>
-          </a:p>
-        </p:txBody>
-      </p:sp>
-      <p:sp>
-        <p:nvSpPr>
-          <p:cNvPr id="20" name="TextBox 19"/>
-          <p:cNvSpPr txBox="1"/>
-          <p:nvPr/>
-        </p:nvSpPr>
-        <p:spPr>
-          <a:xfrm>
-            <a:off x="1300000" y="7300000"/>
-            <a:ext cx="19000000" cy="800000"/>
-          </a:xfrm>
-          <a:prstGeom prst="rect">
-            <a:avLst/>
-          </a:prstGeom>
-          <a:noFill/>
-        </p:spPr>
-        <p:txBody>
-          <a:bodyPr wrap="square" anchor="ctr"/>
-          <a:lstStyle/>
-          <a:p>
-            <a:pPr algn="l"/>
-            <a:r>
-              <a:rPr sz="1600" b="0">
-                <a:solidFill>
-                  <a:srgbClr val="2C2C2C"/>
-                </a:solidFill>
-                <a:latin typeface="Arial"/>
-              </a:rPr>
-              <a:t>При подозрении на внутреннее кровотечение — срочный вызов СМП и щадящий режим.</a:t>
+              <a:t>Тема 2 · Оказание первой помощи при наружных кровотечениях</a:t>
             </a:r>
           </a:p>
         </p:txBody>

--- a/tema2_bleeding/Признаки_наружного_кровотечения.pptx
+++ b/tema2_bleeding/Признаки_наружного_кровотечения.pptx
@@ -4403,8 +4403,8 @@
         </p:nvSpPr>
         <p:spPr>
           <a:xfrm>
-            <a:off x="800000" y="2150000"/>
-            <a:ext cx="7200000" cy="9000000"/>
+            <a:off x="800000" y="1900000"/>
+            <a:ext cx="7433333" cy="10500000"/>
           </a:xfrm>
           <a:prstGeom prst="rect">
             <a:avLst/>
@@ -4440,49 +4440,30 @@
           </a:p>
         </p:txBody>
       </p:sp>
-      <p:sp>
-        <p:nvSpPr>
-          <p:cNvPr id="7" name="Oval 6"/>
-          <p:cNvSpPr/>
-          <p:nvPr/>
-        </p:nvSpPr>
-        <p:spPr>
-          <a:xfrm>
-            <a:off x="3600000" y="2750000"/>
-            <a:ext cx="1400000" cy="1400000"/>
-          </a:xfrm>
-          <a:prstGeom prst="ellipse">
-            <a:avLst/>
-          </a:prstGeom>
-          <a:solidFill>
-            <a:srgbClr val="CC0000"/>
-          </a:solidFill>
-          <a:ln>
-            <a:noFill/>
-          </a:ln>
-        </p:spPr>
-        <p:style>
-          <a:lnRef idx="1">
-            <a:schemeClr val="accent1"/>
-          </a:lnRef>
-          <a:fillRef idx="3">
-            <a:schemeClr val="accent1"/>
-          </a:fillRef>
-          <a:effectRef idx="2">
-            <a:schemeClr val="accent1"/>
-          </a:effectRef>
-          <a:fontRef idx="minor">
-            <a:schemeClr val="lt1"/>
-          </a:fontRef>
-        </p:style>
-        <p:txBody>
-          <a:bodyPr rtlCol="0" anchor="ctr"/>
-          <a:lstStyle/>
-          <a:p>
-            <a:pPr algn="ctr"/>
-          </a:p>
-        </p:txBody>
-      </p:sp>
+      <p:pic>
+        <p:nvPicPr>
+          <p:cNvPr id="7" name="Picture 6" descr="bleed_arterial.png"/>
+          <p:cNvPicPr>
+            <a:picLocks noChangeAspect="1"/>
+          </p:cNvPicPr>
+          <p:nvPr/>
+        </p:nvPicPr>
+        <p:blipFill>
+          <a:blip r:embed="rId2"/>
+          <a:stretch>
+            <a:fillRect/>
+          </a:stretch>
+        </p:blipFill>
+        <p:spPr>
+          <a:xfrm>
+            <a:off x="1235241" y="2000000"/>
+            <a:ext cx="6562851" cy="6360000"/>
+          </a:xfrm>
+          <a:prstGeom prst="rect">
+            <a:avLst/>
+          </a:prstGeom>
+        </p:spPr>
+      </p:pic>
       <p:sp>
         <p:nvSpPr>
           <p:cNvPr id="8" name="TextBox 7"/>
@@ -4491,45 +4472,8 @@
         </p:nvSpPr>
         <p:spPr>
           <a:xfrm>
-            <a:off x="3600000" y="2750000"/>
-            <a:ext cx="1400000" cy="1400000"/>
-          </a:xfrm>
-          <a:prstGeom prst="rect">
-            <a:avLst/>
-          </a:prstGeom>
-          <a:noFill/>
-        </p:spPr>
-        <p:txBody>
-          <a:bodyPr wrap="square" anchor="ctr">
-            <a:spAutoFit/>
-          </a:bodyPr>
-          <a:lstStyle/>
-          <a:p>
-            <a:pPr algn="ctr"/>
-            <a:r>
-              <a:rPr sz="2000" b="1">
-                <a:solidFill>
-                  <a:srgbClr val="FFFFFF"/>
-                </a:solidFill>
-                <a:latin typeface="Open Sans"/>
-                <a:ea typeface="Open Sans"/>
-                <a:cs typeface="Open Sans"/>
-              </a:rPr>
-              <a:t>А</a:t>
-            </a:r>
-          </a:p>
-        </p:txBody>
-      </p:sp>
-      <p:sp>
-        <p:nvSpPr>
-          <p:cNvPr id="9" name="TextBox 8"/>
-          <p:cNvSpPr txBox="1"/>
-          <p:nvPr/>
-        </p:nvSpPr>
-        <p:spPr>
-          <a:xfrm>
-            <a:off x="1200000" y="4550000"/>
-            <a:ext cx="6400000" cy="900000"/>
+            <a:off x="950000" y="8410000"/>
+            <a:ext cx="7133333" cy="3890000"/>
           </a:xfrm>
           <a:prstGeom prst="rect">
             <a:avLst/>
@@ -4542,9 +4486,9 @@
           </a:bodyPr>
           <a:lstStyle/>
           <a:p>
-            <a:pPr algn="ctr"/>
-            <a:r>
-              <a:rPr sz="2600" b="1">
+            <a:pPr algn="l"/>
+            <a:r>
+              <a:rPr sz="2000" b="0">
                 <a:solidFill>
                   <a:srgbClr val="333333"/>
                 </a:solidFill>
@@ -4552,45 +4496,8 @@
                 <a:ea typeface="Open Sans"/>
                 <a:cs typeface="Open Sans"/>
               </a:rPr>
-              <a:t>Артериальное</a:t>
-            </a:r>
-          </a:p>
-        </p:txBody>
-      </p:sp>
-      <p:sp>
-        <p:nvSpPr>
-          <p:cNvPr id="10" name="TextBox 9"/>
-          <p:cNvSpPr txBox="1"/>
-          <p:nvPr/>
-        </p:nvSpPr>
-        <p:spPr>
-          <a:xfrm>
-            <a:off x="1300000" y="5750000"/>
-            <a:ext cx="6200000" cy="4500000"/>
-          </a:xfrm>
-          <a:prstGeom prst="rect">
-            <a:avLst/>
-          </a:prstGeom>
-          <a:noFill/>
-        </p:spPr>
-        <p:txBody>
-          <a:bodyPr wrap="square" anchor="t">
-            <a:spAutoFit/>
-          </a:bodyPr>
-          <a:lstStyle/>
-          <a:p>
-            <a:pPr algn="ctr"/>
-            <a:r>
-              <a:rPr sz="2400" b="0">
-                <a:solidFill>
-                  <a:srgbClr val="333333"/>
-                </a:solidFill>
-                <a:latin typeface="Open Sans"/>
-                <a:ea typeface="Open Sans"/>
-                <a:cs typeface="Open Sans"/>
-              </a:rPr>
-              <a:t>Алая кровь
-пульсирующей струёй
+              <a:t>Артериальное
+Алая кровь пульсирующей струёй
 Опасность: критическая</a:t>
             </a:r>
           </a:p>
@@ -4598,14 +4505,14 @@
       </p:sp>
       <p:sp>
         <p:nvSpPr>
-          <p:cNvPr id="11" name="Rectangle 10"/>
+          <p:cNvPr id="9" name="Rectangle 8"/>
           <p:cNvSpPr/>
           <p:nvPr/>
         </p:nvSpPr>
         <p:spPr>
           <a:xfrm>
-            <a:off x="8400000" y="2150000"/>
-            <a:ext cx="7200000" cy="9000000"/>
+            <a:off x="8483333" y="1900000"/>
+            <a:ext cx="7433333" cy="10500000"/>
           </a:xfrm>
           <a:prstGeom prst="rect">
             <a:avLst/>
@@ -4641,96 +4548,40 @@
           </a:p>
         </p:txBody>
       </p:sp>
-      <p:sp>
-        <p:nvSpPr>
-          <p:cNvPr id="12" name="Oval 11"/>
-          <p:cNvSpPr/>
-          <p:nvPr/>
-        </p:nvSpPr>
-        <p:spPr>
-          <a:xfrm>
-            <a:off x="11200000" y="2750000"/>
-            <a:ext cx="1400000" cy="1400000"/>
-          </a:xfrm>
-          <a:prstGeom prst="ellipse">
-            <a:avLst/>
-          </a:prstGeom>
-          <a:solidFill>
-            <a:srgbClr val="0055AA"/>
-          </a:solidFill>
-          <a:ln>
-            <a:noFill/>
-          </a:ln>
-        </p:spPr>
-        <p:style>
-          <a:lnRef idx="1">
-            <a:schemeClr val="accent1"/>
-          </a:lnRef>
-          <a:fillRef idx="3">
-            <a:schemeClr val="accent1"/>
-          </a:fillRef>
-          <a:effectRef idx="2">
-            <a:schemeClr val="accent1"/>
-          </a:effectRef>
-          <a:fontRef idx="minor">
-            <a:schemeClr val="lt1"/>
-          </a:fontRef>
-        </p:style>
-        <p:txBody>
-          <a:bodyPr rtlCol="0" anchor="ctr"/>
-          <a:lstStyle/>
-          <a:p>
-            <a:pPr algn="ctr"/>
-          </a:p>
-        </p:txBody>
-      </p:sp>
-      <p:sp>
-        <p:nvSpPr>
-          <p:cNvPr id="13" name="TextBox 12"/>
+      <p:pic>
+        <p:nvPicPr>
+          <p:cNvPr id="10" name="Picture 9" descr="bleed_venous.png"/>
+          <p:cNvPicPr>
+            <a:picLocks noChangeAspect="1"/>
+          </p:cNvPicPr>
+          <p:nvPr/>
+        </p:nvPicPr>
+        <p:blipFill>
+          <a:blip r:embed="rId3"/>
+          <a:stretch>
+            <a:fillRect/>
+          </a:stretch>
+        </p:blipFill>
+        <p:spPr>
+          <a:xfrm>
+            <a:off x="8769418" y="2000000"/>
+            <a:ext cx="6861163" cy="6360000"/>
+          </a:xfrm>
+          <a:prstGeom prst="rect">
+            <a:avLst/>
+          </a:prstGeom>
+        </p:spPr>
+      </p:pic>
+      <p:sp>
+        <p:nvSpPr>
+          <p:cNvPr id="11" name="TextBox 10"/>
           <p:cNvSpPr txBox="1"/>
           <p:nvPr/>
         </p:nvSpPr>
         <p:spPr>
           <a:xfrm>
-            <a:off x="11200000" y="2750000"/>
-            <a:ext cx="1400000" cy="1400000"/>
-          </a:xfrm>
-          <a:prstGeom prst="rect">
-            <a:avLst/>
-          </a:prstGeom>
-          <a:noFill/>
-        </p:spPr>
-        <p:txBody>
-          <a:bodyPr wrap="square" anchor="ctr">
-            <a:spAutoFit/>
-          </a:bodyPr>
-          <a:lstStyle/>
-          <a:p>
-            <a:pPr algn="ctr"/>
-            <a:r>
-              <a:rPr sz="2000" b="1">
-                <a:solidFill>
-                  <a:srgbClr val="FFFFFF"/>
-                </a:solidFill>
-                <a:latin typeface="Open Sans"/>
-                <a:ea typeface="Open Sans"/>
-                <a:cs typeface="Open Sans"/>
-              </a:rPr>
-              <a:t>В</a:t>
-            </a:r>
-          </a:p>
-        </p:txBody>
-      </p:sp>
-      <p:sp>
-        <p:nvSpPr>
-          <p:cNvPr id="14" name="TextBox 13"/>
-          <p:cNvSpPr txBox="1"/>
-          <p:nvPr/>
-        </p:nvSpPr>
-        <p:spPr>
-          <a:xfrm>
-            <a:off x="8800000" y="4550000"/>
-            <a:ext cx="6400000" cy="900000"/>
+            <a:off x="8633333" y="8410000"/>
+            <a:ext cx="7133333" cy="3890000"/>
           </a:xfrm>
           <a:prstGeom prst="rect">
             <a:avLst/>
@@ -4743,9 +4594,9 @@
           </a:bodyPr>
           <a:lstStyle/>
           <a:p>
-            <a:pPr algn="ctr"/>
-            <a:r>
-              <a:rPr sz="2600" b="1">
+            <a:pPr algn="l"/>
+            <a:r>
+              <a:rPr sz="2000" b="0">
                 <a:solidFill>
                   <a:srgbClr val="333333"/>
                 </a:solidFill>
@@ -4753,45 +4604,8 @@
                 <a:ea typeface="Open Sans"/>
                 <a:cs typeface="Open Sans"/>
               </a:rPr>
-              <a:t>Венозное</a:t>
-            </a:r>
-          </a:p>
-        </p:txBody>
-      </p:sp>
-      <p:sp>
-        <p:nvSpPr>
-          <p:cNvPr id="15" name="TextBox 14"/>
-          <p:cNvSpPr txBox="1"/>
-          <p:nvPr/>
-        </p:nvSpPr>
-        <p:spPr>
-          <a:xfrm>
-            <a:off x="8900000" y="5750000"/>
-            <a:ext cx="6200000" cy="4500000"/>
-          </a:xfrm>
-          <a:prstGeom prst="rect">
-            <a:avLst/>
-          </a:prstGeom>
-          <a:noFill/>
-        </p:spPr>
-        <p:txBody>
-          <a:bodyPr wrap="square" anchor="t">
-            <a:spAutoFit/>
-          </a:bodyPr>
-          <a:lstStyle/>
-          <a:p>
-            <a:pPr algn="ctr"/>
-            <a:r>
-              <a:rPr sz="2400" b="0">
-                <a:solidFill>
-                  <a:srgbClr val="333333"/>
-                </a:solidFill>
-                <a:latin typeface="Open Sans"/>
-                <a:ea typeface="Open Sans"/>
-                <a:cs typeface="Open Sans"/>
-              </a:rPr>
-              <a:t>Тёмная кровь
-равномерной струёй
+              <a:t>Венозное
+Тёмная кровь равномерной струёй
 Опасность: высокая</a:t>
             </a:r>
           </a:p>
@@ -4799,14 +4613,14 @@
       </p:sp>
       <p:sp>
         <p:nvSpPr>
-          <p:cNvPr id="16" name="Rectangle 15"/>
+          <p:cNvPr id="12" name="Rectangle 11"/>
           <p:cNvSpPr/>
           <p:nvPr/>
         </p:nvSpPr>
         <p:spPr>
           <a:xfrm>
-            <a:off x="16000000" y="2150000"/>
-            <a:ext cx="7200000" cy="9000000"/>
+            <a:off x="16166666" y="1900000"/>
+            <a:ext cx="7433333" cy="10500000"/>
           </a:xfrm>
           <a:prstGeom prst="rect">
             <a:avLst/>
@@ -4842,96 +4656,40 @@
           </a:p>
         </p:txBody>
       </p:sp>
-      <p:sp>
-        <p:nvSpPr>
-          <p:cNvPr id="17" name="Oval 16"/>
-          <p:cNvSpPr/>
-          <p:nvPr/>
-        </p:nvSpPr>
-        <p:spPr>
-          <a:xfrm>
-            <a:off x="18800000" y="2750000"/>
-            <a:ext cx="1400000" cy="1400000"/>
-          </a:xfrm>
-          <a:prstGeom prst="ellipse">
-            <a:avLst/>
-          </a:prstGeom>
-          <a:solidFill>
-            <a:srgbClr val="DDDDDD"/>
-          </a:solidFill>
-          <a:ln>
-            <a:noFill/>
-          </a:ln>
-        </p:spPr>
-        <p:style>
-          <a:lnRef idx="1">
-            <a:schemeClr val="accent1"/>
-          </a:lnRef>
-          <a:fillRef idx="3">
-            <a:schemeClr val="accent1"/>
-          </a:fillRef>
-          <a:effectRef idx="2">
-            <a:schemeClr val="accent1"/>
-          </a:effectRef>
-          <a:fontRef idx="minor">
-            <a:schemeClr val="lt1"/>
-          </a:fontRef>
-        </p:style>
-        <p:txBody>
-          <a:bodyPr rtlCol="0" anchor="ctr"/>
-          <a:lstStyle/>
-          <a:p>
-            <a:pPr algn="ctr"/>
-          </a:p>
-        </p:txBody>
-      </p:sp>
-      <p:sp>
-        <p:nvSpPr>
-          <p:cNvPr id="18" name="TextBox 17"/>
+      <p:pic>
+        <p:nvPicPr>
+          <p:cNvPr id="13" name="Picture 12" descr="bleed_capillary.png"/>
+          <p:cNvPicPr>
+            <a:picLocks noChangeAspect="1"/>
+          </p:cNvPicPr>
+          <p:nvPr/>
+        </p:nvPicPr>
+        <p:blipFill>
+          <a:blip r:embed="rId4"/>
+          <a:stretch>
+            <a:fillRect/>
+          </a:stretch>
+        </p:blipFill>
+        <p:spPr>
+          <a:xfrm>
+            <a:off x="16452751" y="2000000"/>
+            <a:ext cx="6861163" cy="6360000"/>
+          </a:xfrm>
+          <a:prstGeom prst="rect">
+            <a:avLst/>
+          </a:prstGeom>
+        </p:spPr>
+      </p:pic>
+      <p:sp>
+        <p:nvSpPr>
+          <p:cNvPr id="14" name="TextBox 13"/>
           <p:cNvSpPr txBox="1"/>
           <p:nvPr/>
         </p:nvSpPr>
         <p:spPr>
           <a:xfrm>
-            <a:off x="18800000" y="2750000"/>
-            <a:ext cx="1400000" cy="1400000"/>
-          </a:xfrm>
-          <a:prstGeom prst="rect">
-            <a:avLst/>
-          </a:prstGeom>
-          <a:noFill/>
-        </p:spPr>
-        <p:txBody>
-          <a:bodyPr wrap="square" anchor="ctr">
-            <a:spAutoFit/>
-          </a:bodyPr>
-          <a:lstStyle/>
-          <a:p>
-            <a:pPr algn="ctr"/>
-            <a:r>
-              <a:rPr sz="2000" b="1">
-                <a:solidFill>
-                  <a:srgbClr val="FFFFFF"/>
-                </a:solidFill>
-                <a:latin typeface="Open Sans"/>
-                <a:ea typeface="Open Sans"/>
-                <a:cs typeface="Open Sans"/>
-              </a:rPr>
-              <a:t>К</a:t>
-            </a:r>
-          </a:p>
-        </p:txBody>
-      </p:sp>
-      <p:sp>
-        <p:nvSpPr>
-          <p:cNvPr id="19" name="TextBox 18"/>
-          <p:cNvSpPr txBox="1"/>
-          <p:nvPr/>
-        </p:nvSpPr>
-        <p:spPr>
-          <a:xfrm>
-            <a:off x="16400000" y="4550000"/>
-            <a:ext cx="6400000" cy="900000"/>
+            <a:off x="16316666" y="8410000"/>
+            <a:ext cx="7133333" cy="3890000"/>
           </a:xfrm>
           <a:prstGeom prst="rect">
             <a:avLst/>
@@ -4944,9 +4702,9 @@
           </a:bodyPr>
           <a:lstStyle/>
           <a:p>
-            <a:pPr algn="ctr"/>
-            <a:r>
-              <a:rPr sz="2600" b="1">
+            <a:pPr algn="l"/>
+            <a:r>
+              <a:rPr sz="2000" b="0">
                 <a:solidFill>
                   <a:srgbClr val="333333"/>
                 </a:solidFill>
@@ -4954,44 +4712,8 @@
                 <a:ea typeface="Open Sans"/>
                 <a:cs typeface="Open Sans"/>
               </a:rPr>
-              <a:t>Капиллярное</a:t>
-            </a:r>
-          </a:p>
-        </p:txBody>
-      </p:sp>
-      <p:sp>
-        <p:nvSpPr>
-          <p:cNvPr id="20" name="TextBox 19"/>
-          <p:cNvSpPr txBox="1"/>
-          <p:nvPr/>
-        </p:nvSpPr>
-        <p:spPr>
-          <a:xfrm>
-            <a:off x="16500000" y="5750000"/>
-            <a:ext cx="6200000" cy="4500000"/>
-          </a:xfrm>
-          <a:prstGeom prst="rect">
-            <a:avLst/>
-          </a:prstGeom>
-          <a:noFill/>
-        </p:spPr>
-        <p:txBody>
-          <a:bodyPr wrap="square" anchor="t">
-            <a:spAutoFit/>
-          </a:bodyPr>
-          <a:lstStyle/>
-          <a:p>
-            <a:pPr algn="ctr"/>
-            <a:r>
-              <a:rPr sz="2400" b="0">
-                <a:solidFill>
-                  <a:srgbClr val="333333"/>
-                </a:solidFill>
-                <a:latin typeface="Open Sans"/>
-                <a:ea typeface="Open Sans"/>
-                <a:cs typeface="Open Sans"/>
-              </a:rPr>
-              <a:t>Сочится по поверхности
+              <a:t>Капиллярное
+Сочится по поверхности
 Опасность: обычно низкая</a:t>
             </a:r>
           </a:p>

--- a/tema2_bleeding/Признаки_наружного_кровотечения.pptx
+++ b/tema2_bleeding/Признаки_наружного_кровотечения.pptx
@@ -3141,100 +3141,14 @@
       </p:sp>
       <p:sp>
         <p:nvSpPr>
-          <p:cNvPr id="3" name="Rectangle 2"/>
-          <p:cNvSpPr/>
-          <p:nvPr/>
-        </p:nvSpPr>
-        <p:spPr>
-          <a:xfrm>
-            <a:off x="0" y="0"/>
-            <a:ext cx="24384000" cy="120000"/>
-          </a:xfrm>
-          <a:prstGeom prst="rect">
-            <a:avLst/>
-          </a:prstGeom>
-          <a:solidFill>
-            <a:srgbClr val="DDDDDD"/>
-          </a:solidFill>
-          <a:ln>
-            <a:noFill/>
-          </a:ln>
-        </p:spPr>
-        <p:style>
-          <a:lnRef idx="1">
-            <a:schemeClr val="accent1"/>
-          </a:lnRef>
-          <a:fillRef idx="3">
-            <a:schemeClr val="accent1"/>
-          </a:fillRef>
-          <a:effectRef idx="2">
-            <a:schemeClr val="accent1"/>
-          </a:effectRef>
-          <a:fontRef idx="minor">
-            <a:schemeClr val="lt1"/>
-          </a:fontRef>
-        </p:style>
-        <p:txBody>
-          <a:bodyPr rtlCol="0" anchor="ctr"/>
-          <a:lstStyle/>
-          <a:p>
-            <a:pPr algn="ctr"/>
-          </a:p>
-        </p:txBody>
-      </p:sp>
-      <p:sp>
-        <p:nvSpPr>
-          <p:cNvPr id="4" name="Rectangle 3"/>
-          <p:cNvSpPr/>
-          <p:nvPr/>
-        </p:nvSpPr>
-        <p:spPr>
-          <a:xfrm>
-            <a:off x="0" y="4200000"/>
-            <a:ext cx="24384000" cy="2800000"/>
-          </a:xfrm>
-          <a:prstGeom prst="rect">
-            <a:avLst/>
-          </a:prstGeom>
-          <a:solidFill>
-            <a:srgbClr val="FAFAFA"/>
-          </a:solidFill>
-          <a:ln>
-            <a:noFill/>
-          </a:ln>
-        </p:spPr>
-        <p:style>
-          <a:lnRef idx="1">
-            <a:schemeClr val="accent1"/>
-          </a:lnRef>
-          <a:fillRef idx="3">
-            <a:schemeClr val="accent1"/>
-          </a:fillRef>
-          <a:effectRef idx="2">
-            <a:schemeClr val="accent1"/>
-          </a:effectRef>
-          <a:fontRef idx="minor">
-            <a:schemeClr val="lt1"/>
-          </a:fontRef>
-        </p:style>
-        <p:txBody>
-          <a:bodyPr rtlCol="0" anchor="ctr"/>
-          <a:lstStyle/>
-          <a:p>
-            <a:pPr algn="ctr"/>
-          </a:p>
-        </p:txBody>
-      </p:sp>
-      <p:sp>
-        <p:nvSpPr>
-          <p:cNvPr id="5" name="TextBox 4"/>
+          <p:cNvPr id="3" name="TextBox 2"/>
           <p:cNvSpPr txBox="1"/>
           <p:nvPr/>
         </p:nvSpPr>
         <p:spPr>
           <a:xfrm>
-            <a:off x="800000" y="4600000"/>
-            <a:ext cx="22800000" cy="1400000"/>
+            <a:off x="360000" y="4800000"/>
+            <a:ext cx="23664000" cy="1600000"/>
           </a:xfrm>
           <a:prstGeom prst="rect">
             <a:avLst/>
@@ -3247,7 +3161,7 @@
           </a:bodyPr>
           <a:lstStyle/>
           <a:p>
-            <a:pPr algn="l"/>
+            <a:pPr algn="ctr"/>
             <a:r>
               <a:rPr sz="4600" b="1">
                 <a:solidFill>
@@ -3264,14 +3178,14 @@
       </p:sp>
       <p:sp>
         <p:nvSpPr>
-          <p:cNvPr id="6" name="Rectangle 5"/>
+          <p:cNvPr id="4" name="Rectangle 3"/>
           <p:cNvSpPr/>
           <p:nvPr/>
         </p:nvSpPr>
         <p:spPr>
           <a:xfrm>
-            <a:off x="800000" y="6200000"/>
-            <a:ext cx="12000000" cy="20000"/>
+            <a:off x="7000000" y="6600000"/>
+            <a:ext cx="10000000" cy="25000"/>
           </a:xfrm>
           <a:prstGeom prst="rect">
             <a:avLst/>
@@ -3307,14 +3221,14 @@
       </p:sp>
       <p:sp>
         <p:nvSpPr>
-          <p:cNvPr id="7" name="TextBox 6"/>
+          <p:cNvPr id="5" name="TextBox 4"/>
           <p:cNvSpPr txBox="1"/>
           <p:nvPr/>
         </p:nvSpPr>
         <p:spPr>
           <a:xfrm>
-            <a:off x="800000" y="6500000"/>
-            <a:ext cx="22800000" cy="600000"/>
+            <a:off x="360000" y="6900000"/>
+            <a:ext cx="23664000" cy="800000"/>
           </a:xfrm>
           <a:prstGeom prst="rect">
             <a:avLst/>
@@ -3327,11 +3241,11 @@
           </a:bodyPr>
           <a:lstStyle/>
           <a:p>
-            <a:pPr algn="l"/>
+            <a:pPr algn="ctr"/>
             <a:r>
               <a:rPr sz="2600" b="0">
                 <a:solidFill>
-                  <a:srgbClr val="0055AA"/>
+                  <a:srgbClr val="333333"/>
                 </a:solidFill>
                 <a:latin typeface="Open Sans"/>
                 <a:ea typeface="Open Sans"/>
@@ -3344,14 +3258,14 @@
       </p:sp>
       <p:sp>
         <p:nvSpPr>
-          <p:cNvPr id="8" name="TextBox 7"/>
+          <p:cNvPr id="6" name="TextBox 5"/>
           <p:cNvSpPr txBox="1"/>
           <p:nvPr/>
         </p:nvSpPr>
         <p:spPr>
           <a:xfrm>
-            <a:off x="800000" y="7200000"/>
-            <a:ext cx="22800000" cy="500000"/>
+            <a:off x="360000" y="7800000"/>
+            <a:ext cx="23664000" cy="500000"/>
           </a:xfrm>
           <a:prstGeom prst="rect">
             <a:avLst/>
@@ -3364,11 +3278,11 @@
           </a:bodyPr>
           <a:lstStyle/>
           <a:p>
-            <a:pPr algn="l"/>
+            <a:pPr algn="ctr"/>
             <a:r>
               <a:rPr sz="2000" b="0">
                 <a:solidFill>
-                  <a:srgbClr val="333333"/>
+                  <a:srgbClr val="0055AA"/>
                 </a:solidFill>
                 <a:latin typeface="Open Sans"/>
                 <a:ea typeface="Open Sans"/>
@@ -3442,57 +3356,14 @@
       </p:sp>
       <p:sp>
         <p:nvSpPr>
-          <p:cNvPr id="3" name="Rectangle 2"/>
-          <p:cNvSpPr/>
-          <p:nvPr/>
-        </p:nvSpPr>
-        <p:spPr>
-          <a:xfrm>
-            <a:off x="0" y="0"/>
-            <a:ext cx="24384000" cy="120000"/>
-          </a:xfrm>
-          <a:prstGeom prst="rect">
-            <a:avLst/>
-          </a:prstGeom>
-          <a:solidFill>
-            <a:srgbClr val="DDDDDD"/>
-          </a:solidFill>
-          <a:ln>
-            <a:noFill/>
-          </a:ln>
-        </p:spPr>
-        <p:style>
-          <a:lnRef idx="1">
-            <a:schemeClr val="accent1"/>
-          </a:lnRef>
-          <a:fillRef idx="3">
-            <a:schemeClr val="accent1"/>
-          </a:fillRef>
-          <a:effectRef idx="2">
-            <a:schemeClr val="accent1"/>
-          </a:effectRef>
-          <a:fontRef idx="minor">
-            <a:schemeClr val="lt1"/>
-          </a:fontRef>
-        </p:style>
-        <p:txBody>
-          <a:bodyPr rtlCol="0" anchor="ctr"/>
-          <a:lstStyle/>
-          <a:p>
-            <a:pPr algn="ctr"/>
-          </a:p>
-        </p:txBody>
-      </p:sp>
-      <p:sp>
-        <p:nvSpPr>
-          <p:cNvPr id="4" name="TextBox 3"/>
+          <p:cNvPr id="3" name="TextBox 2"/>
           <p:cNvSpPr txBox="1"/>
           <p:nvPr/>
         </p:nvSpPr>
         <p:spPr>
           <a:xfrm>
-            <a:off x="800000" y="350000"/>
-            <a:ext cx="22800000" cy="1000000"/>
+            <a:off x="360000" y="350000"/>
+            <a:ext cx="23664000" cy="1100000"/>
           </a:xfrm>
           <a:prstGeom prst="rect">
             <a:avLst/>
@@ -3505,7 +3376,7 @@
           </a:bodyPr>
           <a:lstStyle/>
           <a:p>
-            <a:pPr algn="l"/>
+            <a:pPr algn="ctr"/>
             <a:r>
               <a:rPr sz="4600" b="1">
                 <a:solidFill>
@@ -3522,14 +3393,14 @@
       </p:sp>
       <p:sp>
         <p:nvSpPr>
-          <p:cNvPr id="5" name="Rectangle 4"/>
+          <p:cNvPr id="4" name="Rectangle 3"/>
           <p:cNvSpPr/>
           <p:nvPr/>
         </p:nvSpPr>
         <p:spPr>
           <a:xfrm>
-            <a:off x="800000" y="1450000"/>
-            <a:ext cx="22800000" cy="20000"/>
+            <a:off x="360000" y="1450000"/>
+            <a:ext cx="23664000" cy="20000"/>
           </a:xfrm>
           <a:prstGeom prst="rect">
             <a:avLst/>
@@ -3565,16 +3436,16 @@
       </p:sp>
       <p:sp>
         <p:nvSpPr>
-          <p:cNvPr id="6" name="Rounded Rectangle 5"/>
+          <p:cNvPr id="5" name="Oval 4"/>
           <p:cNvSpPr/>
           <p:nvPr/>
         </p:nvSpPr>
         <p:spPr>
           <a:xfrm>
-            <a:off x="800000" y="1950000"/>
-            <a:ext cx="900000" cy="900000"/>
-          </a:xfrm>
-          <a:prstGeom prst="roundRect">
+            <a:off x="2360000" y="2000000"/>
+            <a:ext cx="700000" cy="700000"/>
+          </a:xfrm>
+          <a:prstGeom prst="ellipse">
             <a:avLst/>
           </a:prstGeom>
           <a:solidFill>
@@ -3608,14 +3479,14 @@
       </p:sp>
       <p:sp>
         <p:nvSpPr>
-          <p:cNvPr id="7" name="TextBox 6"/>
+          <p:cNvPr id="6" name="TextBox 5"/>
           <p:cNvSpPr txBox="1"/>
           <p:nvPr/>
         </p:nvSpPr>
         <p:spPr>
           <a:xfrm>
-            <a:off x="800000" y="1950000"/>
-            <a:ext cx="900000" cy="900000"/>
+            <a:off x="2360000" y="2000000"/>
+            <a:ext cx="700000" cy="700000"/>
           </a:xfrm>
           <a:prstGeom prst="rect">
             <a:avLst/>
@@ -3630,7 +3501,7 @@
           <a:p>
             <a:pPr algn="ctr"/>
             <a:r>
-              <a:rPr sz="3200" b="1">
+              <a:rPr sz="2600" b="1">
                 <a:solidFill>
                   <a:srgbClr val="FFFFFF"/>
                 </a:solidFill>
@@ -3645,59 +3516,14 @@
       </p:sp>
       <p:sp>
         <p:nvSpPr>
-          <p:cNvPr id="8" name="Rectangle 7"/>
-          <p:cNvSpPr/>
-          <p:nvPr/>
-        </p:nvSpPr>
-        <p:spPr>
-          <a:xfrm>
-            <a:off x="1900000" y="1950000"/>
-            <a:ext cx="20500000" cy="900000"/>
-          </a:xfrm>
-          <a:prstGeom prst="rect">
-            <a:avLst/>
-          </a:prstGeom>
-          <a:solidFill>
-            <a:srgbClr val="FFFFFF"/>
-          </a:solidFill>
-          <a:ln w="12700">
-            <a:solidFill>
-              <a:srgbClr val="E1E1E1"/>
-            </a:solidFill>
-          </a:ln>
-        </p:spPr>
-        <p:style>
-          <a:lnRef idx="1">
-            <a:schemeClr val="accent1"/>
-          </a:lnRef>
-          <a:fillRef idx="3">
-            <a:schemeClr val="accent1"/>
-          </a:fillRef>
-          <a:effectRef idx="2">
-            <a:schemeClr val="accent1"/>
-          </a:effectRef>
-          <a:fontRef idx="minor">
-            <a:schemeClr val="lt1"/>
-          </a:fontRef>
-        </p:style>
-        <p:txBody>
-          <a:bodyPr rtlCol="0" anchor="ctr"/>
-          <a:lstStyle/>
-          <a:p>
-            <a:pPr algn="ctr"/>
-          </a:p>
-        </p:txBody>
-      </p:sp>
-      <p:sp>
-        <p:nvSpPr>
-          <p:cNvPr id="9" name="TextBox 8"/>
+          <p:cNvPr id="7" name="TextBox 6"/>
           <p:cNvSpPr txBox="1"/>
           <p:nvPr/>
         </p:nvSpPr>
         <p:spPr>
           <a:xfrm>
-            <a:off x="2200000" y="1950000"/>
-            <a:ext cx="19500000" cy="900000"/>
+            <a:off x="3360000" y="2000000"/>
+            <a:ext cx="14000000" cy="700000"/>
           </a:xfrm>
           <a:prstGeom prst="rect">
             <a:avLst/>
@@ -3727,16 +3553,16 @@
       </p:sp>
       <p:sp>
         <p:nvSpPr>
-          <p:cNvPr id="10" name="Rounded Rectangle 9"/>
+          <p:cNvPr id="8" name="Oval 7"/>
           <p:cNvSpPr/>
           <p:nvPr/>
         </p:nvSpPr>
         <p:spPr>
           <a:xfrm>
-            <a:off x="800000" y="3150000"/>
-            <a:ext cx="900000" cy="900000"/>
-          </a:xfrm>
-          <a:prstGeom prst="roundRect">
+            <a:off x="2360000" y="3400000"/>
+            <a:ext cx="700000" cy="700000"/>
+          </a:xfrm>
+          <a:prstGeom prst="ellipse">
             <a:avLst/>
           </a:prstGeom>
           <a:solidFill>
@@ -3770,14 +3596,14 @@
       </p:sp>
       <p:sp>
         <p:nvSpPr>
-          <p:cNvPr id="11" name="TextBox 10"/>
+          <p:cNvPr id="9" name="TextBox 8"/>
           <p:cNvSpPr txBox="1"/>
           <p:nvPr/>
         </p:nvSpPr>
         <p:spPr>
           <a:xfrm>
-            <a:off x="800000" y="3150000"/>
-            <a:ext cx="900000" cy="900000"/>
+            <a:off x="2360000" y="3400000"/>
+            <a:ext cx="700000" cy="700000"/>
           </a:xfrm>
           <a:prstGeom prst="rect">
             <a:avLst/>
@@ -3792,7 +3618,7 @@
           <a:p>
             <a:pPr algn="ctr"/>
             <a:r>
-              <a:rPr sz="3200" b="1">
+              <a:rPr sz="2600" b="1">
                 <a:solidFill>
                   <a:srgbClr val="FFFFFF"/>
                 </a:solidFill>
@@ -3807,59 +3633,14 @@
       </p:sp>
       <p:sp>
         <p:nvSpPr>
-          <p:cNvPr id="12" name="Rectangle 11"/>
-          <p:cNvSpPr/>
-          <p:nvPr/>
-        </p:nvSpPr>
-        <p:spPr>
-          <a:xfrm>
-            <a:off x="1900000" y="3150000"/>
-            <a:ext cx="20500000" cy="900000"/>
-          </a:xfrm>
-          <a:prstGeom prst="rect">
-            <a:avLst/>
-          </a:prstGeom>
-          <a:solidFill>
-            <a:srgbClr val="FFFFFF"/>
-          </a:solidFill>
-          <a:ln w="12700">
-            <a:solidFill>
-              <a:srgbClr val="E1E1E1"/>
-            </a:solidFill>
-          </a:ln>
-        </p:spPr>
-        <p:style>
-          <a:lnRef idx="1">
-            <a:schemeClr val="accent1"/>
-          </a:lnRef>
-          <a:fillRef idx="3">
-            <a:schemeClr val="accent1"/>
-          </a:fillRef>
-          <a:effectRef idx="2">
-            <a:schemeClr val="accent1"/>
-          </a:effectRef>
-          <a:fontRef idx="minor">
-            <a:schemeClr val="lt1"/>
-          </a:fontRef>
-        </p:style>
-        <p:txBody>
-          <a:bodyPr rtlCol="0" anchor="ctr"/>
-          <a:lstStyle/>
-          <a:p>
-            <a:pPr algn="ctr"/>
-          </a:p>
-        </p:txBody>
-      </p:sp>
-      <p:sp>
-        <p:nvSpPr>
-          <p:cNvPr id="13" name="TextBox 12"/>
+          <p:cNvPr id="10" name="TextBox 9"/>
           <p:cNvSpPr txBox="1"/>
           <p:nvPr/>
         </p:nvSpPr>
         <p:spPr>
           <a:xfrm>
-            <a:off x="2200000" y="3150000"/>
-            <a:ext cx="19500000" cy="900000"/>
+            <a:off x="3360000" y="3400000"/>
+            <a:ext cx="14000000" cy="700000"/>
           </a:xfrm>
           <a:prstGeom prst="rect">
             <a:avLst/>
@@ -3889,16 +3670,16 @@
       </p:sp>
       <p:sp>
         <p:nvSpPr>
-          <p:cNvPr id="14" name="Rounded Rectangle 13"/>
+          <p:cNvPr id="11" name="Oval 10"/>
           <p:cNvSpPr/>
           <p:nvPr/>
         </p:nvSpPr>
         <p:spPr>
           <a:xfrm>
-            <a:off x="800000" y="4350000"/>
-            <a:ext cx="900000" cy="900000"/>
-          </a:xfrm>
-          <a:prstGeom prst="roundRect">
+            <a:off x="2360000" y="4800000"/>
+            <a:ext cx="700000" cy="700000"/>
+          </a:xfrm>
+          <a:prstGeom prst="ellipse">
             <a:avLst/>
           </a:prstGeom>
           <a:solidFill>
@@ -3932,14 +3713,14 @@
       </p:sp>
       <p:sp>
         <p:nvSpPr>
-          <p:cNvPr id="15" name="TextBox 14"/>
+          <p:cNvPr id="12" name="TextBox 11"/>
           <p:cNvSpPr txBox="1"/>
           <p:nvPr/>
         </p:nvSpPr>
         <p:spPr>
           <a:xfrm>
-            <a:off x="800000" y="4350000"/>
-            <a:ext cx="900000" cy="900000"/>
+            <a:off x="2360000" y="4800000"/>
+            <a:ext cx="700000" cy="700000"/>
           </a:xfrm>
           <a:prstGeom prst="rect">
             <a:avLst/>
@@ -3954,7 +3735,7 @@
           <a:p>
             <a:pPr algn="ctr"/>
             <a:r>
-              <a:rPr sz="3200" b="1">
+              <a:rPr sz="2600" b="1">
                 <a:solidFill>
                   <a:srgbClr val="FFFFFF"/>
                 </a:solidFill>
@@ -3969,59 +3750,14 @@
       </p:sp>
       <p:sp>
         <p:nvSpPr>
-          <p:cNvPr id="16" name="Rectangle 15"/>
-          <p:cNvSpPr/>
-          <p:nvPr/>
-        </p:nvSpPr>
-        <p:spPr>
-          <a:xfrm>
-            <a:off x="1900000" y="4350000"/>
-            <a:ext cx="20500000" cy="900000"/>
-          </a:xfrm>
-          <a:prstGeom prst="rect">
-            <a:avLst/>
-          </a:prstGeom>
-          <a:solidFill>
-            <a:srgbClr val="FFFFFF"/>
-          </a:solidFill>
-          <a:ln w="12700">
-            <a:solidFill>
-              <a:srgbClr val="E1E1E1"/>
-            </a:solidFill>
-          </a:ln>
-        </p:spPr>
-        <p:style>
-          <a:lnRef idx="1">
-            <a:schemeClr val="accent1"/>
-          </a:lnRef>
-          <a:fillRef idx="3">
-            <a:schemeClr val="accent1"/>
-          </a:fillRef>
-          <a:effectRef idx="2">
-            <a:schemeClr val="accent1"/>
-          </a:effectRef>
-          <a:fontRef idx="minor">
-            <a:schemeClr val="lt1"/>
-          </a:fontRef>
-        </p:style>
-        <p:txBody>
-          <a:bodyPr rtlCol="0" anchor="ctr"/>
-          <a:lstStyle/>
-          <a:p>
-            <a:pPr algn="ctr"/>
-          </a:p>
-        </p:txBody>
-      </p:sp>
-      <p:sp>
-        <p:nvSpPr>
-          <p:cNvPr id="17" name="TextBox 16"/>
+          <p:cNvPr id="13" name="TextBox 12"/>
           <p:cNvSpPr txBox="1"/>
           <p:nvPr/>
         </p:nvSpPr>
         <p:spPr>
           <a:xfrm>
-            <a:off x="2200000" y="4350000"/>
-            <a:ext cx="19500000" cy="900000"/>
+            <a:off x="3360000" y="4800000"/>
+            <a:ext cx="14000000" cy="700000"/>
           </a:xfrm>
           <a:prstGeom prst="rect">
             <a:avLst/>
@@ -4044,23 +3780,23 @@
                 <a:ea typeface="Open Sans"/>
                 <a:cs typeface="Open Sans"/>
               </a:rPr>
-              <a:t>Признаки острой кровопотери и объём</a:t>
-            </a:r>
-          </a:p>
-        </p:txBody>
-      </p:sp>
-      <p:sp>
-        <p:nvSpPr>
-          <p:cNvPr id="18" name="Rounded Rectangle 17"/>
+              <a:t>Признаки кровопотери и объём</a:t>
+            </a:r>
+          </a:p>
+        </p:txBody>
+      </p:sp>
+      <p:sp>
+        <p:nvSpPr>
+          <p:cNvPr id="14" name="Oval 13"/>
           <p:cNvSpPr/>
           <p:nvPr/>
         </p:nvSpPr>
         <p:spPr>
           <a:xfrm>
-            <a:off x="800000" y="5550000"/>
-            <a:ext cx="900000" cy="900000"/>
-          </a:xfrm>
-          <a:prstGeom prst="roundRect">
+            <a:off x="2360000" y="6200000"/>
+            <a:ext cx="700000" cy="700000"/>
+          </a:xfrm>
+          <a:prstGeom prst="ellipse">
             <a:avLst/>
           </a:prstGeom>
           <a:solidFill>
@@ -4094,14 +3830,14 @@
       </p:sp>
       <p:sp>
         <p:nvSpPr>
-          <p:cNvPr id="19" name="TextBox 18"/>
+          <p:cNvPr id="15" name="TextBox 14"/>
           <p:cNvSpPr txBox="1"/>
           <p:nvPr/>
         </p:nvSpPr>
         <p:spPr>
           <a:xfrm>
-            <a:off x="800000" y="5550000"/>
-            <a:ext cx="900000" cy="900000"/>
+            <a:off x="2360000" y="6200000"/>
+            <a:ext cx="700000" cy="700000"/>
           </a:xfrm>
           <a:prstGeom prst="rect">
             <a:avLst/>
@@ -4116,7 +3852,7 @@
           <a:p>
             <a:pPr algn="ctr"/>
             <a:r>
-              <a:rPr sz="3200" b="1">
+              <a:rPr sz="2600" b="1">
                 <a:solidFill>
                   <a:srgbClr val="FFFFFF"/>
                 </a:solidFill>
@@ -4131,59 +3867,14 @@
       </p:sp>
       <p:sp>
         <p:nvSpPr>
-          <p:cNvPr id="20" name="Rectangle 19"/>
-          <p:cNvSpPr/>
-          <p:nvPr/>
-        </p:nvSpPr>
-        <p:spPr>
-          <a:xfrm>
-            <a:off x="1900000" y="5550000"/>
-            <a:ext cx="20500000" cy="900000"/>
-          </a:xfrm>
-          <a:prstGeom prst="rect">
-            <a:avLst/>
-          </a:prstGeom>
-          <a:solidFill>
-            <a:srgbClr val="FFFFFF"/>
-          </a:solidFill>
-          <a:ln w="12700">
-            <a:solidFill>
-              <a:srgbClr val="E1E1E1"/>
-            </a:solidFill>
-          </a:ln>
-        </p:spPr>
-        <p:style>
-          <a:lnRef idx="1">
-            <a:schemeClr val="accent1"/>
-          </a:lnRef>
-          <a:fillRef idx="3">
-            <a:schemeClr val="accent1"/>
-          </a:fillRef>
-          <a:effectRef idx="2">
-            <a:schemeClr val="accent1"/>
-          </a:effectRef>
-          <a:fontRef idx="minor">
-            <a:schemeClr val="lt1"/>
-          </a:fontRef>
-        </p:style>
-        <p:txBody>
-          <a:bodyPr rtlCol="0" anchor="ctr"/>
-          <a:lstStyle/>
-          <a:p>
-            <a:pPr algn="ctr"/>
-          </a:p>
-        </p:txBody>
-      </p:sp>
-      <p:sp>
-        <p:nvSpPr>
-          <p:cNvPr id="21" name="TextBox 20"/>
+          <p:cNvPr id="16" name="TextBox 15"/>
           <p:cNvSpPr txBox="1"/>
           <p:nvPr/>
         </p:nvSpPr>
         <p:spPr>
           <a:xfrm>
-            <a:off x="2200000" y="5550000"/>
-            <a:ext cx="19500000" cy="900000"/>
+            <a:off x="3360000" y="6200000"/>
+            <a:ext cx="14000000" cy="700000"/>
           </a:xfrm>
           <a:prstGeom prst="rect">
             <a:avLst/>
@@ -4208,6 +3899,49 @@
               </a:rPr>
               <a:t>Скрытое (внутреннее) кровотечение</a:t>
             </a:r>
+          </a:p>
+        </p:txBody>
+      </p:sp>
+      <p:sp>
+        <p:nvSpPr>
+          <p:cNvPr id="17" name="Rectangle 16"/>
+          <p:cNvSpPr/>
+          <p:nvPr/>
+        </p:nvSpPr>
+        <p:spPr>
+          <a:xfrm>
+            <a:off x="22000000" y="1600000"/>
+            <a:ext cx="80000" cy="9000000"/>
+          </a:xfrm>
+          <a:prstGeom prst="rect">
+            <a:avLst/>
+          </a:prstGeom>
+          <a:solidFill>
+            <a:srgbClr val="DDDDDD"/>
+          </a:solidFill>
+          <a:ln>
+            <a:noFill/>
+          </a:ln>
+        </p:spPr>
+        <p:style>
+          <a:lnRef idx="1">
+            <a:schemeClr val="accent1"/>
+          </a:lnRef>
+          <a:fillRef idx="3">
+            <a:schemeClr val="accent1"/>
+          </a:fillRef>
+          <a:effectRef idx="2">
+            <a:schemeClr val="accent1"/>
+          </a:effectRef>
+          <a:fontRef idx="minor">
+            <a:schemeClr val="lt1"/>
+          </a:fontRef>
+        </p:style>
+        <p:txBody>
+          <a:bodyPr rtlCol="0" anchor="ctr"/>
+          <a:lstStyle/>
+          <a:p>
+            <a:pPr algn="ctr"/>
           </a:p>
         </p:txBody>
       </p:sp>
@@ -4274,57 +4008,14 @@
       </p:sp>
       <p:sp>
         <p:nvSpPr>
-          <p:cNvPr id="3" name="Rectangle 2"/>
-          <p:cNvSpPr/>
-          <p:nvPr/>
-        </p:nvSpPr>
-        <p:spPr>
-          <a:xfrm>
-            <a:off x="0" y="0"/>
-            <a:ext cx="24384000" cy="120000"/>
-          </a:xfrm>
-          <a:prstGeom prst="rect">
-            <a:avLst/>
-          </a:prstGeom>
-          <a:solidFill>
-            <a:srgbClr val="DDDDDD"/>
-          </a:solidFill>
-          <a:ln>
-            <a:noFill/>
-          </a:ln>
-        </p:spPr>
-        <p:style>
-          <a:lnRef idx="1">
-            <a:schemeClr val="accent1"/>
-          </a:lnRef>
-          <a:fillRef idx="3">
-            <a:schemeClr val="accent1"/>
-          </a:fillRef>
-          <a:effectRef idx="2">
-            <a:schemeClr val="accent1"/>
-          </a:effectRef>
-          <a:fontRef idx="minor">
-            <a:schemeClr val="lt1"/>
-          </a:fontRef>
-        </p:style>
-        <p:txBody>
-          <a:bodyPr rtlCol="0" anchor="ctr"/>
-          <a:lstStyle/>
-          <a:p>
-            <a:pPr algn="ctr"/>
-          </a:p>
-        </p:txBody>
-      </p:sp>
-      <p:sp>
-        <p:nvSpPr>
-          <p:cNvPr id="4" name="TextBox 3"/>
+          <p:cNvPr id="3" name="TextBox 2"/>
           <p:cNvSpPr txBox="1"/>
           <p:nvPr/>
         </p:nvSpPr>
         <p:spPr>
           <a:xfrm>
-            <a:off x="800000" y="350000"/>
-            <a:ext cx="22800000" cy="1000000"/>
+            <a:off x="360000" y="350000"/>
+            <a:ext cx="23664000" cy="1100000"/>
           </a:xfrm>
           <a:prstGeom prst="rect">
             <a:avLst/>
@@ -4354,14 +4045,14 @@
       </p:sp>
       <p:sp>
         <p:nvSpPr>
-          <p:cNvPr id="5" name="Rectangle 4"/>
+          <p:cNvPr id="4" name="Rectangle 3"/>
           <p:cNvSpPr/>
           <p:nvPr/>
         </p:nvSpPr>
         <p:spPr>
           <a:xfrm>
-            <a:off x="800000" y="1450000"/>
-            <a:ext cx="22800000" cy="20000"/>
+            <a:off x="360000" y="1450000"/>
+            <a:ext cx="23664000" cy="20000"/>
           </a:xfrm>
           <a:prstGeom prst="rect">
             <a:avLst/>
@@ -4397,14 +4088,14 @@
       </p:sp>
       <p:sp>
         <p:nvSpPr>
-          <p:cNvPr id="6" name="Rectangle 5"/>
+          <p:cNvPr id="5" name="Rectangle 4"/>
           <p:cNvSpPr/>
           <p:nvPr/>
         </p:nvSpPr>
         <p:spPr>
           <a:xfrm>
-            <a:off x="800000" y="1900000"/>
-            <a:ext cx="7433333" cy="10500000"/>
+            <a:off x="360000" y="1900000"/>
+            <a:ext cx="7721333" cy="9000000"/>
           </a:xfrm>
           <a:prstGeom prst="rect">
             <a:avLst/>
@@ -4412,7 +4103,7 @@
           <a:solidFill>
             <a:srgbClr val="FFFFFF"/>
           </a:solidFill>
-          <a:ln w="12700">
+          <a:ln w="15875">
             <a:solidFill>
               <a:srgbClr val="E1E1E1"/>
             </a:solidFill>
@@ -4442,7 +4133,7 @@
       </p:sp>
       <p:pic>
         <p:nvPicPr>
-          <p:cNvPr id="7" name="Picture 6" descr="bleed_arterial.png"/>
+          <p:cNvPr id="6" name="Picture 5" descr="bleed_arterial.png"/>
           <p:cNvPicPr>
             <a:picLocks noChangeAspect="1"/>
           </p:cNvPicPr>
@@ -4456,8 +4147,8 @@
         </p:blipFill>
         <p:spPr>
           <a:xfrm>
-            <a:off x="1235241" y="2000000"/>
-            <a:ext cx="6562851" cy="6360000"/>
+            <a:off x="1228171" y="2000000"/>
+            <a:ext cx="5984990" cy="5800000"/>
           </a:xfrm>
           <a:prstGeom prst="rect">
             <a:avLst/>
@@ -4466,14 +4157,14 @@
       </p:pic>
       <p:sp>
         <p:nvSpPr>
-          <p:cNvPr id="8" name="TextBox 7"/>
+          <p:cNvPr id="7" name="TextBox 6"/>
           <p:cNvSpPr txBox="1"/>
           <p:nvPr/>
         </p:nvSpPr>
         <p:spPr>
           <a:xfrm>
-            <a:off x="950000" y="8410000"/>
-            <a:ext cx="7133333" cy="3890000"/>
+            <a:off x="510000" y="7900000"/>
+            <a:ext cx="7421333" cy="2900000"/>
           </a:xfrm>
           <a:prstGeom prst="rect">
             <a:avLst/>
@@ -4486,7 +4177,7 @@
           </a:bodyPr>
           <a:lstStyle/>
           <a:p>
-            <a:pPr algn="l"/>
+            <a:pPr algn="ctr"/>
             <a:r>
               <a:rPr sz="2000" b="0">
                 <a:solidFill>
@@ -4497,22 +4188,21 @@
                 <a:cs typeface="Open Sans"/>
               </a:rPr>
               <a:t>Артериальное
-Алая кровь пульсирующей струёй
-Опасность: критическая</a:t>
-            </a:r>
-          </a:p>
-        </p:txBody>
-      </p:sp>
-      <p:sp>
-        <p:nvSpPr>
-          <p:cNvPr id="9" name="Rectangle 8"/>
+Алая кровь, пульсирующая струя</a:t>
+            </a:r>
+          </a:p>
+        </p:txBody>
+      </p:sp>
+      <p:sp>
+        <p:nvSpPr>
+          <p:cNvPr id="8" name="Rectangle 7"/>
           <p:cNvSpPr/>
           <p:nvPr/>
         </p:nvSpPr>
         <p:spPr>
           <a:xfrm>
-            <a:off x="8483333" y="1900000"/>
-            <a:ext cx="7433333" cy="10500000"/>
+            <a:off x="8331333" y="1900000"/>
+            <a:ext cx="7721333" cy="9000000"/>
           </a:xfrm>
           <a:prstGeom prst="rect">
             <a:avLst/>
@@ -4520,7 +4210,7 @@
           <a:solidFill>
             <a:srgbClr val="FFFFFF"/>
           </a:solidFill>
-          <a:ln w="12700">
+          <a:ln w="15875">
             <a:solidFill>
               <a:srgbClr val="E1E1E1"/>
             </a:solidFill>
@@ -4550,7 +4240,7 @@
       </p:sp>
       <p:pic>
         <p:nvPicPr>
-          <p:cNvPr id="10" name="Picture 9" descr="bleed_venous.png"/>
+          <p:cNvPr id="9" name="Picture 8" descr="bleed_venous.png"/>
           <p:cNvPicPr>
             <a:picLocks noChangeAspect="1"/>
           </p:cNvPicPr>
@@ -4564,8 +4254,8 @@
         </p:blipFill>
         <p:spPr>
           <a:xfrm>
-            <a:off x="8769418" y="2000000"/>
-            <a:ext cx="6861163" cy="6360000"/>
+            <a:off x="9063482" y="2000000"/>
+            <a:ext cx="6257035" cy="5800000"/>
           </a:xfrm>
           <a:prstGeom prst="rect">
             <a:avLst/>
@@ -4574,14 +4264,14 @@
       </p:pic>
       <p:sp>
         <p:nvSpPr>
-          <p:cNvPr id="11" name="TextBox 10"/>
+          <p:cNvPr id="10" name="TextBox 9"/>
           <p:cNvSpPr txBox="1"/>
           <p:nvPr/>
         </p:nvSpPr>
         <p:spPr>
           <a:xfrm>
-            <a:off x="8633333" y="8410000"/>
-            <a:ext cx="7133333" cy="3890000"/>
+            <a:off x="8481333" y="7900000"/>
+            <a:ext cx="7421333" cy="2900000"/>
           </a:xfrm>
           <a:prstGeom prst="rect">
             <a:avLst/>
@@ -4594,7 +4284,7 @@
           </a:bodyPr>
           <a:lstStyle/>
           <a:p>
-            <a:pPr algn="l"/>
+            <a:pPr algn="ctr"/>
             <a:r>
               <a:rPr sz="2000" b="0">
                 <a:solidFill>
@@ -4605,22 +4295,21 @@
                 <a:cs typeface="Open Sans"/>
               </a:rPr>
               <a:t>Венозное
-Тёмная кровь равномерной струёй
-Опасность: высокая</a:t>
-            </a:r>
-          </a:p>
-        </p:txBody>
-      </p:sp>
-      <p:sp>
-        <p:nvSpPr>
-          <p:cNvPr id="12" name="Rectangle 11"/>
+Тёмная кровь, равномерная струя</a:t>
+            </a:r>
+          </a:p>
+        </p:txBody>
+      </p:sp>
+      <p:sp>
+        <p:nvSpPr>
+          <p:cNvPr id="11" name="Rectangle 10"/>
           <p:cNvSpPr/>
           <p:nvPr/>
         </p:nvSpPr>
         <p:spPr>
           <a:xfrm>
-            <a:off x="16166666" y="1900000"/>
-            <a:ext cx="7433333" cy="10500000"/>
+            <a:off x="16302666" y="1900000"/>
+            <a:ext cx="7721333" cy="9000000"/>
           </a:xfrm>
           <a:prstGeom prst="rect">
             <a:avLst/>
@@ -4628,7 +4317,7 @@
           <a:solidFill>
             <a:srgbClr val="FFFFFF"/>
           </a:solidFill>
-          <a:ln w="12700">
+          <a:ln w="15875">
             <a:solidFill>
               <a:srgbClr val="E1E1E1"/>
             </a:solidFill>
@@ -4658,7 +4347,7 @@
       </p:sp>
       <p:pic>
         <p:nvPicPr>
-          <p:cNvPr id="13" name="Picture 12" descr="bleed_capillary.png"/>
+          <p:cNvPr id="12" name="Picture 11" descr="bleed_capillary.png"/>
           <p:cNvPicPr>
             <a:picLocks noChangeAspect="1"/>
           </p:cNvPicPr>
@@ -4672,8 +4361,8 @@
         </p:blipFill>
         <p:spPr>
           <a:xfrm>
-            <a:off x="16452751" y="2000000"/>
-            <a:ext cx="6861163" cy="6360000"/>
+            <a:off x="17034815" y="2000000"/>
+            <a:ext cx="6257035" cy="5800000"/>
           </a:xfrm>
           <a:prstGeom prst="rect">
             <a:avLst/>
@@ -4682,14 +4371,14 @@
       </p:pic>
       <p:sp>
         <p:nvSpPr>
-          <p:cNvPr id="14" name="TextBox 13"/>
+          <p:cNvPr id="13" name="TextBox 12"/>
           <p:cNvSpPr txBox="1"/>
           <p:nvPr/>
         </p:nvSpPr>
         <p:spPr>
           <a:xfrm>
-            <a:off x="16316666" y="8410000"/>
-            <a:ext cx="7133333" cy="3890000"/>
+            <a:off x="16452666" y="7900000"/>
+            <a:ext cx="7421333" cy="2900000"/>
           </a:xfrm>
           <a:prstGeom prst="rect">
             <a:avLst/>
@@ -4702,7 +4391,7 @@
           </a:bodyPr>
           <a:lstStyle/>
           <a:p>
-            <a:pPr algn="l"/>
+            <a:pPr algn="ctr"/>
             <a:r>
               <a:rPr sz="2000" b="0">
                 <a:solidFill>
@@ -4713,8 +4402,7 @@
                 <a:cs typeface="Open Sans"/>
               </a:rPr>
               <a:t>Капиллярное
-Сочится по поверхности
-Опасность: обычно низкая</a:t>
+Сочится по поверхности</a:t>
             </a:r>
           </a:p>
         </p:txBody>
@@ -4782,57 +4470,14 @@
       </p:sp>
       <p:sp>
         <p:nvSpPr>
-          <p:cNvPr id="3" name="Rectangle 2"/>
-          <p:cNvSpPr/>
-          <p:nvPr/>
-        </p:nvSpPr>
-        <p:spPr>
-          <a:xfrm>
-            <a:off x="0" y="0"/>
-            <a:ext cx="24384000" cy="120000"/>
-          </a:xfrm>
-          <a:prstGeom prst="rect">
-            <a:avLst/>
-          </a:prstGeom>
-          <a:solidFill>
-            <a:srgbClr val="DDDDDD"/>
-          </a:solidFill>
-          <a:ln>
-            <a:noFill/>
-          </a:ln>
-        </p:spPr>
-        <p:style>
-          <a:lnRef idx="1">
-            <a:schemeClr val="accent1"/>
-          </a:lnRef>
-          <a:fillRef idx="3">
-            <a:schemeClr val="accent1"/>
-          </a:fillRef>
-          <a:effectRef idx="2">
-            <a:schemeClr val="accent1"/>
-          </a:effectRef>
-          <a:fontRef idx="minor">
-            <a:schemeClr val="lt1"/>
-          </a:fontRef>
-        </p:style>
-        <p:txBody>
-          <a:bodyPr rtlCol="0" anchor="ctr"/>
-          <a:lstStyle/>
-          <a:p>
-            <a:pPr algn="ctr"/>
-          </a:p>
-        </p:txBody>
-      </p:sp>
-      <p:sp>
-        <p:nvSpPr>
-          <p:cNvPr id="4" name="TextBox 3"/>
+          <p:cNvPr id="3" name="TextBox 2"/>
           <p:cNvSpPr txBox="1"/>
           <p:nvPr/>
         </p:nvSpPr>
         <p:spPr>
           <a:xfrm>
-            <a:off x="800000" y="350000"/>
-            <a:ext cx="22800000" cy="1000000"/>
+            <a:off x="360000" y="350000"/>
+            <a:ext cx="23664000" cy="1100000"/>
           </a:xfrm>
           <a:prstGeom prst="rect">
             <a:avLst/>
@@ -4855,21 +4500,21 @@
                 <a:ea typeface="Open Sans"/>
                 <a:cs typeface="Open Sans"/>
               </a:rPr>
-              <a:t>Сравнительная таблица видов кровотечения</a:t>
-            </a:r>
-          </a:p>
-        </p:txBody>
-      </p:sp>
-      <p:sp>
-        <p:nvSpPr>
-          <p:cNvPr id="5" name="Rectangle 4"/>
+              <a:t>Сравнение видов кровотечения</a:t>
+            </a:r>
+          </a:p>
+        </p:txBody>
+      </p:sp>
+      <p:sp>
+        <p:nvSpPr>
+          <p:cNvPr id="4" name="Rectangle 3"/>
           <p:cNvSpPr/>
           <p:nvPr/>
         </p:nvSpPr>
         <p:spPr>
           <a:xfrm>
-            <a:off x="800000" y="1450000"/>
-            <a:ext cx="22800000" cy="20000"/>
+            <a:off x="360000" y="1450000"/>
+            <a:ext cx="23664000" cy="20000"/>
           </a:xfrm>
           <a:prstGeom prst="rect">
             <a:avLst/>
@@ -4905,15 +4550,15 @@
       </p:sp>
       <p:graphicFrame>
         <p:nvGraphicFramePr>
-          <p:cNvPr id="6" name="Table 5"/>
+          <p:cNvPr id="5" name="Table 4"/>
           <p:cNvGraphicFramePr>
             <a:graphicFrameLocks noGrp="1"/>
           </p:cNvGraphicFramePr>
           <p:nvPr/>
         </p:nvGraphicFramePr>
         <p:xfrm>
-          <a:off x="800000" y="2050000"/>
-          <a:ext cx="22800000" cy="9000000"/>
+          <a:off x="2192000" y="2000000"/>
+          <a:ext cx="20000000" cy="5500000"/>
         </p:xfrm>
         <a:graphic>
           <a:graphicData uri="http://schemas.openxmlformats.org/drawingml/2006/table">
@@ -4922,20 +4567,19 @@
                 <a:tableStyleId>{5C22544A-7EE6-4342-B048-85BDC9FD1C3A}</a:tableStyleId>
               </a:tblPr>
               <a:tblGrid>
-                <a:gridCol w="5700000"/>
-                <a:gridCol w="5700000"/>
-                <a:gridCol w="5700000"/>
-                <a:gridCol w="5700000"/>
+                <a:gridCol w="5000000"/>
+                <a:gridCol w="5000000"/>
+                <a:gridCol w="5000000"/>
+                <a:gridCol w="5000000"/>
               </a:tblGrid>
-              <a:tr h="1500000">
+              <a:tr h="1100000">
                 <a:tc>
                   <a:txBody>
                     <a:bodyPr/>
                     <a:lstStyle/>
                     <a:p>
-                      <a:pPr algn="l"/>
                       <a:r>
-                        <a:rPr sz="2200" b="1">
+                        <a:rPr sz="2600" b="1">
                           <a:solidFill>
                             <a:srgbClr val="FFFFFF"/>
                           </a:solidFill>
@@ -4949,7 +4593,7 @@
                   </a:txBody>
                   <a:tcPr>
                     <a:solidFill>
-                      <a:srgbClr val="0055AA"/>
+                      <a:srgbClr val="444444"/>
                     </a:solidFill>
                   </a:tcPr>
                 </a:tc>
@@ -4958,9 +4602,8 @@
                     <a:bodyPr/>
                     <a:lstStyle/>
                     <a:p>
-                      <a:pPr algn="l"/>
                       <a:r>
-                        <a:rPr sz="2200" b="1">
+                        <a:rPr sz="2600" b="1">
                           <a:solidFill>
                             <a:srgbClr val="FFFFFF"/>
                           </a:solidFill>
@@ -4974,7 +4617,7 @@
                   </a:txBody>
                   <a:tcPr>
                     <a:solidFill>
-                      <a:srgbClr val="0055AA"/>
+                      <a:srgbClr val="444444"/>
                     </a:solidFill>
                   </a:tcPr>
                 </a:tc>
@@ -4983,9 +4626,8 @@
                     <a:bodyPr/>
                     <a:lstStyle/>
                     <a:p>
-                      <a:pPr algn="l"/>
                       <a:r>
-                        <a:rPr sz="2200" b="1">
+                        <a:rPr sz="2600" b="1">
                           <a:solidFill>
                             <a:srgbClr val="FFFFFF"/>
                           </a:solidFill>
@@ -4999,7 +4641,7 @@
                   </a:txBody>
                   <a:tcPr>
                     <a:solidFill>
-                      <a:srgbClr val="0055AA"/>
+                      <a:srgbClr val="444444"/>
                     </a:solidFill>
                   </a:tcPr>
                 </a:tc>
@@ -5008,9 +4650,8 @@
                     <a:bodyPr/>
                     <a:lstStyle/>
                     <a:p>
-                      <a:pPr algn="l"/>
                       <a:r>
-                        <a:rPr sz="2200" b="1">
+                        <a:rPr sz="2600" b="1">
                           <a:solidFill>
                             <a:srgbClr val="FFFFFF"/>
                           </a:solidFill>
@@ -5024,18 +4665,17 @@
                   </a:txBody>
                   <a:tcPr>
                     <a:solidFill>
-                      <a:srgbClr val="0055AA"/>
+                      <a:srgbClr val="444444"/>
                     </a:solidFill>
                   </a:tcPr>
                 </a:tc>
               </a:tr>
-              <a:tr h="1500000">
+              <a:tr h="1100000">
                 <a:tc>
                   <a:txBody>
                     <a:bodyPr/>
                     <a:lstStyle/>
                     <a:p>
-                      <a:pPr algn="l"/>
                       <a:r>
                         <a:rPr sz="2200" b="0">
                           <a:solidFill>
@@ -5045,7 +4685,7 @@
                           <a:ea typeface="Open Sans"/>
                           <a:cs typeface="Open Sans"/>
                         </a:rPr>
-                        <a:t>Цвет крови</a:t>
+                        <a:t>Цвет</a:t>
                       </a:r>
                     </a:p>
                   </a:txBody>
@@ -5060,7 +4700,6 @@
                     <a:bodyPr/>
                     <a:lstStyle/>
                     <a:p>
-                      <a:pPr algn="l"/>
                       <a:r>
                         <a:rPr sz="2200" b="1">
                           <a:solidFill>
@@ -5070,7 +4709,7 @@
                           <a:ea typeface="Open Sans"/>
                           <a:cs typeface="Open Sans"/>
                         </a:rPr>
-                        <a:t>Алый, яркий</a:t>
+                        <a:t>Алый</a:t>
                       </a:r>
                     </a:p>
                   </a:txBody>
@@ -5085,7 +4724,6 @@
                     <a:bodyPr/>
                     <a:lstStyle/>
                     <a:p>
-                      <a:pPr algn="l"/>
                       <a:r>
                         <a:rPr sz="2200" b="0">
                           <a:solidFill>
@@ -5095,7 +4733,7 @@
                           <a:ea typeface="Open Sans"/>
                           <a:cs typeface="Open Sans"/>
                         </a:rPr>
-                        <a:t>Тёмный, вишнёвый</a:t>
+                        <a:t>Тёмный</a:t>
                       </a:r>
                     </a:p>
                   </a:txBody>
@@ -5110,7 +4748,6 @@
                     <a:bodyPr/>
                     <a:lstStyle/>
                     <a:p>
-                      <a:pPr algn="l"/>
                       <a:r>
                         <a:rPr sz="2200" b="0">
                           <a:solidFill>
@@ -5131,13 +4768,12 @@
                   </a:tcPr>
                 </a:tc>
               </a:tr>
-              <a:tr h="1500000">
+              <a:tr h="1100000">
                 <a:tc>
                   <a:txBody>
                     <a:bodyPr/>
                     <a:lstStyle/>
                     <a:p>
-                      <a:pPr algn="l"/>
                       <a:r>
                         <a:rPr sz="2200" b="0">
                           <a:solidFill>
@@ -5162,7 +4798,6 @@
                     <a:bodyPr/>
                     <a:lstStyle/>
                     <a:p>
-                      <a:pPr algn="l"/>
                       <a:r>
                         <a:rPr sz="2200" b="1">
                           <a:solidFill>
@@ -5187,7 +4822,6 @@
                     <a:bodyPr/>
                     <a:lstStyle/>
                     <a:p>
-                      <a:pPr algn="l"/>
                       <a:r>
                         <a:rPr sz="2200" b="0">
                           <a:solidFill>
@@ -5212,7 +4846,6 @@
                     <a:bodyPr/>
                     <a:lstStyle/>
                     <a:p>
-                      <a:pPr algn="l"/>
                       <a:r>
                         <a:rPr sz="2200" b="0">
                           <a:solidFill>
@@ -5233,13 +4866,12 @@
                   </a:tcPr>
                 </a:tc>
               </a:tr>
-              <a:tr h="1500000">
+              <a:tr h="1100000">
                 <a:tc>
                   <a:txBody>
                     <a:bodyPr/>
                     <a:lstStyle/>
                     <a:p>
-                      <a:pPr algn="l"/>
                       <a:r>
                         <a:rPr sz="2200" b="0">
                           <a:solidFill>
@@ -5264,7 +4896,6 @@
                     <a:bodyPr/>
                     <a:lstStyle/>
                     <a:p>
-                      <a:pPr algn="l"/>
                       <a:r>
                         <a:rPr sz="2200" b="0">
                           <a:solidFill>
@@ -5289,7 +4920,6 @@
                     <a:bodyPr/>
                     <a:lstStyle/>
                     <a:p>
-                      <a:pPr algn="l"/>
                       <a:r>
                         <a:rPr sz="2200" b="0">
                           <a:solidFill>
@@ -5299,7 +4929,7 @@
                           <a:ea typeface="Open Sans"/>
                           <a:cs typeface="Open Sans"/>
                         </a:rPr>
-                        <a:t>Умеренная / быстрая</a:t>
+                        <a:t>Умеренная</a:t>
                       </a:r>
                     </a:p>
                   </a:txBody>
@@ -5314,7 +4944,6 @@
                     <a:bodyPr/>
                     <a:lstStyle/>
                     <a:p>
-                      <a:pPr algn="l"/>
                       <a:r>
                         <a:rPr sz="2200" b="0">
                           <a:solidFill>
@@ -5335,13 +4964,12 @@
                   </a:tcPr>
                 </a:tc>
               </a:tr>
-              <a:tr h="1500000">
+              <a:tr h="1100000">
                 <a:tc>
                   <a:txBody>
                     <a:bodyPr/>
                     <a:lstStyle/>
                     <a:p>
-                      <a:pPr algn="l"/>
                       <a:r>
                         <a:rPr sz="2200" b="0">
                           <a:solidFill>
@@ -5366,7 +4994,6 @@
                     <a:bodyPr/>
                     <a:lstStyle/>
                     <a:p>
-                      <a:pPr algn="l"/>
                       <a:r>
                         <a:rPr sz="2200" b="1">
                           <a:solidFill>
@@ -5376,7 +5003,7 @@
                           <a:ea typeface="Open Sans"/>
                           <a:cs typeface="Open Sans"/>
                         </a:rPr>
-                        <a:t>Критическая — минуты</a:t>
+                        <a:t>Критическая</a:t>
                       </a:r>
                     </a:p>
                   </a:txBody>
@@ -5391,7 +5018,6 @@
                     <a:bodyPr/>
                     <a:lstStyle/>
                     <a:p>
-                      <a:pPr algn="l"/>
                       <a:r>
                         <a:rPr sz="2200" b="0">
                           <a:solidFill>
@@ -5401,7 +5027,7 @@
                           <a:ea typeface="Open Sans"/>
                           <a:cs typeface="Open Sans"/>
                         </a:rPr>
-                        <a:t>Высокая при крупных венах</a:t>
+                        <a:t>Высокая</a:t>
                       </a:r>
                     </a:p>
                   </a:txBody>
@@ -5416,7 +5042,6 @@
                     <a:bodyPr/>
                     <a:lstStyle/>
                     <a:p>
-                      <a:pPr algn="l"/>
                       <a:r>
                         <a:rPr sz="2200" b="0">
                           <a:solidFill>
@@ -5433,108 +5058,6 @@
                   <a:tcPr>
                     <a:solidFill>
                       <a:srgbClr val="F5F5F5"/>
-                    </a:solidFill>
-                  </a:tcPr>
-                </a:tc>
-              </a:tr>
-              <a:tr h="1500000">
-                <a:tc>
-                  <a:txBody>
-                    <a:bodyPr/>
-                    <a:lstStyle/>
-                    <a:p>
-                      <a:pPr algn="l"/>
-                      <a:r>
-                        <a:rPr sz="2200" b="0">
-                          <a:solidFill>
-                            <a:srgbClr val="333333"/>
-                          </a:solidFill>
-                          <a:latin typeface="Open Sans"/>
-                          <a:ea typeface="Open Sans"/>
-                          <a:cs typeface="Open Sans"/>
-                        </a:rPr>
-                        <a:t>Приоритет</a:t>
-                      </a:r>
-                    </a:p>
-                  </a:txBody>
-                  <a:tcPr>
-                    <a:solidFill>
-                      <a:srgbClr val="FFFFFF"/>
-                    </a:solidFill>
-                  </a:tcPr>
-                </a:tc>
-                <a:tc>
-                  <a:txBody>
-                    <a:bodyPr/>
-                    <a:lstStyle/>
-                    <a:p>
-                      <a:pPr algn="l"/>
-                      <a:r>
-                        <a:rPr sz="2200" b="0">
-                          <a:solidFill>
-                            <a:srgbClr val="333333"/>
-                          </a:solidFill>
-                          <a:latin typeface="Open Sans"/>
-                          <a:ea typeface="Open Sans"/>
-                          <a:cs typeface="Open Sans"/>
-                        </a:rPr>
-                        <a:t>Немедленно</a:t>
-                      </a:r>
-                    </a:p>
-                  </a:txBody>
-                  <a:tcPr>
-                    <a:solidFill>
-                      <a:srgbClr val="FFFFFF"/>
-                    </a:solidFill>
-                  </a:tcPr>
-                </a:tc>
-                <a:tc>
-                  <a:txBody>
-                    <a:bodyPr/>
-                    <a:lstStyle/>
-                    <a:p>
-                      <a:pPr algn="l"/>
-                      <a:r>
-                        <a:rPr sz="2200" b="0">
-                          <a:solidFill>
-                            <a:srgbClr val="333333"/>
-                          </a:solidFill>
-                          <a:latin typeface="Open Sans"/>
-                          <a:ea typeface="Open Sans"/>
-                          <a:cs typeface="Open Sans"/>
-                        </a:rPr>
-                        <a:t>Быстро</a:t>
-                      </a:r>
-                    </a:p>
-                  </a:txBody>
-                  <a:tcPr>
-                    <a:solidFill>
-                      <a:srgbClr val="FFFFFF"/>
-                    </a:solidFill>
-                  </a:tcPr>
-                </a:tc>
-                <a:tc>
-                  <a:txBody>
-                    <a:bodyPr/>
-                    <a:lstStyle/>
-                    <a:p>
-                      <a:pPr algn="l"/>
-                      <a:r>
-                        <a:rPr sz="2200" b="0">
-                          <a:solidFill>
-                            <a:srgbClr val="333333"/>
-                          </a:solidFill>
-                          <a:latin typeface="Open Sans"/>
-                          <a:ea typeface="Open Sans"/>
-                          <a:cs typeface="Open Sans"/>
-                        </a:rPr>
-                        <a:t>По ситуации</a:t>
-                      </a:r>
-                    </a:p>
-                  </a:txBody>
-                  <a:tcPr>
-                    <a:solidFill>
-                      <a:srgbClr val="FFFFFF"/>
                     </a:solidFill>
                   </a:tcPr>
                 </a:tc>
@@ -5606,57 +5129,14 @@
       </p:sp>
       <p:sp>
         <p:nvSpPr>
-          <p:cNvPr id="3" name="Rectangle 2"/>
-          <p:cNvSpPr/>
-          <p:nvPr/>
-        </p:nvSpPr>
-        <p:spPr>
-          <a:xfrm>
-            <a:off x="0" y="0"/>
-            <a:ext cx="24384000" cy="120000"/>
-          </a:xfrm>
-          <a:prstGeom prst="rect">
-            <a:avLst/>
-          </a:prstGeom>
-          <a:solidFill>
-            <a:srgbClr val="DDDDDD"/>
-          </a:solidFill>
-          <a:ln>
-            <a:noFill/>
-          </a:ln>
-        </p:spPr>
-        <p:style>
-          <a:lnRef idx="1">
-            <a:schemeClr val="accent1"/>
-          </a:lnRef>
-          <a:fillRef idx="3">
-            <a:schemeClr val="accent1"/>
-          </a:fillRef>
-          <a:effectRef idx="2">
-            <a:schemeClr val="accent1"/>
-          </a:effectRef>
-          <a:fontRef idx="minor">
-            <a:schemeClr val="lt1"/>
-          </a:fontRef>
-        </p:style>
-        <p:txBody>
-          <a:bodyPr rtlCol="0" anchor="ctr"/>
-          <a:lstStyle/>
-          <a:p>
-            <a:pPr algn="ctr"/>
-          </a:p>
-        </p:txBody>
-      </p:sp>
-      <p:sp>
-        <p:nvSpPr>
-          <p:cNvPr id="4" name="TextBox 3"/>
+          <p:cNvPr id="3" name="TextBox 2"/>
           <p:cNvSpPr txBox="1"/>
           <p:nvPr/>
         </p:nvSpPr>
         <p:spPr>
           <a:xfrm>
-            <a:off x="800000" y="350000"/>
-            <a:ext cx="22800000" cy="1000000"/>
+            <a:off x="360000" y="350000"/>
+            <a:ext cx="23664000" cy="1100000"/>
           </a:xfrm>
           <a:prstGeom prst="rect">
             <a:avLst/>
@@ -5686,14 +5166,14 @@
       </p:sp>
       <p:sp>
         <p:nvSpPr>
-          <p:cNvPr id="5" name="Rectangle 4"/>
+          <p:cNvPr id="4" name="Rectangle 3"/>
           <p:cNvSpPr/>
           <p:nvPr/>
         </p:nvSpPr>
         <p:spPr>
           <a:xfrm>
-            <a:off x="800000" y="1450000"/>
-            <a:ext cx="22800000" cy="20000"/>
+            <a:off x="360000" y="1450000"/>
+            <a:ext cx="23664000" cy="20000"/>
           </a:xfrm>
           <a:prstGeom prst="rect">
             <a:avLst/>
@@ -5729,14 +5209,57 @@
       </p:sp>
       <p:sp>
         <p:nvSpPr>
+          <p:cNvPr id="5" name="Rounded Rectangle 4"/>
+          <p:cNvSpPr/>
+          <p:nvPr/>
+        </p:nvSpPr>
+        <p:spPr>
+          <a:xfrm>
+            <a:off x="360000" y="1900000"/>
+            <a:ext cx="900000" cy="900000"/>
+          </a:xfrm>
+          <a:prstGeom prst="roundRect">
+            <a:avLst/>
+          </a:prstGeom>
+          <a:solidFill>
+            <a:srgbClr val="0055AA"/>
+          </a:solidFill>
+          <a:ln>
+            <a:noFill/>
+          </a:ln>
+        </p:spPr>
+        <p:style>
+          <a:lnRef idx="1">
+            <a:schemeClr val="accent1"/>
+          </a:lnRef>
+          <a:fillRef idx="3">
+            <a:schemeClr val="accent1"/>
+          </a:fillRef>
+          <a:effectRef idx="2">
+            <a:schemeClr val="accent1"/>
+          </a:effectRef>
+          <a:fontRef idx="minor">
+            <a:schemeClr val="lt1"/>
+          </a:fontRef>
+        </p:style>
+        <p:txBody>
+          <a:bodyPr rtlCol="0" anchor="ctr"/>
+          <a:lstStyle/>
+          <a:p>
+            <a:pPr algn="ctr"/>
+          </a:p>
+        </p:txBody>
+      </p:sp>
+      <p:sp>
+        <p:nvSpPr>
           <p:cNvPr id="6" name="TextBox 5"/>
           <p:cNvSpPr txBox="1"/>
           <p:nvPr/>
         </p:nvSpPr>
         <p:spPr>
           <a:xfrm>
-            <a:off x="800000" y="1950000"/>
-            <a:ext cx="22800000" cy="8500000"/>
+            <a:off x="360000" y="1900000"/>
+            <a:ext cx="900000" cy="900000"/>
           </a:xfrm>
           <a:prstGeom prst="rect">
             <a:avLst/>
@@ -5744,16 +5267,49 @@
           <a:noFill/>
         </p:spPr>
         <p:txBody>
-          <a:bodyPr wrap="square">
+          <a:bodyPr wrap="square" anchor="ctr">
             <a:spAutoFit/>
           </a:bodyPr>
           <a:lstStyle/>
           <a:p>
-            <a:pPr algn="l">
-              <a:spcAft>
-                <a:spcPts val="1000"/>
-              </a:spcAft>
-            </a:pPr>
+            <a:pPr algn="ctr"/>
+            <a:r>
+              <a:rPr sz="2200" b="1">
+                <a:solidFill>
+                  <a:srgbClr val="FFFFFF"/>
+                </a:solidFill>
+                <a:latin typeface="Open Sans"/>
+                <a:ea typeface="Open Sans"/>
+                <a:cs typeface="Open Sans"/>
+              </a:rPr>
+              <a:t>1</a:t>
+            </a:r>
+          </a:p>
+        </p:txBody>
+      </p:sp>
+      <p:sp>
+        <p:nvSpPr>
+          <p:cNvPr id="7" name="TextBox 6"/>
+          <p:cNvSpPr txBox="1"/>
+          <p:nvPr/>
+        </p:nvSpPr>
+        <p:spPr>
+          <a:xfrm>
+            <a:off x="1560000" y="1900000"/>
+            <a:ext cx="22464000" cy="900000"/>
+          </a:xfrm>
+          <a:prstGeom prst="rect">
+            <a:avLst/>
+          </a:prstGeom>
+          <a:noFill/>
+        </p:spPr>
+        <p:txBody>
+          <a:bodyPr wrap="square" anchor="ctr">
+            <a:spAutoFit/>
+          </a:bodyPr>
+          <a:lstStyle/>
+          <a:p>
+            <a:pPr algn="l"/>
             <a:r>
               <a:rPr sz="3200" b="0">
                 <a:solidFill>
@@ -5763,15 +5319,114 @@
                 <a:ea typeface="Open Sans"/>
                 <a:cs typeface="Open Sans"/>
               </a:rPr>
-              <a:t>•  Резкая общая слабость, жажда, головокружение.</a:t>
-            </a:r>
-          </a:p>
-          <a:p>
-            <a:pPr algn="l">
-              <a:spcAft>
-                <a:spcPts val="1000"/>
-              </a:spcAft>
-            </a:pPr>
+              <a:t>Слабость, жажда, головокружение</a:t>
+            </a:r>
+          </a:p>
+        </p:txBody>
+      </p:sp>
+      <p:sp>
+        <p:nvSpPr>
+          <p:cNvPr id="8" name="Rounded Rectangle 7"/>
+          <p:cNvSpPr/>
+          <p:nvPr/>
+        </p:nvSpPr>
+        <p:spPr>
+          <a:xfrm>
+            <a:off x="360000" y="3500000"/>
+            <a:ext cx="900000" cy="900000"/>
+          </a:xfrm>
+          <a:prstGeom prst="roundRect">
+            <a:avLst/>
+          </a:prstGeom>
+          <a:solidFill>
+            <a:srgbClr val="0055AA"/>
+          </a:solidFill>
+          <a:ln>
+            <a:noFill/>
+          </a:ln>
+        </p:spPr>
+        <p:style>
+          <a:lnRef idx="1">
+            <a:schemeClr val="accent1"/>
+          </a:lnRef>
+          <a:fillRef idx="3">
+            <a:schemeClr val="accent1"/>
+          </a:fillRef>
+          <a:effectRef idx="2">
+            <a:schemeClr val="accent1"/>
+          </a:effectRef>
+          <a:fontRef idx="minor">
+            <a:schemeClr val="lt1"/>
+          </a:fontRef>
+        </p:style>
+        <p:txBody>
+          <a:bodyPr rtlCol="0" anchor="ctr"/>
+          <a:lstStyle/>
+          <a:p>
+            <a:pPr algn="ctr"/>
+          </a:p>
+        </p:txBody>
+      </p:sp>
+      <p:sp>
+        <p:nvSpPr>
+          <p:cNvPr id="9" name="TextBox 8"/>
+          <p:cNvSpPr txBox="1"/>
+          <p:nvPr/>
+        </p:nvSpPr>
+        <p:spPr>
+          <a:xfrm>
+            <a:off x="360000" y="3500000"/>
+            <a:ext cx="900000" cy="900000"/>
+          </a:xfrm>
+          <a:prstGeom prst="rect">
+            <a:avLst/>
+          </a:prstGeom>
+          <a:noFill/>
+        </p:spPr>
+        <p:txBody>
+          <a:bodyPr wrap="square" anchor="ctr">
+            <a:spAutoFit/>
+          </a:bodyPr>
+          <a:lstStyle/>
+          <a:p>
+            <a:pPr algn="ctr"/>
+            <a:r>
+              <a:rPr sz="2200" b="1">
+                <a:solidFill>
+                  <a:srgbClr val="FFFFFF"/>
+                </a:solidFill>
+                <a:latin typeface="Open Sans"/>
+                <a:ea typeface="Open Sans"/>
+                <a:cs typeface="Open Sans"/>
+              </a:rPr>
+              <a:t>2</a:t>
+            </a:r>
+          </a:p>
+        </p:txBody>
+      </p:sp>
+      <p:sp>
+        <p:nvSpPr>
+          <p:cNvPr id="10" name="TextBox 9"/>
+          <p:cNvSpPr txBox="1"/>
+          <p:nvPr/>
+        </p:nvSpPr>
+        <p:spPr>
+          <a:xfrm>
+            <a:off x="1560000" y="3500000"/>
+            <a:ext cx="22464000" cy="900000"/>
+          </a:xfrm>
+          <a:prstGeom prst="rect">
+            <a:avLst/>
+          </a:prstGeom>
+          <a:noFill/>
+        </p:spPr>
+        <p:txBody>
+          <a:bodyPr wrap="square" anchor="ctr">
+            <a:spAutoFit/>
+          </a:bodyPr>
+          <a:lstStyle/>
+          <a:p>
+            <a:pPr algn="l"/>
             <a:r>
               <a:rPr sz="3200" b="0">
                 <a:solidFill>
@@ -5781,15 +5436,114 @@
                 <a:ea typeface="Open Sans"/>
                 <a:cs typeface="Open Sans"/>
               </a:rPr>
-              <a:t>•  Мелькание «мушек» перед глазами; обморок при попытке встать.</a:t>
-            </a:r>
-          </a:p>
-          <a:p>
-            <a:pPr algn="l">
-              <a:spcAft>
-                <a:spcPts val="1000"/>
-              </a:spcAft>
-            </a:pPr>
+              <a:t>«Мушки», обморок при попытке встать</a:t>
+            </a:r>
+          </a:p>
+        </p:txBody>
+      </p:sp>
+      <p:sp>
+        <p:nvSpPr>
+          <p:cNvPr id="11" name="Rounded Rectangle 10"/>
+          <p:cNvSpPr/>
+          <p:nvPr/>
+        </p:nvSpPr>
+        <p:spPr>
+          <a:xfrm>
+            <a:off x="360000" y="5100000"/>
+            <a:ext cx="900000" cy="900000"/>
+          </a:xfrm>
+          <a:prstGeom prst="roundRect">
+            <a:avLst/>
+          </a:prstGeom>
+          <a:solidFill>
+            <a:srgbClr val="0055AA"/>
+          </a:solidFill>
+          <a:ln>
+            <a:noFill/>
+          </a:ln>
+        </p:spPr>
+        <p:style>
+          <a:lnRef idx="1">
+            <a:schemeClr val="accent1"/>
+          </a:lnRef>
+          <a:fillRef idx="3">
+            <a:schemeClr val="accent1"/>
+          </a:fillRef>
+          <a:effectRef idx="2">
+            <a:schemeClr val="accent1"/>
+          </a:effectRef>
+          <a:fontRef idx="minor">
+            <a:schemeClr val="lt1"/>
+          </a:fontRef>
+        </p:style>
+        <p:txBody>
+          <a:bodyPr rtlCol="0" anchor="ctr"/>
+          <a:lstStyle/>
+          <a:p>
+            <a:pPr algn="ctr"/>
+          </a:p>
+        </p:txBody>
+      </p:sp>
+      <p:sp>
+        <p:nvSpPr>
+          <p:cNvPr id="12" name="TextBox 11"/>
+          <p:cNvSpPr txBox="1"/>
+          <p:nvPr/>
+        </p:nvSpPr>
+        <p:spPr>
+          <a:xfrm>
+            <a:off x="360000" y="5100000"/>
+            <a:ext cx="900000" cy="900000"/>
+          </a:xfrm>
+          <a:prstGeom prst="rect">
+            <a:avLst/>
+          </a:prstGeom>
+          <a:noFill/>
+        </p:spPr>
+        <p:txBody>
+          <a:bodyPr wrap="square" anchor="ctr">
+            <a:spAutoFit/>
+          </a:bodyPr>
+          <a:lstStyle/>
+          <a:p>
+            <a:pPr algn="ctr"/>
+            <a:r>
+              <a:rPr sz="2200" b="1">
+                <a:solidFill>
+                  <a:srgbClr val="FFFFFF"/>
+                </a:solidFill>
+                <a:latin typeface="Open Sans"/>
+                <a:ea typeface="Open Sans"/>
+                <a:cs typeface="Open Sans"/>
+              </a:rPr>
+              <a:t>3</a:t>
+            </a:r>
+          </a:p>
+        </p:txBody>
+      </p:sp>
+      <p:sp>
+        <p:nvSpPr>
+          <p:cNvPr id="13" name="TextBox 12"/>
+          <p:cNvSpPr txBox="1"/>
+          <p:nvPr/>
+        </p:nvSpPr>
+        <p:spPr>
+          <a:xfrm>
+            <a:off x="1560000" y="5100000"/>
+            <a:ext cx="22464000" cy="900000"/>
+          </a:xfrm>
+          <a:prstGeom prst="rect">
+            <a:avLst/>
+          </a:prstGeom>
+          <a:noFill/>
+        </p:spPr>
+        <p:txBody>
+          <a:bodyPr wrap="square" anchor="ctr">
+            <a:spAutoFit/>
+          </a:bodyPr>
+          <a:lstStyle/>
+          <a:p>
+            <a:pPr algn="l"/>
             <a:r>
               <a:rPr sz="3200" b="0">
                 <a:solidFill>
@@ -5799,15 +5553,114 @@
                 <a:ea typeface="Open Sans"/>
                 <a:cs typeface="Open Sans"/>
               </a:rPr>
-              <a:t>•  Бледная, влажная, холодная кожа.</a:t>
-            </a:r>
-          </a:p>
-          <a:p>
-            <a:pPr algn="l">
-              <a:spcAft>
-                <a:spcPts val="1000"/>
-              </a:spcAft>
-            </a:pPr>
+              <a:t>Бледная холодная влажная кожа</a:t>
+            </a:r>
+          </a:p>
+        </p:txBody>
+      </p:sp>
+      <p:sp>
+        <p:nvSpPr>
+          <p:cNvPr id="14" name="Rounded Rectangle 13"/>
+          <p:cNvSpPr/>
+          <p:nvPr/>
+        </p:nvSpPr>
+        <p:spPr>
+          <a:xfrm>
+            <a:off x="360000" y="6700000"/>
+            <a:ext cx="900000" cy="900000"/>
+          </a:xfrm>
+          <a:prstGeom prst="roundRect">
+            <a:avLst/>
+          </a:prstGeom>
+          <a:solidFill>
+            <a:srgbClr val="0055AA"/>
+          </a:solidFill>
+          <a:ln>
+            <a:noFill/>
+          </a:ln>
+        </p:spPr>
+        <p:style>
+          <a:lnRef idx="1">
+            <a:schemeClr val="accent1"/>
+          </a:lnRef>
+          <a:fillRef idx="3">
+            <a:schemeClr val="accent1"/>
+          </a:fillRef>
+          <a:effectRef idx="2">
+            <a:schemeClr val="accent1"/>
+          </a:effectRef>
+          <a:fontRef idx="minor">
+            <a:schemeClr val="lt1"/>
+          </a:fontRef>
+        </p:style>
+        <p:txBody>
+          <a:bodyPr rtlCol="0" anchor="ctr"/>
+          <a:lstStyle/>
+          <a:p>
+            <a:pPr algn="ctr"/>
+          </a:p>
+        </p:txBody>
+      </p:sp>
+      <p:sp>
+        <p:nvSpPr>
+          <p:cNvPr id="15" name="TextBox 14"/>
+          <p:cNvSpPr txBox="1"/>
+          <p:nvPr/>
+        </p:nvSpPr>
+        <p:spPr>
+          <a:xfrm>
+            <a:off x="360000" y="6700000"/>
+            <a:ext cx="900000" cy="900000"/>
+          </a:xfrm>
+          <a:prstGeom prst="rect">
+            <a:avLst/>
+          </a:prstGeom>
+          <a:noFill/>
+        </p:spPr>
+        <p:txBody>
+          <a:bodyPr wrap="square" anchor="ctr">
+            <a:spAutoFit/>
+          </a:bodyPr>
+          <a:lstStyle/>
+          <a:p>
+            <a:pPr algn="ctr"/>
+            <a:r>
+              <a:rPr sz="2200" b="1">
+                <a:solidFill>
+                  <a:srgbClr val="FFFFFF"/>
+                </a:solidFill>
+                <a:latin typeface="Open Sans"/>
+                <a:ea typeface="Open Sans"/>
+                <a:cs typeface="Open Sans"/>
+              </a:rPr>
+              <a:t>4</a:t>
+            </a:r>
+          </a:p>
+        </p:txBody>
+      </p:sp>
+      <p:sp>
+        <p:nvSpPr>
+          <p:cNvPr id="16" name="TextBox 15"/>
+          <p:cNvSpPr txBox="1"/>
+          <p:nvPr/>
+        </p:nvSpPr>
+        <p:spPr>
+          <a:xfrm>
+            <a:off x="1560000" y="6700000"/>
+            <a:ext cx="22464000" cy="900000"/>
+          </a:xfrm>
+          <a:prstGeom prst="rect">
+            <a:avLst/>
+          </a:prstGeom>
+          <a:noFill/>
+        </p:spPr>
+        <p:txBody>
+          <a:bodyPr wrap="square" anchor="ctr">
+            <a:spAutoFit/>
+          </a:bodyPr>
+          <a:lstStyle/>
+          <a:p>
+            <a:pPr algn="l"/>
             <a:r>
               <a:rPr sz="3200" b="0">
                 <a:solidFill>
@@ -5817,43 +5670,7 @@
                 <a:ea typeface="Open Sans"/>
                 <a:cs typeface="Open Sans"/>
               </a:rPr>
-              <a:t>•  Учащённое сердцебиение и частое дыхание.</a:t>
-            </a:r>
-          </a:p>
-          <a:p>
-            <a:pPr algn="l">
-              <a:spcAft>
-                <a:spcPts val="1000"/>
-              </a:spcAft>
-            </a:pPr>
-            <a:r>
-              <a:rPr sz="3200" b="0">
-                <a:solidFill>
-                  <a:srgbClr val="333333"/>
-                </a:solidFill>
-                <a:latin typeface="Open Sans"/>
-                <a:ea typeface="Open Sans"/>
-                <a:cs typeface="Open Sans"/>
-              </a:rPr>
-              <a:t>•  Тревога, возбуждение → затем апатия.</a:t>
-            </a:r>
-          </a:p>
-          <a:p>
-            <a:pPr algn="l">
-              <a:spcAft>
-                <a:spcPts val="1000"/>
-              </a:spcAft>
-            </a:pPr>
-            <a:r>
-              <a:rPr sz="3200" b="0">
-                <a:solidFill>
-                  <a:srgbClr val="333333"/>
-                </a:solidFill>
-                <a:latin typeface="Open Sans"/>
-                <a:ea typeface="Open Sans"/>
-                <a:cs typeface="Open Sans"/>
-              </a:rPr>
-              <a:t>•  Слабый / нитевидный пульс при тяжёлой кровопотере.</a:t>
+              <a:t>Тахикардия и частое дыхание</a:t>
             </a:r>
           </a:p>
         </p:txBody>
@@ -5921,57 +5738,14 @@
       </p:sp>
       <p:sp>
         <p:nvSpPr>
-          <p:cNvPr id="3" name="Rectangle 2"/>
-          <p:cNvSpPr/>
-          <p:nvPr/>
-        </p:nvSpPr>
-        <p:spPr>
-          <a:xfrm>
-            <a:off x="0" y="0"/>
-            <a:ext cx="24384000" cy="120000"/>
-          </a:xfrm>
-          <a:prstGeom prst="rect">
-            <a:avLst/>
-          </a:prstGeom>
-          <a:solidFill>
-            <a:srgbClr val="DDDDDD"/>
-          </a:solidFill>
-          <a:ln>
-            <a:noFill/>
-          </a:ln>
-        </p:spPr>
-        <p:style>
-          <a:lnRef idx="1">
-            <a:schemeClr val="accent1"/>
-          </a:lnRef>
-          <a:fillRef idx="3">
-            <a:schemeClr val="accent1"/>
-          </a:fillRef>
-          <a:effectRef idx="2">
-            <a:schemeClr val="accent1"/>
-          </a:effectRef>
-          <a:fontRef idx="minor">
-            <a:schemeClr val="lt1"/>
-          </a:fontRef>
-        </p:style>
-        <p:txBody>
-          <a:bodyPr rtlCol="0" anchor="ctr"/>
-          <a:lstStyle/>
-          <a:p>
-            <a:pPr algn="ctr"/>
-          </a:p>
-        </p:txBody>
-      </p:sp>
-      <p:sp>
-        <p:nvSpPr>
-          <p:cNvPr id="4" name="TextBox 3"/>
+          <p:cNvPr id="3" name="TextBox 2"/>
           <p:cNvSpPr txBox="1"/>
           <p:nvPr/>
         </p:nvSpPr>
         <p:spPr>
           <a:xfrm>
-            <a:off x="800000" y="350000"/>
-            <a:ext cx="22800000" cy="1000000"/>
+            <a:off x="360000" y="350000"/>
+            <a:ext cx="23664000" cy="1100000"/>
           </a:xfrm>
           <a:prstGeom prst="rect">
             <a:avLst/>
@@ -5994,21 +5768,21 @@
                 <a:ea typeface="Open Sans"/>
                 <a:cs typeface="Open Sans"/>
               </a:rPr>
-              <a:t>Оценка объёма кровопотери</a:t>
-            </a:r>
-          </a:p>
-        </p:txBody>
-      </p:sp>
-      <p:sp>
-        <p:nvSpPr>
-          <p:cNvPr id="5" name="Rectangle 4"/>
+              <a:t>Объём кровопотери и состояние</a:t>
+            </a:r>
+          </a:p>
+        </p:txBody>
+      </p:sp>
+      <p:sp>
+        <p:nvSpPr>
+          <p:cNvPr id="4" name="Rectangle 3"/>
           <p:cNvSpPr/>
           <p:nvPr/>
         </p:nvSpPr>
         <p:spPr>
           <a:xfrm>
-            <a:off x="800000" y="1450000"/>
-            <a:ext cx="22800000" cy="20000"/>
+            <a:off x="360000" y="1450000"/>
+            <a:ext cx="23664000" cy="20000"/>
           </a:xfrm>
           <a:prstGeom prst="rect">
             <a:avLst/>
@@ -6044,15 +5818,15 @@
       </p:sp>
       <p:graphicFrame>
         <p:nvGraphicFramePr>
-          <p:cNvPr id="6" name="Table 5"/>
+          <p:cNvPr id="5" name="Table 4"/>
           <p:cNvGraphicFramePr>
             <a:graphicFrameLocks noGrp="1"/>
           </p:cNvGraphicFramePr>
           <p:nvPr/>
         </p:nvGraphicFramePr>
         <p:xfrm>
-          <a:off x="800000" y="2050000"/>
-          <a:ext cx="22800000" cy="7500000"/>
+          <a:off x="2192000" y="2000000"/>
+          <a:ext cx="20000000" cy="5500000"/>
         </p:xfrm>
         <a:graphic>
           <a:graphicData uri="http://schemas.openxmlformats.org/drawingml/2006/table">
@@ -6061,19 +5835,18 @@
                 <a:tableStyleId>{5C22544A-7EE6-4342-B048-85BDC9FD1C3A}</a:tableStyleId>
               </a:tblPr>
               <a:tblGrid>
-                <a:gridCol w="7600000"/>
-                <a:gridCol w="7600000"/>
-                <a:gridCol w="7600000"/>
+                <a:gridCol w="6666666"/>
+                <a:gridCol w="6666666"/>
+                <a:gridCol w="6666668"/>
               </a:tblGrid>
-              <a:tr h="1500000">
+              <a:tr h="1100000">
                 <a:tc>
                   <a:txBody>
                     <a:bodyPr/>
                     <a:lstStyle/>
                     <a:p>
-                      <a:pPr algn="l"/>
                       <a:r>
-                        <a:rPr sz="2200" b="1">
+                        <a:rPr sz="2600" b="1">
                           <a:solidFill>
                             <a:srgbClr val="FFFFFF"/>
                           </a:solidFill>
@@ -6087,7 +5860,7 @@
                   </a:txBody>
                   <a:tcPr>
                     <a:solidFill>
-                      <a:srgbClr val="0055AA"/>
+                      <a:srgbClr val="444444"/>
                     </a:solidFill>
                   </a:tcPr>
                 </a:tc>
@@ -6096,9 +5869,8 @@
                     <a:bodyPr/>
                     <a:lstStyle/>
                     <a:p>
-                      <a:pPr algn="l"/>
                       <a:r>
-                        <a:rPr sz="2200" b="1">
+                        <a:rPr sz="2600" b="1">
                           <a:solidFill>
                             <a:srgbClr val="FFFFFF"/>
                           </a:solidFill>
@@ -6112,7 +5884,7 @@
                   </a:txBody>
                   <a:tcPr>
                     <a:solidFill>
-                      <a:srgbClr val="0055AA"/>
+                      <a:srgbClr val="444444"/>
                     </a:solidFill>
                   </a:tcPr>
                 </a:tc>
@@ -6121,9 +5893,8 @@
                     <a:bodyPr/>
                     <a:lstStyle/>
                     <a:p>
-                      <a:pPr algn="l"/>
                       <a:r>
-                        <a:rPr sz="2200" b="1">
+                        <a:rPr sz="2600" b="1">
                           <a:solidFill>
                             <a:srgbClr val="FFFFFF"/>
                           </a:solidFill>
@@ -6131,24 +5902,23 @@
                           <a:ea typeface="Open Sans"/>
                           <a:cs typeface="Open Sans"/>
                         </a:rPr>
-                        <a:t>Состояние пострадавшего</a:t>
+                        <a:t>Состояние</a:t>
                       </a:r>
                     </a:p>
                   </a:txBody>
                   <a:tcPr>
                     <a:solidFill>
-                      <a:srgbClr val="0055AA"/>
+                      <a:srgbClr val="444444"/>
                     </a:solidFill>
                   </a:tcPr>
                 </a:tc>
               </a:tr>
-              <a:tr h="1500000">
+              <a:tr h="1100000">
                 <a:tc>
                   <a:txBody>
                     <a:bodyPr/>
                     <a:lstStyle/>
                     <a:p>
-                      <a:pPr algn="l"/>
                       <a:r>
                         <a:rPr sz="2200" b="0">
                           <a:solidFill>
@@ -6173,7 +5943,6 @@
                     <a:bodyPr/>
                     <a:lstStyle/>
                     <a:p>
-                      <a:pPr algn="l"/>
                       <a:r>
                         <a:rPr sz="2200" b="0">
                           <a:solidFill>
@@ -6198,7 +5967,6 @@
                     <a:bodyPr/>
                     <a:lstStyle/>
                     <a:p>
-                      <a:pPr algn="l"/>
                       <a:r>
                         <a:rPr sz="2200" b="0">
                           <a:solidFill>
@@ -6219,13 +5987,12 @@
                   </a:tcPr>
                 </a:tc>
               </a:tr>
-              <a:tr h="1500000">
+              <a:tr h="1100000">
                 <a:tc>
                   <a:txBody>
                     <a:bodyPr/>
                     <a:lstStyle/>
                     <a:p>
-                      <a:pPr algn="l"/>
                       <a:r>
                         <a:rPr sz="2200" b="0">
                           <a:solidFill>
@@ -6250,7 +6017,6 @@
                     <a:bodyPr/>
                     <a:lstStyle/>
                     <a:p>
-                      <a:pPr algn="l"/>
                       <a:r>
                         <a:rPr sz="2200" b="0">
                           <a:solidFill>
@@ -6275,7 +6041,6 @@
                     <a:bodyPr/>
                     <a:lstStyle/>
                     <a:p>
-                      <a:pPr algn="l"/>
                       <a:r>
                         <a:rPr sz="2200" b="0">
                           <a:solidFill>
@@ -6296,13 +6061,12 @@
                   </a:tcPr>
                 </a:tc>
               </a:tr>
-              <a:tr h="1500000">
+              <a:tr h="1100000">
                 <a:tc>
                   <a:txBody>
                     <a:bodyPr/>
                     <a:lstStyle/>
                     <a:p>
-                      <a:pPr algn="l"/>
                       <a:r>
                         <a:rPr sz="2200" b="0">
                           <a:solidFill>
@@ -6327,7 +6091,6 @@
                     <a:bodyPr/>
                     <a:lstStyle/>
                     <a:p>
-                      <a:pPr algn="l"/>
                       <a:r>
                         <a:rPr sz="2200" b="1">
                           <a:solidFill>
@@ -6352,7 +6115,6 @@
                     <a:bodyPr/>
                     <a:lstStyle/>
                     <a:p>
-                      <a:pPr algn="l"/>
                       <a:r>
                         <a:rPr sz="2200" b="0">
                           <a:solidFill>
@@ -6362,7 +6124,7 @@
                           <a:ea typeface="Open Sans"/>
                           <a:cs typeface="Open Sans"/>
                         </a:rPr>
-                        <a:t>Головокружение, холодный пот, обмороки</a:t>
+                        <a:t>Обмороки, холодный пот</a:t>
                       </a:r>
                     </a:p>
                   </a:txBody>
@@ -6373,13 +6135,12 @@
                   </a:tcPr>
                 </a:tc>
               </a:tr>
-              <a:tr h="1500000">
+              <a:tr h="1100000">
                 <a:tc>
                   <a:txBody>
                     <a:bodyPr/>
                     <a:lstStyle/>
                     <a:p>
-                      <a:pPr algn="l"/>
                       <a:r>
                         <a:rPr sz="2200" b="0">
                           <a:solidFill>
@@ -6389,7 +6150,7 @@
                           <a:ea typeface="Open Sans"/>
                           <a:cs typeface="Open Sans"/>
                         </a:rPr>
-                        <a:t>Более 1500–2000 мл</a:t>
+                        <a:t>&gt;1500–2000 мл</a:t>
                       </a:r>
                     </a:p>
                   </a:txBody>
@@ -6404,7 +6165,6 @@
                     <a:bodyPr/>
                     <a:lstStyle/>
                     <a:p>
-                      <a:pPr algn="l"/>
                       <a:r>
                         <a:rPr sz="2200" b="1">
                           <a:solidFill>
@@ -6429,7 +6189,6 @@
                     <a:bodyPr/>
                     <a:lstStyle/>
                     <a:p>
-                      <a:pPr algn="l"/>
                       <a:r>
                         <a:rPr sz="2200" b="0">
                           <a:solidFill>
@@ -6439,7 +6198,7 @@
                           <a:ea typeface="Open Sans"/>
                           <a:cs typeface="Open Sans"/>
                         </a:rPr>
-                        <a:t>Угроза жизни, шок, потеря сознания</a:t>
+                        <a:t>Шок, угроза жизни</a:t>
                       </a:r>
                     </a:p>
                   </a:txBody>
@@ -6454,43 +6213,6 @@
           </a:graphicData>
         </a:graphic>
       </p:graphicFrame>
-      <p:sp>
-        <p:nvSpPr>
-          <p:cNvPr id="7" name="TextBox 6"/>
-          <p:cNvSpPr txBox="1"/>
-          <p:nvPr/>
-        </p:nvSpPr>
-        <p:spPr>
-          <a:xfrm>
-            <a:off x="800000" y="11500000"/>
-            <a:ext cx="22800000" cy="1200000"/>
-          </a:xfrm>
-          <a:prstGeom prst="rect">
-            <a:avLst/>
-          </a:prstGeom>
-          <a:noFill/>
-        </p:spPr>
-        <p:txBody>
-          <a:bodyPr wrap="square" anchor="t">
-            <a:spAutoFit/>
-          </a:bodyPr>
-          <a:lstStyle/>
-          <a:p>
-            <a:pPr algn="l"/>
-            <a:r>
-              <a:rPr sz="2400" b="1">
-                <a:solidFill>
-                  <a:srgbClr val="CC0000"/>
-                </a:solidFill>
-                <a:latin typeface="Open Sans"/>
-                <a:ea typeface="Open Sans"/>
-                <a:cs typeface="Open Sans"/>
-              </a:rPr>
-              <a:t>Ориентиры условные; у детей и пожилых критический порог ниже.</a:t>
-            </a:r>
-          </a:p>
-        </p:txBody>
-      </p:sp>
     </p:spTree>
   </p:cSld>
   <p:clrMapOvr>
@@ -6554,57 +6276,14 @@
       </p:sp>
       <p:sp>
         <p:nvSpPr>
-          <p:cNvPr id="3" name="Rectangle 2"/>
-          <p:cNvSpPr/>
-          <p:nvPr/>
-        </p:nvSpPr>
-        <p:spPr>
-          <a:xfrm>
-            <a:off x="0" y="0"/>
-            <a:ext cx="24384000" cy="120000"/>
-          </a:xfrm>
-          <a:prstGeom prst="rect">
-            <a:avLst/>
-          </a:prstGeom>
-          <a:solidFill>
-            <a:srgbClr val="DDDDDD"/>
-          </a:solidFill>
-          <a:ln>
-            <a:noFill/>
-          </a:ln>
-        </p:spPr>
-        <p:style>
-          <a:lnRef idx="1">
-            <a:schemeClr val="accent1"/>
-          </a:lnRef>
-          <a:fillRef idx="3">
-            <a:schemeClr val="accent1"/>
-          </a:fillRef>
-          <a:effectRef idx="2">
-            <a:schemeClr val="accent1"/>
-          </a:effectRef>
-          <a:fontRef idx="minor">
-            <a:schemeClr val="lt1"/>
-          </a:fontRef>
-        </p:style>
-        <p:txBody>
-          <a:bodyPr rtlCol="0" anchor="ctr"/>
-          <a:lstStyle/>
-          <a:p>
-            <a:pPr algn="ctr"/>
-          </a:p>
-        </p:txBody>
-      </p:sp>
-      <p:sp>
-        <p:nvSpPr>
-          <p:cNvPr id="4" name="TextBox 3"/>
+          <p:cNvPr id="3" name="TextBox 2"/>
           <p:cNvSpPr txBox="1"/>
           <p:nvPr/>
         </p:nvSpPr>
         <p:spPr>
           <a:xfrm>
-            <a:off x="800000" y="350000"/>
-            <a:ext cx="22800000" cy="1000000"/>
+            <a:off x="360000" y="350000"/>
+            <a:ext cx="23664000" cy="1100000"/>
           </a:xfrm>
           <a:prstGeom prst="rect">
             <a:avLst/>
@@ -6627,21 +6306,21 @@
                 <a:ea typeface="Open Sans"/>
                 <a:cs typeface="Open Sans"/>
               </a:rPr>
-              <a:t>Признаки скрытого (внутреннего) кровотечения</a:t>
-            </a:r>
-          </a:p>
-        </p:txBody>
-      </p:sp>
-      <p:sp>
-        <p:nvSpPr>
-          <p:cNvPr id="5" name="Rectangle 4"/>
+              <a:t>Скрытое (внутреннее) кровотечение</a:t>
+            </a:r>
+          </a:p>
+        </p:txBody>
+      </p:sp>
+      <p:sp>
+        <p:nvSpPr>
+          <p:cNvPr id="4" name="Rectangle 3"/>
           <p:cNvSpPr/>
           <p:nvPr/>
         </p:nvSpPr>
         <p:spPr>
           <a:xfrm>
-            <a:off x="800000" y="1450000"/>
-            <a:ext cx="22800000" cy="20000"/>
+            <a:off x="360000" y="1450000"/>
+            <a:ext cx="23664000" cy="20000"/>
           </a:xfrm>
           <a:prstGeom prst="rect">
             <a:avLst/>
@@ -6677,14 +6356,14 @@
       </p:sp>
       <p:sp>
         <p:nvSpPr>
-          <p:cNvPr id="6" name="TextBox 5"/>
+          <p:cNvPr id="5" name="TextBox 4"/>
           <p:cNvSpPr txBox="1"/>
           <p:nvPr/>
         </p:nvSpPr>
         <p:spPr>
           <a:xfrm>
-            <a:off x="800000" y="1950000"/>
-            <a:ext cx="22800000" cy="7000000"/>
+            <a:off x="860000" y="2000000"/>
+            <a:ext cx="22664000" cy="6500000"/>
           </a:xfrm>
           <a:prstGeom prst="rect">
             <a:avLst/>
@@ -6699,7 +6378,7 @@
           <a:p>
             <a:pPr algn="l">
               <a:spcAft>
-                <a:spcPts val="1000"/>
+                <a:spcPts val="1400"/>
               </a:spcAft>
             </a:pPr>
             <a:r>
@@ -6711,13 +6390,13 @@
                 <a:ea typeface="Open Sans"/>
                 <a:cs typeface="Open Sans"/>
               </a:rPr>
-              <a:t>•  Кровь изливается в полости тела — снаружи может не быть видно.</a:t>
+              <a:t>•  Снаружи крови может не быть видно</a:t>
             </a:r>
           </a:p>
           <a:p>
             <a:pPr algn="l">
               <a:spcAft>
-                <a:spcPts val="1000"/>
+                <a:spcPts val="1400"/>
               </a:spcAft>
             </a:pPr>
             <a:r>
@@ -6729,13 +6408,13 @@
                 <a:ea typeface="Open Sans"/>
                 <a:cs typeface="Open Sans"/>
               </a:rPr>
-              <a:t>•  Бледность, холодный пот, нарастающая слабость, жажда.</a:t>
+              <a:t>•  Бледность, холодный пот, слабость, жажда</a:t>
             </a:r>
           </a:p>
           <a:p>
             <a:pPr algn="l">
               <a:spcAft>
-                <a:spcPts val="1000"/>
+                <a:spcPts val="1400"/>
               </a:spcAft>
             </a:pPr>
             <a:r>
@@ -6747,13 +6426,13 @@
                 <a:ea typeface="Open Sans"/>
                 <a:cs typeface="Open Sans"/>
               </a:rPr>
-              <a:t>•  Учащённый слабый пульс, частое дыхание.</a:t>
+              <a:t>•  Слабый учащённый пульс, частое дыхание</a:t>
             </a:r>
           </a:p>
           <a:p>
             <a:pPr algn="l">
               <a:spcAft>
-                <a:spcPts val="1000"/>
+                <a:spcPts val="1400"/>
               </a:spcAft>
             </a:pPr>
             <a:r>
@@ -6765,13 +6444,13 @@
                 <a:ea typeface="Open Sans"/>
                 <a:cs typeface="Open Sans"/>
               </a:rPr>
-              <a:t>•  Боль и напряжение живота (кровотечение в брюшную полость).</a:t>
+              <a:t>•  Боль и напряжение живота</a:t>
             </a:r>
           </a:p>
           <a:p>
             <a:pPr algn="l">
               <a:spcAft>
-                <a:spcPts val="1000"/>
+                <a:spcPts val="1400"/>
               </a:spcAft>
             </a:pPr>
             <a:r>
@@ -6783,45 +6462,27 @@
                 <a:ea typeface="Open Sans"/>
                 <a:cs typeface="Open Sans"/>
               </a:rPr>
-              <a:t>•  При травме груди — одышка, слабость, бледность.</a:t>
-            </a:r>
-          </a:p>
-          <a:p>
-            <a:pPr algn="l">
-              <a:spcAft>
-                <a:spcPts val="1000"/>
-              </a:spcAft>
-            </a:pPr>
-            <a:r>
-              <a:rPr sz="3200" b="0">
-                <a:solidFill>
-                  <a:srgbClr val="333333"/>
-                </a:solidFill>
-                <a:latin typeface="Open Sans"/>
-                <a:ea typeface="Open Sans"/>
-                <a:cs typeface="Open Sans"/>
-              </a:rPr>
-              <a:t>•  Действия: вызвать СМП, положение, холод на живот, не кормить и не поить.</a:t>
-            </a:r>
-          </a:p>
-        </p:txBody>
-      </p:sp>
-      <p:sp>
-        <p:nvSpPr>
-          <p:cNvPr id="7" name="Rounded Rectangle 6"/>
+              <a:t>•  Действия: СМП, положение, холод, не поить</a:t>
+            </a:r>
+          </a:p>
+        </p:txBody>
+      </p:sp>
+      <p:sp>
+        <p:nvSpPr>
+          <p:cNvPr id="6" name="Rounded Rectangle 5"/>
           <p:cNvSpPr/>
           <p:nvPr/>
         </p:nvSpPr>
         <p:spPr>
           <a:xfrm>
-            <a:off x="800000" y="11000000"/>
-            <a:ext cx="22800000" cy="1800000"/>
+            <a:off x="360000" y="11200000"/>
+            <a:ext cx="23664000" cy="1500000"/>
           </a:xfrm>
           <a:prstGeom prst="roundRect">
             <a:avLst/>
           </a:prstGeom>
           <a:solidFill>
-            <a:srgbClr val="FAFAFA"/>
+            <a:srgbClr val="F7F7F7"/>
           </a:solidFill>
           <a:ln>
             <a:noFill/>
@@ -6851,14 +6512,14 @@
       </p:sp>
       <p:sp>
         <p:nvSpPr>
-          <p:cNvPr id="8" name="Rectangle 7"/>
+          <p:cNvPr id="7" name="Rectangle 6"/>
           <p:cNvSpPr/>
           <p:nvPr/>
         </p:nvSpPr>
         <p:spPr>
           <a:xfrm>
-            <a:off x="800000" y="11000000"/>
-            <a:ext cx="120000" cy="1800000"/>
+            <a:off x="360000" y="11200000"/>
+            <a:ext cx="120000" cy="1500000"/>
           </a:xfrm>
           <a:prstGeom prst="rect">
             <a:avLst/>
@@ -6894,14 +6555,14 @@
       </p:sp>
       <p:sp>
         <p:nvSpPr>
-          <p:cNvPr id="9" name="TextBox 8"/>
+          <p:cNvPr id="8" name="TextBox 7"/>
           <p:cNvSpPr txBox="1"/>
           <p:nvPr/>
         </p:nvSpPr>
         <p:spPr>
           <a:xfrm>
-            <a:off x="1200000" y="11300000"/>
-            <a:ext cx="21800000" cy="1400000"/>
+            <a:off x="760000" y="11400000"/>
+            <a:ext cx="23064000" cy="1100000"/>
           </a:xfrm>
           <a:prstGeom prst="rect">
             <a:avLst/>
@@ -6924,7 +6585,7 @@
                 <a:ea typeface="Open Sans"/>
                 <a:cs typeface="Open Sans"/>
               </a:rPr>
-              <a:t>Внутреннее кровотечение на месте не «останавливают» — нужна СМП.</a:t>
+              <a:t>Внутреннее кровотечение на месте не останавливают — нужна СМП</a:t>
             </a:r>
           </a:p>
         </p:txBody>
@@ -6992,57 +6653,14 @@
       </p:sp>
       <p:sp>
         <p:nvSpPr>
-          <p:cNvPr id="3" name="Rectangle 2"/>
-          <p:cNvSpPr/>
-          <p:nvPr/>
-        </p:nvSpPr>
-        <p:spPr>
-          <a:xfrm>
-            <a:off x="0" y="0"/>
-            <a:ext cx="24384000" cy="120000"/>
-          </a:xfrm>
-          <a:prstGeom prst="rect">
-            <a:avLst/>
-          </a:prstGeom>
-          <a:solidFill>
-            <a:srgbClr val="DDDDDD"/>
-          </a:solidFill>
-          <a:ln>
-            <a:noFill/>
-          </a:ln>
-        </p:spPr>
-        <p:style>
-          <a:lnRef idx="1">
-            <a:schemeClr val="accent1"/>
-          </a:lnRef>
-          <a:fillRef idx="3">
-            <a:schemeClr val="accent1"/>
-          </a:fillRef>
-          <a:effectRef idx="2">
-            <a:schemeClr val="accent1"/>
-          </a:effectRef>
-          <a:fontRef idx="minor">
-            <a:schemeClr val="lt1"/>
-          </a:fontRef>
-        </p:style>
-        <p:txBody>
-          <a:bodyPr rtlCol="0" anchor="ctr"/>
-          <a:lstStyle/>
-          <a:p>
-            <a:pPr algn="ctr"/>
-          </a:p>
-        </p:txBody>
-      </p:sp>
-      <p:sp>
-        <p:nvSpPr>
-          <p:cNvPr id="4" name="TextBox 3"/>
+          <p:cNvPr id="3" name="TextBox 2"/>
           <p:cNvSpPr txBox="1"/>
           <p:nvPr/>
         </p:nvSpPr>
         <p:spPr>
           <a:xfrm>
-            <a:off x="800000" y="350000"/>
-            <a:ext cx="22800000" cy="1000000"/>
+            <a:off x="360000" y="350000"/>
+            <a:ext cx="23664000" cy="1100000"/>
           </a:xfrm>
           <a:prstGeom prst="rect">
             <a:avLst/>
@@ -7055,7 +6673,7 @@
           </a:bodyPr>
           <a:lstStyle/>
           <a:p>
-            <a:pPr algn="l"/>
+            <a:pPr algn="ctr"/>
             <a:r>
               <a:rPr sz="4600" b="1">
                 <a:solidFill>
@@ -7065,21 +6683,21 @@
                 <a:ea typeface="Open Sans"/>
                 <a:cs typeface="Open Sans"/>
               </a:rPr>
-              <a:t>Краткое резюме</a:t>
-            </a:r>
-          </a:p>
-        </p:txBody>
-      </p:sp>
-      <p:sp>
-        <p:nvSpPr>
-          <p:cNvPr id="5" name="Rectangle 4"/>
+              <a:t>Главное запомнить</a:t>
+            </a:r>
+          </a:p>
+        </p:txBody>
+      </p:sp>
+      <p:sp>
+        <p:nvSpPr>
+          <p:cNvPr id="4" name="Rectangle 3"/>
           <p:cNvSpPr/>
           <p:nvPr/>
         </p:nvSpPr>
         <p:spPr>
           <a:xfrm>
-            <a:off x="800000" y="1450000"/>
-            <a:ext cx="22800000" cy="20000"/>
+            <a:off x="360000" y="1450000"/>
+            <a:ext cx="23664000" cy="20000"/>
           </a:xfrm>
           <a:prstGeom prst="rect">
             <a:avLst/>
@@ -7115,61 +6733,16 @@
       </p:sp>
       <p:sp>
         <p:nvSpPr>
-          <p:cNvPr id="6" name="Rectangle 5"/>
+          <p:cNvPr id="5" name="Oval 4"/>
           <p:cNvSpPr/>
           <p:nvPr/>
         </p:nvSpPr>
         <p:spPr>
           <a:xfrm>
-            <a:off x="800000" y="1950000"/>
-            <a:ext cx="22800000" cy="1600000"/>
-          </a:xfrm>
-          <a:prstGeom prst="rect">
-            <a:avLst/>
-          </a:prstGeom>
-          <a:solidFill>
-            <a:srgbClr val="FFFFFF"/>
-          </a:solidFill>
-          <a:ln w="12700">
-            <a:solidFill>
-              <a:srgbClr val="E1E1E1"/>
-            </a:solidFill>
-          </a:ln>
-        </p:spPr>
-        <p:style>
-          <a:lnRef idx="1">
-            <a:schemeClr val="accent1"/>
-          </a:lnRef>
-          <a:fillRef idx="3">
-            <a:schemeClr val="accent1"/>
-          </a:fillRef>
-          <a:effectRef idx="2">
-            <a:schemeClr val="accent1"/>
-          </a:effectRef>
-          <a:fontRef idx="minor">
-            <a:schemeClr val="lt1"/>
-          </a:fontRef>
-        </p:style>
-        <p:txBody>
-          <a:bodyPr rtlCol="0" anchor="ctr"/>
-          <a:lstStyle/>
-          <a:p>
-            <a:pPr algn="ctr"/>
-          </a:p>
-        </p:txBody>
-      </p:sp>
-      <p:sp>
-        <p:nvSpPr>
-          <p:cNvPr id="7" name="Rectangle 6"/>
-          <p:cNvSpPr/>
-          <p:nvPr/>
-        </p:nvSpPr>
-        <p:spPr>
-          <a:xfrm>
-            <a:off x="800000" y="1950000"/>
-            <a:ext cx="120000" cy="1600000"/>
-          </a:xfrm>
-          <a:prstGeom prst="rect">
+            <a:off x="1860000" y="2150000"/>
+            <a:ext cx="600000" cy="600000"/>
+          </a:xfrm>
+          <a:prstGeom prst="ellipse">
             <a:avLst/>
           </a:prstGeom>
           <a:solidFill>
@@ -7203,14 +6776,14 @@
       </p:sp>
       <p:sp>
         <p:nvSpPr>
-          <p:cNvPr id="8" name="TextBox 7"/>
+          <p:cNvPr id="6" name="TextBox 5"/>
           <p:cNvSpPr txBox="1"/>
           <p:nvPr/>
         </p:nvSpPr>
         <p:spPr>
           <a:xfrm>
-            <a:off x="1200000" y="2250000"/>
-            <a:ext cx="21800000" cy="1100000"/>
+            <a:off x="1860000" y="2150000"/>
+            <a:ext cx="600000" cy="600000"/>
           </a:xfrm>
           <a:prstGeom prst="rect">
             <a:avLst/>
@@ -7223,9 +6796,46 @@
           </a:bodyPr>
           <a:lstStyle/>
           <a:p>
+            <a:pPr algn="ctr"/>
+            <a:r>
+              <a:rPr sz="2400" b="1">
+                <a:solidFill>
+                  <a:srgbClr val="FFFFFF"/>
+                </a:solidFill>
+                <a:latin typeface="Open Sans"/>
+                <a:ea typeface="Open Sans"/>
+                <a:cs typeface="Open Sans"/>
+              </a:rPr>
+              <a:t>OK</a:t>
+            </a:r>
+          </a:p>
+        </p:txBody>
+      </p:sp>
+      <p:sp>
+        <p:nvSpPr>
+          <p:cNvPr id="7" name="TextBox 6"/>
+          <p:cNvSpPr txBox="1"/>
+          <p:nvPr/>
+        </p:nvSpPr>
+        <p:spPr>
+          <a:xfrm>
+            <a:off x="2860000" y="2000000"/>
+            <a:ext cx="18000000" cy="900000"/>
+          </a:xfrm>
+          <a:prstGeom prst="rect">
+            <a:avLst/>
+          </a:prstGeom>
+          <a:noFill/>
+        </p:spPr>
+        <p:txBody>
+          <a:bodyPr wrap="square" anchor="ctr">
+            <a:spAutoFit/>
+          </a:bodyPr>
+          <a:lstStyle/>
+          <a:p>
             <a:pPr algn="l"/>
             <a:r>
-              <a:rPr sz="2600" b="0">
+              <a:rPr sz="2800" b="0">
                 <a:solidFill>
                   <a:srgbClr val="333333"/>
                 </a:solidFill>
@@ -7233,68 +6843,23 @@
                 <a:ea typeface="Open Sans"/>
                 <a:cs typeface="Open Sans"/>
               </a:rPr>
-              <a:t>Артериальное — алая пульсирующая струя; венозное — тёмная струя; капиллярное — сочение.</a:t>
-            </a:r>
-          </a:p>
-        </p:txBody>
-      </p:sp>
-      <p:sp>
-        <p:nvSpPr>
-          <p:cNvPr id="9" name="Rectangle 8"/>
+              <a:t>Артериальное — алая пульсирующая струя</a:t>
+            </a:r>
+          </a:p>
+        </p:txBody>
+      </p:sp>
+      <p:sp>
+        <p:nvSpPr>
+          <p:cNvPr id="8" name="Oval 7"/>
           <p:cNvSpPr/>
           <p:nvPr/>
         </p:nvSpPr>
         <p:spPr>
           <a:xfrm>
-            <a:off x="800000" y="3850000"/>
-            <a:ext cx="22800000" cy="1600000"/>
-          </a:xfrm>
-          <a:prstGeom prst="rect">
-            <a:avLst/>
-          </a:prstGeom>
-          <a:solidFill>
-            <a:srgbClr val="FFFFFF"/>
-          </a:solidFill>
-          <a:ln w="12700">
-            <a:solidFill>
-              <a:srgbClr val="E1E1E1"/>
-            </a:solidFill>
-          </a:ln>
-        </p:spPr>
-        <p:style>
-          <a:lnRef idx="1">
-            <a:schemeClr val="accent1"/>
-          </a:lnRef>
-          <a:fillRef idx="3">
-            <a:schemeClr val="accent1"/>
-          </a:fillRef>
-          <a:effectRef idx="2">
-            <a:schemeClr val="accent1"/>
-          </a:effectRef>
-          <a:fontRef idx="minor">
-            <a:schemeClr val="lt1"/>
-          </a:fontRef>
-        </p:style>
-        <p:txBody>
-          <a:bodyPr rtlCol="0" anchor="ctr"/>
-          <a:lstStyle/>
-          <a:p>
-            <a:pPr algn="ctr"/>
-          </a:p>
-        </p:txBody>
-      </p:sp>
-      <p:sp>
-        <p:nvSpPr>
-          <p:cNvPr id="10" name="Rectangle 9"/>
-          <p:cNvSpPr/>
-          <p:nvPr/>
-        </p:nvSpPr>
-        <p:spPr>
-          <a:xfrm>
-            <a:off x="800000" y="3850000"/>
-            <a:ext cx="120000" cy="1600000"/>
-          </a:xfrm>
-          <a:prstGeom prst="rect">
+            <a:off x="1860000" y="3750000"/>
+            <a:ext cx="600000" cy="600000"/>
+          </a:xfrm>
+          <a:prstGeom prst="ellipse">
             <a:avLst/>
           </a:prstGeom>
           <a:solidFill>
@@ -7328,14 +6893,14 @@
       </p:sp>
       <p:sp>
         <p:nvSpPr>
-          <p:cNvPr id="11" name="TextBox 10"/>
+          <p:cNvPr id="9" name="TextBox 8"/>
           <p:cNvSpPr txBox="1"/>
           <p:nvPr/>
         </p:nvSpPr>
         <p:spPr>
           <a:xfrm>
-            <a:off x="1200000" y="4150000"/>
-            <a:ext cx="21800000" cy="1100000"/>
+            <a:off x="1860000" y="3750000"/>
+            <a:ext cx="600000" cy="600000"/>
           </a:xfrm>
           <a:prstGeom prst="rect">
             <a:avLst/>
@@ -7348,9 +6913,46 @@
           </a:bodyPr>
           <a:lstStyle/>
           <a:p>
+            <a:pPr algn="ctr"/>
+            <a:r>
+              <a:rPr sz="2400" b="1">
+                <a:solidFill>
+                  <a:srgbClr val="FFFFFF"/>
+                </a:solidFill>
+                <a:latin typeface="Open Sans"/>
+                <a:ea typeface="Open Sans"/>
+                <a:cs typeface="Open Sans"/>
+              </a:rPr>
+              <a:t>OK</a:t>
+            </a:r>
+          </a:p>
+        </p:txBody>
+      </p:sp>
+      <p:sp>
+        <p:nvSpPr>
+          <p:cNvPr id="10" name="TextBox 9"/>
+          <p:cNvSpPr txBox="1"/>
+          <p:nvPr/>
+        </p:nvSpPr>
+        <p:spPr>
+          <a:xfrm>
+            <a:off x="2860000" y="3600000"/>
+            <a:ext cx="18000000" cy="900000"/>
+          </a:xfrm>
+          <a:prstGeom prst="rect">
+            <a:avLst/>
+          </a:prstGeom>
+          <a:noFill/>
+        </p:spPr>
+        <p:txBody>
+          <a:bodyPr wrap="square" anchor="ctr">
+            <a:spAutoFit/>
+          </a:bodyPr>
+          <a:lstStyle/>
+          <a:p>
             <a:pPr algn="l"/>
             <a:r>
-              <a:rPr sz="2600" b="0">
+              <a:rPr sz="2800" b="0">
                 <a:solidFill>
                   <a:srgbClr val="333333"/>
                 </a:solidFill>
@@ -7358,68 +6960,23 @@
                 <a:ea typeface="Open Sans"/>
                 <a:cs typeface="Open Sans"/>
               </a:rPr>
-              <a:t>Признаки кровопотери: слабость, жажда, бледность, холодный пот, тахикардия.</a:t>
-            </a:r>
-          </a:p>
-        </p:txBody>
-      </p:sp>
-      <p:sp>
-        <p:nvSpPr>
-          <p:cNvPr id="12" name="Rectangle 11"/>
+              <a:t>Венозное — тёмная струя; капиллярное — сочение</a:t>
+            </a:r>
+          </a:p>
+        </p:txBody>
+      </p:sp>
+      <p:sp>
+        <p:nvSpPr>
+          <p:cNvPr id="11" name="Oval 10"/>
           <p:cNvSpPr/>
           <p:nvPr/>
         </p:nvSpPr>
         <p:spPr>
           <a:xfrm>
-            <a:off x="800000" y="5750000"/>
-            <a:ext cx="22800000" cy="1600000"/>
-          </a:xfrm>
-          <a:prstGeom prst="rect">
-            <a:avLst/>
-          </a:prstGeom>
-          <a:solidFill>
-            <a:srgbClr val="FFFFFF"/>
-          </a:solidFill>
-          <a:ln w="12700">
-            <a:solidFill>
-              <a:srgbClr val="E1E1E1"/>
-            </a:solidFill>
-          </a:ln>
-        </p:spPr>
-        <p:style>
-          <a:lnRef idx="1">
-            <a:schemeClr val="accent1"/>
-          </a:lnRef>
-          <a:fillRef idx="3">
-            <a:schemeClr val="accent1"/>
-          </a:fillRef>
-          <a:effectRef idx="2">
-            <a:schemeClr val="accent1"/>
-          </a:effectRef>
-          <a:fontRef idx="minor">
-            <a:schemeClr val="lt1"/>
-          </a:fontRef>
-        </p:style>
-        <p:txBody>
-          <a:bodyPr rtlCol="0" anchor="ctr"/>
-          <a:lstStyle/>
-          <a:p>
-            <a:pPr algn="ctr"/>
-          </a:p>
-        </p:txBody>
-      </p:sp>
-      <p:sp>
-        <p:nvSpPr>
-          <p:cNvPr id="13" name="Rectangle 12"/>
-          <p:cNvSpPr/>
-          <p:nvPr/>
-        </p:nvSpPr>
-        <p:spPr>
-          <a:xfrm>
-            <a:off x="800000" y="5750000"/>
-            <a:ext cx="120000" cy="1600000"/>
-          </a:xfrm>
-          <a:prstGeom prst="rect">
+            <a:off x="1860000" y="5350000"/>
+            <a:ext cx="600000" cy="600000"/>
+          </a:xfrm>
+          <a:prstGeom prst="ellipse">
             <a:avLst/>
           </a:prstGeom>
           <a:solidFill>
@@ -7453,14 +7010,14 @@
       </p:sp>
       <p:sp>
         <p:nvSpPr>
-          <p:cNvPr id="14" name="TextBox 13"/>
+          <p:cNvPr id="12" name="TextBox 11"/>
           <p:cNvSpPr txBox="1"/>
           <p:nvPr/>
         </p:nvSpPr>
         <p:spPr>
           <a:xfrm>
-            <a:off x="1200000" y="6050000"/>
-            <a:ext cx="21800000" cy="1100000"/>
+            <a:off x="1860000" y="5350000"/>
+            <a:ext cx="600000" cy="600000"/>
           </a:xfrm>
           <a:prstGeom prst="rect">
             <a:avLst/>
@@ -7473,9 +7030,46 @@
           </a:bodyPr>
           <a:lstStyle/>
           <a:p>
+            <a:pPr algn="ctr"/>
+            <a:r>
+              <a:rPr sz="2400" b="1">
+                <a:solidFill>
+                  <a:srgbClr val="FFFFFF"/>
+                </a:solidFill>
+                <a:latin typeface="Open Sans"/>
+                <a:ea typeface="Open Sans"/>
+                <a:cs typeface="Open Sans"/>
+              </a:rPr>
+              <a:t>OK</a:t>
+            </a:r>
+          </a:p>
+        </p:txBody>
+      </p:sp>
+      <p:sp>
+        <p:nvSpPr>
+          <p:cNvPr id="13" name="TextBox 12"/>
+          <p:cNvSpPr txBox="1"/>
+          <p:nvPr/>
+        </p:nvSpPr>
+        <p:spPr>
+          <a:xfrm>
+            <a:off x="2860000" y="5200000"/>
+            <a:ext cx="18000000" cy="900000"/>
+          </a:xfrm>
+          <a:prstGeom prst="rect">
+            <a:avLst/>
+          </a:prstGeom>
+          <a:noFill/>
+        </p:spPr>
+        <p:txBody>
+          <a:bodyPr wrap="square" anchor="ctr">
+            <a:spAutoFit/>
+          </a:bodyPr>
+          <a:lstStyle/>
+          <a:p>
             <a:pPr algn="l"/>
             <a:r>
-              <a:rPr sz="2600" b="0">
+              <a:rPr sz="2800" b="0">
                 <a:solidFill>
                   <a:srgbClr val="333333"/>
                 </a:solidFill>
@@ -7483,68 +7077,23 @@
                 <a:ea typeface="Open Sans"/>
                 <a:cs typeface="Open Sans"/>
               </a:rPr>
-              <a:t>Потеря &gt;30% ОЦК угрожает жизни; у детей порог ниже.</a:t>
-            </a:r>
-          </a:p>
-        </p:txBody>
-      </p:sp>
-      <p:sp>
-        <p:nvSpPr>
-          <p:cNvPr id="15" name="Rectangle 14"/>
+              <a:t>Потеря &gt;30% ОЦК угрожает жизни</a:t>
+            </a:r>
+          </a:p>
+        </p:txBody>
+      </p:sp>
+      <p:sp>
+        <p:nvSpPr>
+          <p:cNvPr id="14" name="Oval 13"/>
           <p:cNvSpPr/>
           <p:nvPr/>
         </p:nvSpPr>
         <p:spPr>
           <a:xfrm>
-            <a:off x="800000" y="7650000"/>
-            <a:ext cx="22800000" cy="1600000"/>
-          </a:xfrm>
-          <a:prstGeom prst="rect">
-            <a:avLst/>
-          </a:prstGeom>
-          <a:solidFill>
-            <a:srgbClr val="FFFFFF"/>
-          </a:solidFill>
-          <a:ln w="12700">
-            <a:solidFill>
-              <a:srgbClr val="E1E1E1"/>
-            </a:solidFill>
-          </a:ln>
-        </p:spPr>
-        <p:style>
-          <a:lnRef idx="1">
-            <a:schemeClr val="accent1"/>
-          </a:lnRef>
-          <a:fillRef idx="3">
-            <a:schemeClr val="accent1"/>
-          </a:fillRef>
-          <a:effectRef idx="2">
-            <a:schemeClr val="accent1"/>
-          </a:effectRef>
-          <a:fontRef idx="minor">
-            <a:schemeClr val="lt1"/>
-          </a:fontRef>
-        </p:style>
-        <p:txBody>
-          <a:bodyPr rtlCol="0" anchor="ctr"/>
-          <a:lstStyle/>
-          <a:p>
-            <a:pPr algn="ctr"/>
-          </a:p>
-        </p:txBody>
-      </p:sp>
-      <p:sp>
-        <p:nvSpPr>
-          <p:cNvPr id="16" name="Rectangle 15"/>
-          <p:cNvSpPr/>
-          <p:nvPr/>
-        </p:nvSpPr>
-        <p:spPr>
-          <a:xfrm>
-            <a:off x="800000" y="7650000"/>
-            <a:ext cx="120000" cy="1600000"/>
-          </a:xfrm>
-          <a:prstGeom prst="rect">
+            <a:off x="1860000" y="6950000"/>
+            <a:ext cx="600000" cy="600000"/>
+          </a:xfrm>
+          <a:prstGeom prst="ellipse">
             <a:avLst/>
           </a:prstGeom>
           <a:solidFill>
@@ -7578,14 +7127,14 @@
       </p:sp>
       <p:sp>
         <p:nvSpPr>
-          <p:cNvPr id="17" name="TextBox 16"/>
+          <p:cNvPr id="15" name="TextBox 14"/>
           <p:cNvSpPr txBox="1"/>
           <p:nvPr/>
         </p:nvSpPr>
         <p:spPr>
           <a:xfrm>
-            <a:off x="1200000" y="7950000"/>
-            <a:ext cx="21800000" cy="1100000"/>
+            <a:off x="1860000" y="6950000"/>
+            <a:ext cx="600000" cy="600000"/>
           </a:xfrm>
           <a:prstGeom prst="rect">
             <a:avLst/>
@@ -7598,9 +7147,46 @@
           </a:bodyPr>
           <a:lstStyle/>
           <a:p>
+            <a:pPr algn="ctr"/>
+            <a:r>
+              <a:rPr sz="2400" b="1">
+                <a:solidFill>
+                  <a:srgbClr val="FFFFFF"/>
+                </a:solidFill>
+                <a:latin typeface="Open Sans"/>
+                <a:ea typeface="Open Sans"/>
+                <a:cs typeface="Open Sans"/>
+              </a:rPr>
+              <a:t>OK</a:t>
+            </a:r>
+          </a:p>
+        </p:txBody>
+      </p:sp>
+      <p:sp>
+        <p:nvSpPr>
+          <p:cNvPr id="16" name="TextBox 15"/>
+          <p:cNvSpPr txBox="1"/>
+          <p:nvPr/>
+        </p:nvSpPr>
+        <p:spPr>
+          <a:xfrm>
+            <a:off x="2860000" y="6800000"/>
+            <a:ext cx="18000000" cy="900000"/>
+          </a:xfrm>
+          <a:prstGeom prst="rect">
+            <a:avLst/>
+          </a:prstGeom>
+          <a:noFill/>
+        </p:spPr>
+        <p:txBody>
+          <a:bodyPr wrap="square" anchor="ctr">
+            <a:spAutoFit/>
+          </a:bodyPr>
+          <a:lstStyle/>
+          <a:p>
             <a:pPr algn="l"/>
             <a:r>
-              <a:rPr sz="2600" b="0">
+              <a:rPr sz="2800" b="0">
                 <a:solidFill>
                   <a:srgbClr val="333333"/>
                 </a:solidFill>
@@ -7608,7 +7194,44 @@
                 <a:ea typeface="Open Sans"/>
                 <a:cs typeface="Open Sans"/>
               </a:rPr>
-              <a:t>При подозрении на внутреннее кровотечение — срочный вызов СМП.</a:t>
+              <a:t>При подозрении на внутреннее — срочный вызов СМП</a:t>
+            </a:r>
+          </a:p>
+        </p:txBody>
+      </p:sp>
+      <p:sp>
+        <p:nvSpPr>
+          <p:cNvPr id="17" name="TextBox 16"/>
+          <p:cNvSpPr txBox="1"/>
+          <p:nvPr/>
+        </p:nvSpPr>
+        <p:spPr>
+          <a:xfrm>
+            <a:off x="360000" y="11200000"/>
+            <a:ext cx="23664000" cy="1200000"/>
+          </a:xfrm>
+          <a:prstGeom prst="rect">
+            <a:avLst/>
+          </a:prstGeom>
+          <a:noFill/>
+        </p:spPr>
+        <p:txBody>
+          <a:bodyPr wrap="square" anchor="t">
+            <a:spAutoFit/>
+          </a:bodyPr>
+          <a:lstStyle/>
+          <a:p>
+            <a:pPr algn="ctr"/>
+            <a:r>
+              <a:rPr sz="2600" b="1">
+                <a:solidFill>
+                  <a:srgbClr val="CC0000"/>
+                </a:solidFill>
+                <a:latin typeface="Open Sans"/>
+                <a:ea typeface="Open Sans"/>
+                <a:cs typeface="Open Sans"/>
+              </a:rPr>
+              <a:t>Ориентируйтесь на признаки, а не на подсчёт миллилитров</a:t>
             </a:r>
           </a:p>
         </p:txBody>
@@ -7676,57 +7299,14 @@
       </p:sp>
       <p:sp>
         <p:nvSpPr>
-          <p:cNvPr id="3" name="Rectangle 2"/>
-          <p:cNvSpPr/>
-          <p:nvPr/>
-        </p:nvSpPr>
-        <p:spPr>
-          <a:xfrm>
-            <a:off x="0" y="0"/>
-            <a:ext cx="24384000" cy="120000"/>
-          </a:xfrm>
-          <a:prstGeom prst="rect">
-            <a:avLst/>
-          </a:prstGeom>
-          <a:solidFill>
-            <a:srgbClr val="DDDDDD"/>
-          </a:solidFill>
-          <a:ln>
-            <a:noFill/>
-          </a:ln>
-        </p:spPr>
-        <p:style>
-          <a:lnRef idx="1">
-            <a:schemeClr val="accent1"/>
-          </a:lnRef>
-          <a:fillRef idx="3">
-            <a:schemeClr val="accent1"/>
-          </a:fillRef>
-          <a:effectRef idx="2">
-            <a:schemeClr val="accent1"/>
-          </a:effectRef>
-          <a:fontRef idx="minor">
-            <a:schemeClr val="lt1"/>
-          </a:fontRef>
-        </p:style>
-        <p:txBody>
-          <a:bodyPr rtlCol="0" anchor="ctr"/>
-          <a:lstStyle/>
-          <a:p>
-            <a:pPr algn="ctr"/>
-          </a:p>
-        </p:txBody>
-      </p:sp>
-      <p:sp>
-        <p:nvSpPr>
-          <p:cNvPr id="4" name="TextBox 3"/>
+          <p:cNvPr id="3" name="TextBox 2"/>
           <p:cNvSpPr txBox="1"/>
           <p:nvPr/>
         </p:nvSpPr>
         <p:spPr>
           <a:xfrm>
-            <a:off x="800000" y="5500000"/>
-            <a:ext cx="22800000" cy="1200000"/>
+            <a:off x="360000" y="5500000"/>
+            <a:ext cx="23664000" cy="1200000"/>
           </a:xfrm>
           <a:prstGeom prst="rect">
             <a:avLst/>
@@ -7739,7 +7319,7 @@
           </a:bodyPr>
           <a:lstStyle/>
           <a:p>
-            <a:pPr algn="l"/>
+            <a:pPr algn="ctr"/>
             <a:r>
               <a:rPr sz="4600" b="1">
                 <a:solidFill>
@@ -7749,21 +7329,21 @@
                 <a:ea typeface="Open Sans"/>
                 <a:cs typeface="Open Sans"/>
               </a:rPr>
-              <a:t>Спасибо за внимание</a:t>
-            </a:r>
-          </a:p>
-        </p:txBody>
-      </p:sp>
-      <p:sp>
-        <p:nvSpPr>
-          <p:cNvPr id="5" name="Rectangle 4"/>
+              <a:t>Благодарим за внимание</a:t>
+            </a:r>
+          </a:p>
+        </p:txBody>
+      </p:sp>
+      <p:sp>
+        <p:nvSpPr>
+          <p:cNvPr id="4" name="Rectangle 3"/>
           <p:cNvSpPr/>
           <p:nvPr/>
         </p:nvSpPr>
         <p:spPr>
           <a:xfrm>
-            <a:off x="800000" y="6900000"/>
-            <a:ext cx="10000000" cy="20000"/>
+            <a:off x="7000000" y="7000000"/>
+            <a:ext cx="10000000" cy="25000"/>
           </a:xfrm>
           <a:prstGeom prst="rect">
             <a:avLst/>
@@ -7799,14 +7379,14 @@
       </p:sp>
       <p:sp>
         <p:nvSpPr>
-          <p:cNvPr id="6" name="TextBox 5"/>
+          <p:cNvPr id="5" name="TextBox 4"/>
           <p:cNvSpPr txBox="1"/>
           <p:nvPr/>
         </p:nvSpPr>
         <p:spPr>
           <a:xfrm>
-            <a:off x="800000" y="7200000"/>
-            <a:ext cx="22800000" cy="500000"/>
+            <a:off x="360000" y="7400000"/>
+            <a:ext cx="23664000" cy="500000"/>
           </a:xfrm>
           <a:prstGeom prst="rect">
             <a:avLst/>
@@ -7819,7 +7399,7 @@
           </a:bodyPr>
           <a:lstStyle/>
           <a:p>
-            <a:pPr algn="l"/>
+            <a:pPr algn="ctr"/>
             <a:r>
               <a:rPr sz="2000" b="0">
                 <a:solidFill>

--- a/tema2_bleeding/Признаки_наружного_кровотечения.pptx
+++ b/tema2_bleeding/Признаки_наружного_кровотечения.pptx
@@ -3096,12 +3096,20 @@
         <p:nvPr/>
       </p:nvGrpSpPr>
       <p:grpSpPr/>
-      <p:sp>
-        <p:nvSpPr>
-          <p:cNvPr id="2" name="Rectangle 1"/>
-          <p:cNvSpPr/>
+      <p:pic>
+        <p:nvPicPr>
+          <p:cNvPr id="2" name="Picture 1" descr="page_01.png"/>
+          <p:cNvPicPr>
+            <a:picLocks noChangeAspect="1"/>
+          </p:cNvPicPr>
           <p:nvPr/>
-        </p:nvSpPr>
+        </p:nvPicPr>
+        <p:blipFill>
+          <a:blip r:embed="rId2"/>
+          <a:stretch>
+            <a:fillRect/>
+          </a:stretch>
+        </p:blipFill>
         <p:spPr>
           <a:xfrm>
             <a:off x="0" y="0"/>
@@ -3110,189 +3118,8 @@
           <a:prstGeom prst="rect">
             <a:avLst/>
           </a:prstGeom>
-          <a:solidFill>
-            <a:srgbClr val="FFFFFF"/>
-          </a:solidFill>
-          <a:ln>
-            <a:noFill/>
-          </a:ln>
-        </p:spPr>
-        <p:style>
-          <a:lnRef idx="1">
-            <a:schemeClr val="accent1"/>
-          </a:lnRef>
-          <a:fillRef idx="3">
-            <a:schemeClr val="accent1"/>
-          </a:fillRef>
-          <a:effectRef idx="2">
-            <a:schemeClr val="accent1"/>
-          </a:effectRef>
-          <a:fontRef idx="minor">
-            <a:schemeClr val="lt1"/>
-          </a:fontRef>
-        </p:style>
-        <p:txBody>
-          <a:bodyPr rtlCol="0" anchor="ctr"/>
-          <a:lstStyle/>
-          <a:p>
-            <a:pPr algn="ctr"/>
-          </a:p>
-        </p:txBody>
-      </p:sp>
-      <p:sp>
-        <p:nvSpPr>
-          <p:cNvPr id="3" name="TextBox 2"/>
-          <p:cNvSpPr txBox="1"/>
-          <p:nvPr/>
-        </p:nvSpPr>
-        <p:spPr>
-          <a:xfrm>
-            <a:off x="360000" y="4800000"/>
-            <a:ext cx="23664000" cy="1600000"/>
-          </a:xfrm>
-          <a:prstGeom prst="rect">
-            <a:avLst/>
-          </a:prstGeom>
-          <a:noFill/>
-        </p:spPr>
-        <p:txBody>
-          <a:bodyPr wrap="square" anchor="t">
-            <a:spAutoFit/>
-          </a:bodyPr>
-          <a:lstStyle/>
-          <a:p>
-            <a:pPr algn="ctr"/>
-            <a:r>
-              <a:rPr sz="4600" b="1">
-                <a:solidFill>
-                  <a:srgbClr val="333333"/>
-                </a:solidFill>
-                <a:latin typeface="Open Sans"/>
-                <a:ea typeface="Open Sans"/>
-                <a:cs typeface="Open Sans"/>
-              </a:rPr>
-              <a:t>ПРИЗНАКИ НАРУЖНОГО КРОВОТЕЧЕНИЯ И КРОВОПОТЕРИ</a:t>
-            </a:r>
-          </a:p>
-        </p:txBody>
-      </p:sp>
-      <p:sp>
-        <p:nvSpPr>
-          <p:cNvPr id="4" name="Rectangle 3"/>
-          <p:cNvSpPr/>
-          <p:nvPr/>
-        </p:nvSpPr>
-        <p:spPr>
-          <a:xfrm>
-            <a:off x="7000000" y="6600000"/>
-            <a:ext cx="10000000" cy="25000"/>
-          </a:xfrm>
-          <a:prstGeom prst="rect">
-            <a:avLst/>
-          </a:prstGeom>
-          <a:solidFill>
-            <a:srgbClr val="0055AA"/>
-          </a:solidFill>
-          <a:ln>
-            <a:noFill/>
-          </a:ln>
-        </p:spPr>
-        <p:style>
-          <a:lnRef idx="1">
-            <a:schemeClr val="accent1"/>
-          </a:lnRef>
-          <a:fillRef idx="3">
-            <a:schemeClr val="accent1"/>
-          </a:fillRef>
-          <a:effectRef idx="2">
-            <a:schemeClr val="accent1"/>
-          </a:effectRef>
-          <a:fontRef idx="minor">
-            <a:schemeClr val="lt1"/>
-          </a:fontRef>
-        </p:style>
-        <p:txBody>
-          <a:bodyPr rtlCol="0" anchor="ctr"/>
-          <a:lstStyle/>
-          <a:p>
-            <a:pPr algn="ctr"/>
-          </a:p>
-        </p:txBody>
-      </p:sp>
-      <p:sp>
-        <p:nvSpPr>
-          <p:cNvPr id="5" name="TextBox 4"/>
-          <p:cNvSpPr txBox="1"/>
-          <p:nvPr/>
-        </p:nvSpPr>
-        <p:spPr>
-          <a:xfrm>
-            <a:off x="360000" y="6900000"/>
-            <a:ext cx="23664000" cy="800000"/>
-          </a:xfrm>
-          <a:prstGeom prst="rect">
-            <a:avLst/>
-          </a:prstGeom>
-          <a:noFill/>
-        </p:spPr>
-        <p:txBody>
-          <a:bodyPr wrap="square" anchor="t">
-            <a:spAutoFit/>
-          </a:bodyPr>
-          <a:lstStyle/>
-          <a:p>
-            <a:pPr algn="ctr"/>
-            <a:r>
-              <a:rPr sz="2600" b="0">
-                <a:solidFill>
-                  <a:srgbClr val="333333"/>
-                </a:solidFill>
-                <a:latin typeface="Open Sans"/>
-                <a:ea typeface="Open Sans"/>
-                <a:cs typeface="Open Sans"/>
-              </a:rPr>
-              <a:t>Теоретический модуль · п. 2.2</a:t>
-            </a:r>
-          </a:p>
-        </p:txBody>
-      </p:sp>
-      <p:sp>
-        <p:nvSpPr>
-          <p:cNvPr id="6" name="TextBox 5"/>
-          <p:cNvSpPr txBox="1"/>
-          <p:nvPr/>
-        </p:nvSpPr>
-        <p:spPr>
-          <a:xfrm>
-            <a:off x="360000" y="7800000"/>
-            <a:ext cx="23664000" cy="500000"/>
-          </a:xfrm>
-          <a:prstGeom prst="rect">
-            <a:avLst/>
-          </a:prstGeom>
-          <a:noFill/>
-        </p:spPr>
-        <p:txBody>
-          <a:bodyPr wrap="square" anchor="t">
-            <a:spAutoFit/>
-          </a:bodyPr>
-          <a:lstStyle/>
-          <a:p>
-            <a:pPr algn="ctr"/>
-            <a:r>
-              <a:rPr sz="2000" b="0">
-                <a:solidFill>
-                  <a:srgbClr val="0055AA"/>
-                </a:solidFill>
-                <a:latin typeface="Open Sans"/>
-                <a:ea typeface="Open Sans"/>
-                <a:cs typeface="Open Sans"/>
-              </a:rPr>
-              <a:t>Тема 2 · Оказание первой помощи при наружных кровотечениях</a:t>
-            </a:r>
-          </a:p>
-        </p:txBody>
-      </p:sp>
+        </p:spPr>
+      </p:pic>
     </p:spTree>
   </p:cSld>
   <p:clrMapOvr>
@@ -3362,8 +3189,8 @@
         </p:nvSpPr>
         <p:spPr>
           <a:xfrm>
-            <a:off x="360000" y="350000"/>
-            <a:ext cx="23664000" cy="1100000"/>
+            <a:off x="800000" y="400000"/>
+            <a:ext cx="22800000" cy="1000000"/>
           </a:xfrm>
           <a:prstGeom prst="rect">
             <a:avLst/>
@@ -3376,7 +3203,7 @@
           </a:bodyPr>
           <a:lstStyle/>
           <a:p>
-            <a:pPr algn="ctr"/>
+            <a:pPr algn="l"/>
             <a:r>
               <a:rPr sz="4600" b="1">
                 <a:solidFill>
@@ -3399,8 +3226,8 @@
         </p:nvSpPr>
         <p:spPr>
           <a:xfrm>
-            <a:off x="360000" y="1450000"/>
-            <a:ext cx="23664000" cy="20000"/>
+            <a:off x="800000" y="1500000"/>
+            <a:ext cx="22800000" cy="20000"/>
           </a:xfrm>
           <a:prstGeom prst="rect">
             <a:avLst/>
@@ -3442,8 +3269,8 @@
         </p:nvSpPr>
         <p:spPr>
           <a:xfrm>
-            <a:off x="2360000" y="2000000"/>
-            <a:ext cx="700000" cy="700000"/>
+            <a:off x="800000" y="2000000"/>
+            <a:ext cx="800000" cy="800000"/>
           </a:xfrm>
           <a:prstGeom prst="ellipse">
             <a:avLst/>
@@ -3485,8 +3312,8 @@
         </p:nvSpPr>
         <p:spPr>
           <a:xfrm>
-            <a:off x="2360000" y="2000000"/>
-            <a:ext cx="700000" cy="700000"/>
+            <a:off x="800000" y="2000000"/>
+            <a:ext cx="800000" cy="800000"/>
           </a:xfrm>
           <a:prstGeom prst="rect">
             <a:avLst/>
@@ -3516,14 +3343,59 @@
       </p:sp>
       <p:sp>
         <p:nvSpPr>
-          <p:cNvPr id="7" name="TextBox 6"/>
+          <p:cNvPr id="7" name="Rectangle 6"/>
+          <p:cNvSpPr/>
+          <p:nvPr/>
+        </p:nvSpPr>
+        <p:spPr>
+          <a:xfrm>
+            <a:off x="1900000" y="2000000"/>
+            <a:ext cx="20500000" cy="800000"/>
+          </a:xfrm>
+          <a:prstGeom prst="rect">
+            <a:avLst/>
+          </a:prstGeom>
+          <a:solidFill>
+            <a:srgbClr val="FFFFFF"/>
+          </a:solidFill>
+          <a:ln w="12700">
+            <a:solidFill>
+              <a:srgbClr val="E1E1E1"/>
+            </a:solidFill>
+          </a:ln>
+        </p:spPr>
+        <p:style>
+          <a:lnRef idx="1">
+            <a:schemeClr val="accent1"/>
+          </a:lnRef>
+          <a:fillRef idx="3">
+            <a:schemeClr val="accent1"/>
+          </a:fillRef>
+          <a:effectRef idx="2">
+            <a:schemeClr val="accent1"/>
+          </a:effectRef>
+          <a:fontRef idx="minor">
+            <a:schemeClr val="lt1"/>
+          </a:fontRef>
+        </p:style>
+        <p:txBody>
+          <a:bodyPr rtlCol="0" anchor="ctr"/>
+          <a:lstStyle/>
+          <a:p>
+            <a:pPr algn="ctr"/>
+          </a:p>
+        </p:txBody>
+      </p:sp>
+      <p:sp>
+        <p:nvSpPr>
+          <p:cNvPr id="8" name="TextBox 7"/>
           <p:cNvSpPr txBox="1"/>
           <p:nvPr/>
         </p:nvSpPr>
         <p:spPr>
           <a:xfrm>
-            <a:off x="3360000" y="2000000"/>
-            <a:ext cx="14000000" cy="700000"/>
+            <a:off x="2200000" y="2000000"/>
+            <a:ext cx="19500000" cy="800000"/>
           </a:xfrm>
           <a:prstGeom prst="rect">
             <a:avLst/>
@@ -3553,14 +3425,14 @@
       </p:sp>
       <p:sp>
         <p:nvSpPr>
-          <p:cNvPr id="8" name="Oval 7"/>
+          <p:cNvPr id="9" name="Oval 8"/>
           <p:cNvSpPr/>
           <p:nvPr/>
         </p:nvSpPr>
         <p:spPr>
           <a:xfrm>
-            <a:off x="2360000" y="3400000"/>
-            <a:ext cx="700000" cy="700000"/>
+            <a:off x="800000" y="3400000"/>
+            <a:ext cx="800000" cy="800000"/>
           </a:xfrm>
           <a:prstGeom prst="ellipse">
             <a:avLst/>
@@ -3596,14 +3468,14 @@
       </p:sp>
       <p:sp>
         <p:nvSpPr>
-          <p:cNvPr id="9" name="TextBox 8"/>
+          <p:cNvPr id="10" name="TextBox 9"/>
           <p:cNvSpPr txBox="1"/>
           <p:nvPr/>
         </p:nvSpPr>
         <p:spPr>
           <a:xfrm>
-            <a:off x="2360000" y="3400000"/>
-            <a:ext cx="700000" cy="700000"/>
+            <a:off x="800000" y="3400000"/>
+            <a:ext cx="800000" cy="800000"/>
           </a:xfrm>
           <a:prstGeom prst="rect">
             <a:avLst/>
@@ -3633,14 +3505,59 @@
       </p:sp>
       <p:sp>
         <p:nvSpPr>
-          <p:cNvPr id="10" name="TextBox 9"/>
+          <p:cNvPr id="11" name="Rectangle 10"/>
+          <p:cNvSpPr/>
+          <p:nvPr/>
+        </p:nvSpPr>
+        <p:spPr>
+          <a:xfrm>
+            <a:off x="1900000" y="3400000"/>
+            <a:ext cx="20500000" cy="800000"/>
+          </a:xfrm>
+          <a:prstGeom prst="rect">
+            <a:avLst/>
+          </a:prstGeom>
+          <a:solidFill>
+            <a:srgbClr val="FFFFFF"/>
+          </a:solidFill>
+          <a:ln w="12700">
+            <a:solidFill>
+              <a:srgbClr val="E1E1E1"/>
+            </a:solidFill>
+          </a:ln>
+        </p:spPr>
+        <p:style>
+          <a:lnRef idx="1">
+            <a:schemeClr val="accent1"/>
+          </a:lnRef>
+          <a:fillRef idx="3">
+            <a:schemeClr val="accent1"/>
+          </a:fillRef>
+          <a:effectRef idx="2">
+            <a:schemeClr val="accent1"/>
+          </a:effectRef>
+          <a:fontRef idx="minor">
+            <a:schemeClr val="lt1"/>
+          </a:fontRef>
+        </p:style>
+        <p:txBody>
+          <a:bodyPr rtlCol="0" anchor="ctr"/>
+          <a:lstStyle/>
+          <a:p>
+            <a:pPr algn="ctr"/>
+          </a:p>
+        </p:txBody>
+      </p:sp>
+      <p:sp>
+        <p:nvSpPr>
+          <p:cNvPr id="12" name="TextBox 11"/>
           <p:cNvSpPr txBox="1"/>
           <p:nvPr/>
         </p:nvSpPr>
         <p:spPr>
           <a:xfrm>
-            <a:off x="3360000" y="3400000"/>
-            <a:ext cx="14000000" cy="700000"/>
+            <a:off x="2200000" y="3400000"/>
+            <a:ext cx="19500000" cy="800000"/>
           </a:xfrm>
           <a:prstGeom prst="rect">
             <a:avLst/>
@@ -3670,14 +3587,14 @@
       </p:sp>
       <p:sp>
         <p:nvSpPr>
-          <p:cNvPr id="11" name="Oval 10"/>
+          <p:cNvPr id="13" name="Oval 12"/>
           <p:cNvSpPr/>
           <p:nvPr/>
         </p:nvSpPr>
         <p:spPr>
           <a:xfrm>
-            <a:off x="2360000" y="4800000"/>
-            <a:ext cx="700000" cy="700000"/>
+            <a:off x="800000" y="4800000"/>
+            <a:ext cx="800000" cy="800000"/>
           </a:xfrm>
           <a:prstGeom prst="ellipse">
             <a:avLst/>
@@ -3713,14 +3630,14 @@
       </p:sp>
       <p:sp>
         <p:nvSpPr>
-          <p:cNvPr id="12" name="TextBox 11"/>
+          <p:cNvPr id="14" name="TextBox 13"/>
           <p:cNvSpPr txBox="1"/>
           <p:nvPr/>
         </p:nvSpPr>
         <p:spPr>
           <a:xfrm>
-            <a:off x="2360000" y="4800000"/>
-            <a:ext cx="700000" cy="700000"/>
+            <a:off x="800000" y="4800000"/>
+            <a:ext cx="800000" cy="800000"/>
           </a:xfrm>
           <a:prstGeom prst="rect">
             <a:avLst/>
@@ -3750,14 +3667,59 @@
       </p:sp>
       <p:sp>
         <p:nvSpPr>
-          <p:cNvPr id="13" name="TextBox 12"/>
+          <p:cNvPr id="15" name="Rectangle 14"/>
+          <p:cNvSpPr/>
+          <p:nvPr/>
+        </p:nvSpPr>
+        <p:spPr>
+          <a:xfrm>
+            <a:off x="1900000" y="4800000"/>
+            <a:ext cx="20500000" cy="800000"/>
+          </a:xfrm>
+          <a:prstGeom prst="rect">
+            <a:avLst/>
+          </a:prstGeom>
+          <a:solidFill>
+            <a:srgbClr val="FFFFFF"/>
+          </a:solidFill>
+          <a:ln w="12700">
+            <a:solidFill>
+              <a:srgbClr val="E1E1E1"/>
+            </a:solidFill>
+          </a:ln>
+        </p:spPr>
+        <p:style>
+          <a:lnRef idx="1">
+            <a:schemeClr val="accent1"/>
+          </a:lnRef>
+          <a:fillRef idx="3">
+            <a:schemeClr val="accent1"/>
+          </a:fillRef>
+          <a:effectRef idx="2">
+            <a:schemeClr val="accent1"/>
+          </a:effectRef>
+          <a:fontRef idx="minor">
+            <a:schemeClr val="lt1"/>
+          </a:fontRef>
+        </p:style>
+        <p:txBody>
+          <a:bodyPr rtlCol="0" anchor="ctr"/>
+          <a:lstStyle/>
+          <a:p>
+            <a:pPr algn="ctr"/>
+          </a:p>
+        </p:txBody>
+      </p:sp>
+      <p:sp>
+        <p:nvSpPr>
+          <p:cNvPr id="16" name="TextBox 15"/>
           <p:cNvSpPr txBox="1"/>
           <p:nvPr/>
         </p:nvSpPr>
         <p:spPr>
           <a:xfrm>
-            <a:off x="3360000" y="4800000"/>
-            <a:ext cx="14000000" cy="700000"/>
+            <a:off x="2200000" y="4800000"/>
+            <a:ext cx="19500000" cy="800000"/>
           </a:xfrm>
           <a:prstGeom prst="rect">
             <a:avLst/>
@@ -3787,14 +3749,14 @@
       </p:sp>
       <p:sp>
         <p:nvSpPr>
-          <p:cNvPr id="14" name="Oval 13"/>
+          <p:cNvPr id="17" name="Oval 16"/>
           <p:cNvSpPr/>
           <p:nvPr/>
         </p:nvSpPr>
         <p:spPr>
           <a:xfrm>
-            <a:off x="2360000" y="6200000"/>
-            <a:ext cx="700000" cy="700000"/>
+            <a:off x="800000" y="6200000"/>
+            <a:ext cx="800000" cy="800000"/>
           </a:xfrm>
           <a:prstGeom prst="ellipse">
             <a:avLst/>
@@ -3830,14 +3792,14 @@
       </p:sp>
       <p:sp>
         <p:nvSpPr>
-          <p:cNvPr id="15" name="TextBox 14"/>
+          <p:cNvPr id="18" name="TextBox 17"/>
           <p:cNvSpPr txBox="1"/>
           <p:nvPr/>
         </p:nvSpPr>
         <p:spPr>
           <a:xfrm>
-            <a:off x="2360000" y="6200000"/>
-            <a:ext cx="700000" cy="700000"/>
+            <a:off x="800000" y="6200000"/>
+            <a:ext cx="800000" cy="800000"/>
           </a:xfrm>
           <a:prstGeom prst="rect">
             <a:avLst/>
@@ -3867,14 +3829,59 @@
       </p:sp>
       <p:sp>
         <p:nvSpPr>
-          <p:cNvPr id="16" name="TextBox 15"/>
+          <p:cNvPr id="19" name="Rectangle 18"/>
+          <p:cNvSpPr/>
+          <p:nvPr/>
+        </p:nvSpPr>
+        <p:spPr>
+          <a:xfrm>
+            <a:off x="1900000" y="6200000"/>
+            <a:ext cx="20500000" cy="800000"/>
+          </a:xfrm>
+          <a:prstGeom prst="rect">
+            <a:avLst/>
+          </a:prstGeom>
+          <a:solidFill>
+            <a:srgbClr val="FFFFFF"/>
+          </a:solidFill>
+          <a:ln w="12700">
+            <a:solidFill>
+              <a:srgbClr val="E1E1E1"/>
+            </a:solidFill>
+          </a:ln>
+        </p:spPr>
+        <p:style>
+          <a:lnRef idx="1">
+            <a:schemeClr val="accent1"/>
+          </a:lnRef>
+          <a:fillRef idx="3">
+            <a:schemeClr val="accent1"/>
+          </a:fillRef>
+          <a:effectRef idx="2">
+            <a:schemeClr val="accent1"/>
+          </a:effectRef>
+          <a:fontRef idx="minor">
+            <a:schemeClr val="lt1"/>
+          </a:fontRef>
+        </p:style>
+        <p:txBody>
+          <a:bodyPr rtlCol="0" anchor="ctr"/>
+          <a:lstStyle/>
+          <a:p>
+            <a:pPr algn="ctr"/>
+          </a:p>
+        </p:txBody>
+      </p:sp>
+      <p:sp>
+        <p:nvSpPr>
+          <p:cNvPr id="20" name="TextBox 19"/>
           <p:cNvSpPr txBox="1"/>
           <p:nvPr/>
         </p:nvSpPr>
         <p:spPr>
           <a:xfrm>
-            <a:off x="3360000" y="6200000"/>
-            <a:ext cx="14000000" cy="700000"/>
+            <a:off x="2200000" y="6200000"/>
+            <a:ext cx="19500000" cy="800000"/>
           </a:xfrm>
           <a:prstGeom prst="rect">
             <a:avLst/>
@@ -3899,49 +3906,6 @@
               </a:rPr>
               <a:t>Скрытое (внутреннее) кровотечение</a:t>
             </a:r>
-          </a:p>
-        </p:txBody>
-      </p:sp>
-      <p:sp>
-        <p:nvSpPr>
-          <p:cNvPr id="17" name="Rectangle 16"/>
-          <p:cNvSpPr/>
-          <p:nvPr/>
-        </p:nvSpPr>
-        <p:spPr>
-          <a:xfrm>
-            <a:off x="22000000" y="1600000"/>
-            <a:ext cx="80000" cy="9000000"/>
-          </a:xfrm>
-          <a:prstGeom prst="rect">
-            <a:avLst/>
-          </a:prstGeom>
-          <a:solidFill>
-            <a:srgbClr val="DDDDDD"/>
-          </a:solidFill>
-          <a:ln>
-            <a:noFill/>
-          </a:ln>
-        </p:spPr>
-        <p:style>
-          <a:lnRef idx="1">
-            <a:schemeClr val="accent1"/>
-          </a:lnRef>
-          <a:fillRef idx="3">
-            <a:schemeClr val="accent1"/>
-          </a:fillRef>
-          <a:effectRef idx="2">
-            <a:schemeClr val="accent1"/>
-          </a:effectRef>
-          <a:fontRef idx="minor">
-            <a:schemeClr val="lt1"/>
-          </a:fontRef>
-        </p:style>
-        <p:txBody>
-          <a:bodyPr rtlCol="0" anchor="ctr"/>
-          <a:lstStyle/>
-          <a:p>
-            <a:pPr algn="ctr"/>
           </a:p>
         </p:txBody>
       </p:sp>
@@ -3963,177 +3927,9 @@
         <p:nvPr/>
       </p:nvGrpSpPr>
       <p:grpSpPr/>
-      <p:sp>
-        <p:nvSpPr>
-          <p:cNvPr id="2" name="Rectangle 1"/>
-          <p:cNvSpPr/>
-          <p:nvPr/>
-        </p:nvSpPr>
-        <p:spPr>
-          <a:xfrm>
-            <a:off x="0" y="0"/>
-            <a:ext cx="24384000" cy="13716000"/>
-          </a:xfrm>
-          <a:prstGeom prst="rect">
-            <a:avLst/>
-          </a:prstGeom>
-          <a:solidFill>
-            <a:srgbClr val="FFFFFF"/>
-          </a:solidFill>
-          <a:ln>
-            <a:noFill/>
-          </a:ln>
-        </p:spPr>
-        <p:style>
-          <a:lnRef idx="1">
-            <a:schemeClr val="accent1"/>
-          </a:lnRef>
-          <a:fillRef idx="3">
-            <a:schemeClr val="accent1"/>
-          </a:fillRef>
-          <a:effectRef idx="2">
-            <a:schemeClr val="accent1"/>
-          </a:effectRef>
-          <a:fontRef idx="minor">
-            <a:schemeClr val="lt1"/>
-          </a:fontRef>
-        </p:style>
-        <p:txBody>
-          <a:bodyPr rtlCol="0" anchor="ctr"/>
-          <a:lstStyle/>
-          <a:p>
-            <a:pPr algn="ctr"/>
-          </a:p>
-        </p:txBody>
-      </p:sp>
-      <p:sp>
-        <p:nvSpPr>
-          <p:cNvPr id="3" name="TextBox 2"/>
-          <p:cNvSpPr txBox="1"/>
-          <p:nvPr/>
-        </p:nvSpPr>
-        <p:spPr>
-          <a:xfrm>
-            <a:off x="360000" y="350000"/>
-            <a:ext cx="23664000" cy="1100000"/>
-          </a:xfrm>
-          <a:prstGeom prst="rect">
-            <a:avLst/>
-          </a:prstGeom>
-          <a:noFill/>
-        </p:spPr>
-        <p:txBody>
-          <a:bodyPr wrap="square" anchor="t">
-            <a:spAutoFit/>
-          </a:bodyPr>
-          <a:lstStyle/>
-          <a:p>
-            <a:pPr algn="l"/>
-            <a:r>
-              <a:rPr sz="4600" b="1">
-                <a:solidFill>
-                  <a:srgbClr val="333333"/>
-                </a:solidFill>
-                <a:latin typeface="Open Sans"/>
-                <a:ea typeface="Open Sans"/>
-                <a:cs typeface="Open Sans"/>
-              </a:rPr>
-              <a:t>Виды наружного кровотечения</a:t>
-            </a:r>
-          </a:p>
-        </p:txBody>
-      </p:sp>
-      <p:sp>
-        <p:nvSpPr>
-          <p:cNvPr id="4" name="Rectangle 3"/>
-          <p:cNvSpPr/>
-          <p:nvPr/>
-        </p:nvSpPr>
-        <p:spPr>
-          <a:xfrm>
-            <a:off x="360000" y="1450000"/>
-            <a:ext cx="23664000" cy="20000"/>
-          </a:xfrm>
-          <a:prstGeom prst="rect">
-            <a:avLst/>
-          </a:prstGeom>
-          <a:solidFill>
-            <a:srgbClr val="E1E1E1"/>
-          </a:solidFill>
-          <a:ln>
-            <a:noFill/>
-          </a:ln>
-        </p:spPr>
-        <p:style>
-          <a:lnRef idx="1">
-            <a:schemeClr val="accent1"/>
-          </a:lnRef>
-          <a:fillRef idx="3">
-            <a:schemeClr val="accent1"/>
-          </a:fillRef>
-          <a:effectRef idx="2">
-            <a:schemeClr val="accent1"/>
-          </a:effectRef>
-          <a:fontRef idx="minor">
-            <a:schemeClr val="lt1"/>
-          </a:fontRef>
-        </p:style>
-        <p:txBody>
-          <a:bodyPr rtlCol="0" anchor="ctr"/>
-          <a:lstStyle/>
-          <a:p>
-            <a:pPr algn="ctr"/>
-          </a:p>
-        </p:txBody>
-      </p:sp>
-      <p:sp>
-        <p:nvSpPr>
-          <p:cNvPr id="5" name="Rectangle 4"/>
-          <p:cNvSpPr/>
-          <p:nvPr/>
-        </p:nvSpPr>
-        <p:spPr>
-          <a:xfrm>
-            <a:off x="360000" y="1900000"/>
-            <a:ext cx="7721333" cy="9000000"/>
-          </a:xfrm>
-          <a:prstGeom prst="rect">
-            <a:avLst/>
-          </a:prstGeom>
-          <a:solidFill>
-            <a:srgbClr val="FFFFFF"/>
-          </a:solidFill>
-          <a:ln w="15875">
-            <a:solidFill>
-              <a:srgbClr val="E1E1E1"/>
-            </a:solidFill>
-          </a:ln>
-        </p:spPr>
-        <p:style>
-          <a:lnRef idx="1">
-            <a:schemeClr val="accent1"/>
-          </a:lnRef>
-          <a:fillRef idx="3">
-            <a:schemeClr val="accent1"/>
-          </a:fillRef>
-          <a:effectRef idx="2">
-            <a:schemeClr val="accent1"/>
-          </a:effectRef>
-          <a:fontRef idx="minor">
-            <a:schemeClr val="lt1"/>
-          </a:fontRef>
-        </p:style>
-        <p:txBody>
-          <a:bodyPr rtlCol="0" anchor="ctr"/>
-          <a:lstStyle/>
-          <a:p>
-            <a:pPr algn="ctr"/>
-          </a:p>
-        </p:txBody>
-      </p:sp>
       <p:pic>
         <p:nvPicPr>
-          <p:cNvPr id="6" name="Picture 5" descr="bleed_arterial.png"/>
+          <p:cNvPr id="2" name="Picture 1" descr="page_02.png"/>
           <p:cNvPicPr>
             <a:picLocks noChangeAspect="1"/>
           </p:cNvPicPr>
@@ -4147,266 +3943,14 @@
         </p:blipFill>
         <p:spPr>
           <a:xfrm>
-            <a:off x="1228171" y="2000000"/>
-            <a:ext cx="5984990" cy="5800000"/>
+            <a:off x="0" y="0"/>
+            <a:ext cx="24384000" cy="13716000"/>
           </a:xfrm>
           <a:prstGeom prst="rect">
             <a:avLst/>
           </a:prstGeom>
         </p:spPr>
       </p:pic>
-      <p:sp>
-        <p:nvSpPr>
-          <p:cNvPr id="7" name="TextBox 6"/>
-          <p:cNvSpPr txBox="1"/>
-          <p:nvPr/>
-        </p:nvSpPr>
-        <p:spPr>
-          <a:xfrm>
-            <a:off x="510000" y="7900000"/>
-            <a:ext cx="7421333" cy="2900000"/>
-          </a:xfrm>
-          <a:prstGeom prst="rect">
-            <a:avLst/>
-          </a:prstGeom>
-          <a:noFill/>
-        </p:spPr>
-        <p:txBody>
-          <a:bodyPr wrap="square" anchor="t">
-            <a:spAutoFit/>
-          </a:bodyPr>
-          <a:lstStyle/>
-          <a:p>
-            <a:pPr algn="ctr"/>
-            <a:r>
-              <a:rPr sz="2000" b="0">
-                <a:solidFill>
-                  <a:srgbClr val="333333"/>
-                </a:solidFill>
-                <a:latin typeface="Open Sans"/>
-                <a:ea typeface="Open Sans"/>
-                <a:cs typeface="Open Sans"/>
-              </a:rPr>
-              <a:t>Артериальное
-Алая кровь, пульсирующая струя</a:t>
-            </a:r>
-          </a:p>
-        </p:txBody>
-      </p:sp>
-      <p:sp>
-        <p:nvSpPr>
-          <p:cNvPr id="8" name="Rectangle 7"/>
-          <p:cNvSpPr/>
-          <p:nvPr/>
-        </p:nvSpPr>
-        <p:spPr>
-          <a:xfrm>
-            <a:off x="8331333" y="1900000"/>
-            <a:ext cx="7721333" cy="9000000"/>
-          </a:xfrm>
-          <a:prstGeom prst="rect">
-            <a:avLst/>
-          </a:prstGeom>
-          <a:solidFill>
-            <a:srgbClr val="FFFFFF"/>
-          </a:solidFill>
-          <a:ln w="15875">
-            <a:solidFill>
-              <a:srgbClr val="E1E1E1"/>
-            </a:solidFill>
-          </a:ln>
-        </p:spPr>
-        <p:style>
-          <a:lnRef idx="1">
-            <a:schemeClr val="accent1"/>
-          </a:lnRef>
-          <a:fillRef idx="3">
-            <a:schemeClr val="accent1"/>
-          </a:fillRef>
-          <a:effectRef idx="2">
-            <a:schemeClr val="accent1"/>
-          </a:effectRef>
-          <a:fontRef idx="minor">
-            <a:schemeClr val="lt1"/>
-          </a:fontRef>
-        </p:style>
-        <p:txBody>
-          <a:bodyPr rtlCol="0" anchor="ctr"/>
-          <a:lstStyle/>
-          <a:p>
-            <a:pPr algn="ctr"/>
-          </a:p>
-        </p:txBody>
-      </p:sp>
-      <p:pic>
-        <p:nvPicPr>
-          <p:cNvPr id="9" name="Picture 8" descr="bleed_venous.png"/>
-          <p:cNvPicPr>
-            <a:picLocks noChangeAspect="1"/>
-          </p:cNvPicPr>
-          <p:nvPr/>
-        </p:nvPicPr>
-        <p:blipFill>
-          <a:blip r:embed="rId3"/>
-          <a:stretch>
-            <a:fillRect/>
-          </a:stretch>
-        </p:blipFill>
-        <p:spPr>
-          <a:xfrm>
-            <a:off x="9063482" y="2000000"/>
-            <a:ext cx="6257035" cy="5800000"/>
-          </a:xfrm>
-          <a:prstGeom prst="rect">
-            <a:avLst/>
-          </a:prstGeom>
-        </p:spPr>
-      </p:pic>
-      <p:sp>
-        <p:nvSpPr>
-          <p:cNvPr id="10" name="TextBox 9"/>
-          <p:cNvSpPr txBox="1"/>
-          <p:nvPr/>
-        </p:nvSpPr>
-        <p:spPr>
-          <a:xfrm>
-            <a:off x="8481333" y="7900000"/>
-            <a:ext cx="7421333" cy="2900000"/>
-          </a:xfrm>
-          <a:prstGeom prst="rect">
-            <a:avLst/>
-          </a:prstGeom>
-          <a:noFill/>
-        </p:spPr>
-        <p:txBody>
-          <a:bodyPr wrap="square" anchor="t">
-            <a:spAutoFit/>
-          </a:bodyPr>
-          <a:lstStyle/>
-          <a:p>
-            <a:pPr algn="ctr"/>
-            <a:r>
-              <a:rPr sz="2000" b="0">
-                <a:solidFill>
-                  <a:srgbClr val="333333"/>
-                </a:solidFill>
-                <a:latin typeface="Open Sans"/>
-                <a:ea typeface="Open Sans"/>
-                <a:cs typeface="Open Sans"/>
-              </a:rPr>
-              <a:t>Венозное
-Тёмная кровь, равномерная струя</a:t>
-            </a:r>
-          </a:p>
-        </p:txBody>
-      </p:sp>
-      <p:sp>
-        <p:nvSpPr>
-          <p:cNvPr id="11" name="Rectangle 10"/>
-          <p:cNvSpPr/>
-          <p:nvPr/>
-        </p:nvSpPr>
-        <p:spPr>
-          <a:xfrm>
-            <a:off x="16302666" y="1900000"/>
-            <a:ext cx="7721333" cy="9000000"/>
-          </a:xfrm>
-          <a:prstGeom prst="rect">
-            <a:avLst/>
-          </a:prstGeom>
-          <a:solidFill>
-            <a:srgbClr val="FFFFFF"/>
-          </a:solidFill>
-          <a:ln w="15875">
-            <a:solidFill>
-              <a:srgbClr val="E1E1E1"/>
-            </a:solidFill>
-          </a:ln>
-        </p:spPr>
-        <p:style>
-          <a:lnRef idx="1">
-            <a:schemeClr val="accent1"/>
-          </a:lnRef>
-          <a:fillRef idx="3">
-            <a:schemeClr val="accent1"/>
-          </a:fillRef>
-          <a:effectRef idx="2">
-            <a:schemeClr val="accent1"/>
-          </a:effectRef>
-          <a:fontRef idx="minor">
-            <a:schemeClr val="lt1"/>
-          </a:fontRef>
-        </p:style>
-        <p:txBody>
-          <a:bodyPr rtlCol="0" anchor="ctr"/>
-          <a:lstStyle/>
-          <a:p>
-            <a:pPr algn="ctr"/>
-          </a:p>
-        </p:txBody>
-      </p:sp>
-      <p:pic>
-        <p:nvPicPr>
-          <p:cNvPr id="12" name="Picture 11" descr="bleed_capillary.png"/>
-          <p:cNvPicPr>
-            <a:picLocks noChangeAspect="1"/>
-          </p:cNvPicPr>
-          <p:nvPr/>
-        </p:nvPicPr>
-        <p:blipFill>
-          <a:blip r:embed="rId4"/>
-          <a:stretch>
-            <a:fillRect/>
-          </a:stretch>
-        </p:blipFill>
-        <p:spPr>
-          <a:xfrm>
-            <a:off x="17034815" y="2000000"/>
-            <a:ext cx="6257035" cy="5800000"/>
-          </a:xfrm>
-          <a:prstGeom prst="rect">
-            <a:avLst/>
-          </a:prstGeom>
-        </p:spPr>
-      </p:pic>
-      <p:sp>
-        <p:nvSpPr>
-          <p:cNvPr id="13" name="TextBox 12"/>
-          <p:cNvSpPr txBox="1"/>
-          <p:nvPr/>
-        </p:nvSpPr>
-        <p:spPr>
-          <a:xfrm>
-            <a:off x="16452666" y="7900000"/>
-            <a:ext cx="7421333" cy="2900000"/>
-          </a:xfrm>
-          <a:prstGeom prst="rect">
-            <a:avLst/>
-          </a:prstGeom>
-          <a:noFill/>
-        </p:spPr>
-        <p:txBody>
-          <a:bodyPr wrap="square" anchor="t">
-            <a:spAutoFit/>
-          </a:bodyPr>
-          <a:lstStyle/>
-          <a:p>
-            <a:pPr algn="ctr"/>
-            <a:r>
-              <a:rPr sz="2000" b="0">
-                <a:solidFill>
-                  <a:srgbClr val="333333"/>
-                </a:solidFill>
-                <a:latin typeface="Open Sans"/>
-                <a:ea typeface="Open Sans"/>
-                <a:cs typeface="Open Sans"/>
-              </a:rPr>
-              <a:t>Капиллярное
-Сочится по поверхности</a:t>
-            </a:r>
-          </a:p>
-        </p:txBody>
-      </p:sp>
     </p:spTree>
   </p:cSld>
   <p:clrMapOvr>
@@ -4425,6 +3969,48 @@
         <p:nvPr/>
       </p:nvGrpSpPr>
       <p:grpSpPr/>
+      <p:pic>
+        <p:nvPicPr>
+          <p:cNvPr id="2" name="Picture 1" descr="page_03.png"/>
+          <p:cNvPicPr>
+            <a:picLocks noChangeAspect="1"/>
+          </p:cNvPicPr>
+          <p:nvPr/>
+        </p:nvPicPr>
+        <p:blipFill>
+          <a:blip r:embed="rId2"/>
+          <a:stretch>
+            <a:fillRect/>
+          </a:stretch>
+        </p:blipFill>
+        <p:spPr>
+          <a:xfrm>
+            <a:off x="0" y="0"/>
+            <a:ext cx="24384000" cy="13716000"/>
+          </a:xfrm>
+          <a:prstGeom prst="rect">
+            <a:avLst/>
+          </a:prstGeom>
+        </p:spPr>
+      </p:pic>
+    </p:spTree>
+  </p:cSld>
+  <p:clrMapOvr>
+    <a:masterClrMapping/>
+  </p:clrMapOvr>
+</p:sld>
+</file>
+
+<file path=ppt/slides/slide5.xml><?xml version="1.0" encoding="utf-8"?>
+<p:sld xmlns:a="http://schemas.openxmlformats.org/drawingml/2006/main" xmlns:p="http://schemas.openxmlformats.org/presentationml/2006/main" xmlns:r="http://schemas.openxmlformats.org/officeDocument/2006/relationships">
+  <p:cSld>
+    <p:spTree>
+      <p:nvGrpSpPr>
+        <p:cNvPr id="1" name=""/>
+        <p:cNvGrpSpPr/>
+        <p:nvPr/>
+      </p:nvGrpSpPr>
+      <p:grpSpPr/>
       <p:sp>
         <p:nvSpPr>
           <p:cNvPr id="2" name="Rectangle 1"/>
@@ -4476,8 +4062,8 @@
         </p:nvSpPr>
         <p:spPr>
           <a:xfrm>
-            <a:off x="360000" y="350000"/>
-            <a:ext cx="23664000" cy="1100000"/>
+            <a:off x="800000" y="400000"/>
+            <a:ext cx="22800000" cy="1000000"/>
           </a:xfrm>
           <a:prstGeom prst="rect">
             <a:avLst/>
@@ -4500,7 +4086,7 @@
                 <a:ea typeface="Open Sans"/>
                 <a:cs typeface="Open Sans"/>
               </a:rPr>
-              <a:t>Сравнение видов кровотечения</a:t>
+              <a:t>Сравнительная таблица видов кровотечения</a:t>
             </a:r>
           </a:p>
         </p:txBody>
@@ -4513,8 +4099,8 @@
         </p:nvSpPr>
         <p:spPr>
           <a:xfrm>
-            <a:off x="360000" y="1450000"/>
-            <a:ext cx="23664000" cy="20000"/>
+            <a:off x="800000" y="1500000"/>
+            <a:ext cx="22800000" cy="20000"/>
           </a:xfrm>
           <a:prstGeom prst="rect">
             <a:avLst/>
@@ -4557,8 +4143,8 @@
           <p:nvPr/>
         </p:nvGraphicFramePr>
         <p:xfrm>
-          <a:off x="2192000" y="2000000"/>
-          <a:ext cx="20000000" cy="5500000"/>
+          <a:off x="800000" y="1900000"/>
+          <a:ext cx="22800000" cy="6000000"/>
         </p:xfrm>
         <a:graphic>
           <a:graphicData uri="http://schemas.openxmlformats.org/drawingml/2006/table">
@@ -4567,12 +4153,12 @@
                 <a:tableStyleId>{5C22544A-7EE6-4342-B048-85BDC9FD1C3A}</a:tableStyleId>
               </a:tblPr>
               <a:tblGrid>
-                <a:gridCol w="5000000"/>
-                <a:gridCol w="5000000"/>
-                <a:gridCol w="5000000"/>
-                <a:gridCol w="5000000"/>
+                <a:gridCol w="5700000"/>
+                <a:gridCol w="5700000"/>
+                <a:gridCol w="5700000"/>
+                <a:gridCol w="5700000"/>
               </a:tblGrid>
-              <a:tr h="1100000">
+              <a:tr h="1200000">
                 <a:tc>
                   <a:txBody>
                     <a:bodyPr/>
@@ -4670,7 +4256,7 @@
                   </a:tcPr>
                 </a:tc>
               </a:tr>
-              <a:tr h="1100000">
+              <a:tr h="1200000">
                 <a:tc>
                   <a:txBody>
                     <a:bodyPr/>
@@ -4685,7 +4271,7 @@
                           <a:ea typeface="Open Sans"/>
                           <a:cs typeface="Open Sans"/>
                         </a:rPr>
-                        <a:t>Цвет</a:t>
+                        <a:t>Цвет крови</a:t>
                       </a:r>
                     </a:p>
                   </a:txBody>
@@ -4709,7 +4295,7 @@
                           <a:ea typeface="Open Sans"/>
                           <a:cs typeface="Open Sans"/>
                         </a:rPr>
-                        <a:t>Алый</a:t>
+                        <a:t>Алый, яркий</a:t>
                       </a:r>
                     </a:p>
                   </a:txBody>
@@ -4733,7 +4319,7 @@
                           <a:ea typeface="Open Sans"/>
                           <a:cs typeface="Open Sans"/>
                         </a:rPr>
-                        <a:t>Тёмный</a:t>
+                        <a:t>Тёмный, вишнёвый</a:t>
                       </a:r>
                     </a:p>
                   </a:txBody>
@@ -4768,7 +4354,7 @@
                   </a:tcPr>
                 </a:tc>
               </a:tr>
-              <a:tr h="1100000">
+              <a:tr h="1200000">
                 <a:tc>
                   <a:txBody>
                     <a:bodyPr/>
@@ -4866,7 +4452,7 @@
                   </a:tcPr>
                 </a:tc>
               </a:tr>
-              <a:tr h="1100000">
+              <a:tr h="1200000">
                 <a:tc>
                   <a:txBody>
                     <a:bodyPr/>
@@ -4929,7 +4515,7 @@
                           <a:ea typeface="Open Sans"/>
                           <a:cs typeface="Open Sans"/>
                         </a:rPr>
-                        <a:t>Умеренная</a:t>
+                        <a:t>Умеренная / быстрая</a:t>
                       </a:r>
                     </a:p>
                   </a:txBody>
@@ -4964,7 +4550,7 @@
                   </a:tcPr>
                 </a:tc>
               </a:tr>
-              <a:tr h="1100000">
+              <a:tr h="1200000">
                 <a:tc>
                   <a:txBody>
                     <a:bodyPr/>
@@ -5003,7 +4589,7 @@
                           <a:ea typeface="Open Sans"/>
                           <a:cs typeface="Open Sans"/>
                         </a:rPr>
-                        <a:t>Критическая</a:t>
+                        <a:t>Критическая — минуты</a:t>
                       </a:r>
                     </a:p>
                   </a:txBody>
@@ -5074,615 +4660,6 @@
 </p:sld>
 </file>
 
-<file path=ppt/slides/slide5.xml><?xml version="1.0" encoding="utf-8"?>
-<p:sld xmlns:a="http://schemas.openxmlformats.org/drawingml/2006/main" xmlns:p="http://schemas.openxmlformats.org/presentationml/2006/main" xmlns:r="http://schemas.openxmlformats.org/officeDocument/2006/relationships">
-  <p:cSld>
-    <p:spTree>
-      <p:nvGrpSpPr>
-        <p:cNvPr id="1" name=""/>
-        <p:cNvGrpSpPr/>
-        <p:nvPr/>
-      </p:nvGrpSpPr>
-      <p:grpSpPr/>
-      <p:sp>
-        <p:nvSpPr>
-          <p:cNvPr id="2" name="Rectangle 1"/>
-          <p:cNvSpPr/>
-          <p:nvPr/>
-        </p:nvSpPr>
-        <p:spPr>
-          <a:xfrm>
-            <a:off x="0" y="0"/>
-            <a:ext cx="24384000" cy="13716000"/>
-          </a:xfrm>
-          <a:prstGeom prst="rect">
-            <a:avLst/>
-          </a:prstGeom>
-          <a:solidFill>
-            <a:srgbClr val="FFFFFF"/>
-          </a:solidFill>
-          <a:ln>
-            <a:noFill/>
-          </a:ln>
-        </p:spPr>
-        <p:style>
-          <a:lnRef idx="1">
-            <a:schemeClr val="accent1"/>
-          </a:lnRef>
-          <a:fillRef idx="3">
-            <a:schemeClr val="accent1"/>
-          </a:fillRef>
-          <a:effectRef idx="2">
-            <a:schemeClr val="accent1"/>
-          </a:effectRef>
-          <a:fontRef idx="minor">
-            <a:schemeClr val="lt1"/>
-          </a:fontRef>
-        </p:style>
-        <p:txBody>
-          <a:bodyPr rtlCol="0" anchor="ctr"/>
-          <a:lstStyle/>
-          <a:p>
-            <a:pPr algn="ctr"/>
-          </a:p>
-        </p:txBody>
-      </p:sp>
-      <p:sp>
-        <p:nvSpPr>
-          <p:cNvPr id="3" name="TextBox 2"/>
-          <p:cNvSpPr txBox="1"/>
-          <p:nvPr/>
-        </p:nvSpPr>
-        <p:spPr>
-          <a:xfrm>
-            <a:off x="360000" y="350000"/>
-            <a:ext cx="23664000" cy="1100000"/>
-          </a:xfrm>
-          <a:prstGeom prst="rect">
-            <a:avLst/>
-          </a:prstGeom>
-          <a:noFill/>
-        </p:spPr>
-        <p:txBody>
-          <a:bodyPr wrap="square" anchor="t">
-            <a:spAutoFit/>
-          </a:bodyPr>
-          <a:lstStyle/>
-          <a:p>
-            <a:pPr algn="l"/>
-            <a:r>
-              <a:rPr sz="4600" b="1">
-                <a:solidFill>
-                  <a:srgbClr val="333333"/>
-                </a:solidFill>
-                <a:latin typeface="Open Sans"/>
-                <a:ea typeface="Open Sans"/>
-                <a:cs typeface="Open Sans"/>
-              </a:rPr>
-              <a:t>Признаки острой кровопотери</a:t>
-            </a:r>
-          </a:p>
-        </p:txBody>
-      </p:sp>
-      <p:sp>
-        <p:nvSpPr>
-          <p:cNvPr id="4" name="Rectangle 3"/>
-          <p:cNvSpPr/>
-          <p:nvPr/>
-        </p:nvSpPr>
-        <p:spPr>
-          <a:xfrm>
-            <a:off x="360000" y="1450000"/>
-            <a:ext cx="23664000" cy="20000"/>
-          </a:xfrm>
-          <a:prstGeom prst="rect">
-            <a:avLst/>
-          </a:prstGeom>
-          <a:solidFill>
-            <a:srgbClr val="E1E1E1"/>
-          </a:solidFill>
-          <a:ln>
-            <a:noFill/>
-          </a:ln>
-        </p:spPr>
-        <p:style>
-          <a:lnRef idx="1">
-            <a:schemeClr val="accent1"/>
-          </a:lnRef>
-          <a:fillRef idx="3">
-            <a:schemeClr val="accent1"/>
-          </a:fillRef>
-          <a:effectRef idx="2">
-            <a:schemeClr val="accent1"/>
-          </a:effectRef>
-          <a:fontRef idx="minor">
-            <a:schemeClr val="lt1"/>
-          </a:fontRef>
-        </p:style>
-        <p:txBody>
-          <a:bodyPr rtlCol="0" anchor="ctr"/>
-          <a:lstStyle/>
-          <a:p>
-            <a:pPr algn="ctr"/>
-          </a:p>
-        </p:txBody>
-      </p:sp>
-      <p:sp>
-        <p:nvSpPr>
-          <p:cNvPr id="5" name="Rounded Rectangle 4"/>
-          <p:cNvSpPr/>
-          <p:nvPr/>
-        </p:nvSpPr>
-        <p:spPr>
-          <a:xfrm>
-            <a:off x="360000" y="1900000"/>
-            <a:ext cx="900000" cy="900000"/>
-          </a:xfrm>
-          <a:prstGeom prst="roundRect">
-            <a:avLst/>
-          </a:prstGeom>
-          <a:solidFill>
-            <a:srgbClr val="0055AA"/>
-          </a:solidFill>
-          <a:ln>
-            <a:noFill/>
-          </a:ln>
-        </p:spPr>
-        <p:style>
-          <a:lnRef idx="1">
-            <a:schemeClr val="accent1"/>
-          </a:lnRef>
-          <a:fillRef idx="3">
-            <a:schemeClr val="accent1"/>
-          </a:fillRef>
-          <a:effectRef idx="2">
-            <a:schemeClr val="accent1"/>
-          </a:effectRef>
-          <a:fontRef idx="minor">
-            <a:schemeClr val="lt1"/>
-          </a:fontRef>
-        </p:style>
-        <p:txBody>
-          <a:bodyPr rtlCol="0" anchor="ctr"/>
-          <a:lstStyle/>
-          <a:p>
-            <a:pPr algn="ctr"/>
-          </a:p>
-        </p:txBody>
-      </p:sp>
-      <p:sp>
-        <p:nvSpPr>
-          <p:cNvPr id="6" name="TextBox 5"/>
-          <p:cNvSpPr txBox="1"/>
-          <p:nvPr/>
-        </p:nvSpPr>
-        <p:spPr>
-          <a:xfrm>
-            <a:off x="360000" y="1900000"/>
-            <a:ext cx="900000" cy="900000"/>
-          </a:xfrm>
-          <a:prstGeom prst="rect">
-            <a:avLst/>
-          </a:prstGeom>
-          <a:noFill/>
-        </p:spPr>
-        <p:txBody>
-          <a:bodyPr wrap="square" anchor="ctr">
-            <a:spAutoFit/>
-          </a:bodyPr>
-          <a:lstStyle/>
-          <a:p>
-            <a:pPr algn="ctr"/>
-            <a:r>
-              <a:rPr sz="2200" b="1">
-                <a:solidFill>
-                  <a:srgbClr val="FFFFFF"/>
-                </a:solidFill>
-                <a:latin typeface="Open Sans"/>
-                <a:ea typeface="Open Sans"/>
-                <a:cs typeface="Open Sans"/>
-              </a:rPr>
-              <a:t>1</a:t>
-            </a:r>
-          </a:p>
-        </p:txBody>
-      </p:sp>
-      <p:sp>
-        <p:nvSpPr>
-          <p:cNvPr id="7" name="TextBox 6"/>
-          <p:cNvSpPr txBox="1"/>
-          <p:nvPr/>
-        </p:nvSpPr>
-        <p:spPr>
-          <a:xfrm>
-            <a:off x="1560000" y="1900000"/>
-            <a:ext cx="22464000" cy="900000"/>
-          </a:xfrm>
-          <a:prstGeom prst="rect">
-            <a:avLst/>
-          </a:prstGeom>
-          <a:noFill/>
-        </p:spPr>
-        <p:txBody>
-          <a:bodyPr wrap="square" anchor="ctr">
-            <a:spAutoFit/>
-          </a:bodyPr>
-          <a:lstStyle/>
-          <a:p>
-            <a:pPr algn="l"/>
-            <a:r>
-              <a:rPr sz="3200" b="0">
-                <a:solidFill>
-                  <a:srgbClr val="333333"/>
-                </a:solidFill>
-                <a:latin typeface="Open Sans"/>
-                <a:ea typeface="Open Sans"/>
-                <a:cs typeface="Open Sans"/>
-              </a:rPr>
-              <a:t>Слабость, жажда, головокружение</a:t>
-            </a:r>
-          </a:p>
-        </p:txBody>
-      </p:sp>
-      <p:sp>
-        <p:nvSpPr>
-          <p:cNvPr id="8" name="Rounded Rectangle 7"/>
-          <p:cNvSpPr/>
-          <p:nvPr/>
-        </p:nvSpPr>
-        <p:spPr>
-          <a:xfrm>
-            <a:off x="360000" y="3500000"/>
-            <a:ext cx="900000" cy="900000"/>
-          </a:xfrm>
-          <a:prstGeom prst="roundRect">
-            <a:avLst/>
-          </a:prstGeom>
-          <a:solidFill>
-            <a:srgbClr val="0055AA"/>
-          </a:solidFill>
-          <a:ln>
-            <a:noFill/>
-          </a:ln>
-        </p:spPr>
-        <p:style>
-          <a:lnRef idx="1">
-            <a:schemeClr val="accent1"/>
-          </a:lnRef>
-          <a:fillRef idx="3">
-            <a:schemeClr val="accent1"/>
-          </a:fillRef>
-          <a:effectRef idx="2">
-            <a:schemeClr val="accent1"/>
-          </a:effectRef>
-          <a:fontRef idx="minor">
-            <a:schemeClr val="lt1"/>
-          </a:fontRef>
-        </p:style>
-        <p:txBody>
-          <a:bodyPr rtlCol="0" anchor="ctr"/>
-          <a:lstStyle/>
-          <a:p>
-            <a:pPr algn="ctr"/>
-          </a:p>
-        </p:txBody>
-      </p:sp>
-      <p:sp>
-        <p:nvSpPr>
-          <p:cNvPr id="9" name="TextBox 8"/>
-          <p:cNvSpPr txBox="1"/>
-          <p:nvPr/>
-        </p:nvSpPr>
-        <p:spPr>
-          <a:xfrm>
-            <a:off x="360000" y="3500000"/>
-            <a:ext cx="900000" cy="900000"/>
-          </a:xfrm>
-          <a:prstGeom prst="rect">
-            <a:avLst/>
-          </a:prstGeom>
-          <a:noFill/>
-        </p:spPr>
-        <p:txBody>
-          <a:bodyPr wrap="square" anchor="ctr">
-            <a:spAutoFit/>
-          </a:bodyPr>
-          <a:lstStyle/>
-          <a:p>
-            <a:pPr algn="ctr"/>
-            <a:r>
-              <a:rPr sz="2200" b="1">
-                <a:solidFill>
-                  <a:srgbClr val="FFFFFF"/>
-                </a:solidFill>
-                <a:latin typeface="Open Sans"/>
-                <a:ea typeface="Open Sans"/>
-                <a:cs typeface="Open Sans"/>
-              </a:rPr>
-              <a:t>2</a:t>
-            </a:r>
-          </a:p>
-        </p:txBody>
-      </p:sp>
-      <p:sp>
-        <p:nvSpPr>
-          <p:cNvPr id="10" name="TextBox 9"/>
-          <p:cNvSpPr txBox="1"/>
-          <p:nvPr/>
-        </p:nvSpPr>
-        <p:spPr>
-          <a:xfrm>
-            <a:off x="1560000" y="3500000"/>
-            <a:ext cx="22464000" cy="900000"/>
-          </a:xfrm>
-          <a:prstGeom prst="rect">
-            <a:avLst/>
-          </a:prstGeom>
-          <a:noFill/>
-        </p:spPr>
-        <p:txBody>
-          <a:bodyPr wrap="square" anchor="ctr">
-            <a:spAutoFit/>
-          </a:bodyPr>
-          <a:lstStyle/>
-          <a:p>
-            <a:pPr algn="l"/>
-            <a:r>
-              <a:rPr sz="3200" b="0">
-                <a:solidFill>
-                  <a:srgbClr val="333333"/>
-                </a:solidFill>
-                <a:latin typeface="Open Sans"/>
-                <a:ea typeface="Open Sans"/>
-                <a:cs typeface="Open Sans"/>
-              </a:rPr>
-              <a:t>«Мушки», обморок при попытке встать</a:t>
-            </a:r>
-          </a:p>
-        </p:txBody>
-      </p:sp>
-      <p:sp>
-        <p:nvSpPr>
-          <p:cNvPr id="11" name="Rounded Rectangle 10"/>
-          <p:cNvSpPr/>
-          <p:nvPr/>
-        </p:nvSpPr>
-        <p:spPr>
-          <a:xfrm>
-            <a:off x="360000" y="5100000"/>
-            <a:ext cx="900000" cy="900000"/>
-          </a:xfrm>
-          <a:prstGeom prst="roundRect">
-            <a:avLst/>
-          </a:prstGeom>
-          <a:solidFill>
-            <a:srgbClr val="0055AA"/>
-          </a:solidFill>
-          <a:ln>
-            <a:noFill/>
-          </a:ln>
-        </p:spPr>
-        <p:style>
-          <a:lnRef idx="1">
-            <a:schemeClr val="accent1"/>
-          </a:lnRef>
-          <a:fillRef idx="3">
-            <a:schemeClr val="accent1"/>
-          </a:fillRef>
-          <a:effectRef idx="2">
-            <a:schemeClr val="accent1"/>
-          </a:effectRef>
-          <a:fontRef idx="minor">
-            <a:schemeClr val="lt1"/>
-          </a:fontRef>
-        </p:style>
-        <p:txBody>
-          <a:bodyPr rtlCol="0" anchor="ctr"/>
-          <a:lstStyle/>
-          <a:p>
-            <a:pPr algn="ctr"/>
-          </a:p>
-        </p:txBody>
-      </p:sp>
-      <p:sp>
-        <p:nvSpPr>
-          <p:cNvPr id="12" name="TextBox 11"/>
-          <p:cNvSpPr txBox="1"/>
-          <p:nvPr/>
-        </p:nvSpPr>
-        <p:spPr>
-          <a:xfrm>
-            <a:off x="360000" y="5100000"/>
-            <a:ext cx="900000" cy="900000"/>
-          </a:xfrm>
-          <a:prstGeom prst="rect">
-            <a:avLst/>
-          </a:prstGeom>
-          <a:noFill/>
-        </p:spPr>
-        <p:txBody>
-          <a:bodyPr wrap="square" anchor="ctr">
-            <a:spAutoFit/>
-          </a:bodyPr>
-          <a:lstStyle/>
-          <a:p>
-            <a:pPr algn="ctr"/>
-            <a:r>
-              <a:rPr sz="2200" b="1">
-                <a:solidFill>
-                  <a:srgbClr val="FFFFFF"/>
-                </a:solidFill>
-                <a:latin typeface="Open Sans"/>
-                <a:ea typeface="Open Sans"/>
-                <a:cs typeface="Open Sans"/>
-              </a:rPr>
-              <a:t>3</a:t>
-            </a:r>
-          </a:p>
-        </p:txBody>
-      </p:sp>
-      <p:sp>
-        <p:nvSpPr>
-          <p:cNvPr id="13" name="TextBox 12"/>
-          <p:cNvSpPr txBox="1"/>
-          <p:nvPr/>
-        </p:nvSpPr>
-        <p:spPr>
-          <a:xfrm>
-            <a:off x="1560000" y="5100000"/>
-            <a:ext cx="22464000" cy="900000"/>
-          </a:xfrm>
-          <a:prstGeom prst="rect">
-            <a:avLst/>
-          </a:prstGeom>
-          <a:noFill/>
-        </p:spPr>
-        <p:txBody>
-          <a:bodyPr wrap="square" anchor="ctr">
-            <a:spAutoFit/>
-          </a:bodyPr>
-          <a:lstStyle/>
-          <a:p>
-            <a:pPr algn="l"/>
-            <a:r>
-              <a:rPr sz="3200" b="0">
-                <a:solidFill>
-                  <a:srgbClr val="333333"/>
-                </a:solidFill>
-                <a:latin typeface="Open Sans"/>
-                <a:ea typeface="Open Sans"/>
-                <a:cs typeface="Open Sans"/>
-              </a:rPr>
-              <a:t>Бледная холодная влажная кожа</a:t>
-            </a:r>
-          </a:p>
-        </p:txBody>
-      </p:sp>
-      <p:sp>
-        <p:nvSpPr>
-          <p:cNvPr id="14" name="Rounded Rectangle 13"/>
-          <p:cNvSpPr/>
-          <p:nvPr/>
-        </p:nvSpPr>
-        <p:spPr>
-          <a:xfrm>
-            <a:off x="360000" y="6700000"/>
-            <a:ext cx="900000" cy="900000"/>
-          </a:xfrm>
-          <a:prstGeom prst="roundRect">
-            <a:avLst/>
-          </a:prstGeom>
-          <a:solidFill>
-            <a:srgbClr val="0055AA"/>
-          </a:solidFill>
-          <a:ln>
-            <a:noFill/>
-          </a:ln>
-        </p:spPr>
-        <p:style>
-          <a:lnRef idx="1">
-            <a:schemeClr val="accent1"/>
-          </a:lnRef>
-          <a:fillRef idx="3">
-            <a:schemeClr val="accent1"/>
-          </a:fillRef>
-          <a:effectRef idx="2">
-            <a:schemeClr val="accent1"/>
-          </a:effectRef>
-          <a:fontRef idx="minor">
-            <a:schemeClr val="lt1"/>
-          </a:fontRef>
-        </p:style>
-        <p:txBody>
-          <a:bodyPr rtlCol="0" anchor="ctr"/>
-          <a:lstStyle/>
-          <a:p>
-            <a:pPr algn="ctr"/>
-          </a:p>
-        </p:txBody>
-      </p:sp>
-      <p:sp>
-        <p:nvSpPr>
-          <p:cNvPr id="15" name="TextBox 14"/>
-          <p:cNvSpPr txBox="1"/>
-          <p:nvPr/>
-        </p:nvSpPr>
-        <p:spPr>
-          <a:xfrm>
-            <a:off x="360000" y="6700000"/>
-            <a:ext cx="900000" cy="900000"/>
-          </a:xfrm>
-          <a:prstGeom prst="rect">
-            <a:avLst/>
-          </a:prstGeom>
-          <a:noFill/>
-        </p:spPr>
-        <p:txBody>
-          <a:bodyPr wrap="square" anchor="ctr">
-            <a:spAutoFit/>
-          </a:bodyPr>
-          <a:lstStyle/>
-          <a:p>
-            <a:pPr algn="ctr"/>
-            <a:r>
-              <a:rPr sz="2200" b="1">
-                <a:solidFill>
-                  <a:srgbClr val="FFFFFF"/>
-                </a:solidFill>
-                <a:latin typeface="Open Sans"/>
-                <a:ea typeface="Open Sans"/>
-                <a:cs typeface="Open Sans"/>
-              </a:rPr>
-              <a:t>4</a:t>
-            </a:r>
-          </a:p>
-        </p:txBody>
-      </p:sp>
-      <p:sp>
-        <p:nvSpPr>
-          <p:cNvPr id="16" name="TextBox 15"/>
-          <p:cNvSpPr txBox="1"/>
-          <p:nvPr/>
-        </p:nvSpPr>
-        <p:spPr>
-          <a:xfrm>
-            <a:off x="1560000" y="6700000"/>
-            <a:ext cx="22464000" cy="900000"/>
-          </a:xfrm>
-          <a:prstGeom prst="rect">
-            <a:avLst/>
-          </a:prstGeom>
-          <a:noFill/>
-        </p:spPr>
-        <p:txBody>
-          <a:bodyPr wrap="square" anchor="ctr">
-            <a:spAutoFit/>
-          </a:bodyPr>
-          <a:lstStyle/>
-          <a:p>
-            <a:pPr algn="l"/>
-            <a:r>
-              <a:rPr sz="3200" b="0">
-                <a:solidFill>
-                  <a:srgbClr val="333333"/>
-                </a:solidFill>
-                <a:latin typeface="Open Sans"/>
-                <a:ea typeface="Open Sans"/>
-                <a:cs typeface="Open Sans"/>
-              </a:rPr>
-              <a:t>Тахикардия и частое дыхание</a:t>
-            </a:r>
-          </a:p>
-        </p:txBody>
-      </p:sp>
-    </p:spTree>
-  </p:cSld>
-  <p:clrMapOvr>
-    <a:masterClrMapping/>
-  </p:clrMapOvr>
-</p:sld>
-</file>
-
 <file path=ppt/slides/slide6.xml><?xml version="1.0" encoding="utf-8"?>
 <p:sld xmlns:a="http://schemas.openxmlformats.org/drawingml/2006/main" xmlns:p="http://schemas.openxmlformats.org/presentationml/2006/main" xmlns:r="http://schemas.openxmlformats.org/officeDocument/2006/relationships">
   <p:cSld>
@@ -5744,8 +4721,8 @@
         </p:nvSpPr>
         <p:spPr>
           <a:xfrm>
-            <a:off x="360000" y="350000"/>
-            <a:ext cx="23664000" cy="1100000"/>
+            <a:off x="800000" y="400000"/>
+            <a:ext cx="22800000" cy="1000000"/>
           </a:xfrm>
           <a:prstGeom prst="rect">
             <a:avLst/>
@@ -5768,7 +4745,7 @@
                 <a:ea typeface="Open Sans"/>
                 <a:cs typeface="Open Sans"/>
               </a:rPr>
-              <a:t>Объём кровопотери и состояние</a:t>
+              <a:t>Оценка объёма кровопотери</a:t>
             </a:r>
           </a:p>
         </p:txBody>
@@ -5781,8 +4758,8 @@
         </p:nvSpPr>
         <p:spPr>
           <a:xfrm>
-            <a:off x="360000" y="1450000"/>
-            <a:ext cx="23664000" cy="20000"/>
+            <a:off x="800000" y="1500000"/>
+            <a:ext cx="22800000" cy="20000"/>
           </a:xfrm>
           <a:prstGeom prst="rect">
             <a:avLst/>
@@ -5825,8 +4802,8 @@
           <p:nvPr/>
         </p:nvGraphicFramePr>
         <p:xfrm>
-          <a:off x="2192000" y="2000000"/>
-          <a:ext cx="20000000" cy="5500000"/>
+          <a:off x="800000" y="1900000"/>
+          <a:ext cx="22800000" cy="6000000"/>
         </p:xfrm>
         <a:graphic>
           <a:graphicData uri="http://schemas.openxmlformats.org/drawingml/2006/table">
@@ -5835,11 +4812,11 @@
                 <a:tableStyleId>{5C22544A-7EE6-4342-B048-85BDC9FD1C3A}</a:tableStyleId>
               </a:tblPr>
               <a:tblGrid>
-                <a:gridCol w="6666666"/>
-                <a:gridCol w="6666666"/>
-                <a:gridCol w="6666668"/>
+                <a:gridCol w="7600000"/>
+                <a:gridCol w="7600000"/>
+                <a:gridCol w="7600000"/>
               </a:tblGrid>
-              <a:tr h="1100000">
+              <a:tr h="1200000">
                 <a:tc>
                   <a:txBody>
                     <a:bodyPr/>
@@ -5913,7 +4890,7 @@
                   </a:tcPr>
                 </a:tc>
               </a:tr>
-              <a:tr h="1100000">
+              <a:tr h="1200000">
                 <a:tc>
                   <a:txBody>
                     <a:bodyPr/>
@@ -5987,7 +4964,7 @@
                   </a:tcPr>
                 </a:tc>
               </a:tr>
-              <a:tr h="1100000">
+              <a:tr h="1200000">
                 <a:tc>
                   <a:txBody>
                     <a:bodyPr/>
@@ -6061,7 +5038,7 @@
                   </a:tcPr>
                 </a:tc>
               </a:tr>
-              <a:tr h="1100000">
+              <a:tr h="1200000">
                 <a:tc>
                   <a:txBody>
                     <a:bodyPr/>
@@ -6135,7 +5112,7 @@
                   </a:tcPr>
                 </a:tc>
               </a:tr>
-              <a:tr h="1100000">
+              <a:tr h="1200000">
                 <a:tc>
                   <a:txBody>
                     <a:bodyPr/>
@@ -6282,8 +5259,8 @@
         </p:nvSpPr>
         <p:spPr>
           <a:xfrm>
-            <a:off x="360000" y="350000"/>
-            <a:ext cx="23664000" cy="1100000"/>
+            <a:off x="800000" y="400000"/>
+            <a:ext cx="22800000" cy="1000000"/>
           </a:xfrm>
           <a:prstGeom prst="rect">
             <a:avLst/>
@@ -6306,7 +5283,7 @@
                 <a:ea typeface="Open Sans"/>
                 <a:cs typeface="Open Sans"/>
               </a:rPr>
-              <a:t>Скрытое (внутреннее) кровотечение</a:t>
+              <a:t>Признаки скрытого (внутреннего) кровотечения</a:t>
             </a:r>
           </a:p>
         </p:txBody>
@@ -6319,8 +5296,8 @@
         </p:nvSpPr>
         <p:spPr>
           <a:xfrm>
-            <a:off x="360000" y="1450000"/>
-            <a:ext cx="23664000" cy="20000"/>
+            <a:off x="800000" y="1500000"/>
+            <a:ext cx="22800000" cy="20000"/>
           </a:xfrm>
           <a:prstGeom prst="rect">
             <a:avLst/>
@@ -6362,8 +5339,8 @@
         </p:nvSpPr>
         <p:spPr>
           <a:xfrm>
-            <a:off x="860000" y="2000000"/>
-            <a:ext cx="22664000" cy="6500000"/>
+            <a:off x="800000" y="1900000"/>
+            <a:ext cx="22800000" cy="6500000"/>
           </a:xfrm>
           <a:prstGeom prst="rect">
             <a:avLst/>
@@ -6378,7 +5355,7 @@
           <a:p>
             <a:pPr algn="l">
               <a:spcAft>
-                <a:spcPts val="1400"/>
+                <a:spcPts val="1200"/>
               </a:spcAft>
             </a:pPr>
             <a:r>
@@ -6396,7 +5373,7 @@
           <a:p>
             <a:pPr algn="l">
               <a:spcAft>
-                <a:spcPts val="1400"/>
+                <a:spcPts val="1200"/>
               </a:spcAft>
             </a:pPr>
             <a:r>
@@ -6408,13 +5385,13 @@
                 <a:ea typeface="Open Sans"/>
                 <a:cs typeface="Open Sans"/>
               </a:rPr>
-              <a:t>•  Бледность, холодный пот, слабость, жажда</a:t>
+              <a:t>•  Бледность, холодный пот, нарастающая слабость, жажда</a:t>
             </a:r>
           </a:p>
           <a:p>
             <a:pPr algn="l">
               <a:spcAft>
-                <a:spcPts val="1400"/>
+                <a:spcPts val="1200"/>
               </a:spcAft>
             </a:pPr>
             <a:r>
@@ -6432,7 +5409,7 @@
           <a:p>
             <a:pPr algn="l">
               <a:spcAft>
-                <a:spcPts val="1400"/>
+                <a:spcPts val="1200"/>
               </a:spcAft>
             </a:pPr>
             <a:r>
@@ -6450,7 +5427,7 @@
           <a:p>
             <a:pPr algn="l">
               <a:spcAft>
-                <a:spcPts val="1400"/>
+                <a:spcPts val="1200"/>
               </a:spcAft>
             </a:pPr>
             <a:r>
@@ -6462,7 +5439,25 @@
                 <a:ea typeface="Open Sans"/>
                 <a:cs typeface="Open Sans"/>
               </a:rPr>
-              <a:t>•  Действия: СМП, положение, холод, не поить</a:t>
+              <a:t>•  При травме груди — одышка, слабость, бледность</a:t>
+            </a:r>
+          </a:p>
+          <a:p>
+            <a:pPr algn="l">
+              <a:spcAft>
+                <a:spcPts val="1200"/>
+              </a:spcAft>
+            </a:pPr>
+            <a:r>
+              <a:rPr sz="3200" b="0">
+                <a:solidFill>
+                  <a:srgbClr val="333333"/>
+                </a:solidFill>
+                <a:latin typeface="Open Sans"/>
+                <a:ea typeface="Open Sans"/>
+                <a:cs typeface="Open Sans"/>
+              </a:rPr>
+              <a:t>•  Действия: СМП, положение, холод, не кормить и не поить</a:t>
             </a:r>
           </a:p>
         </p:txBody>
@@ -6475,8 +5470,8 @@
         </p:nvSpPr>
         <p:spPr>
           <a:xfrm>
-            <a:off x="360000" y="11200000"/>
-            <a:ext cx="23664000" cy="1500000"/>
+            <a:off x="800000" y="11000000"/>
+            <a:ext cx="22800000" cy="1600000"/>
           </a:xfrm>
           <a:prstGeom prst="roundRect">
             <a:avLst/>
@@ -6518,8 +5513,8 @@
         </p:nvSpPr>
         <p:spPr>
           <a:xfrm>
-            <a:off x="360000" y="11200000"/>
-            <a:ext cx="120000" cy="1500000"/>
+            <a:off x="800000" y="11000000"/>
+            <a:ext cx="120000" cy="1600000"/>
           </a:xfrm>
           <a:prstGeom prst="rect">
             <a:avLst/>
@@ -6561,8 +5556,8 @@
         </p:nvSpPr>
         <p:spPr>
           <a:xfrm>
-            <a:off x="760000" y="11400000"/>
-            <a:ext cx="23064000" cy="1100000"/>
+            <a:off x="1200000" y="11200000"/>
+            <a:ext cx="21800000" cy="1200000"/>
           </a:xfrm>
           <a:prstGeom prst="rect">
             <a:avLst/>
@@ -6659,8 +5654,8 @@
         </p:nvSpPr>
         <p:spPr>
           <a:xfrm>
-            <a:off x="360000" y="350000"/>
-            <a:ext cx="23664000" cy="1100000"/>
+            <a:off x="800000" y="400000"/>
+            <a:ext cx="22800000" cy="1000000"/>
           </a:xfrm>
           <a:prstGeom prst="rect">
             <a:avLst/>
@@ -6673,7 +5668,7 @@
           </a:bodyPr>
           <a:lstStyle/>
           <a:p>
-            <a:pPr algn="ctr"/>
+            <a:pPr algn="l"/>
             <a:r>
               <a:rPr sz="4600" b="1">
                 <a:solidFill>
@@ -6696,8 +5691,8 @@
         </p:nvSpPr>
         <p:spPr>
           <a:xfrm>
-            <a:off x="360000" y="1450000"/>
-            <a:ext cx="23664000" cy="20000"/>
+            <a:off x="800000" y="1500000"/>
+            <a:ext cx="22800000" cy="20000"/>
           </a:xfrm>
           <a:prstGeom prst="rect">
             <a:avLst/>
@@ -6733,16 +5728,61 @@
       </p:sp>
       <p:sp>
         <p:nvSpPr>
-          <p:cNvPr id="5" name="Oval 4"/>
+          <p:cNvPr id="5" name="Rectangle 4"/>
           <p:cNvSpPr/>
           <p:nvPr/>
         </p:nvSpPr>
         <p:spPr>
           <a:xfrm>
-            <a:off x="1860000" y="2150000"/>
-            <a:ext cx="600000" cy="600000"/>
-          </a:xfrm>
-          <a:prstGeom prst="ellipse">
+            <a:off x="800000" y="2000000"/>
+            <a:ext cx="22800000" cy="1600000"/>
+          </a:xfrm>
+          <a:prstGeom prst="rect">
+            <a:avLst/>
+          </a:prstGeom>
+          <a:solidFill>
+            <a:srgbClr val="FFFFFF"/>
+          </a:solidFill>
+          <a:ln w="12700">
+            <a:solidFill>
+              <a:srgbClr val="E1E1E1"/>
+            </a:solidFill>
+          </a:ln>
+        </p:spPr>
+        <p:style>
+          <a:lnRef idx="1">
+            <a:schemeClr val="accent1"/>
+          </a:lnRef>
+          <a:fillRef idx="3">
+            <a:schemeClr val="accent1"/>
+          </a:fillRef>
+          <a:effectRef idx="2">
+            <a:schemeClr val="accent1"/>
+          </a:effectRef>
+          <a:fontRef idx="minor">
+            <a:schemeClr val="lt1"/>
+          </a:fontRef>
+        </p:style>
+        <p:txBody>
+          <a:bodyPr rtlCol="0" anchor="ctr"/>
+          <a:lstStyle/>
+          <a:p>
+            <a:pPr algn="ctr"/>
+          </a:p>
+        </p:txBody>
+      </p:sp>
+      <p:sp>
+        <p:nvSpPr>
+          <p:cNvPr id="6" name="Rectangle 5"/>
+          <p:cNvSpPr/>
+          <p:nvPr/>
+        </p:nvSpPr>
+        <p:spPr>
+          <a:xfrm>
+            <a:off x="800000" y="2000000"/>
+            <a:ext cx="120000" cy="1600000"/>
+          </a:xfrm>
+          <a:prstGeom prst="rect">
             <a:avLst/>
           </a:prstGeom>
           <a:solidFill>
@@ -6776,51 +5816,14 @@
       </p:sp>
       <p:sp>
         <p:nvSpPr>
-          <p:cNvPr id="6" name="TextBox 5"/>
-          <p:cNvSpPr txBox="1"/>
-          <p:nvPr/>
-        </p:nvSpPr>
-        <p:spPr>
-          <a:xfrm>
-            <a:off x="1860000" y="2150000"/>
-            <a:ext cx="600000" cy="600000"/>
-          </a:xfrm>
-          <a:prstGeom prst="rect">
-            <a:avLst/>
-          </a:prstGeom>
-          <a:noFill/>
-        </p:spPr>
-        <p:txBody>
-          <a:bodyPr wrap="square" anchor="ctr">
-            <a:spAutoFit/>
-          </a:bodyPr>
-          <a:lstStyle/>
-          <a:p>
-            <a:pPr algn="ctr"/>
-            <a:r>
-              <a:rPr sz="2400" b="1">
-                <a:solidFill>
-                  <a:srgbClr val="FFFFFF"/>
-                </a:solidFill>
-                <a:latin typeface="Open Sans"/>
-                <a:ea typeface="Open Sans"/>
-                <a:cs typeface="Open Sans"/>
-              </a:rPr>
-              <a:t>OK</a:t>
-            </a:r>
-          </a:p>
-        </p:txBody>
-      </p:sp>
-      <p:sp>
-        <p:nvSpPr>
           <p:cNvPr id="7" name="TextBox 6"/>
           <p:cNvSpPr txBox="1"/>
           <p:nvPr/>
         </p:nvSpPr>
         <p:spPr>
           <a:xfrm>
-            <a:off x="2860000" y="2000000"/>
-            <a:ext cx="18000000" cy="900000"/>
+            <a:off x="1300000" y="2350000"/>
+            <a:ext cx="21500000" cy="900000"/>
           </a:xfrm>
           <a:prstGeom prst="rect">
             <a:avLst/>
@@ -6850,16 +5853,61 @@
       </p:sp>
       <p:sp>
         <p:nvSpPr>
-          <p:cNvPr id="8" name="Oval 7"/>
+          <p:cNvPr id="8" name="Rectangle 7"/>
           <p:cNvSpPr/>
           <p:nvPr/>
         </p:nvSpPr>
         <p:spPr>
           <a:xfrm>
-            <a:off x="1860000" y="3750000"/>
-            <a:ext cx="600000" cy="600000"/>
-          </a:xfrm>
-          <a:prstGeom prst="ellipse">
+            <a:off x="800000" y="3900000"/>
+            <a:ext cx="22800000" cy="1600000"/>
+          </a:xfrm>
+          <a:prstGeom prst="rect">
+            <a:avLst/>
+          </a:prstGeom>
+          <a:solidFill>
+            <a:srgbClr val="FFFFFF"/>
+          </a:solidFill>
+          <a:ln w="12700">
+            <a:solidFill>
+              <a:srgbClr val="E1E1E1"/>
+            </a:solidFill>
+          </a:ln>
+        </p:spPr>
+        <p:style>
+          <a:lnRef idx="1">
+            <a:schemeClr val="accent1"/>
+          </a:lnRef>
+          <a:fillRef idx="3">
+            <a:schemeClr val="accent1"/>
+          </a:fillRef>
+          <a:effectRef idx="2">
+            <a:schemeClr val="accent1"/>
+          </a:effectRef>
+          <a:fontRef idx="minor">
+            <a:schemeClr val="lt1"/>
+          </a:fontRef>
+        </p:style>
+        <p:txBody>
+          <a:bodyPr rtlCol="0" anchor="ctr"/>
+          <a:lstStyle/>
+          <a:p>
+            <a:pPr algn="ctr"/>
+          </a:p>
+        </p:txBody>
+      </p:sp>
+      <p:sp>
+        <p:nvSpPr>
+          <p:cNvPr id="9" name="Rectangle 8"/>
+          <p:cNvSpPr/>
+          <p:nvPr/>
+        </p:nvSpPr>
+        <p:spPr>
+          <a:xfrm>
+            <a:off x="800000" y="3900000"/>
+            <a:ext cx="120000" cy="1600000"/>
+          </a:xfrm>
+          <a:prstGeom prst="rect">
             <a:avLst/>
           </a:prstGeom>
           <a:solidFill>
@@ -6893,51 +5941,14 @@
       </p:sp>
       <p:sp>
         <p:nvSpPr>
-          <p:cNvPr id="9" name="TextBox 8"/>
-          <p:cNvSpPr txBox="1"/>
-          <p:nvPr/>
-        </p:nvSpPr>
-        <p:spPr>
-          <a:xfrm>
-            <a:off x="1860000" y="3750000"/>
-            <a:ext cx="600000" cy="600000"/>
-          </a:xfrm>
-          <a:prstGeom prst="rect">
-            <a:avLst/>
-          </a:prstGeom>
-          <a:noFill/>
-        </p:spPr>
-        <p:txBody>
-          <a:bodyPr wrap="square" anchor="ctr">
-            <a:spAutoFit/>
-          </a:bodyPr>
-          <a:lstStyle/>
-          <a:p>
-            <a:pPr algn="ctr"/>
-            <a:r>
-              <a:rPr sz="2400" b="1">
-                <a:solidFill>
-                  <a:srgbClr val="FFFFFF"/>
-                </a:solidFill>
-                <a:latin typeface="Open Sans"/>
-                <a:ea typeface="Open Sans"/>
-                <a:cs typeface="Open Sans"/>
-              </a:rPr>
-              <a:t>OK</a:t>
-            </a:r>
-          </a:p>
-        </p:txBody>
-      </p:sp>
-      <p:sp>
-        <p:nvSpPr>
           <p:cNvPr id="10" name="TextBox 9"/>
           <p:cNvSpPr txBox="1"/>
           <p:nvPr/>
         </p:nvSpPr>
         <p:spPr>
           <a:xfrm>
-            <a:off x="2860000" y="3600000"/>
-            <a:ext cx="18000000" cy="900000"/>
+            <a:off x="1300000" y="4250000"/>
+            <a:ext cx="21500000" cy="900000"/>
           </a:xfrm>
           <a:prstGeom prst="rect">
             <a:avLst/>
@@ -6967,16 +5978,61 @@
       </p:sp>
       <p:sp>
         <p:nvSpPr>
-          <p:cNvPr id="11" name="Oval 10"/>
+          <p:cNvPr id="11" name="Rectangle 10"/>
           <p:cNvSpPr/>
           <p:nvPr/>
         </p:nvSpPr>
         <p:spPr>
           <a:xfrm>
-            <a:off x="1860000" y="5350000"/>
-            <a:ext cx="600000" cy="600000"/>
-          </a:xfrm>
-          <a:prstGeom prst="ellipse">
+            <a:off x="800000" y="5800000"/>
+            <a:ext cx="22800000" cy="1600000"/>
+          </a:xfrm>
+          <a:prstGeom prst="rect">
+            <a:avLst/>
+          </a:prstGeom>
+          <a:solidFill>
+            <a:srgbClr val="FFFFFF"/>
+          </a:solidFill>
+          <a:ln w="12700">
+            <a:solidFill>
+              <a:srgbClr val="E1E1E1"/>
+            </a:solidFill>
+          </a:ln>
+        </p:spPr>
+        <p:style>
+          <a:lnRef idx="1">
+            <a:schemeClr val="accent1"/>
+          </a:lnRef>
+          <a:fillRef idx="3">
+            <a:schemeClr val="accent1"/>
+          </a:fillRef>
+          <a:effectRef idx="2">
+            <a:schemeClr val="accent1"/>
+          </a:effectRef>
+          <a:fontRef idx="minor">
+            <a:schemeClr val="lt1"/>
+          </a:fontRef>
+        </p:style>
+        <p:txBody>
+          <a:bodyPr rtlCol="0" anchor="ctr"/>
+          <a:lstStyle/>
+          <a:p>
+            <a:pPr algn="ctr"/>
+          </a:p>
+        </p:txBody>
+      </p:sp>
+      <p:sp>
+        <p:nvSpPr>
+          <p:cNvPr id="12" name="Rectangle 11"/>
+          <p:cNvSpPr/>
+          <p:nvPr/>
+        </p:nvSpPr>
+        <p:spPr>
+          <a:xfrm>
+            <a:off x="800000" y="5800000"/>
+            <a:ext cx="120000" cy="1600000"/>
+          </a:xfrm>
+          <a:prstGeom prst="rect">
             <a:avLst/>
           </a:prstGeom>
           <a:solidFill>
@@ -7010,51 +6066,14 @@
       </p:sp>
       <p:sp>
         <p:nvSpPr>
-          <p:cNvPr id="12" name="TextBox 11"/>
-          <p:cNvSpPr txBox="1"/>
-          <p:nvPr/>
-        </p:nvSpPr>
-        <p:spPr>
-          <a:xfrm>
-            <a:off x="1860000" y="5350000"/>
-            <a:ext cx="600000" cy="600000"/>
-          </a:xfrm>
-          <a:prstGeom prst="rect">
-            <a:avLst/>
-          </a:prstGeom>
-          <a:noFill/>
-        </p:spPr>
-        <p:txBody>
-          <a:bodyPr wrap="square" anchor="ctr">
-            <a:spAutoFit/>
-          </a:bodyPr>
-          <a:lstStyle/>
-          <a:p>
-            <a:pPr algn="ctr"/>
-            <a:r>
-              <a:rPr sz="2400" b="1">
-                <a:solidFill>
-                  <a:srgbClr val="FFFFFF"/>
-                </a:solidFill>
-                <a:latin typeface="Open Sans"/>
-                <a:ea typeface="Open Sans"/>
-                <a:cs typeface="Open Sans"/>
-              </a:rPr>
-              <a:t>OK</a:t>
-            </a:r>
-          </a:p>
-        </p:txBody>
-      </p:sp>
-      <p:sp>
-        <p:nvSpPr>
           <p:cNvPr id="13" name="TextBox 12"/>
           <p:cNvSpPr txBox="1"/>
           <p:nvPr/>
         </p:nvSpPr>
         <p:spPr>
           <a:xfrm>
-            <a:off x="2860000" y="5200000"/>
-            <a:ext cx="18000000" cy="900000"/>
+            <a:off x="1300000" y="6150000"/>
+            <a:ext cx="21500000" cy="900000"/>
           </a:xfrm>
           <a:prstGeom prst="rect">
             <a:avLst/>
@@ -7084,16 +6103,61 @@
       </p:sp>
       <p:sp>
         <p:nvSpPr>
-          <p:cNvPr id="14" name="Oval 13"/>
+          <p:cNvPr id="14" name="Rectangle 13"/>
           <p:cNvSpPr/>
           <p:nvPr/>
         </p:nvSpPr>
         <p:spPr>
           <a:xfrm>
-            <a:off x="1860000" y="6950000"/>
-            <a:ext cx="600000" cy="600000"/>
-          </a:xfrm>
-          <a:prstGeom prst="ellipse">
+            <a:off x="800000" y="7700000"/>
+            <a:ext cx="22800000" cy="1600000"/>
+          </a:xfrm>
+          <a:prstGeom prst="rect">
+            <a:avLst/>
+          </a:prstGeom>
+          <a:solidFill>
+            <a:srgbClr val="FFFFFF"/>
+          </a:solidFill>
+          <a:ln w="12700">
+            <a:solidFill>
+              <a:srgbClr val="E1E1E1"/>
+            </a:solidFill>
+          </a:ln>
+        </p:spPr>
+        <p:style>
+          <a:lnRef idx="1">
+            <a:schemeClr val="accent1"/>
+          </a:lnRef>
+          <a:fillRef idx="3">
+            <a:schemeClr val="accent1"/>
+          </a:fillRef>
+          <a:effectRef idx="2">
+            <a:schemeClr val="accent1"/>
+          </a:effectRef>
+          <a:fontRef idx="minor">
+            <a:schemeClr val="lt1"/>
+          </a:fontRef>
+        </p:style>
+        <p:txBody>
+          <a:bodyPr rtlCol="0" anchor="ctr"/>
+          <a:lstStyle/>
+          <a:p>
+            <a:pPr algn="ctr"/>
+          </a:p>
+        </p:txBody>
+      </p:sp>
+      <p:sp>
+        <p:nvSpPr>
+          <p:cNvPr id="15" name="Rectangle 14"/>
+          <p:cNvSpPr/>
+          <p:nvPr/>
+        </p:nvSpPr>
+        <p:spPr>
+          <a:xfrm>
+            <a:off x="800000" y="7700000"/>
+            <a:ext cx="120000" cy="1600000"/>
+          </a:xfrm>
+          <a:prstGeom prst="rect">
             <a:avLst/>
           </a:prstGeom>
           <a:solidFill>
@@ -7127,51 +6191,14 @@
       </p:sp>
       <p:sp>
         <p:nvSpPr>
-          <p:cNvPr id="15" name="TextBox 14"/>
-          <p:cNvSpPr txBox="1"/>
-          <p:nvPr/>
-        </p:nvSpPr>
-        <p:spPr>
-          <a:xfrm>
-            <a:off x="1860000" y="6950000"/>
-            <a:ext cx="600000" cy="600000"/>
-          </a:xfrm>
-          <a:prstGeom prst="rect">
-            <a:avLst/>
-          </a:prstGeom>
-          <a:noFill/>
-        </p:spPr>
-        <p:txBody>
-          <a:bodyPr wrap="square" anchor="ctr">
-            <a:spAutoFit/>
-          </a:bodyPr>
-          <a:lstStyle/>
-          <a:p>
-            <a:pPr algn="ctr"/>
-            <a:r>
-              <a:rPr sz="2400" b="1">
-                <a:solidFill>
-                  <a:srgbClr val="FFFFFF"/>
-                </a:solidFill>
-                <a:latin typeface="Open Sans"/>
-                <a:ea typeface="Open Sans"/>
-                <a:cs typeface="Open Sans"/>
-              </a:rPr>
-              <a:t>OK</a:t>
-            </a:r>
-          </a:p>
-        </p:txBody>
-      </p:sp>
-      <p:sp>
-        <p:nvSpPr>
           <p:cNvPr id="16" name="TextBox 15"/>
           <p:cNvSpPr txBox="1"/>
           <p:nvPr/>
         </p:nvSpPr>
         <p:spPr>
           <a:xfrm>
-            <a:off x="2860000" y="6800000"/>
-            <a:ext cx="18000000" cy="900000"/>
+            <a:off x="1300000" y="8050000"/>
+            <a:ext cx="21500000" cy="900000"/>
           </a:xfrm>
           <a:prstGeom prst="rect">
             <a:avLst/>
@@ -7195,43 +6222,6 @@
                 <a:cs typeface="Open Sans"/>
               </a:rPr>
               <a:t>При подозрении на внутреннее — срочный вызов СМП</a:t>
-            </a:r>
-          </a:p>
-        </p:txBody>
-      </p:sp>
-      <p:sp>
-        <p:nvSpPr>
-          <p:cNvPr id="17" name="TextBox 16"/>
-          <p:cNvSpPr txBox="1"/>
-          <p:nvPr/>
-        </p:nvSpPr>
-        <p:spPr>
-          <a:xfrm>
-            <a:off x="360000" y="11200000"/>
-            <a:ext cx="23664000" cy="1200000"/>
-          </a:xfrm>
-          <a:prstGeom prst="rect">
-            <a:avLst/>
-          </a:prstGeom>
-          <a:noFill/>
-        </p:spPr>
-        <p:txBody>
-          <a:bodyPr wrap="square" anchor="t">
-            <a:spAutoFit/>
-          </a:bodyPr>
-          <a:lstStyle/>
-          <a:p>
-            <a:pPr algn="ctr"/>
-            <a:r>
-              <a:rPr sz="2600" b="1">
-                <a:solidFill>
-                  <a:srgbClr val="CC0000"/>
-                </a:solidFill>
-                <a:latin typeface="Open Sans"/>
-                <a:ea typeface="Open Sans"/>
-                <a:cs typeface="Open Sans"/>
-              </a:rPr>
-              <a:t>Ориентируйтесь на признаки, а не на подсчёт миллилитров</a:t>
             </a:r>
           </a:p>
         </p:txBody>
@@ -7254,12 +6244,20 @@
         <p:nvPr/>
       </p:nvGrpSpPr>
       <p:grpSpPr/>
-      <p:sp>
-        <p:nvSpPr>
-          <p:cNvPr id="2" name="Rectangle 1"/>
-          <p:cNvSpPr/>
+      <p:pic>
+        <p:nvPicPr>
+          <p:cNvPr id="2" name="Picture 1" descr="page_28.png"/>
+          <p:cNvPicPr>
+            <a:picLocks noChangeAspect="1"/>
+          </p:cNvPicPr>
           <p:nvPr/>
-        </p:nvSpPr>
+        </p:nvPicPr>
+        <p:blipFill>
+          <a:blip r:embed="rId2"/>
+          <a:stretch>
+            <a:fillRect/>
+          </a:stretch>
+        </p:blipFill>
         <p:spPr>
           <a:xfrm>
             <a:off x="0" y="0"/>
@@ -7268,152 +6266,8 @@
           <a:prstGeom prst="rect">
             <a:avLst/>
           </a:prstGeom>
-          <a:solidFill>
-            <a:srgbClr val="FFFFFF"/>
-          </a:solidFill>
-          <a:ln>
-            <a:noFill/>
-          </a:ln>
-        </p:spPr>
-        <p:style>
-          <a:lnRef idx="1">
-            <a:schemeClr val="accent1"/>
-          </a:lnRef>
-          <a:fillRef idx="3">
-            <a:schemeClr val="accent1"/>
-          </a:fillRef>
-          <a:effectRef idx="2">
-            <a:schemeClr val="accent1"/>
-          </a:effectRef>
-          <a:fontRef idx="minor">
-            <a:schemeClr val="lt1"/>
-          </a:fontRef>
-        </p:style>
-        <p:txBody>
-          <a:bodyPr rtlCol="0" anchor="ctr"/>
-          <a:lstStyle/>
-          <a:p>
-            <a:pPr algn="ctr"/>
-          </a:p>
-        </p:txBody>
-      </p:sp>
-      <p:sp>
-        <p:nvSpPr>
-          <p:cNvPr id="3" name="TextBox 2"/>
-          <p:cNvSpPr txBox="1"/>
-          <p:nvPr/>
-        </p:nvSpPr>
-        <p:spPr>
-          <a:xfrm>
-            <a:off x="360000" y="5500000"/>
-            <a:ext cx="23664000" cy="1200000"/>
-          </a:xfrm>
-          <a:prstGeom prst="rect">
-            <a:avLst/>
-          </a:prstGeom>
-          <a:noFill/>
-        </p:spPr>
-        <p:txBody>
-          <a:bodyPr wrap="square" anchor="t">
-            <a:spAutoFit/>
-          </a:bodyPr>
-          <a:lstStyle/>
-          <a:p>
-            <a:pPr algn="ctr"/>
-            <a:r>
-              <a:rPr sz="4600" b="1">
-                <a:solidFill>
-                  <a:srgbClr val="333333"/>
-                </a:solidFill>
-                <a:latin typeface="Open Sans"/>
-                <a:ea typeface="Open Sans"/>
-                <a:cs typeface="Open Sans"/>
-              </a:rPr>
-              <a:t>Благодарим за внимание</a:t>
-            </a:r>
-          </a:p>
-        </p:txBody>
-      </p:sp>
-      <p:sp>
-        <p:nvSpPr>
-          <p:cNvPr id="4" name="Rectangle 3"/>
-          <p:cNvSpPr/>
-          <p:nvPr/>
-        </p:nvSpPr>
-        <p:spPr>
-          <a:xfrm>
-            <a:off x="7000000" y="7000000"/>
-            <a:ext cx="10000000" cy="25000"/>
-          </a:xfrm>
-          <a:prstGeom prst="rect">
-            <a:avLst/>
-          </a:prstGeom>
-          <a:solidFill>
-            <a:srgbClr val="0055AA"/>
-          </a:solidFill>
-          <a:ln>
-            <a:noFill/>
-          </a:ln>
-        </p:spPr>
-        <p:style>
-          <a:lnRef idx="1">
-            <a:schemeClr val="accent1"/>
-          </a:lnRef>
-          <a:fillRef idx="3">
-            <a:schemeClr val="accent1"/>
-          </a:fillRef>
-          <a:effectRef idx="2">
-            <a:schemeClr val="accent1"/>
-          </a:effectRef>
-          <a:fontRef idx="minor">
-            <a:schemeClr val="lt1"/>
-          </a:fontRef>
-        </p:style>
-        <p:txBody>
-          <a:bodyPr rtlCol="0" anchor="ctr"/>
-          <a:lstStyle/>
-          <a:p>
-            <a:pPr algn="ctr"/>
-          </a:p>
-        </p:txBody>
-      </p:sp>
-      <p:sp>
-        <p:nvSpPr>
-          <p:cNvPr id="5" name="TextBox 4"/>
-          <p:cNvSpPr txBox="1"/>
-          <p:nvPr/>
-        </p:nvSpPr>
-        <p:spPr>
-          <a:xfrm>
-            <a:off x="360000" y="7400000"/>
-            <a:ext cx="23664000" cy="500000"/>
-          </a:xfrm>
-          <a:prstGeom prst="rect">
-            <a:avLst/>
-          </a:prstGeom>
-          <a:noFill/>
-        </p:spPr>
-        <p:txBody>
-          <a:bodyPr wrap="square" anchor="t">
-            <a:spAutoFit/>
-          </a:bodyPr>
-          <a:lstStyle/>
-          <a:p>
-            <a:pPr algn="ctr"/>
-            <a:r>
-              <a:rPr sz="2000" b="0">
-                <a:solidFill>
-                  <a:srgbClr val="333333"/>
-                </a:solidFill>
-                <a:latin typeface="Open Sans"/>
-                <a:ea typeface="Open Sans"/>
-                <a:cs typeface="Open Sans"/>
-              </a:rPr>
-              <a:t>Тема 2 · Оказание первой помощи при наружных кровотечениях</a:t>
-            </a:r>
-          </a:p>
-        </p:txBody>
-      </p:sp>
+        </p:spPr>
+      </p:pic>
     </p:spTree>
   </p:cSld>
   <p:clrMapOvr>

--- a/tema2_bleeding/Признаки_наружного_кровотечения.pptx
+++ b/tema2_bleeding/Признаки_наружного_кровотечения.pptx
@@ -3096,20 +3096,12 @@
         <p:nvPr/>
       </p:nvGrpSpPr>
       <p:grpSpPr/>
-      <p:pic>
-        <p:nvPicPr>
-          <p:cNvPr id="2" name="Picture 1" descr="page_01.png"/>
-          <p:cNvPicPr>
-            <a:picLocks noChangeAspect="1"/>
-          </p:cNvPicPr>
-          <p:nvPr/>
-        </p:nvPicPr>
-        <p:blipFill>
-          <a:blip r:embed="rId2"/>
-          <a:stretch>
-            <a:fillRect/>
-          </a:stretch>
-        </p:blipFill>
+      <p:sp>
+        <p:nvSpPr>
+          <p:cNvPr id="2" name="Rectangle 1"/>
+          <p:cNvSpPr/>
+          <p:nvPr/>
+        </p:nvSpPr>
         <p:spPr>
           <a:xfrm>
             <a:off x="0" y="0"/>
@@ -3118,8 +3110,202 @@
           <a:prstGeom prst="rect">
             <a:avLst/>
           </a:prstGeom>
-        </p:spPr>
-      </p:pic>
+          <a:solidFill>
+            <a:srgbClr val="FFFFFF"/>
+          </a:solidFill>
+          <a:ln>
+            <a:noFill/>
+          </a:ln>
+        </p:spPr>
+        <p:style>
+          <a:lnRef idx="1">
+            <a:schemeClr val="accent1"/>
+          </a:lnRef>
+          <a:fillRef idx="3">
+            <a:schemeClr val="accent1"/>
+          </a:fillRef>
+          <a:effectRef idx="2">
+            <a:schemeClr val="accent1"/>
+          </a:effectRef>
+          <a:fontRef idx="minor">
+            <a:schemeClr val="lt1"/>
+          </a:fontRef>
+        </p:style>
+        <p:txBody>
+          <a:bodyPr rtlCol="0" anchor="ctr"/>
+          <a:lstStyle/>
+          <a:p>
+            <a:pPr algn="ctr"/>
+          </a:p>
+        </p:txBody>
+      </p:sp>
+      <p:sp>
+        <p:nvSpPr>
+          <p:cNvPr id="3" name="Rectangle 2"/>
+          <p:cNvSpPr/>
+          <p:nvPr/>
+        </p:nvSpPr>
+        <p:spPr>
+          <a:xfrm>
+            <a:off x="0" y="4200000"/>
+            <a:ext cx="4000000" cy="2800000"/>
+          </a:xfrm>
+          <a:prstGeom prst="rect">
+            <a:avLst/>
+          </a:prstGeom>
+          <a:solidFill>
+            <a:srgbClr val="DDDDDD"/>
+          </a:solidFill>
+          <a:ln>
+            <a:noFill/>
+          </a:ln>
+        </p:spPr>
+        <p:style>
+          <a:lnRef idx="1">
+            <a:schemeClr val="accent1"/>
+          </a:lnRef>
+          <a:fillRef idx="3">
+            <a:schemeClr val="accent1"/>
+          </a:fillRef>
+          <a:effectRef idx="2">
+            <a:schemeClr val="accent1"/>
+          </a:effectRef>
+          <a:fontRef idx="minor">
+            <a:schemeClr val="lt1"/>
+          </a:fontRef>
+        </p:style>
+        <p:txBody>
+          <a:bodyPr rtlCol="0" anchor="ctr"/>
+          <a:lstStyle/>
+          <a:p>
+            <a:pPr algn="ctr"/>
+          </a:p>
+        </p:txBody>
+      </p:sp>
+      <p:sp>
+        <p:nvSpPr>
+          <p:cNvPr id="4" name="Rectangle 3"/>
+          <p:cNvSpPr/>
+          <p:nvPr/>
+        </p:nvSpPr>
+        <p:spPr>
+          <a:xfrm>
+            <a:off x="23000000" y="0"/>
+            <a:ext cx="1384000" cy="13716000"/>
+          </a:xfrm>
+          <a:prstGeom prst="rect">
+            <a:avLst/>
+          </a:prstGeom>
+          <a:solidFill>
+            <a:srgbClr val="DDDDDD"/>
+          </a:solidFill>
+          <a:ln>
+            <a:noFill/>
+          </a:ln>
+        </p:spPr>
+        <p:style>
+          <a:lnRef idx="1">
+            <a:schemeClr val="accent1"/>
+          </a:lnRef>
+          <a:fillRef idx="3">
+            <a:schemeClr val="accent1"/>
+          </a:fillRef>
+          <a:effectRef idx="2">
+            <a:schemeClr val="accent1"/>
+          </a:effectRef>
+          <a:fontRef idx="minor">
+            <a:schemeClr val="lt1"/>
+          </a:fontRef>
+        </p:style>
+        <p:txBody>
+          <a:bodyPr rtlCol="0" anchor="ctr"/>
+          <a:lstStyle/>
+          <a:p>
+            <a:pPr algn="ctr"/>
+          </a:p>
+        </p:txBody>
+      </p:sp>
+      <p:sp>
+        <p:nvSpPr>
+          <p:cNvPr id="5" name="TextBox 4"/>
+          <p:cNvSpPr txBox="1"/>
+          <p:nvPr/>
+        </p:nvSpPr>
+        <p:spPr>
+          <a:xfrm>
+            <a:off x="700000" y="4800000"/>
+            <a:ext cx="21000000" cy="1800000"/>
+          </a:xfrm>
+          <a:prstGeom prst="rect">
+            <a:avLst/>
+          </a:prstGeom>
+          <a:noFill/>
+        </p:spPr>
+        <p:txBody>
+          <a:bodyPr wrap="square" anchor="t">
+            <a:spAutoFit/>
+          </a:bodyPr>
+          <a:lstStyle/>
+          <a:p>
+            <a:pPr algn="l"/>
+            <a:r>
+              <a:rPr sz="3600" b="1">
+                <a:solidFill>
+                  <a:srgbClr val="333333"/>
+                </a:solidFill>
+                <a:latin typeface="Open Sans"/>
+                <a:ea typeface="Open Sans"/>
+                <a:cs typeface="Open Sans"/>
+              </a:rPr>
+              <a:t>ОКАЗАНИЕ ПЕРВОЙ ПОМОЩИ ПРИ НАРУЖНЫХ
+КРОВОТЕЧЕНИЯХ И ТРАВМАХ</a:t>
+            </a:r>
+          </a:p>
+        </p:txBody>
+      </p:sp>
+      <p:sp>
+        <p:nvSpPr>
+          <p:cNvPr id="6" name="Rectangle 5"/>
+          <p:cNvSpPr/>
+          <p:nvPr/>
+        </p:nvSpPr>
+        <p:spPr>
+          <a:xfrm>
+            <a:off x="700000" y="6800000"/>
+            <a:ext cx="14000000" cy="25000"/>
+          </a:xfrm>
+          <a:prstGeom prst="rect">
+            <a:avLst/>
+          </a:prstGeom>
+          <a:solidFill>
+            <a:srgbClr val="333333"/>
+          </a:solidFill>
+          <a:ln>
+            <a:noFill/>
+          </a:ln>
+        </p:spPr>
+        <p:style>
+          <a:lnRef idx="1">
+            <a:schemeClr val="accent1"/>
+          </a:lnRef>
+          <a:fillRef idx="3">
+            <a:schemeClr val="accent1"/>
+          </a:fillRef>
+          <a:effectRef idx="2">
+            <a:schemeClr val="accent1"/>
+          </a:effectRef>
+          <a:fontRef idx="minor">
+            <a:schemeClr val="lt1"/>
+          </a:fontRef>
+        </p:style>
+        <p:txBody>
+          <a:bodyPr rtlCol="0" anchor="ctr"/>
+          <a:lstStyle/>
+          <a:p>
+            <a:pPr algn="ctr"/>
+          </a:p>
+        </p:txBody>
+      </p:sp>
     </p:spTree>
   </p:cSld>
   <p:clrMapOvr>
@@ -3189,8 +3375,8 @@
         </p:nvSpPr>
         <p:spPr>
           <a:xfrm>
-            <a:off x="800000" y="400000"/>
-            <a:ext cx="22800000" cy="1000000"/>
+            <a:off x="700000" y="300000"/>
+            <a:ext cx="23000000" cy="1100000"/>
           </a:xfrm>
           <a:prstGeom prst="rect">
             <a:avLst/>
@@ -3226,8 +3412,8 @@
         </p:nvSpPr>
         <p:spPr>
           <a:xfrm>
-            <a:off x="800000" y="1500000"/>
-            <a:ext cx="22800000" cy="20000"/>
+            <a:off x="700000" y="1500000"/>
+            <a:ext cx="23000000" cy="20000"/>
           </a:xfrm>
           <a:prstGeom prst="rect">
             <a:avLst/>
@@ -3269,7 +3455,7 @@
         </p:nvSpPr>
         <p:spPr>
           <a:xfrm>
-            <a:off x="800000" y="2000000"/>
+            <a:off x="700000" y="1900000"/>
             <a:ext cx="800000" cy="800000"/>
           </a:xfrm>
           <a:prstGeom prst="ellipse">
@@ -3312,7 +3498,7 @@
         </p:nvSpPr>
         <p:spPr>
           <a:xfrm>
-            <a:off x="800000" y="2000000"/>
+            <a:off x="700000" y="1900000"/>
             <a:ext cx="800000" cy="800000"/>
           </a:xfrm>
           <a:prstGeom prst="rect">
@@ -3349,7 +3535,7 @@
         </p:nvSpPr>
         <p:spPr>
           <a:xfrm>
-            <a:off x="1900000" y="2000000"/>
+            <a:off x="1800000" y="1900000"/>
             <a:ext cx="20500000" cy="800000"/>
           </a:xfrm>
           <a:prstGeom prst="rect">
@@ -3394,7 +3580,7 @@
         </p:nvSpPr>
         <p:spPr>
           <a:xfrm>
-            <a:off x="2200000" y="2000000"/>
+            <a:off x="2100000" y="1900000"/>
             <a:ext cx="19500000" cy="800000"/>
           </a:xfrm>
           <a:prstGeom prst="rect">
@@ -3410,7 +3596,7 @@
           <a:p>
             <a:pPr algn="l"/>
             <a:r>
-              <a:rPr sz="3200" b="0">
+              <a:rPr sz="2800" b="0">
                 <a:solidFill>
                   <a:srgbClr val="333333"/>
                 </a:solidFill>
@@ -3431,7 +3617,7 @@
         </p:nvSpPr>
         <p:spPr>
           <a:xfrm>
-            <a:off x="800000" y="3400000"/>
+            <a:off x="700000" y="3300000"/>
             <a:ext cx="800000" cy="800000"/>
           </a:xfrm>
           <a:prstGeom prst="ellipse">
@@ -3474,7 +3660,7 @@
         </p:nvSpPr>
         <p:spPr>
           <a:xfrm>
-            <a:off x="800000" y="3400000"/>
+            <a:off x="700000" y="3300000"/>
             <a:ext cx="800000" cy="800000"/>
           </a:xfrm>
           <a:prstGeom prst="rect">
@@ -3511,7 +3697,7 @@
         </p:nvSpPr>
         <p:spPr>
           <a:xfrm>
-            <a:off x="1900000" y="3400000"/>
+            <a:off x="1800000" y="3300000"/>
             <a:ext cx="20500000" cy="800000"/>
           </a:xfrm>
           <a:prstGeom prst="rect">
@@ -3556,7 +3742,7 @@
         </p:nvSpPr>
         <p:spPr>
           <a:xfrm>
-            <a:off x="2200000" y="3400000"/>
+            <a:off x="2100000" y="3300000"/>
             <a:ext cx="19500000" cy="800000"/>
           </a:xfrm>
           <a:prstGeom prst="rect">
@@ -3572,7 +3758,7 @@
           <a:p>
             <a:pPr algn="l"/>
             <a:r>
-              <a:rPr sz="3200" b="0">
+              <a:rPr sz="2800" b="0">
                 <a:solidFill>
                   <a:srgbClr val="333333"/>
                 </a:solidFill>
@@ -3593,7 +3779,7 @@
         </p:nvSpPr>
         <p:spPr>
           <a:xfrm>
-            <a:off x="800000" y="4800000"/>
+            <a:off x="700000" y="4700000"/>
             <a:ext cx="800000" cy="800000"/>
           </a:xfrm>
           <a:prstGeom prst="ellipse">
@@ -3636,7 +3822,7 @@
         </p:nvSpPr>
         <p:spPr>
           <a:xfrm>
-            <a:off x="800000" y="4800000"/>
+            <a:off x="700000" y="4700000"/>
             <a:ext cx="800000" cy="800000"/>
           </a:xfrm>
           <a:prstGeom prst="rect">
@@ -3673,7 +3859,7 @@
         </p:nvSpPr>
         <p:spPr>
           <a:xfrm>
-            <a:off x="1900000" y="4800000"/>
+            <a:off x="1800000" y="4700000"/>
             <a:ext cx="20500000" cy="800000"/>
           </a:xfrm>
           <a:prstGeom prst="rect">
@@ -3718,7 +3904,7 @@
         </p:nvSpPr>
         <p:spPr>
           <a:xfrm>
-            <a:off x="2200000" y="4800000"/>
+            <a:off x="2100000" y="4700000"/>
             <a:ext cx="19500000" cy="800000"/>
           </a:xfrm>
           <a:prstGeom prst="rect">
@@ -3734,7 +3920,7 @@
           <a:p>
             <a:pPr algn="l"/>
             <a:r>
-              <a:rPr sz="3200" b="0">
+              <a:rPr sz="2800" b="0">
                 <a:solidFill>
                   <a:srgbClr val="333333"/>
                 </a:solidFill>
@@ -3755,7 +3941,7 @@
         </p:nvSpPr>
         <p:spPr>
           <a:xfrm>
-            <a:off x="800000" y="6200000"/>
+            <a:off x="700000" y="6100000"/>
             <a:ext cx="800000" cy="800000"/>
           </a:xfrm>
           <a:prstGeom prst="ellipse">
@@ -3798,7 +3984,7 @@
         </p:nvSpPr>
         <p:spPr>
           <a:xfrm>
-            <a:off x="800000" y="6200000"/>
+            <a:off x="700000" y="6100000"/>
             <a:ext cx="800000" cy="800000"/>
           </a:xfrm>
           <a:prstGeom prst="rect">
@@ -3835,7 +4021,7 @@
         </p:nvSpPr>
         <p:spPr>
           <a:xfrm>
-            <a:off x="1900000" y="6200000"/>
+            <a:off x="1800000" y="6100000"/>
             <a:ext cx="20500000" cy="800000"/>
           </a:xfrm>
           <a:prstGeom prst="rect">
@@ -3880,7 +4066,7 @@
         </p:nvSpPr>
         <p:spPr>
           <a:xfrm>
-            <a:off x="2200000" y="6200000"/>
+            <a:off x="2100000" y="6100000"/>
             <a:ext cx="19500000" cy="800000"/>
           </a:xfrm>
           <a:prstGeom prst="rect">
@@ -3896,7 +4082,7 @@
           <a:p>
             <a:pPr algn="l"/>
             <a:r>
-              <a:rPr sz="3200" b="0">
+              <a:rPr sz="2800" b="0">
                 <a:solidFill>
                   <a:srgbClr val="333333"/>
                 </a:solidFill>
@@ -3927,20 +4113,12 @@
         <p:nvPr/>
       </p:nvGrpSpPr>
       <p:grpSpPr/>
-      <p:pic>
-        <p:nvPicPr>
-          <p:cNvPr id="2" name="Picture 1" descr="page_02.png"/>
-          <p:cNvPicPr>
-            <a:picLocks noChangeAspect="1"/>
-          </p:cNvPicPr>
-          <p:nvPr/>
-        </p:nvPicPr>
-        <p:blipFill>
-          <a:blip r:embed="rId2"/>
-          <a:stretch>
-            <a:fillRect/>
-          </a:stretch>
-        </p:blipFill>
+      <p:sp>
+        <p:nvSpPr>
+          <p:cNvPr id="2" name="Rectangle 1"/>
+          <p:cNvSpPr/>
+          <p:nvPr/>
+        </p:nvSpPr>
         <p:spPr>
           <a:xfrm>
             <a:off x="0" y="0"/>
@@ -3949,8 +4127,436 @@
           <a:prstGeom prst="rect">
             <a:avLst/>
           </a:prstGeom>
-        </p:spPr>
-      </p:pic>
+          <a:solidFill>
+            <a:srgbClr val="FFFFFF"/>
+          </a:solidFill>
+          <a:ln>
+            <a:noFill/>
+          </a:ln>
+        </p:spPr>
+        <p:style>
+          <a:lnRef idx="1">
+            <a:schemeClr val="accent1"/>
+          </a:lnRef>
+          <a:fillRef idx="3">
+            <a:schemeClr val="accent1"/>
+          </a:fillRef>
+          <a:effectRef idx="2">
+            <a:schemeClr val="accent1"/>
+          </a:effectRef>
+          <a:fontRef idx="minor">
+            <a:schemeClr val="lt1"/>
+          </a:fontRef>
+        </p:style>
+        <p:txBody>
+          <a:bodyPr rtlCol="0" anchor="ctr"/>
+          <a:lstStyle/>
+          <a:p>
+            <a:pPr algn="ctr"/>
+          </a:p>
+        </p:txBody>
+      </p:sp>
+      <p:sp>
+        <p:nvSpPr>
+          <p:cNvPr id="3" name="TextBox 2"/>
+          <p:cNvSpPr txBox="1"/>
+          <p:nvPr/>
+        </p:nvSpPr>
+        <p:spPr>
+          <a:xfrm>
+            <a:off x="700000" y="300000"/>
+            <a:ext cx="22000000" cy="900000"/>
+          </a:xfrm>
+          <a:prstGeom prst="rect">
+            <a:avLst/>
+          </a:prstGeom>
+          <a:noFill/>
+        </p:spPr>
+        <p:txBody>
+          <a:bodyPr wrap="square" anchor="t">
+            <a:spAutoFit/>
+          </a:bodyPr>
+          <a:lstStyle/>
+          <a:p>
+            <a:pPr algn="l"/>
+            <a:r>
+              <a:rPr sz="3200" b="1">
+                <a:solidFill>
+                  <a:srgbClr val="333333"/>
+                </a:solidFill>
+                <a:latin typeface="Open Sans"/>
+                <a:ea typeface="Open Sans"/>
+                <a:cs typeface="Open Sans"/>
+              </a:rPr>
+              <a:t>ПОНЯТИЕ «КРОВОТЕЧЕНИЕ»</a:t>
+            </a:r>
+          </a:p>
+        </p:txBody>
+      </p:sp>
+      <p:sp>
+        <p:nvSpPr>
+          <p:cNvPr id="4" name="Rectangle 3"/>
+          <p:cNvSpPr/>
+          <p:nvPr/>
+        </p:nvSpPr>
+        <p:spPr>
+          <a:xfrm>
+            <a:off x="700000" y="1250000"/>
+            <a:ext cx="22000000" cy="20000"/>
+          </a:xfrm>
+          <a:prstGeom prst="rect">
+            <a:avLst/>
+          </a:prstGeom>
+          <a:solidFill>
+            <a:srgbClr val="E1E1E1"/>
+          </a:solidFill>
+          <a:ln>
+            <a:noFill/>
+          </a:ln>
+        </p:spPr>
+        <p:style>
+          <a:lnRef idx="1">
+            <a:schemeClr val="accent1"/>
+          </a:lnRef>
+          <a:fillRef idx="3">
+            <a:schemeClr val="accent1"/>
+          </a:fillRef>
+          <a:effectRef idx="2">
+            <a:schemeClr val="accent1"/>
+          </a:effectRef>
+          <a:fontRef idx="minor">
+            <a:schemeClr val="lt1"/>
+          </a:fontRef>
+        </p:style>
+        <p:txBody>
+          <a:bodyPr rtlCol="0" anchor="ctr"/>
+          <a:lstStyle/>
+          <a:p>
+            <a:pPr algn="ctr"/>
+          </a:p>
+        </p:txBody>
+      </p:sp>
+      <p:sp>
+        <p:nvSpPr>
+          <p:cNvPr id="5" name="TextBox 4"/>
+          <p:cNvSpPr txBox="1"/>
+          <p:nvPr/>
+        </p:nvSpPr>
+        <p:spPr>
+          <a:xfrm>
+            <a:off x="700000" y="1350000"/>
+            <a:ext cx="22000000" cy="450000"/>
+          </a:xfrm>
+          <a:prstGeom prst="rect">
+            <a:avLst/>
+          </a:prstGeom>
+          <a:noFill/>
+        </p:spPr>
+        <p:txBody>
+          <a:bodyPr wrap="square" anchor="t">
+            <a:spAutoFit/>
+          </a:bodyPr>
+          <a:lstStyle/>
+          <a:p>
+            <a:pPr algn="l"/>
+            <a:r>
+              <a:rPr sz="1600" b="0">
+                <a:solidFill>
+                  <a:srgbClr val="666666"/>
+                </a:solidFill>
+                <a:latin typeface="Open Sans"/>
+                <a:ea typeface="Open Sans"/>
+                <a:cs typeface="Open Sans"/>
+              </a:rPr>
+              <a:t>Оказание первой помощи при наружных кровотечениях и травмах</a:t>
+            </a:r>
+          </a:p>
+        </p:txBody>
+      </p:sp>
+      <p:sp>
+        <p:nvSpPr>
+          <p:cNvPr id="6" name="Rounded Rectangle 5"/>
+          <p:cNvSpPr/>
+          <p:nvPr/>
+        </p:nvSpPr>
+        <p:spPr>
+          <a:xfrm>
+            <a:off x="700000" y="2000000"/>
+            <a:ext cx="10000000" cy="4500000"/>
+          </a:xfrm>
+          <a:prstGeom prst="roundRect">
+            <a:avLst/>
+          </a:prstGeom>
+          <a:solidFill>
+            <a:srgbClr val="F5F0E1"/>
+          </a:solidFill>
+          <a:ln>
+            <a:noFill/>
+          </a:ln>
+        </p:spPr>
+        <p:style>
+          <a:lnRef idx="1">
+            <a:schemeClr val="accent1"/>
+          </a:lnRef>
+          <a:fillRef idx="3">
+            <a:schemeClr val="accent1"/>
+          </a:fillRef>
+          <a:effectRef idx="2">
+            <a:schemeClr val="accent1"/>
+          </a:effectRef>
+          <a:fontRef idx="minor">
+            <a:schemeClr val="lt1"/>
+          </a:fontRef>
+        </p:style>
+        <p:txBody>
+          <a:bodyPr rtlCol="0" anchor="ctr"/>
+          <a:lstStyle/>
+          <a:p>
+            <a:pPr algn="ctr"/>
+          </a:p>
+        </p:txBody>
+      </p:sp>
+      <p:sp>
+        <p:nvSpPr>
+          <p:cNvPr id="7" name="TextBox 6"/>
+          <p:cNvSpPr txBox="1"/>
+          <p:nvPr/>
+        </p:nvSpPr>
+        <p:spPr>
+          <a:xfrm>
+            <a:off x="1100000" y="2300000"/>
+            <a:ext cx="9200000" cy="3800000"/>
+          </a:xfrm>
+          <a:prstGeom prst="rect">
+            <a:avLst/>
+          </a:prstGeom>
+          <a:noFill/>
+        </p:spPr>
+        <p:txBody>
+          <a:bodyPr wrap="square" anchor="t">
+            <a:spAutoFit/>
+          </a:bodyPr>
+          <a:lstStyle/>
+          <a:p>
+            <a:pPr algn="l"/>
+            <a:r>
+              <a:rPr sz="2400" b="0">
+                <a:solidFill>
+                  <a:srgbClr val="333333"/>
+                </a:solidFill>
+                <a:latin typeface="Open Sans"/>
+                <a:ea typeface="Open Sans"/>
+                <a:cs typeface="Open Sans"/>
+              </a:rPr>
+              <a:t>Под кровотечением понимают ситуацию, когда кровь по разным причинам покидает сосудистое русло, что приводит к острой кровопотере.</a:t>
+            </a:r>
+          </a:p>
+        </p:txBody>
+      </p:sp>
+      <p:sp>
+        <p:nvSpPr>
+          <p:cNvPr id="8" name="TextBox 7"/>
+          <p:cNvSpPr txBox="1"/>
+          <p:nvPr/>
+        </p:nvSpPr>
+        <p:spPr>
+          <a:xfrm>
+            <a:off x="11700000" y="2000000"/>
+            <a:ext cx="11000000" cy="600000"/>
+          </a:xfrm>
+          <a:prstGeom prst="rect">
+            <a:avLst/>
+          </a:prstGeom>
+          <a:noFill/>
+        </p:spPr>
+        <p:txBody>
+          <a:bodyPr wrap="square" anchor="t">
+            <a:spAutoFit/>
+          </a:bodyPr>
+          <a:lstStyle/>
+          <a:p>
+            <a:pPr algn="l"/>
+            <a:r>
+              <a:rPr sz="2400" b="1">
+                <a:solidFill>
+                  <a:srgbClr val="333333"/>
+                </a:solidFill>
+                <a:latin typeface="Open Sans"/>
+                <a:ea typeface="Open Sans"/>
+                <a:cs typeface="Open Sans"/>
+              </a:rPr>
+              <a:t>Основные признаки острой кровопотери:</a:t>
+            </a:r>
+          </a:p>
+        </p:txBody>
+      </p:sp>
+      <p:sp>
+        <p:nvSpPr>
+          <p:cNvPr id="9" name="TextBox 8"/>
+          <p:cNvSpPr txBox="1"/>
+          <p:nvPr/>
+        </p:nvSpPr>
+        <p:spPr>
+          <a:xfrm>
+            <a:off x="11700000" y="2700000"/>
+            <a:ext cx="11000000" cy="8500000"/>
+          </a:xfrm>
+          <a:prstGeom prst="rect">
+            <a:avLst/>
+          </a:prstGeom>
+          <a:noFill/>
+        </p:spPr>
+        <p:txBody>
+          <a:bodyPr wrap="square">
+            <a:spAutoFit/>
+          </a:bodyPr>
+          <a:lstStyle/>
+          <a:p>
+            <a:pPr algn="l">
+              <a:spcAft>
+                <a:spcPts val="1000"/>
+              </a:spcAft>
+            </a:pPr>
+            <a:r>
+              <a:rPr sz="2200" b="0">
+                <a:solidFill>
+                  <a:srgbClr val="333333"/>
+                </a:solidFill>
+                <a:latin typeface="Open Sans"/>
+                <a:ea typeface="Open Sans"/>
+                <a:cs typeface="Open Sans"/>
+              </a:rPr>
+              <a:t>☑  резкая общая слабость;</a:t>
+            </a:r>
+          </a:p>
+          <a:p>
+            <a:pPr algn="l">
+              <a:spcAft>
+                <a:spcPts val="1000"/>
+              </a:spcAft>
+            </a:pPr>
+            <a:r>
+              <a:rPr sz="2200" b="0">
+                <a:solidFill>
+                  <a:srgbClr val="333333"/>
+                </a:solidFill>
+                <a:latin typeface="Open Sans"/>
+                <a:ea typeface="Open Sans"/>
+                <a:cs typeface="Open Sans"/>
+              </a:rPr>
+              <a:t>☑  чувство жажды;</a:t>
+            </a:r>
+          </a:p>
+          <a:p>
+            <a:pPr algn="l">
+              <a:spcAft>
+                <a:spcPts val="1000"/>
+              </a:spcAft>
+            </a:pPr>
+            <a:r>
+              <a:rPr sz="2200" b="0">
+                <a:solidFill>
+                  <a:srgbClr val="333333"/>
+                </a:solidFill>
+                <a:latin typeface="Open Sans"/>
+                <a:ea typeface="Open Sans"/>
+                <a:cs typeface="Open Sans"/>
+              </a:rPr>
+              <a:t>☑  головокружение;</a:t>
+            </a:r>
+          </a:p>
+          <a:p>
+            <a:pPr algn="l">
+              <a:spcAft>
+                <a:spcPts val="1000"/>
+              </a:spcAft>
+            </a:pPr>
+            <a:r>
+              <a:rPr sz="2200" b="0">
+                <a:solidFill>
+                  <a:srgbClr val="333333"/>
+                </a:solidFill>
+                <a:latin typeface="Open Sans"/>
+                <a:ea typeface="Open Sans"/>
+                <a:cs typeface="Open Sans"/>
+              </a:rPr>
+              <a:t>☑  мелькание «мушек» перед глазами;</a:t>
+            </a:r>
+          </a:p>
+          <a:p>
+            <a:pPr algn="l">
+              <a:spcAft>
+                <a:spcPts val="1000"/>
+              </a:spcAft>
+            </a:pPr>
+            <a:r>
+              <a:rPr sz="2200" b="0">
+                <a:solidFill>
+                  <a:srgbClr val="333333"/>
+                </a:solidFill>
+                <a:latin typeface="Open Sans"/>
+                <a:ea typeface="Open Sans"/>
+                <a:cs typeface="Open Sans"/>
+              </a:rPr>
+              <a:t>☑  обморок, чаще при попытке встать;</a:t>
+            </a:r>
+          </a:p>
+          <a:p>
+            <a:pPr algn="l">
+              <a:spcAft>
+                <a:spcPts val="1000"/>
+              </a:spcAft>
+            </a:pPr>
+            <a:r>
+              <a:rPr sz="2200" b="0">
+                <a:solidFill>
+                  <a:srgbClr val="333333"/>
+                </a:solidFill>
+                <a:latin typeface="Open Sans"/>
+                <a:ea typeface="Open Sans"/>
+                <a:cs typeface="Open Sans"/>
+              </a:rPr>
+              <a:t>☑  бледная, влажная и холодная кожа;</a:t>
+            </a:r>
+          </a:p>
+          <a:p>
+            <a:pPr algn="l">
+              <a:spcAft>
+                <a:spcPts val="1000"/>
+              </a:spcAft>
+            </a:pPr>
+            <a:r>
+              <a:rPr sz="2200" b="0">
+                <a:solidFill>
+                  <a:srgbClr val="333333"/>
+                </a:solidFill>
+                <a:latin typeface="Open Sans"/>
+                <a:ea typeface="Open Sans"/>
+                <a:cs typeface="Open Sans"/>
+              </a:rPr>
+              <a:t>☑  учащённое сердцебиение;</a:t>
+            </a:r>
+          </a:p>
+          <a:p>
+            <a:pPr algn="l">
+              <a:spcAft>
+                <a:spcPts val="1000"/>
+              </a:spcAft>
+            </a:pPr>
+            <a:r>
+              <a:rPr sz="2200" b="0">
+                <a:solidFill>
+                  <a:srgbClr val="333333"/>
+                </a:solidFill>
+                <a:latin typeface="Open Sans"/>
+                <a:ea typeface="Open Sans"/>
+                <a:cs typeface="Open Sans"/>
+              </a:rPr>
+              <a:t>☑  частое дыхание.</a:t>
+            </a:r>
+          </a:p>
+        </p:txBody>
+      </p:sp>
     </p:spTree>
   </p:cSld>
   <p:clrMapOvr>
@@ -3969,9 +4575,252 @@
         <p:nvPr/>
       </p:nvGrpSpPr>
       <p:grpSpPr/>
+      <p:sp>
+        <p:nvSpPr>
+          <p:cNvPr id="2" name="Rectangle 1"/>
+          <p:cNvSpPr/>
+          <p:nvPr/>
+        </p:nvSpPr>
+        <p:spPr>
+          <a:xfrm>
+            <a:off x="0" y="0"/>
+            <a:ext cx="24384000" cy="13716000"/>
+          </a:xfrm>
+          <a:prstGeom prst="rect">
+            <a:avLst/>
+          </a:prstGeom>
+          <a:solidFill>
+            <a:srgbClr val="FFFFFF"/>
+          </a:solidFill>
+          <a:ln>
+            <a:noFill/>
+          </a:ln>
+        </p:spPr>
+        <p:style>
+          <a:lnRef idx="1">
+            <a:schemeClr val="accent1"/>
+          </a:lnRef>
+          <a:fillRef idx="3">
+            <a:schemeClr val="accent1"/>
+          </a:fillRef>
+          <a:effectRef idx="2">
+            <a:schemeClr val="accent1"/>
+          </a:effectRef>
+          <a:fontRef idx="minor">
+            <a:schemeClr val="lt1"/>
+          </a:fontRef>
+        </p:style>
+        <p:txBody>
+          <a:bodyPr rtlCol="0" anchor="ctr"/>
+          <a:lstStyle/>
+          <a:p>
+            <a:pPr algn="ctr"/>
+          </a:p>
+        </p:txBody>
+      </p:sp>
+      <p:sp>
+        <p:nvSpPr>
+          <p:cNvPr id="3" name="TextBox 2"/>
+          <p:cNvSpPr txBox="1"/>
+          <p:nvPr/>
+        </p:nvSpPr>
+        <p:spPr>
+          <a:xfrm>
+            <a:off x="700000" y="300000"/>
+            <a:ext cx="22000000" cy="900000"/>
+          </a:xfrm>
+          <a:prstGeom prst="rect">
+            <a:avLst/>
+          </a:prstGeom>
+          <a:noFill/>
+        </p:spPr>
+        <p:txBody>
+          <a:bodyPr wrap="square" anchor="t">
+            <a:spAutoFit/>
+          </a:bodyPr>
+          <a:lstStyle/>
+          <a:p>
+            <a:pPr algn="l"/>
+            <a:r>
+              <a:rPr sz="3200" b="1">
+                <a:solidFill>
+                  <a:srgbClr val="333333"/>
+                </a:solidFill>
+                <a:latin typeface="Open Sans"/>
+                <a:ea typeface="Open Sans"/>
+                <a:cs typeface="Open Sans"/>
+              </a:rPr>
+              <a:t>ПРИЗНАКИ РАЗЛИЧНЫХ ВИДОВ НАРУЖНОГО КРОВОТЕЧЕНИЯ</a:t>
+            </a:r>
+          </a:p>
+        </p:txBody>
+      </p:sp>
+      <p:sp>
+        <p:nvSpPr>
+          <p:cNvPr id="4" name="Rectangle 3"/>
+          <p:cNvSpPr/>
+          <p:nvPr/>
+        </p:nvSpPr>
+        <p:spPr>
+          <a:xfrm>
+            <a:off x="700000" y="1250000"/>
+            <a:ext cx="22000000" cy="20000"/>
+          </a:xfrm>
+          <a:prstGeom prst="rect">
+            <a:avLst/>
+          </a:prstGeom>
+          <a:solidFill>
+            <a:srgbClr val="E1E1E1"/>
+          </a:solidFill>
+          <a:ln>
+            <a:noFill/>
+          </a:ln>
+        </p:spPr>
+        <p:style>
+          <a:lnRef idx="1">
+            <a:schemeClr val="accent1"/>
+          </a:lnRef>
+          <a:fillRef idx="3">
+            <a:schemeClr val="accent1"/>
+          </a:fillRef>
+          <a:effectRef idx="2">
+            <a:schemeClr val="accent1"/>
+          </a:effectRef>
+          <a:fontRef idx="minor">
+            <a:schemeClr val="lt1"/>
+          </a:fontRef>
+        </p:style>
+        <p:txBody>
+          <a:bodyPr rtlCol="0" anchor="ctr"/>
+          <a:lstStyle/>
+          <a:p>
+            <a:pPr algn="ctr"/>
+          </a:p>
+        </p:txBody>
+      </p:sp>
+      <p:sp>
+        <p:nvSpPr>
+          <p:cNvPr id="5" name="TextBox 4"/>
+          <p:cNvSpPr txBox="1"/>
+          <p:nvPr/>
+        </p:nvSpPr>
+        <p:spPr>
+          <a:xfrm>
+            <a:off x="700000" y="1350000"/>
+            <a:ext cx="22000000" cy="450000"/>
+          </a:xfrm>
+          <a:prstGeom prst="rect">
+            <a:avLst/>
+          </a:prstGeom>
+          <a:noFill/>
+        </p:spPr>
+        <p:txBody>
+          <a:bodyPr wrap="square" anchor="t">
+            <a:spAutoFit/>
+          </a:bodyPr>
+          <a:lstStyle/>
+          <a:p>
+            <a:pPr algn="l"/>
+            <a:r>
+              <a:rPr sz="1600" b="0">
+                <a:solidFill>
+                  <a:srgbClr val="666666"/>
+                </a:solidFill>
+                <a:latin typeface="Open Sans"/>
+                <a:ea typeface="Open Sans"/>
+                <a:cs typeface="Open Sans"/>
+              </a:rPr>
+              <a:t>Оказание первой помощи при наружных кровотечениях и травмах</a:t>
+            </a:r>
+          </a:p>
+        </p:txBody>
+      </p:sp>
+      <p:sp>
+        <p:nvSpPr>
+          <p:cNvPr id="6" name="TextBox 5"/>
+          <p:cNvSpPr txBox="1"/>
+          <p:nvPr/>
+        </p:nvSpPr>
+        <p:spPr>
+          <a:xfrm>
+            <a:off x="700000" y="1900000"/>
+            <a:ext cx="7200000" cy="1000000"/>
+          </a:xfrm>
+          <a:prstGeom prst="rect">
+            <a:avLst/>
+          </a:prstGeom>
+          <a:noFill/>
+        </p:spPr>
+        <p:txBody>
+          <a:bodyPr wrap="square" anchor="t">
+            <a:spAutoFit/>
+          </a:bodyPr>
+          <a:lstStyle/>
+          <a:p>
+            <a:pPr algn="ctr"/>
+            <a:r>
+              <a:rPr sz="2400" b="1">
+                <a:solidFill>
+                  <a:srgbClr val="333333"/>
+                </a:solidFill>
+                <a:latin typeface="Open Sans"/>
+                <a:ea typeface="Open Sans"/>
+                <a:cs typeface="Open Sans"/>
+              </a:rPr>
+              <a:t>Артериальное
+кровотечение</a:t>
+            </a:r>
+          </a:p>
+        </p:txBody>
+      </p:sp>
+      <p:sp>
+        <p:nvSpPr>
+          <p:cNvPr id="7" name="Rectangle 6"/>
+          <p:cNvSpPr/>
+          <p:nvPr/>
+        </p:nvSpPr>
+        <p:spPr>
+          <a:xfrm>
+            <a:off x="700000" y="3000000"/>
+            <a:ext cx="7200000" cy="9000000"/>
+          </a:xfrm>
+          <a:prstGeom prst="rect">
+            <a:avLst/>
+          </a:prstGeom>
+          <a:solidFill>
+            <a:srgbClr val="FFFFFF"/>
+          </a:solidFill>
+          <a:ln w="12700">
+            <a:solidFill>
+              <a:srgbClr val="E1E1E1"/>
+            </a:solidFill>
+          </a:ln>
+        </p:spPr>
+        <p:style>
+          <a:lnRef idx="1">
+            <a:schemeClr val="accent1"/>
+          </a:lnRef>
+          <a:fillRef idx="3">
+            <a:schemeClr val="accent1"/>
+          </a:fillRef>
+          <a:effectRef idx="2">
+            <a:schemeClr val="accent1"/>
+          </a:effectRef>
+          <a:fontRef idx="minor">
+            <a:schemeClr val="lt1"/>
+          </a:fontRef>
+        </p:style>
+        <p:txBody>
+          <a:bodyPr rtlCol="0" anchor="ctr"/>
+          <a:lstStyle/>
+          <a:p>
+            <a:pPr algn="ctr"/>
+          </a:p>
+        </p:txBody>
+      </p:sp>
       <p:pic>
         <p:nvPicPr>
-          <p:cNvPr id="2" name="Picture 1" descr="page_03.png"/>
+          <p:cNvPr id="8" name="Picture 7" descr="bleed_arterial.png"/>
           <p:cNvPicPr>
             <a:picLocks noChangeAspect="1"/>
           </p:cNvPicPr>
@@ -3985,8 +4834,222 @@
         </p:blipFill>
         <p:spPr>
           <a:xfrm>
-            <a:off x="0" y="0"/>
-            <a:ext cx="24384000" cy="13716000"/>
+            <a:off x="850000" y="4156636"/>
+            <a:ext cx="6900000" cy="6686727"/>
+          </a:xfrm>
+          <a:prstGeom prst="rect">
+            <a:avLst/>
+          </a:prstGeom>
+        </p:spPr>
+      </p:pic>
+      <p:sp>
+        <p:nvSpPr>
+          <p:cNvPr id="9" name="TextBox 8"/>
+          <p:cNvSpPr txBox="1"/>
+          <p:nvPr/>
+        </p:nvSpPr>
+        <p:spPr>
+          <a:xfrm>
+            <a:off x="8200000" y="1900000"/>
+            <a:ext cx="7200000" cy="1000000"/>
+          </a:xfrm>
+          <a:prstGeom prst="rect">
+            <a:avLst/>
+          </a:prstGeom>
+          <a:noFill/>
+        </p:spPr>
+        <p:txBody>
+          <a:bodyPr wrap="square" anchor="t">
+            <a:spAutoFit/>
+          </a:bodyPr>
+          <a:lstStyle/>
+          <a:p>
+            <a:pPr algn="ctr"/>
+            <a:r>
+              <a:rPr sz="2400" b="1">
+                <a:solidFill>
+                  <a:srgbClr val="333333"/>
+                </a:solidFill>
+                <a:latin typeface="Open Sans"/>
+                <a:ea typeface="Open Sans"/>
+                <a:cs typeface="Open Sans"/>
+              </a:rPr>
+              <a:t>Венозное
+кровотечение</a:t>
+            </a:r>
+          </a:p>
+        </p:txBody>
+      </p:sp>
+      <p:sp>
+        <p:nvSpPr>
+          <p:cNvPr id="10" name="Rectangle 9"/>
+          <p:cNvSpPr/>
+          <p:nvPr/>
+        </p:nvSpPr>
+        <p:spPr>
+          <a:xfrm>
+            <a:off x="8200000" y="3000000"/>
+            <a:ext cx="7200000" cy="9000000"/>
+          </a:xfrm>
+          <a:prstGeom prst="rect">
+            <a:avLst/>
+          </a:prstGeom>
+          <a:solidFill>
+            <a:srgbClr val="FFFFFF"/>
+          </a:solidFill>
+          <a:ln w="12700">
+            <a:solidFill>
+              <a:srgbClr val="E1E1E1"/>
+            </a:solidFill>
+          </a:ln>
+        </p:spPr>
+        <p:style>
+          <a:lnRef idx="1">
+            <a:schemeClr val="accent1"/>
+          </a:lnRef>
+          <a:fillRef idx="3">
+            <a:schemeClr val="accent1"/>
+          </a:fillRef>
+          <a:effectRef idx="2">
+            <a:schemeClr val="accent1"/>
+          </a:effectRef>
+          <a:fontRef idx="minor">
+            <a:schemeClr val="lt1"/>
+          </a:fontRef>
+        </p:style>
+        <p:txBody>
+          <a:bodyPr rtlCol="0" anchor="ctr"/>
+          <a:lstStyle/>
+          <a:p>
+            <a:pPr algn="ctr"/>
+          </a:p>
+        </p:txBody>
+      </p:sp>
+      <p:pic>
+        <p:nvPicPr>
+          <p:cNvPr id="11" name="Picture 10" descr="bleed_venous.png"/>
+          <p:cNvPicPr>
+            <a:picLocks noChangeAspect="1"/>
+          </p:cNvPicPr>
+          <p:nvPr/>
+        </p:nvPicPr>
+        <p:blipFill>
+          <a:blip r:embed="rId3"/>
+          <a:stretch>
+            <a:fillRect/>
+          </a:stretch>
+        </p:blipFill>
+        <p:spPr>
+          <a:xfrm>
+            <a:off x="8350000" y="4302000"/>
+            <a:ext cx="6900000" cy="6396000"/>
+          </a:xfrm>
+          <a:prstGeom prst="rect">
+            <a:avLst/>
+          </a:prstGeom>
+        </p:spPr>
+      </p:pic>
+      <p:sp>
+        <p:nvSpPr>
+          <p:cNvPr id="12" name="TextBox 11"/>
+          <p:cNvSpPr txBox="1"/>
+          <p:nvPr/>
+        </p:nvSpPr>
+        <p:spPr>
+          <a:xfrm>
+            <a:off x="15700000" y="1900000"/>
+            <a:ext cx="7200000" cy="1000000"/>
+          </a:xfrm>
+          <a:prstGeom prst="rect">
+            <a:avLst/>
+          </a:prstGeom>
+          <a:noFill/>
+        </p:spPr>
+        <p:txBody>
+          <a:bodyPr wrap="square" anchor="t">
+            <a:spAutoFit/>
+          </a:bodyPr>
+          <a:lstStyle/>
+          <a:p>
+            <a:pPr algn="ctr"/>
+            <a:r>
+              <a:rPr sz="2400" b="1">
+                <a:solidFill>
+                  <a:srgbClr val="333333"/>
+                </a:solidFill>
+                <a:latin typeface="Open Sans"/>
+                <a:ea typeface="Open Sans"/>
+                <a:cs typeface="Open Sans"/>
+              </a:rPr>
+              <a:t>Капиллярное
+кровотечение</a:t>
+            </a:r>
+          </a:p>
+        </p:txBody>
+      </p:sp>
+      <p:sp>
+        <p:nvSpPr>
+          <p:cNvPr id="13" name="Rectangle 12"/>
+          <p:cNvSpPr/>
+          <p:nvPr/>
+        </p:nvSpPr>
+        <p:spPr>
+          <a:xfrm>
+            <a:off x="15700000" y="3000000"/>
+            <a:ext cx="7200000" cy="9000000"/>
+          </a:xfrm>
+          <a:prstGeom prst="rect">
+            <a:avLst/>
+          </a:prstGeom>
+          <a:solidFill>
+            <a:srgbClr val="FFFFFF"/>
+          </a:solidFill>
+          <a:ln w="12700">
+            <a:solidFill>
+              <a:srgbClr val="E1E1E1"/>
+            </a:solidFill>
+          </a:ln>
+        </p:spPr>
+        <p:style>
+          <a:lnRef idx="1">
+            <a:schemeClr val="accent1"/>
+          </a:lnRef>
+          <a:fillRef idx="3">
+            <a:schemeClr val="accent1"/>
+          </a:fillRef>
+          <a:effectRef idx="2">
+            <a:schemeClr val="accent1"/>
+          </a:effectRef>
+          <a:fontRef idx="minor">
+            <a:schemeClr val="lt1"/>
+          </a:fontRef>
+        </p:style>
+        <p:txBody>
+          <a:bodyPr rtlCol="0" anchor="ctr"/>
+          <a:lstStyle/>
+          <a:p>
+            <a:pPr algn="ctr"/>
+          </a:p>
+        </p:txBody>
+      </p:sp>
+      <p:pic>
+        <p:nvPicPr>
+          <p:cNvPr id="14" name="Picture 13" descr="bleed_capillary.png"/>
+          <p:cNvPicPr>
+            <a:picLocks noChangeAspect="1"/>
+          </p:cNvPicPr>
+          <p:nvPr/>
+        </p:nvPicPr>
+        <p:blipFill>
+          <a:blip r:embed="rId4"/>
+          <a:stretch>
+            <a:fillRect/>
+          </a:stretch>
+        </p:blipFill>
+        <p:spPr>
+          <a:xfrm>
+            <a:off x="15850000" y="4302000"/>
+            <a:ext cx="6900000" cy="6396000"/>
           </a:xfrm>
           <a:prstGeom prst="rect">
             <a:avLst/>
@@ -4062,8 +5125,8 @@
         </p:nvSpPr>
         <p:spPr>
           <a:xfrm>
-            <a:off x="800000" y="400000"/>
-            <a:ext cx="22800000" cy="1000000"/>
+            <a:off x="700000" y="300000"/>
+            <a:ext cx="23000000" cy="1100000"/>
           </a:xfrm>
           <a:prstGeom prst="rect">
             <a:avLst/>
@@ -4099,8 +5162,8 @@
         </p:nvSpPr>
         <p:spPr>
           <a:xfrm>
-            <a:off x="800000" y="1500000"/>
-            <a:ext cx="22800000" cy="20000"/>
+            <a:off x="700000" y="1500000"/>
+            <a:ext cx="23000000" cy="20000"/>
           </a:xfrm>
           <a:prstGeom prst="rect">
             <a:avLst/>
@@ -4143,8 +5206,8 @@
           <p:nvPr/>
         </p:nvGraphicFramePr>
         <p:xfrm>
-          <a:off x="800000" y="1900000"/>
-          <a:ext cx="22800000" cy="6000000"/>
+          <a:off x="700000" y="1900000"/>
+          <a:ext cx="23000000" cy="6000000"/>
         </p:xfrm>
         <a:graphic>
           <a:graphicData uri="http://schemas.openxmlformats.org/drawingml/2006/table">
@@ -4153,10 +5216,10 @@
                 <a:tableStyleId>{5C22544A-7EE6-4342-B048-85BDC9FD1C3A}</a:tableStyleId>
               </a:tblPr>
               <a:tblGrid>
-                <a:gridCol w="5700000"/>
-                <a:gridCol w="5700000"/>
-                <a:gridCol w="5700000"/>
-                <a:gridCol w="5700000"/>
+                <a:gridCol w="5750000"/>
+                <a:gridCol w="5750000"/>
+                <a:gridCol w="5750000"/>
+                <a:gridCol w="5750000"/>
               </a:tblGrid>
               <a:tr h="1200000">
                 <a:tc>
@@ -4165,7 +5228,7 @@
                     <a:lstStyle/>
                     <a:p>
                       <a:r>
-                        <a:rPr sz="2600" b="1">
+                        <a:rPr sz="2400" b="1">
                           <a:solidFill>
                             <a:srgbClr val="FFFFFF"/>
                           </a:solidFill>
@@ -4189,7 +5252,7 @@
                     <a:lstStyle/>
                     <a:p>
                       <a:r>
-                        <a:rPr sz="2600" b="1">
+                        <a:rPr sz="2400" b="1">
                           <a:solidFill>
                             <a:srgbClr val="FFFFFF"/>
                           </a:solidFill>
@@ -4213,7 +5276,7 @@
                     <a:lstStyle/>
                     <a:p>
                       <a:r>
-                        <a:rPr sz="2600" b="1">
+                        <a:rPr sz="2400" b="1">
                           <a:solidFill>
                             <a:srgbClr val="FFFFFF"/>
                           </a:solidFill>
@@ -4237,7 +5300,7 @@
                     <a:lstStyle/>
                     <a:p>
                       <a:r>
-                        <a:rPr sz="2600" b="1">
+                        <a:rPr sz="2400" b="1">
                           <a:solidFill>
                             <a:srgbClr val="FFFFFF"/>
                           </a:solidFill>
@@ -4721,8 +5784,8 @@
         </p:nvSpPr>
         <p:spPr>
           <a:xfrm>
-            <a:off x="800000" y="400000"/>
-            <a:ext cx="22800000" cy="1000000"/>
+            <a:off x="700000" y="300000"/>
+            <a:ext cx="23000000" cy="1100000"/>
           </a:xfrm>
           <a:prstGeom prst="rect">
             <a:avLst/>
@@ -4758,8 +5821,8 @@
         </p:nvSpPr>
         <p:spPr>
           <a:xfrm>
-            <a:off x="800000" y="1500000"/>
-            <a:ext cx="22800000" cy="20000"/>
+            <a:off x="700000" y="1500000"/>
+            <a:ext cx="23000000" cy="20000"/>
           </a:xfrm>
           <a:prstGeom prst="rect">
             <a:avLst/>
@@ -4802,8 +5865,8 @@
           <p:nvPr/>
         </p:nvGraphicFramePr>
         <p:xfrm>
-          <a:off x="800000" y="1900000"/>
-          <a:ext cx="22800000" cy="6000000"/>
+          <a:off x="700000" y="1900000"/>
+          <a:ext cx="23000000" cy="6000000"/>
         </p:xfrm>
         <a:graphic>
           <a:graphicData uri="http://schemas.openxmlformats.org/drawingml/2006/table">
@@ -4812,9 +5875,9 @@
                 <a:tableStyleId>{5C22544A-7EE6-4342-B048-85BDC9FD1C3A}</a:tableStyleId>
               </a:tblPr>
               <a:tblGrid>
-                <a:gridCol w="7600000"/>
-                <a:gridCol w="7600000"/>
-                <a:gridCol w="7600000"/>
+                <a:gridCol w="7666666"/>
+                <a:gridCol w="7666666"/>
+                <a:gridCol w="7666668"/>
               </a:tblGrid>
               <a:tr h="1200000">
                 <a:tc>
@@ -4823,7 +5886,7 @@
                     <a:lstStyle/>
                     <a:p>
                       <a:r>
-                        <a:rPr sz="2600" b="1">
+                        <a:rPr sz="2400" b="1">
                           <a:solidFill>
                             <a:srgbClr val="FFFFFF"/>
                           </a:solidFill>
@@ -4847,7 +5910,7 @@
                     <a:lstStyle/>
                     <a:p>
                       <a:r>
-                        <a:rPr sz="2600" b="1">
+                        <a:rPr sz="2400" b="1">
                           <a:solidFill>
                             <a:srgbClr val="FFFFFF"/>
                           </a:solidFill>
@@ -4871,7 +5934,7 @@
                     <a:lstStyle/>
                     <a:p>
                       <a:r>
-                        <a:rPr sz="2600" b="1">
+                        <a:rPr sz="2400" b="1">
                           <a:solidFill>
                             <a:srgbClr val="FFFFFF"/>
                           </a:solidFill>
@@ -5259,8 +6322,8 @@
         </p:nvSpPr>
         <p:spPr>
           <a:xfrm>
-            <a:off x="800000" y="400000"/>
-            <a:ext cx="22800000" cy="1000000"/>
+            <a:off x="700000" y="300000"/>
+            <a:ext cx="23000000" cy="1100000"/>
           </a:xfrm>
           <a:prstGeom prst="rect">
             <a:avLst/>
@@ -5296,8 +6359,8 @@
         </p:nvSpPr>
         <p:spPr>
           <a:xfrm>
-            <a:off x="800000" y="1500000"/>
-            <a:ext cx="22800000" cy="20000"/>
+            <a:off x="700000" y="1500000"/>
+            <a:ext cx="23000000" cy="20000"/>
           </a:xfrm>
           <a:prstGeom prst="rect">
             <a:avLst/>
@@ -5339,8 +6402,8 @@
         </p:nvSpPr>
         <p:spPr>
           <a:xfrm>
-            <a:off x="800000" y="1900000"/>
-            <a:ext cx="22800000" cy="6500000"/>
+            <a:off x="700000" y="1900000"/>
+            <a:ext cx="23000000" cy="6500000"/>
           </a:xfrm>
           <a:prstGeom prst="rect">
             <a:avLst/>
@@ -5355,7 +6418,7 @@
           <a:p>
             <a:pPr algn="l">
               <a:spcAft>
-                <a:spcPts val="1200"/>
+                <a:spcPts val="1000"/>
               </a:spcAft>
             </a:pPr>
             <a:r>
@@ -5373,7 +6436,7 @@
           <a:p>
             <a:pPr algn="l">
               <a:spcAft>
-                <a:spcPts val="1200"/>
+                <a:spcPts val="1000"/>
               </a:spcAft>
             </a:pPr>
             <a:r>
@@ -5391,7 +6454,7 @@
           <a:p>
             <a:pPr algn="l">
               <a:spcAft>
-                <a:spcPts val="1200"/>
+                <a:spcPts val="1000"/>
               </a:spcAft>
             </a:pPr>
             <a:r>
@@ -5409,7 +6472,7 @@
           <a:p>
             <a:pPr algn="l">
               <a:spcAft>
-                <a:spcPts val="1200"/>
+                <a:spcPts val="1000"/>
               </a:spcAft>
             </a:pPr>
             <a:r>
@@ -5427,25 +6490,7 @@
           <a:p>
             <a:pPr algn="l">
               <a:spcAft>
-                <a:spcPts val="1200"/>
-              </a:spcAft>
-            </a:pPr>
-            <a:r>
-              <a:rPr sz="3200" b="0">
-                <a:solidFill>
-                  <a:srgbClr val="333333"/>
-                </a:solidFill>
-                <a:latin typeface="Open Sans"/>
-                <a:ea typeface="Open Sans"/>
-                <a:cs typeface="Open Sans"/>
-              </a:rPr>
-              <a:t>•  При травме груди — одышка, слабость, бледность</a:t>
-            </a:r>
-          </a:p>
-          <a:p>
-            <a:pPr algn="l">
-              <a:spcAft>
-                <a:spcPts val="1200"/>
+                <a:spcPts val="1000"/>
               </a:spcAft>
             </a:pPr>
             <a:r>
@@ -5470,8 +6515,8 @@
         </p:nvSpPr>
         <p:spPr>
           <a:xfrm>
-            <a:off x="800000" y="11000000"/>
-            <a:ext cx="22800000" cy="1600000"/>
+            <a:off x="700000" y="11000000"/>
+            <a:ext cx="23000000" cy="1600000"/>
           </a:xfrm>
           <a:prstGeom prst="roundRect">
             <a:avLst/>
@@ -5513,7 +6558,7 @@
         </p:nvSpPr>
         <p:spPr>
           <a:xfrm>
-            <a:off x="800000" y="11000000"/>
+            <a:off x="700000" y="11000000"/>
             <a:ext cx="120000" cy="1600000"/>
           </a:xfrm>
           <a:prstGeom prst="rect">
@@ -5556,8 +6601,8 @@
         </p:nvSpPr>
         <p:spPr>
           <a:xfrm>
-            <a:off x="1200000" y="11200000"/>
-            <a:ext cx="21800000" cy="1200000"/>
+            <a:off x="1100000" y="11200000"/>
+            <a:ext cx="22000000" cy="1200000"/>
           </a:xfrm>
           <a:prstGeom prst="rect">
             <a:avLst/>
@@ -5654,8 +6699,8 @@
         </p:nvSpPr>
         <p:spPr>
           <a:xfrm>
-            <a:off x="800000" y="400000"/>
-            <a:ext cx="22800000" cy="1000000"/>
+            <a:off x="700000" y="300000"/>
+            <a:ext cx="23000000" cy="1100000"/>
           </a:xfrm>
           <a:prstGeom prst="rect">
             <a:avLst/>
@@ -5691,8 +6736,8 @@
         </p:nvSpPr>
         <p:spPr>
           <a:xfrm>
-            <a:off x="800000" y="1500000"/>
-            <a:ext cx="22800000" cy="20000"/>
+            <a:off x="700000" y="1500000"/>
+            <a:ext cx="23000000" cy="20000"/>
           </a:xfrm>
           <a:prstGeom prst="rect">
             <a:avLst/>
@@ -5734,8 +6779,8 @@
         </p:nvSpPr>
         <p:spPr>
           <a:xfrm>
-            <a:off x="800000" y="2000000"/>
-            <a:ext cx="22800000" cy="1600000"/>
+            <a:off x="700000" y="1900000"/>
+            <a:ext cx="23000000" cy="1600000"/>
           </a:xfrm>
           <a:prstGeom prst="rect">
             <a:avLst/>
@@ -5779,7 +6824,7 @@
         </p:nvSpPr>
         <p:spPr>
           <a:xfrm>
-            <a:off x="800000" y="2000000"/>
+            <a:off x="700000" y="1900000"/>
             <a:ext cx="120000" cy="1600000"/>
           </a:xfrm>
           <a:prstGeom prst="rect">
@@ -5822,8 +6867,8 @@
         </p:nvSpPr>
         <p:spPr>
           <a:xfrm>
-            <a:off x="1300000" y="2350000"/>
-            <a:ext cx="21500000" cy="900000"/>
+            <a:off x="1200000" y="2250000"/>
+            <a:ext cx="22000000" cy="900000"/>
           </a:xfrm>
           <a:prstGeom prst="rect">
             <a:avLst/>
@@ -5859,8 +6904,8 @@
         </p:nvSpPr>
         <p:spPr>
           <a:xfrm>
-            <a:off x="800000" y="3900000"/>
-            <a:ext cx="22800000" cy="1600000"/>
+            <a:off x="700000" y="3750000"/>
+            <a:ext cx="23000000" cy="1600000"/>
           </a:xfrm>
           <a:prstGeom prst="rect">
             <a:avLst/>
@@ -5904,7 +6949,7 @@
         </p:nvSpPr>
         <p:spPr>
           <a:xfrm>
-            <a:off x="800000" y="3900000"/>
+            <a:off x="700000" y="3750000"/>
             <a:ext cx="120000" cy="1600000"/>
           </a:xfrm>
           <a:prstGeom prst="rect">
@@ -5947,8 +6992,8 @@
         </p:nvSpPr>
         <p:spPr>
           <a:xfrm>
-            <a:off x="1300000" y="4250000"/>
-            <a:ext cx="21500000" cy="900000"/>
+            <a:off x="1200000" y="4100000"/>
+            <a:ext cx="22000000" cy="900000"/>
           </a:xfrm>
           <a:prstGeom prst="rect">
             <a:avLst/>
@@ -5984,8 +7029,8 @@
         </p:nvSpPr>
         <p:spPr>
           <a:xfrm>
-            <a:off x="800000" y="5800000"/>
-            <a:ext cx="22800000" cy="1600000"/>
+            <a:off x="700000" y="5600000"/>
+            <a:ext cx="23000000" cy="1600000"/>
           </a:xfrm>
           <a:prstGeom prst="rect">
             <a:avLst/>
@@ -6029,7 +7074,7 @@
         </p:nvSpPr>
         <p:spPr>
           <a:xfrm>
-            <a:off x="800000" y="5800000"/>
+            <a:off x="700000" y="5600000"/>
             <a:ext cx="120000" cy="1600000"/>
           </a:xfrm>
           <a:prstGeom prst="rect">
@@ -6072,8 +7117,8 @@
         </p:nvSpPr>
         <p:spPr>
           <a:xfrm>
-            <a:off x="1300000" y="6150000"/>
-            <a:ext cx="21500000" cy="900000"/>
+            <a:off x="1200000" y="5950000"/>
+            <a:ext cx="22000000" cy="900000"/>
           </a:xfrm>
           <a:prstGeom prst="rect">
             <a:avLst/>
@@ -6109,8 +7154,8 @@
         </p:nvSpPr>
         <p:spPr>
           <a:xfrm>
-            <a:off x="800000" y="7700000"/>
-            <a:ext cx="22800000" cy="1600000"/>
+            <a:off x="700000" y="7450000"/>
+            <a:ext cx="23000000" cy="1600000"/>
           </a:xfrm>
           <a:prstGeom prst="rect">
             <a:avLst/>
@@ -6154,7 +7199,7 @@
         </p:nvSpPr>
         <p:spPr>
           <a:xfrm>
-            <a:off x="800000" y="7700000"/>
+            <a:off x="700000" y="7450000"/>
             <a:ext cx="120000" cy="1600000"/>
           </a:xfrm>
           <a:prstGeom prst="rect">
@@ -6197,8 +7242,8 @@
         </p:nvSpPr>
         <p:spPr>
           <a:xfrm>
-            <a:off x="1300000" y="8050000"/>
-            <a:ext cx="21500000" cy="900000"/>
+            <a:off x="1200000" y="7800000"/>
+            <a:ext cx="22000000" cy="900000"/>
           </a:xfrm>
           <a:prstGeom prst="rect">
             <a:avLst/>
@@ -6244,20 +7289,12 @@
         <p:nvPr/>
       </p:nvGrpSpPr>
       <p:grpSpPr/>
-      <p:pic>
-        <p:nvPicPr>
-          <p:cNvPr id="2" name="Picture 1" descr="page_28.png"/>
-          <p:cNvPicPr>
-            <a:picLocks noChangeAspect="1"/>
-          </p:cNvPicPr>
-          <p:nvPr/>
-        </p:nvPicPr>
-        <p:blipFill>
-          <a:blip r:embed="rId2"/>
-          <a:stretch>
-            <a:fillRect/>
-          </a:stretch>
-        </p:blipFill>
+      <p:sp>
+        <p:nvSpPr>
+          <p:cNvPr id="2" name="Rectangle 1"/>
+          <p:cNvSpPr/>
+          <p:nvPr/>
+        </p:nvSpPr>
         <p:spPr>
           <a:xfrm>
             <a:off x="0" y="0"/>
@@ -6266,8 +7303,158 @@
           <a:prstGeom prst="rect">
             <a:avLst/>
           </a:prstGeom>
-        </p:spPr>
-      </p:pic>
+          <a:solidFill>
+            <a:srgbClr val="FFFFFF"/>
+          </a:solidFill>
+          <a:ln>
+            <a:noFill/>
+          </a:ln>
+        </p:spPr>
+        <p:style>
+          <a:lnRef idx="1">
+            <a:schemeClr val="accent1"/>
+          </a:lnRef>
+          <a:fillRef idx="3">
+            <a:schemeClr val="accent1"/>
+          </a:fillRef>
+          <a:effectRef idx="2">
+            <a:schemeClr val="accent1"/>
+          </a:effectRef>
+          <a:fontRef idx="minor">
+            <a:schemeClr val="lt1"/>
+          </a:fontRef>
+        </p:style>
+        <p:txBody>
+          <a:bodyPr rtlCol="0" anchor="ctr"/>
+          <a:lstStyle/>
+          <a:p>
+            <a:pPr algn="ctr"/>
+          </a:p>
+        </p:txBody>
+      </p:sp>
+      <p:sp>
+        <p:nvSpPr>
+          <p:cNvPr id="3" name="Rectangle 2"/>
+          <p:cNvSpPr/>
+          <p:nvPr/>
+        </p:nvSpPr>
+        <p:spPr>
+          <a:xfrm>
+            <a:off x="23000000" y="0"/>
+            <a:ext cx="1384000" cy="13716000"/>
+          </a:xfrm>
+          <a:prstGeom prst="rect">
+            <a:avLst/>
+          </a:prstGeom>
+          <a:solidFill>
+            <a:srgbClr val="DDDDDD"/>
+          </a:solidFill>
+          <a:ln>
+            <a:noFill/>
+          </a:ln>
+        </p:spPr>
+        <p:style>
+          <a:lnRef idx="1">
+            <a:schemeClr val="accent1"/>
+          </a:lnRef>
+          <a:fillRef idx="3">
+            <a:schemeClr val="accent1"/>
+          </a:fillRef>
+          <a:effectRef idx="2">
+            <a:schemeClr val="accent1"/>
+          </a:effectRef>
+          <a:fontRef idx="minor">
+            <a:schemeClr val="lt1"/>
+          </a:fontRef>
+        </p:style>
+        <p:txBody>
+          <a:bodyPr rtlCol="0" anchor="ctr"/>
+          <a:lstStyle/>
+          <a:p>
+            <a:pPr algn="ctr"/>
+          </a:p>
+        </p:txBody>
+      </p:sp>
+      <p:sp>
+        <p:nvSpPr>
+          <p:cNvPr id="4" name="TextBox 3"/>
+          <p:cNvSpPr txBox="1"/>
+          <p:nvPr/>
+        </p:nvSpPr>
+        <p:spPr>
+          <a:xfrm>
+            <a:off x="700000" y="5500000"/>
+            <a:ext cx="21000000" cy="1200000"/>
+          </a:xfrm>
+          <a:prstGeom prst="rect">
+            <a:avLst/>
+          </a:prstGeom>
+          <a:noFill/>
+        </p:spPr>
+        <p:txBody>
+          <a:bodyPr wrap="square" anchor="t">
+            <a:spAutoFit/>
+          </a:bodyPr>
+          <a:lstStyle/>
+          <a:p>
+            <a:pPr algn="l"/>
+            <a:r>
+              <a:rPr sz="4000" b="1">
+                <a:solidFill>
+                  <a:srgbClr val="333333"/>
+                </a:solidFill>
+                <a:latin typeface="Open Sans"/>
+                <a:ea typeface="Open Sans"/>
+                <a:cs typeface="Open Sans"/>
+              </a:rPr>
+              <a:t>БЛАГОДАРИМ ЗА ВНИМАНИЕ</a:t>
+            </a:r>
+          </a:p>
+        </p:txBody>
+      </p:sp>
+      <p:sp>
+        <p:nvSpPr>
+          <p:cNvPr id="5" name="Rectangle 4"/>
+          <p:cNvSpPr/>
+          <p:nvPr/>
+        </p:nvSpPr>
+        <p:spPr>
+          <a:xfrm>
+            <a:off x="700000" y="6900000"/>
+            <a:ext cx="10000000" cy="25000"/>
+          </a:xfrm>
+          <a:prstGeom prst="rect">
+            <a:avLst/>
+          </a:prstGeom>
+          <a:solidFill>
+            <a:srgbClr val="333333"/>
+          </a:solidFill>
+          <a:ln>
+            <a:noFill/>
+          </a:ln>
+        </p:spPr>
+        <p:style>
+          <a:lnRef idx="1">
+            <a:schemeClr val="accent1"/>
+          </a:lnRef>
+          <a:fillRef idx="3">
+            <a:schemeClr val="accent1"/>
+          </a:fillRef>
+          <a:effectRef idx="2">
+            <a:schemeClr val="accent1"/>
+          </a:effectRef>
+          <a:fontRef idx="minor">
+            <a:schemeClr val="lt1"/>
+          </a:fontRef>
+        </p:style>
+        <p:txBody>
+          <a:bodyPr rtlCol="0" anchor="ctr"/>
+          <a:lstStyle/>
+          <a:p>
+            <a:pPr algn="ctr"/>
+          </a:p>
+        </p:txBody>
+      </p:sp>
     </p:spTree>
   </p:cSld>
   <p:clrMapOvr>

--- a/tema2_bleeding/Признаки_наружного_кровотечения.pptx
+++ b/tema2_bleeding/Признаки_наружного_кровотечения.pptx
@@ -3111,7 +3111,7 @@
             <a:avLst/>
           </a:prstGeom>
           <a:solidFill>
-            <a:srgbClr val="FFFFFF"/>
+            <a:srgbClr val="F2F2F2"/>
           </a:solidFill>
           <a:ln>
             <a:noFill/>
@@ -3147,8 +3147,8 @@
         </p:nvSpPr>
         <p:spPr>
           <a:xfrm>
-            <a:off x="0" y="4200000"/>
-            <a:ext cx="4000000" cy="2800000"/>
+            <a:off x="17500000" y="0"/>
+            <a:ext cx="6884000" cy="13716000"/>
           </a:xfrm>
           <a:prstGeom prst="rect">
             <a:avLst/>
@@ -3190,8 +3190,8 @@
         </p:nvSpPr>
         <p:spPr>
           <a:xfrm>
-            <a:off x="23000000" y="0"/>
-            <a:ext cx="1384000" cy="13716000"/>
+            <a:off x="0" y="4500000"/>
+            <a:ext cx="4500000" cy="2800000"/>
           </a:xfrm>
           <a:prstGeom prst="rect">
             <a:avLst/>
@@ -3233,8 +3233,8 @@
         </p:nvSpPr>
         <p:spPr>
           <a:xfrm>
-            <a:off x="700000" y="4800000"/>
-            <a:ext cx="21000000" cy="1800000"/>
+            <a:off x="700000" y="5000000"/>
+            <a:ext cx="16500000" cy="1600000"/>
           </a:xfrm>
           <a:prstGeom prst="rect">
             <a:avLst/>
@@ -3249,7 +3249,7 @@
           <a:p>
             <a:pPr algn="l"/>
             <a:r>
-              <a:rPr sz="3600" b="1">
+              <a:rPr sz="3400" b="1">
                 <a:solidFill>
                   <a:srgbClr val="333333"/>
                 </a:solidFill>
@@ -3272,7 +3272,7 @@
         <p:spPr>
           <a:xfrm>
             <a:off x="700000" y="6800000"/>
-            <a:ext cx="14000000" cy="25000"/>
+            <a:ext cx="14000000" cy="35000"/>
           </a:xfrm>
           <a:prstGeom prst="rect">
             <a:avLst/>
@@ -4164,8 +4164,8 @@
         </p:nvSpPr>
         <p:spPr>
           <a:xfrm>
-            <a:off x="700000" y="300000"/>
-            <a:ext cx="22000000" cy="900000"/>
+            <a:off x="700000" y="280000"/>
+            <a:ext cx="22000000" cy="850000"/>
           </a:xfrm>
           <a:prstGeom prst="rect">
             <a:avLst/>
@@ -4180,7 +4180,7 @@
           <a:p>
             <a:pPr algn="l"/>
             <a:r>
-              <a:rPr sz="3200" b="1">
+              <a:rPr sz="3000" b="1">
                 <a:solidFill>
                   <a:srgbClr val="333333"/>
                 </a:solidFill>
@@ -4201,14 +4201,14 @@
         </p:nvSpPr>
         <p:spPr>
           <a:xfrm>
-            <a:off x="700000" y="1250000"/>
-            <a:ext cx="22000000" cy="20000"/>
+            <a:off x="700000" y="1150000"/>
+            <a:ext cx="16000000" cy="35000"/>
           </a:xfrm>
           <a:prstGeom prst="rect">
             <a:avLst/>
           </a:prstGeom>
           <a:solidFill>
-            <a:srgbClr val="E1E1E1"/>
+            <a:srgbClr val="555555"/>
           </a:solidFill>
           <a:ln>
             <a:noFill/>
@@ -4244,7 +4244,7 @@
         </p:nvSpPr>
         <p:spPr>
           <a:xfrm>
-            <a:off x="700000" y="1350000"/>
+            <a:off x="700000" y="1250000"/>
             <a:ext cx="22000000" cy="450000"/>
           </a:xfrm>
           <a:prstGeom prst="rect">
@@ -4260,7 +4260,7 @@
           <a:p>
             <a:pPr algn="l"/>
             <a:r>
-              <a:rPr sz="1600" b="0">
+              <a:rPr sz="1400" b="0">
                 <a:solidFill>
                   <a:srgbClr val="666666"/>
                 </a:solidFill>
@@ -4273,16 +4273,40 @@
           </a:p>
         </p:txBody>
       </p:sp>
-      <p:sp>
-        <p:nvSpPr>
-          <p:cNvPr id="6" name="Rounded Rectangle 5"/>
+      <p:pic>
+        <p:nvPicPr>
+          <p:cNvPr id="6" name="Picture 5" descr="def_man.png"/>
+          <p:cNvPicPr>
+            <a:picLocks noChangeAspect="1"/>
+          </p:cNvPicPr>
+          <p:nvPr/>
+        </p:nvPicPr>
+        <p:blipFill>
+          <a:blip r:embed="rId2"/>
+          <a:stretch>
+            <a:fillRect/>
+          </a:stretch>
+        </p:blipFill>
+        <p:spPr>
+          <a:xfrm>
+            <a:off x="700000" y="3068750"/>
+            <a:ext cx="7000000" cy="8362500"/>
+          </a:xfrm>
+          <a:prstGeom prst="rect">
+            <a:avLst/>
+          </a:prstGeom>
+        </p:spPr>
+      </p:pic>
+      <p:sp>
+        <p:nvSpPr>
+          <p:cNvPr id="7" name="Rounded Rectangle 6"/>
           <p:cNvSpPr/>
           <p:nvPr/>
         </p:nvSpPr>
         <p:spPr>
           <a:xfrm>
-            <a:off x="700000" y="2000000"/>
-            <a:ext cx="10000000" cy="4500000"/>
+            <a:off x="6900000" y="2100000"/>
+            <a:ext cx="7500000" cy="4200000"/>
           </a:xfrm>
           <a:prstGeom prst="roundRect">
             <a:avLst/>
@@ -4318,14 +4342,14 @@
       </p:sp>
       <p:sp>
         <p:nvSpPr>
-          <p:cNvPr id="7" name="TextBox 6"/>
+          <p:cNvPr id="8" name="TextBox 7"/>
           <p:cNvSpPr txBox="1"/>
           <p:nvPr/>
         </p:nvSpPr>
         <p:spPr>
           <a:xfrm>
-            <a:off x="1100000" y="2300000"/>
-            <a:ext cx="9200000" cy="3800000"/>
+            <a:off x="7300000" y="2400000"/>
+            <a:ext cx="6700000" cy="3600000"/>
           </a:xfrm>
           <a:prstGeom prst="rect">
             <a:avLst/>
@@ -4340,7 +4364,7 @@
           <a:p>
             <a:pPr algn="l"/>
             <a:r>
-              <a:rPr sz="2400" b="0">
+              <a:rPr sz="2200" b="0">
                 <a:solidFill>
                   <a:srgbClr val="333333"/>
                 </a:solidFill>
@@ -4355,14 +4379,14 @@
       </p:sp>
       <p:sp>
         <p:nvSpPr>
-          <p:cNvPr id="8" name="TextBox 7"/>
+          <p:cNvPr id="9" name="TextBox 8"/>
           <p:cNvSpPr txBox="1"/>
           <p:nvPr/>
         </p:nvSpPr>
         <p:spPr>
           <a:xfrm>
-            <a:off x="11700000" y="2000000"/>
-            <a:ext cx="11000000" cy="600000"/>
+            <a:off x="14700000" y="2000000"/>
+            <a:ext cx="9000000" cy="700000"/>
           </a:xfrm>
           <a:prstGeom prst="rect">
             <a:avLst/>
@@ -4377,7 +4401,7 @@
           <a:p>
             <a:pPr algn="l"/>
             <a:r>
-              <a:rPr sz="2400" b="1">
+              <a:rPr sz="2200" b="1">
                 <a:solidFill>
                   <a:srgbClr val="333333"/>
                 </a:solidFill>
@@ -4392,14 +4416,14 @@
       </p:sp>
       <p:sp>
         <p:nvSpPr>
-          <p:cNvPr id="9" name="TextBox 8"/>
+          <p:cNvPr id="10" name="TextBox 9"/>
           <p:cNvSpPr txBox="1"/>
           <p:nvPr/>
         </p:nvSpPr>
         <p:spPr>
           <a:xfrm>
-            <a:off x="11700000" y="2700000"/>
-            <a:ext cx="11000000" cy="8500000"/>
+            <a:off x="14700000" y="2800000"/>
+            <a:ext cx="9000000" cy="9000000"/>
           </a:xfrm>
           <a:prstGeom prst="rect">
             <a:avLst/>
@@ -4418,7 +4442,7 @@
               </a:spcAft>
             </a:pPr>
             <a:r>
-              <a:rPr sz="2200" b="0">
+              <a:rPr sz="2000" b="0">
                 <a:solidFill>
                   <a:srgbClr val="333333"/>
                 </a:solidFill>
@@ -4426,7 +4450,7 @@
                 <a:ea typeface="Open Sans"/>
                 <a:cs typeface="Open Sans"/>
               </a:rPr>
-              <a:t>☑  резкая общая слабость;</a:t>
+              <a:t>☐  резкая общая слабость;</a:t>
             </a:r>
           </a:p>
           <a:p>
@@ -4436,7 +4460,7 @@
               </a:spcAft>
             </a:pPr>
             <a:r>
-              <a:rPr sz="2200" b="0">
+              <a:rPr sz="2000" b="0">
                 <a:solidFill>
                   <a:srgbClr val="333333"/>
                 </a:solidFill>
@@ -4444,7 +4468,7 @@
                 <a:ea typeface="Open Sans"/>
                 <a:cs typeface="Open Sans"/>
               </a:rPr>
-              <a:t>☑  чувство жажды;</a:t>
+              <a:t>☐  чувство жажды;</a:t>
             </a:r>
           </a:p>
           <a:p>
@@ -4454,7 +4478,7 @@
               </a:spcAft>
             </a:pPr>
             <a:r>
-              <a:rPr sz="2200" b="0">
+              <a:rPr sz="2000" b="0">
                 <a:solidFill>
                   <a:srgbClr val="333333"/>
                 </a:solidFill>
@@ -4462,7 +4486,7 @@
                 <a:ea typeface="Open Sans"/>
                 <a:cs typeface="Open Sans"/>
               </a:rPr>
-              <a:t>☑  головокружение;</a:t>
+              <a:t>☐  головокружение;</a:t>
             </a:r>
           </a:p>
           <a:p>
@@ -4472,7 +4496,7 @@
               </a:spcAft>
             </a:pPr>
             <a:r>
-              <a:rPr sz="2200" b="0">
+              <a:rPr sz="2000" b="0">
                 <a:solidFill>
                   <a:srgbClr val="333333"/>
                 </a:solidFill>
@@ -4480,7 +4504,7 @@
                 <a:ea typeface="Open Sans"/>
                 <a:cs typeface="Open Sans"/>
               </a:rPr>
-              <a:t>☑  мелькание «мушек» перед глазами;</a:t>
+              <a:t>☐  мелькание «мушек» перед глазами;</a:t>
             </a:r>
           </a:p>
           <a:p>
@@ -4490,7 +4514,7 @@
               </a:spcAft>
             </a:pPr>
             <a:r>
-              <a:rPr sz="2200" b="0">
+              <a:rPr sz="2000" b="0">
                 <a:solidFill>
                   <a:srgbClr val="333333"/>
                 </a:solidFill>
@@ -4498,7 +4522,7 @@
                 <a:ea typeface="Open Sans"/>
                 <a:cs typeface="Open Sans"/>
               </a:rPr>
-              <a:t>☑  обморок, чаще при попытке встать;</a:t>
+              <a:t>☐  обморок, чаще при попытке встать;</a:t>
             </a:r>
           </a:p>
           <a:p>
@@ -4508,7 +4532,7 @@
               </a:spcAft>
             </a:pPr>
             <a:r>
-              <a:rPr sz="2200" b="0">
+              <a:rPr sz="2000" b="0">
                 <a:solidFill>
                   <a:srgbClr val="333333"/>
                 </a:solidFill>
@@ -4516,7 +4540,7 @@
                 <a:ea typeface="Open Sans"/>
                 <a:cs typeface="Open Sans"/>
               </a:rPr>
-              <a:t>☑  бледная, влажная и холодная кожа;</a:t>
+              <a:t>☐  бледная, влажная и холодная кожа;</a:t>
             </a:r>
           </a:p>
           <a:p>
@@ -4526,7 +4550,7 @@
               </a:spcAft>
             </a:pPr>
             <a:r>
-              <a:rPr sz="2200" b="0">
+              <a:rPr sz="2000" b="0">
                 <a:solidFill>
                   <a:srgbClr val="333333"/>
                 </a:solidFill>
@@ -4534,7 +4558,7 @@
                 <a:ea typeface="Open Sans"/>
                 <a:cs typeface="Open Sans"/>
               </a:rPr>
-              <a:t>☑  учащённое сердцебиение;</a:t>
+              <a:t>☐  учащённое сердцебиение;</a:t>
             </a:r>
           </a:p>
           <a:p>
@@ -4544,7 +4568,7 @@
               </a:spcAft>
             </a:pPr>
             <a:r>
-              <a:rPr sz="2200" b="0">
+              <a:rPr sz="2000" b="0">
                 <a:solidFill>
                   <a:srgbClr val="333333"/>
                 </a:solidFill>
@@ -4552,7 +4576,7 @@
                 <a:ea typeface="Open Sans"/>
                 <a:cs typeface="Open Sans"/>
               </a:rPr>
-              <a:t>☑  частое дыхание.</a:t>
+              <a:t>☐  частое дыхание.</a:t>
             </a:r>
           </a:p>
         </p:txBody>
@@ -4626,8 +4650,8 @@
         </p:nvSpPr>
         <p:spPr>
           <a:xfrm>
-            <a:off x="700000" y="300000"/>
-            <a:ext cx="22000000" cy="900000"/>
+            <a:off x="700000" y="280000"/>
+            <a:ext cx="22000000" cy="850000"/>
           </a:xfrm>
           <a:prstGeom prst="rect">
             <a:avLst/>
@@ -4642,7 +4666,7 @@
           <a:p>
             <a:pPr algn="l"/>
             <a:r>
-              <a:rPr sz="3200" b="1">
+              <a:rPr sz="3000" b="1">
                 <a:solidFill>
                   <a:srgbClr val="333333"/>
                 </a:solidFill>
@@ -4663,14 +4687,14 @@
         </p:nvSpPr>
         <p:spPr>
           <a:xfrm>
-            <a:off x="700000" y="1250000"/>
-            <a:ext cx="22000000" cy="20000"/>
+            <a:off x="700000" y="1150000"/>
+            <a:ext cx="16000000" cy="35000"/>
           </a:xfrm>
           <a:prstGeom prst="rect">
             <a:avLst/>
           </a:prstGeom>
           <a:solidFill>
-            <a:srgbClr val="E1E1E1"/>
+            <a:srgbClr val="555555"/>
           </a:solidFill>
           <a:ln>
             <a:noFill/>
@@ -4706,7 +4730,7 @@
         </p:nvSpPr>
         <p:spPr>
           <a:xfrm>
-            <a:off x="700000" y="1350000"/>
+            <a:off x="700000" y="1250000"/>
             <a:ext cx="22000000" cy="450000"/>
           </a:xfrm>
           <a:prstGeom prst="rect">
@@ -4722,7 +4746,7 @@
           <a:p>
             <a:pPr algn="l"/>
             <a:r>
-              <a:rPr sz="1600" b="0">
+              <a:rPr sz="1400" b="0">
                 <a:solidFill>
                   <a:srgbClr val="666666"/>
                 </a:solidFill>
@@ -4744,7 +4768,7 @@
         <p:spPr>
           <a:xfrm>
             <a:off x="700000" y="1900000"/>
-            <a:ext cx="7200000" cy="1000000"/>
+            <a:ext cx="7200000" cy="800000"/>
           </a:xfrm>
           <a:prstGeom prst="rect">
             <a:avLst/>
@@ -4767,60 +4791,14 @@
                 <a:ea typeface="Open Sans"/>
                 <a:cs typeface="Open Sans"/>
               </a:rPr>
-              <a:t>Артериальное
-кровотечение</a:t>
-            </a:r>
-          </a:p>
-        </p:txBody>
-      </p:sp>
-      <p:sp>
-        <p:nvSpPr>
-          <p:cNvPr id="7" name="Rectangle 6"/>
-          <p:cNvSpPr/>
-          <p:nvPr/>
-        </p:nvSpPr>
-        <p:spPr>
-          <a:xfrm>
-            <a:off x="700000" y="3000000"/>
-            <a:ext cx="7200000" cy="9000000"/>
-          </a:xfrm>
-          <a:prstGeom prst="rect">
-            <a:avLst/>
-          </a:prstGeom>
-          <a:solidFill>
-            <a:srgbClr val="FFFFFF"/>
-          </a:solidFill>
-          <a:ln w="12700">
-            <a:solidFill>
-              <a:srgbClr val="E1E1E1"/>
-            </a:solidFill>
-          </a:ln>
-        </p:spPr>
-        <p:style>
-          <a:lnRef idx="1">
-            <a:schemeClr val="accent1"/>
-          </a:lnRef>
-          <a:fillRef idx="3">
-            <a:schemeClr val="accent1"/>
-          </a:fillRef>
-          <a:effectRef idx="2">
-            <a:schemeClr val="accent1"/>
-          </a:effectRef>
-          <a:fontRef idx="minor">
-            <a:schemeClr val="lt1"/>
-          </a:fontRef>
-        </p:style>
-        <p:txBody>
-          <a:bodyPr rtlCol="0" anchor="ctr"/>
-          <a:lstStyle/>
-          <a:p>
-            <a:pPr algn="ctr"/>
+              <a:t>Артериальное кровотечение</a:t>
+            </a:r>
           </a:p>
         </p:txBody>
       </p:sp>
       <p:pic>
         <p:nvPicPr>
-          <p:cNvPr id="8" name="Picture 7" descr="bleed_arterial.png"/>
+          <p:cNvPr id="7" name="Picture 6" descr="bleed_arterial.png"/>
           <p:cNvPicPr>
             <a:picLocks noChangeAspect="1"/>
           </p:cNvPicPr>
@@ -4834,8 +4812,8 @@
         </p:blipFill>
         <p:spPr>
           <a:xfrm>
-            <a:off x="850000" y="4156636"/>
-            <a:ext cx="6900000" cy="6686727"/>
+            <a:off x="900000" y="3490000"/>
+            <a:ext cx="6800000" cy="7820000"/>
           </a:xfrm>
           <a:prstGeom prst="rect">
             <a:avLst/>
@@ -4844,14 +4822,14 @@
       </p:pic>
       <p:sp>
         <p:nvSpPr>
-          <p:cNvPr id="9" name="TextBox 8"/>
+          <p:cNvPr id="8" name="TextBox 7"/>
           <p:cNvSpPr txBox="1"/>
           <p:nvPr/>
         </p:nvSpPr>
         <p:spPr>
           <a:xfrm>
             <a:off x="8200000" y="1900000"/>
-            <a:ext cx="7200000" cy="1000000"/>
+            <a:ext cx="7200000" cy="800000"/>
           </a:xfrm>
           <a:prstGeom prst="rect">
             <a:avLst/>
@@ -4874,60 +4852,14 @@
                 <a:ea typeface="Open Sans"/>
                 <a:cs typeface="Open Sans"/>
               </a:rPr>
-              <a:t>Венозное
-кровотечение</a:t>
-            </a:r>
-          </a:p>
-        </p:txBody>
-      </p:sp>
-      <p:sp>
-        <p:nvSpPr>
-          <p:cNvPr id="10" name="Rectangle 9"/>
-          <p:cNvSpPr/>
-          <p:nvPr/>
-        </p:nvSpPr>
-        <p:spPr>
-          <a:xfrm>
-            <a:off x="8200000" y="3000000"/>
-            <a:ext cx="7200000" cy="9000000"/>
-          </a:xfrm>
-          <a:prstGeom prst="rect">
-            <a:avLst/>
-          </a:prstGeom>
-          <a:solidFill>
-            <a:srgbClr val="FFFFFF"/>
-          </a:solidFill>
-          <a:ln w="12700">
-            <a:solidFill>
-              <a:srgbClr val="E1E1E1"/>
-            </a:solidFill>
-          </a:ln>
-        </p:spPr>
-        <p:style>
-          <a:lnRef idx="1">
-            <a:schemeClr val="accent1"/>
-          </a:lnRef>
-          <a:fillRef idx="3">
-            <a:schemeClr val="accent1"/>
-          </a:fillRef>
-          <a:effectRef idx="2">
-            <a:schemeClr val="accent1"/>
-          </a:effectRef>
-          <a:fontRef idx="minor">
-            <a:schemeClr val="lt1"/>
-          </a:fontRef>
-        </p:style>
-        <p:txBody>
-          <a:bodyPr rtlCol="0" anchor="ctr"/>
-          <a:lstStyle/>
-          <a:p>
-            <a:pPr algn="ctr"/>
+              <a:t>Венозное кровотечение</a:t>
+            </a:r>
           </a:p>
         </p:txBody>
       </p:sp>
       <p:pic>
         <p:nvPicPr>
-          <p:cNvPr id="11" name="Picture 10" descr="bleed_venous.png"/>
+          <p:cNvPr id="9" name="Picture 8" descr="bleed_venous.png"/>
           <p:cNvPicPr>
             <a:picLocks noChangeAspect="1"/>
           </p:cNvPicPr>
@@ -4941,8 +4873,8 @@
         </p:blipFill>
         <p:spPr>
           <a:xfrm>
-            <a:off x="8350000" y="4302000"/>
-            <a:ext cx="6900000" cy="6396000"/>
+            <a:off x="8400000" y="3676190"/>
+            <a:ext cx="6800000" cy="7447619"/>
           </a:xfrm>
           <a:prstGeom prst="rect">
             <a:avLst/>
@@ -4951,14 +4883,14 @@
       </p:pic>
       <p:sp>
         <p:nvSpPr>
-          <p:cNvPr id="12" name="TextBox 11"/>
+          <p:cNvPr id="10" name="TextBox 9"/>
           <p:cNvSpPr txBox="1"/>
           <p:nvPr/>
         </p:nvSpPr>
         <p:spPr>
           <a:xfrm>
             <a:off x="15700000" y="1900000"/>
-            <a:ext cx="7200000" cy="1000000"/>
+            <a:ext cx="7200000" cy="800000"/>
           </a:xfrm>
           <a:prstGeom prst="rect">
             <a:avLst/>
@@ -4981,60 +4913,14 @@
                 <a:ea typeface="Open Sans"/>
                 <a:cs typeface="Open Sans"/>
               </a:rPr>
-              <a:t>Капиллярное
-кровотечение</a:t>
-            </a:r>
-          </a:p>
-        </p:txBody>
-      </p:sp>
-      <p:sp>
-        <p:nvSpPr>
-          <p:cNvPr id="13" name="Rectangle 12"/>
-          <p:cNvSpPr/>
-          <p:nvPr/>
-        </p:nvSpPr>
-        <p:spPr>
-          <a:xfrm>
-            <a:off x="15700000" y="3000000"/>
-            <a:ext cx="7200000" cy="9000000"/>
-          </a:xfrm>
-          <a:prstGeom prst="rect">
-            <a:avLst/>
-          </a:prstGeom>
-          <a:solidFill>
-            <a:srgbClr val="FFFFFF"/>
-          </a:solidFill>
-          <a:ln w="12700">
-            <a:solidFill>
-              <a:srgbClr val="E1E1E1"/>
-            </a:solidFill>
-          </a:ln>
-        </p:spPr>
-        <p:style>
-          <a:lnRef idx="1">
-            <a:schemeClr val="accent1"/>
-          </a:lnRef>
-          <a:fillRef idx="3">
-            <a:schemeClr val="accent1"/>
-          </a:fillRef>
-          <a:effectRef idx="2">
-            <a:schemeClr val="accent1"/>
-          </a:effectRef>
-          <a:fontRef idx="minor">
-            <a:schemeClr val="lt1"/>
-          </a:fontRef>
-        </p:style>
-        <p:txBody>
-          <a:bodyPr rtlCol="0" anchor="ctr"/>
-          <a:lstStyle/>
-          <a:p>
-            <a:pPr algn="ctr"/>
+              <a:t>Капиллярное кровотечение</a:t>
+            </a:r>
           </a:p>
         </p:txBody>
       </p:sp>
       <p:pic>
         <p:nvPicPr>
-          <p:cNvPr id="14" name="Picture 13" descr="bleed_capillary.png"/>
+          <p:cNvPr id="11" name="Picture 10" descr="bleed_capillary.png"/>
           <p:cNvPicPr>
             <a:picLocks noChangeAspect="1"/>
           </p:cNvPicPr>
@@ -5048,8 +4934,8 @@
         </p:blipFill>
         <p:spPr>
           <a:xfrm>
-            <a:off x="15850000" y="4302000"/>
-            <a:ext cx="6900000" cy="6396000"/>
+            <a:off x="15900000" y="3845455"/>
+            <a:ext cx="6800000" cy="7109090"/>
           </a:xfrm>
           <a:prstGeom prst="rect">
             <a:avLst/>
@@ -7304,7 +7190,7 @@
             <a:avLst/>
           </a:prstGeom>
           <a:solidFill>
-            <a:srgbClr val="FFFFFF"/>
+            <a:srgbClr val="F2F2F2"/>
           </a:solidFill>
           <a:ln>
             <a:noFill/>
@@ -7340,8 +7226,8 @@
         </p:nvSpPr>
         <p:spPr>
           <a:xfrm>
-            <a:off x="23000000" y="0"/>
-            <a:ext cx="1384000" cy="13716000"/>
+            <a:off x="17500000" y="0"/>
+            <a:ext cx="6884000" cy="13716000"/>
           </a:xfrm>
           <a:prstGeom prst="rect">
             <a:avLst/>
@@ -7384,7 +7270,7 @@
         <p:spPr>
           <a:xfrm>
             <a:off x="700000" y="5500000"/>
-            <a:ext cx="21000000" cy="1200000"/>
+            <a:ext cx="16000000" cy="1200000"/>
           </a:xfrm>
           <a:prstGeom prst="rect">
             <a:avLst/>
@@ -7421,7 +7307,7 @@
         <p:spPr>
           <a:xfrm>
             <a:off x="700000" y="6900000"/>
-            <a:ext cx="10000000" cy="25000"/>
+            <a:ext cx="10000000" cy="35000"/>
           </a:xfrm>
           <a:prstGeom prst="rect">
             <a:avLst/>

--- a/tema2_bleeding/Признаки_наружного_кровотечения.pptx
+++ b/tema2_bleeding/Признаки_наружного_кровотечения.pptx
@@ -4289,8 +4289,8 @@
         </p:blipFill>
         <p:spPr>
           <a:xfrm>
-            <a:off x="700000" y="3068750"/>
-            <a:ext cx="7000000" cy="8362500"/>
+            <a:off x="1430000" y="2000000"/>
+            <a:ext cx="5040000" cy="10500000"/>
           </a:xfrm>
           <a:prstGeom prst="rect">
             <a:avLst/>
@@ -4305,7 +4305,7 @@
         </p:nvSpPr>
         <p:spPr>
           <a:xfrm>
-            <a:off x="6900000" y="2100000"/>
+            <a:off x="6500000" y="2100000"/>
             <a:ext cx="7500000" cy="4200000"/>
           </a:xfrm>
           <a:prstGeom prst="roundRect">
@@ -4348,7 +4348,7 @@
         </p:nvSpPr>
         <p:spPr>
           <a:xfrm>
-            <a:off x="7300000" y="2400000"/>
+            <a:off x="6900000" y="2400000"/>
             <a:ext cx="6700000" cy="3600000"/>
           </a:xfrm>
           <a:prstGeom prst="rect">
@@ -4372,7 +4372,29 @@
                 <a:ea typeface="Open Sans"/>
                 <a:cs typeface="Open Sans"/>
               </a:rPr>
-              <a:t>Под кровотечением понимают ситуацию, когда кровь по разным причинам покидает сосудистое русло, что приводит к острой кровопотере.</a:t>
+              <a:t>Под </a:t>
+            </a:r>
+            <a:r>
+              <a:rPr sz="2200" b="1">
+                <a:solidFill>
+                  <a:srgbClr val="333333"/>
+                </a:solidFill>
+                <a:latin typeface="Open Sans"/>
+                <a:ea typeface="Open Sans"/>
+                <a:cs typeface="Open Sans"/>
+              </a:rPr>
+              <a:t>кровотечением понимают</a:t>
+            </a:r>
+            <a:r>
+              <a:rPr sz="2200" b="0">
+                <a:solidFill>
+                  <a:srgbClr val="333333"/>
+                </a:solidFill>
+                <a:latin typeface="Open Sans"/>
+                <a:ea typeface="Open Sans"/>
+                <a:cs typeface="Open Sans"/>
+              </a:rPr>
+              <a:t> ситуацию, когда кровь по разным причинам покидает сосудистое русло, что приводит к острой кровопотере.</a:t>
             </a:r>
           </a:p>
         </p:txBody>
@@ -4812,8 +4834,8 @@
         </p:blipFill>
         <p:spPr>
           <a:xfrm>
-            <a:off x="900000" y="3490000"/>
-            <a:ext cx="6800000" cy="7820000"/>
+            <a:off x="900000" y="3079167"/>
+            <a:ext cx="6800000" cy="8641666"/>
           </a:xfrm>
           <a:prstGeom prst="rect">
             <a:avLst/>
@@ -4873,8 +4895,8 @@
         </p:blipFill>
         <p:spPr>
           <a:xfrm>
-            <a:off x="8400000" y="3676190"/>
-            <a:ext cx="6800000" cy="7447619"/>
+            <a:off x="8400000" y="3079167"/>
+            <a:ext cx="6800000" cy="8641666"/>
           </a:xfrm>
           <a:prstGeom prst="rect">
             <a:avLst/>
@@ -4934,8 +4956,8 @@
         </p:blipFill>
         <p:spPr>
           <a:xfrm>
-            <a:off x="15900000" y="3845455"/>
-            <a:ext cx="6800000" cy="7109090"/>
+            <a:off x="15900000" y="3411538"/>
+            <a:ext cx="6800000" cy="7976923"/>
           </a:xfrm>
           <a:prstGeom prst="rect">
             <a:avLst/>
